--- a/outputs/vwd_mechanism_driven_agentic_diagnosis_2026-06-29.pptx
+++ b/outputs/vwd_mechanism_driven_agentic_diagnosis_2026-06-29.pptx
@@ -2,28 +2,28 @@
 <file path=ppt/presentation.xml><?xml version="1.0" encoding="utf-8"?>
 <p:presentation xmlns:p="http://schemas.openxmlformats.org/presentationml/2006/main">
   <p:sldMasterIdLst>
-    <p:sldMasterId xmlns:r="http://schemas.openxmlformats.org/officeDocument/2006/relationships" id="2147483648" r:id="Rfb8d3ee9dcde44e7"/>
+    <p:sldMasterId xmlns:r="http://schemas.openxmlformats.org/officeDocument/2006/relationships" id="2147483648" r:id="Rfc2918b200ea4bf8"/>
   </p:sldMasterIdLst>
   <p:notesMasterIdLst>
-    <p:notesMasterId xmlns:r="http://schemas.openxmlformats.org/officeDocument/2006/relationships" r:id="R5074ebf2e67b49ff"/>
+    <p:notesMasterId xmlns:r="http://schemas.openxmlformats.org/officeDocument/2006/relationships" r:id="Ra39c386b27b2483d"/>
   </p:notesMasterIdLst>
   <p:sldIdLst>
-    <p:sldId xmlns:r="http://schemas.openxmlformats.org/officeDocument/2006/relationships" id="256" r:id="Rde257e551a6e4a13"/>
-    <p:sldId xmlns:r="http://schemas.openxmlformats.org/officeDocument/2006/relationships" id="257" r:id="R8fb10f06b01941a9"/>
-    <p:sldId xmlns:r="http://schemas.openxmlformats.org/officeDocument/2006/relationships" id="258" r:id="R44dbbaf80abf43da"/>
-    <p:sldId xmlns:r="http://schemas.openxmlformats.org/officeDocument/2006/relationships" id="259" r:id="Rda4b01b148d44342"/>
-    <p:sldId xmlns:r="http://schemas.openxmlformats.org/officeDocument/2006/relationships" id="260" r:id="R754974b6d5264226"/>
-    <p:sldId xmlns:r="http://schemas.openxmlformats.org/officeDocument/2006/relationships" id="261" r:id="R4e697f88d59f4624"/>
-    <p:sldId xmlns:r="http://schemas.openxmlformats.org/officeDocument/2006/relationships" id="262" r:id="R187644541a394892"/>
-    <p:sldId xmlns:r="http://schemas.openxmlformats.org/officeDocument/2006/relationships" id="263" r:id="Rb862fdbecb7743fd"/>
-    <p:sldId xmlns:r="http://schemas.openxmlformats.org/officeDocument/2006/relationships" id="264" r:id="R3494f36033f44e14"/>
-    <p:sldId xmlns:r="http://schemas.openxmlformats.org/officeDocument/2006/relationships" id="265" r:id="Ree2ca77ed768405a"/>
-    <p:sldId xmlns:r="http://schemas.openxmlformats.org/officeDocument/2006/relationships" id="266" r:id="Rb3ebf7348638429e"/>
-    <p:sldId xmlns:r="http://schemas.openxmlformats.org/officeDocument/2006/relationships" id="267" r:id="R8e8b93e9e4a04d7e"/>
-    <p:sldId xmlns:r="http://schemas.openxmlformats.org/officeDocument/2006/relationships" id="268" r:id="R5d811a023d70421e"/>
-    <p:sldId xmlns:r="http://schemas.openxmlformats.org/officeDocument/2006/relationships" id="269" r:id="Rbbeffc621b9e4594"/>
-    <p:sldId xmlns:r="http://schemas.openxmlformats.org/officeDocument/2006/relationships" id="270" r:id="R5d968da7b65a45f8"/>
-    <p:sldId xmlns:r="http://schemas.openxmlformats.org/officeDocument/2006/relationships" id="271" r:id="R80f6094183f147ad"/>
+    <p:sldId xmlns:r="http://schemas.openxmlformats.org/officeDocument/2006/relationships" id="256" r:id="R488e6c68ad284763"/>
+    <p:sldId xmlns:r="http://schemas.openxmlformats.org/officeDocument/2006/relationships" id="257" r:id="R7bc19a08fc8d426e"/>
+    <p:sldId xmlns:r="http://schemas.openxmlformats.org/officeDocument/2006/relationships" id="258" r:id="R1bc4e8e23be64dfb"/>
+    <p:sldId xmlns:r="http://schemas.openxmlformats.org/officeDocument/2006/relationships" id="259" r:id="R49a4970dce0f4f43"/>
+    <p:sldId xmlns:r="http://schemas.openxmlformats.org/officeDocument/2006/relationships" id="260" r:id="Rc678463fa6b24541"/>
+    <p:sldId xmlns:r="http://schemas.openxmlformats.org/officeDocument/2006/relationships" id="261" r:id="R70f696402e6d4961"/>
+    <p:sldId xmlns:r="http://schemas.openxmlformats.org/officeDocument/2006/relationships" id="262" r:id="Rdc37db6b79c748db"/>
+    <p:sldId xmlns:r="http://schemas.openxmlformats.org/officeDocument/2006/relationships" id="263" r:id="R2598a64c788b43bf"/>
+    <p:sldId xmlns:r="http://schemas.openxmlformats.org/officeDocument/2006/relationships" id="264" r:id="R9d7ccea63e104b55"/>
+    <p:sldId xmlns:r="http://schemas.openxmlformats.org/officeDocument/2006/relationships" id="265" r:id="R013a9befb3e44575"/>
+    <p:sldId xmlns:r="http://schemas.openxmlformats.org/officeDocument/2006/relationships" id="266" r:id="Rc3f22b1bff464598"/>
+    <p:sldId xmlns:r="http://schemas.openxmlformats.org/officeDocument/2006/relationships" id="267" r:id="R7e3637eaedd04ea6"/>
+    <p:sldId xmlns:r="http://schemas.openxmlformats.org/officeDocument/2006/relationships" id="268" r:id="R78099a39a5b74ee6"/>
+    <p:sldId xmlns:r="http://schemas.openxmlformats.org/officeDocument/2006/relationships" id="269" r:id="R20b753523cd84da0"/>
+    <p:sldId xmlns:r="http://schemas.openxmlformats.org/officeDocument/2006/relationships" id="270" r:id="R703c278fbdcb44ab"/>
+    <p:sldId xmlns:r="http://schemas.openxmlformats.org/officeDocument/2006/relationships" id="271" r:id="Ra4594b0a849d4ab7"/>
   </p:sldIdLst>
   <p:sldSz cx="12192000" cy="6858000"/>
   <p:notesSz cx="6858000" cy="9144000"/>
@@ -1606,7 +1606,7 @@
   </p:cSld>
   <p:clrMap bg1="lt1" tx1="dk1" bg2="lt2" tx2="dk2" accent1="accent1" accent2="accent2" accent3="accent3" accent4="accent4" accent5="accent5" accent6="accent6" hlink="hlink" folHlink="folHlink"/>
   <p:sldLayoutIdLst>
-    <p:sldLayoutId xmlns:r="http://schemas.openxmlformats.org/officeDocument/2006/relationships" id="2147483649" r:id="R2180007303f64391"/>
+    <p:sldLayoutId xmlns:r="http://schemas.openxmlformats.org/officeDocument/2006/relationships" id="2147483649" r:id="R016f649baa9c41e0"/>
   </p:sldLayoutIdLst>
   <p:txStyles>
     <p:titleStyle>
@@ -2564,7 +2564,7 @@
           <p:cNvPr id="1" name="">
             <a:extLst xmlns:a="http://schemas.openxmlformats.org/drawingml/2006/main">
               <a:ext uri="{FF2B5EF4-FFF2-40B4-BE49-F238E27FC236}">
-                <a16:creationId xmlns:a16="http://schemas.microsoft.com/office/drawing/2014/main" id="{E9114935-D084-43C7-930C-95CF156438B0}"/>
+                <a16:creationId xmlns:a16="http://schemas.microsoft.com/office/drawing/2014/main" id="{9A8102D9-8327-4308-A23A-9179905EF11E}"/>
               </a:ext>
             </a:extLst>
           </p:cNvPr>
@@ -2614,7 +2614,7 @@
           <p:cNvPr id="2" name="">
             <a:extLst xmlns:a="http://schemas.openxmlformats.org/drawingml/2006/main">
               <a:ext uri="{FF2B5EF4-FFF2-40B4-BE49-F238E27FC236}">
-                <a16:creationId xmlns:a16="http://schemas.microsoft.com/office/drawing/2014/main" id="{40F3BCC5-A2C5-457E-A2CC-178DEFDE6588}"/>
+                <a16:creationId xmlns:a16="http://schemas.microsoft.com/office/drawing/2014/main" id="{D1B0AC6B-F24A-4C81-8719-FB135E2F46C5}"/>
               </a:ext>
             </a:extLst>
           </p:cNvPr>
@@ -2664,7 +2664,7 @@
           <p:cNvPr id="3" name="">
             <a:extLst xmlns:a="http://schemas.openxmlformats.org/drawingml/2006/main">
               <a:ext uri="{FF2B5EF4-FFF2-40B4-BE49-F238E27FC236}">
-                <a16:creationId xmlns:a16="http://schemas.microsoft.com/office/drawing/2014/main" id="{D3D5C437-E34C-46A2-856C-C4BBD9B6473A}"/>
+                <a16:creationId xmlns:a16="http://schemas.microsoft.com/office/drawing/2014/main" id="{111855CF-A0CA-432C-9A6A-C4FF6033C396}"/>
               </a:ext>
             </a:extLst>
           </p:cNvPr>
@@ -2714,7 +2714,7 @@
           <p:cNvPr id="4" name="">
             <a:extLst xmlns:a="http://schemas.openxmlformats.org/drawingml/2006/main">
               <a:ext uri="{FF2B5EF4-FFF2-40B4-BE49-F238E27FC236}">
-                <a16:creationId xmlns:a16="http://schemas.microsoft.com/office/drawing/2014/main" id="{AB40BD1F-34E3-45AC-A442-0528D4B3BD51}"/>
+                <a16:creationId xmlns:a16="http://schemas.microsoft.com/office/drawing/2014/main" id="{2E7CBDA9-F7CA-44C5-9CD5-F17954AF0368}"/>
               </a:ext>
             </a:extLst>
           </p:cNvPr>
@@ -2747,7 +2747,7 @@
           <p:cNvPr id="5" name="">
             <a:extLst xmlns:a="http://schemas.openxmlformats.org/drawingml/2006/main">
               <a:ext uri="{FF2B5EF4-FFF2-40B4-BE49-F238E27FC236}">
-                <a16:creationId xmlns:a16="http://schemas.microsoft.com/office/drawing/2014/main" id="{AC0CDD3C-2F9C-437D-8F38-1A4641169082}"/>
+                <a16:creationId xmlns:a16="http://schemas.microsoft.com/office/drawing/2014/main" id="{20680505-04E3-442E-89F3-7F9B6CE293C3}"/>
               </a:ext>
             </a:extLst>
           </p:cNvPr>
@@ -2797,7 +2797,7 @@
           <p:cNvPr id="6" name="">
             <a:extLst xmlns:a="http://schemas.openxmlformats.org/drawingml/2006/main">
               <a:ext uri="{FF2B5EF4-FFF2-40B4-BE49-F238E27FC236}">
-                <a16:creationId xmlns:a16="http://schemas.microsoft.com/office/drawing/2014/main" id="{E003D481-7480-4220-955E-2FA8D3DEC27F}"/>
+                <a16:creationId xmlns:a16="http://schemas.microsoft.com/office/drawing/2014/main" id="{6A84B9F5-CA09-408F-BA37-CEF4A64B61A7}"/>
               </a:ext>
             </a:extLst>
           </p:cNvPr>
@@ -2847,7 +2847,7 @@
           <p:cNvPr id="7" name="">
             <a:extLst xmlns:a="http://schemas.openxmlformats.org/drawingml/2006/main">
               <a:ext uri="{FF2B5EF4-FFF2-40B4-BE49-F238E27FC236}">
-                <a16:creationId xmlns:a16="http://schemas.microsoft.com/office/drawing/2014/main" id="{A49C0B8A-9EE1-4370-A964-06287770ABF1}"/>
+                <a16:creationId xmlns:a16="http://schemas.microsoft.com/office/drawing/2014/main" id="{5BDB6752-3463-4AB7-8265-6C4DBBAD6FAD}"/>
               </a:ext>
             </a:extLst>
           </p:cNvPr>
@@ -2897,7 +2897,7 @@
           <p:cNvPr id="8" name="">
             <a:extLst xmlns:a="http://schemas.openxmlformats.org/drawingml/2006/main">
               <a:ext uri="{FF2B5EF4-FFF2-40B4-BE49-F238E27FC236}">
-                <a16:creationId xmlns:a16="http://schemas.microsoft.com/office/drawing/2014/main" id="{AE35E121-A0D7-4475-B5AA-91435AD5A9A4}"/>
+                <a16:creationId xmlns:a16="http://schemas.microsoft.com/office/drawing/2014/main" id="{D0DEBFFB-2BEE-4EE7-99B0-845397D48FDD}"/>
               </a:ext>
             </a:extLst>
           </p:cNvPr>
@@ -2947,7 +2947,7 @@
           <p:cNvPr id="9" name="">
             <a:extLst xmlns:a="http://schemas.openxmlformats.org/drawingml/2006/main">
               <a:ext uri="{FF2B5EF4-FFF2-40B4-BE49-F238E27FC236}">
-                <a16:creationId xmlns:a16="http://schemas.microsoft.com/office/drawing/2014/main" id="{16FF60AA-8959-4EA9-B773-DAF72255D504}"/>
+                <a16:creationId xmlns:a16="http://schemas.microsoft.com/office/drawing/2014/main" id="{3DD677F7-9A7A-4871-BAD2-1583F47CE1E9}"/>
               </a:ext>
             </a:extLst>
           </p:cNvPr>
@@ -2997,7 +2997,7 @@
           <p:cNvPr id="10" name="">
             <a:extLst xmlns:a="http://schemas.openxmlformats.org/drawingml/2006/main">
               <a:ext uri="{FF2B5EF4-FFF2-40B4-BE49-F238E27FC236}">
-                <a16:creationId xmlns:a16="http://schemas.microsoft.com/office/drawing/2014/main" id="{1E51CE5F-F73F-4743-A558-5BBF00DE1EBF}"/>
+                <a16:creationId xmlns:a16="http://schemas.microsoft.com/office/drawing/2014/main" id="{292643D1-38B0-405C-94B2-BFC957FBC07F}"/>
               </a:ext>
             </a:extLst>
           </p:cNvPr>
@@ -3047,7 +3047,7 @@
           <p:cNvPr id="11" name="">
             <a:extLst xmlns:a="http://schemas.openxmlformats.org/drawingml/2006/main">
               <a:ext uri="{FF2B5EF4-FFF2-40B4-BE49-F238E27FC236}">
-                <a16:creationId xmlns:a16="http://schemas.microsoft.com/office/drawing/2014/main" id="{3D3FB0EE-4459-4F45-9C9B-624D525B00C2}"/>
+                <a16:creationId xmlns:a16="http://schemas.microsoft.com/office/drawing/2014/main" id="{6794106A-F5E4-415B-BCEC-7BD064A2B2C7}"/>
               </a:ext>
             </a:extLst>
           </p:cNvPr>
@@ -3097,7 +3097,7 @@
           <p:cNvPr id="12" name="">
             <a:extLst xmlns:a="http://schemas.openxmlformats.org/drawingml/2006/main">
               <a:ext uri="{FF2B5EF4-FFF2-40B4-BE49-F238E27FC236}">
-                <a16:creationId xmlns:a16="http://schemas.microsoft.com/office/drawing/2014/main" id="{176BAF9D-3368-48EA-A3AF-E008078119C1}"/>
+                <a16:creationId xmlns:a16="http://schemas.microsoft.com/office/drawing/2014/main" id="{DC5F15B1-8456-4ABF-9514-4CF1C5986AD2}"/>
               </a:ext>
             </a:extLst>
           </p:cNvPr>
@@ -3147,7 +3147,7 @@
           <p:cNvPr id="13" name="">
             <a:extLst xmlns:a="http://schemas.openxmlformats.org/drawingml/2006/main">
               <a:ext uri="{FF2B5EF4-FFF2-40B4-BE49-F238E27FC236}">
-                <a16:creationId xmlns:a16="http://schemas.microsoft.com/office/drawing/2014/main" id="{AE45E007-EC7E-4BE9-96AF-8C718A293E84}"/>
+                <a16:creationId xmlns:a16="http://schemas.microsoft.com/office/drawing/2014/main" id="{566684F9-F8FC-4B34-8846-37A8A5974FFE}"/>
               </a:ext>
             </a:extLst>
           </p:cNvPr>
@@ -3197,7 +3197,7 @@
           <p:cNvPr id="14" name="">
             <a:extLst xmlns:a="http://schemas.openxmlformats.org/drawingml/2006/main">
               <a:ext uri="{FF2B5EF4-FFF2-40B4-BE49-F238E27FC236}">
-                <a16:creationId xmlns:a16="http://schemas.microsoft.com/office/drawing/2014/main" id="{58917811-5548-4649-A11E-FBFD7C43BBD0}"/>
+                <a16:creationId xmlns:a16="http://schemas.microsoft.com/office/drawing/2014/main" id="{1FDA2622-5EC8-4EEC-BCBB-3668339F770A}"/>
               </a:ext>
             </a:extLst>
           </p:cNvPr>
@@ -3247,7 +3247,7 @@
           <p:cNvPr id="15" name="">
             <a:extLst xmlns:a="http://schemas.openxmlformats.org/drawingml/2006/main">
               <a:ext uri="{FF2B5EF4-FFF2-40B4-BE49-F238E27FC236}">
-                <a16:creationId xmlns:a16="http://schemas.microsoft.com/office/drawing/2014/main" id="{E99DC51B-63D1-41AC-BC36-78672FC116F0}"/>
+                <a16:creationId xmlns:a16="http://schemas.microsoft.com/office/drawing/2014/main" id="{59C9FD8A-2211-4AF8-B879-2BD266FC6BA4}"/>
               </a:ext>
             </a:extLst>
           </p:cNvPr>
@@ -3297,7 +3297,7 @@
           <p:cNvPr id="16" name="">
             <a:extLst xmlns:a="http://schemas.openxmlformats.org/drawingml/2006/main">
               <a:ext uri="{FF2B5EF4-FFF2-40B4-BE49-F238E27FC236}">
-                <a16:creationId xmlns:a16="http://schemas.microsoft.com/office/drawing/2014/main" id="{7FC9D3AE-483F-4853-8E5B-A6866DAA6C70}"/>
+                <a16:creationId xmlns:a16="http://schemas.microsoft.com/office/drawing/2014/main" id="{B47A481E-4B3F-4F2C-97FC-B72BEDE70EAA}"/>
               </a:ext>
             </a:extLst>
           </p:cNvPr>
@@ -3347,7 +3347,7 @@
           <p:cNvPr id="17" name="">
             <a:extLst xmlns:a="http://schemas.openxmlformats.org/drawingml/2006/main">
               <a:ext uri="{FF2B5EF4-FFF2-40B4-BE49-F238E27FC236}">
-                <a16:creationId xmlns:a16="http://schemas.microsoft.com/office/drawing/2014/main" id="{2CDF7A26-4237-45B4-86FE-0048C71359F6}"/>
+                <a16:creationId xmlns:a16="http://schemas.microsoft.com/office/drawing/2014/main" id="{82D59784-6F11-4A20-8598-807D4420FC4F}"/>
               </a:ext>
             </a:extLst>
           </p:cNvPr>
@@ -3387,7 +3387,7 @@
                   <a:srgbClr val="777777"/>
                 </a:solidFill>
               </a:rPr>
-              <a:t>Method name suggestion: mechanism-driven VWD agentic decision-support system; diagnosis remains clinician-confirmed.</a:t>
+              <a:t>Mechanism-driven VWD agentic decision-support system; diagnosis remains clinician-confirmed.</a:t>
             </a:r>
           </a:p>
         </p:txBody>
@@ -3395,7 +3395,7 @@
     </p:spTree>
     <p:extLst>
       <p:ext uri="{BB962C8B-B14F-4D97-AF65-F5344CB8AC3E}">
-        <p14:creationId xmlns:p14="http://schemas.microsoft.com/office/powerpoint/2010/main" val="576592603"/>
+        <p14:creationId xmlns:p14="http://schemas.microsoft.com/office/powerpoint/2010/main" val="2128974654"/>
       </p:ext>
     </p:extLst>
   </p:cSld>
@@ -3426,7 +3426,7 @@
           <p:cNvPr id="1" name="">
             <a:extLst xmlns:a="http://schemas.openxmlformats.org/drawingml/2006/main">
               <a:ext uri="{FF2B5EF4-FFF2-40B4-BE49-F238E27FC236}">
-                <a16:creationId xmlns:a16="http://schemas.microsoft.com/office/drawing/2014/main" id="{D0732A1E-8E3A-4EFD-B3B6-A22244A14BD4}"/>
+                <a16:creationId xmlns:a16="http://schemas.microsoft.com/office/drawing/2014/main" id="{1290194C-465A-4262-A4CA-5AD4CEF05AC6}"/>
               </a:ext>
             </a:extLst>
           </p:cNvPr>
@@ -3476,7 +3476,7 @@
           <p:cNvPr id="2" name="">
             <a:extLst xmlns:a="http://schemas.openxmlformats.org/drawingml/2006/main">
               <a:ext uri="{FF2B5EF4-FFF2-40B4-BE49-F238E27FC236}">
-                <a16:creationId xmlns:a16="http://schemas.microsoft.com/office/drawing/2014/main" id="{9142D37D-1417-438E-AB5D-0E13E2EB8ED1}"/>
+                <a16:creationId xmlns:a16="http://schemas.microsoft.com/office/drawing/2014/main" id="{ACA32131-C659-47D5-B7F7-BAF943632703}"/>
               </a:ext>
             </a:extLst>
           </p:cNvPr>
@@ -3526,7 +3526,7 @@
           <p:cNvPr id="3" name="">
             <a:extLst xmlns:a="http://schemas.openxmlformats.org/drawingml/2006/main">
               <a:ext uri="{FF2B5EF4-FFF2-40B4-BE49-F238E27FC236}">
-                <a16:creationId xmlns:a16="http://schemas.microsoft.com/office/drawing/2014/main" id="{87CF1092-9380-4973-A19E-500AB45122DB}"/>
+                <a16:creationId xmlns:a16="http://schemas.microsoft.com/office/drawing/2014/main" id="{EEBA51B9-1CCD-4F49-AB4A-37F3DE70AF33}"/>
               </a:ext>
             </a:extLst>
           </p:cNvPr>
@@ -3576,7 +3576,7 @@
           <p:cNvPr id="4" name="">
             <a:extLst xmlns:a="http://schemas.openxmlformats.org/drawingml/2006/main">
               <a:ext uri="{FF2B5EF4-FFF2-40B4-BE49-F238E27FC236}">
-                <a16:creationId xmlns:a16="http://schemas.microsoft.com/office/drawing/2014/main" id="{0F05A354-B31A-43FE-9C53-4CA1177AD3F1}"/>
+                <a16:creationId xmlns:a16="http://schemas.microsoft.com/office/drawing/2014/main" id="{111F6BBE-5BA3-4513-BF6F-10945A53A240}"/>
               </a:ext>
             </a:extLst>
           </p:cNvPr>
@@ -3609,7 +3609,7 @@
           <p:cNvPr id="5" name="">
             <a:extLst xmlns:a="http://schemas.openxmlformats.org/drawingml/2006/main">
               <a:ext uri="{FF2B5EF4-FFF2-40B4-BE49-F238E27FC236}">
-                <a16:creationId xmlns:a16="http://schemas.microsoft.com/office/drawing/2014/main" id="{E9BB9C7F-FA24-45C6-99B5-EC4A1F72CD86}"/>
+                <a16:creationId xmlns:a16="http://schemas.microsoft.com/office/drawing/2014/main" id="{1030C5DC-B92A-4208-8021-6234B56118C4}"/>
               </a:ext>
             </a:extLst>
           </p:cNvPr>
@@ -3659,7 +3659,7 @@
           <p:cNvPr id="6" name="">
             <a:extLst xmlns:a="http://schemas.openxmlformats.org/drawingml/2006/main">
               <a:ext uri="{FF2B5EF4-FFF2-40B4-BE49-F238E27FC236}">
-                <a16:creationId xmlns:a16="http://schemas.microsoft.com/office/drawing/2014/main" id="{B3B871C7-EDC8-4658-97C3-11C477790EE6}"/>
+                <a16:creationId xmlns:a16="http://schemas.microsoft.com/office/drawing/2014/main" id="{CC3A1117-8911-44D3-ACA4-5902C0AA948A}"/>
               </a:ext>
             </a:extLst>
           </p:cNvPr>
@@ -3709,7 +3709,7 @@
           <p:cNvPr id="7" name="">
             <a:extLst xmlns:a="http://schemas.openxmlformats.org/drawingml/2006/main">
               <a:ext uri="{FF2B5EF4-FFF2-40B4-BE49-F238E27FC236}">
-                <a16:creationId xmlns:a16="http://schemas.microsoft.com/office/drawing/2014/main" id="{EA00AF93-842E-491B-B4A4-01F1363E89A2}"/>
+                <a16:creationId xmlns:a16="http://schemas.microsoft.com/office/drawing/2014/main" id="{36B6AE0C-88D5-47A6-8866-0AEECA3F257E}"/>
               </a:ext>
             </a:extLst>
           </p:cNvPr>
@@ -3759,7 +3759,7 @@
           <p:cNvPr id="8" name="">
             <a:extLst xmlns:a="http://schemas.openxmlformats.org/drawingml/2006/main">
               <a:ext uri="{FF2B5EF4-FFF2-40B4-BE49-F238E27FC236}">
-                <a16:creationId xmlns:a16="http://schemas.microsoft.com/office/drawing/2014/main" id="{67BF3348-6241-403A-873B-937348C5BC1C}"/>
+                <a16:creationId xmlns:a16="http://schemas.microsoft.com/office/drawing/2014/main" id="{2C7AFD45-9230-4121-A19F-E10476BDF569}"/>
               </a:ext>
             </a:extLst>
           </p:cNvPr>
@@ -3792,7 +3792,7 @@
           <p:cNvPr id="9" name="">
             <a:extLst xmlns:a="http://schemas.openxmlformats.org/drawingml/2006/main">
               <a:ext uri="{FF2B5EF4-FFF2-40B4-BE49-F238E27FC236}">
-                <a16:creationId xmlns:a16="http://schemas.microsoft.com/office/drawing/2014/main" id="{DF88BA25-DD42-4734-BC8D-50C95B42BA85}"/>
+                <a16:creationId xmlns:a16="http://schemas.microsoft.com/office/drawing/2014/main" id="{5D7706F9-BD44-4469-AE51-98009F44498D}"/>
               </a:ext>
             </a:extLst>
           </p:cNvPr>
@@ -3842,7 +3842,7 @@
           <p:cNvPr id="10" name="">
             <a:extLst xmlns:a="http://schemas.openxmlformats.org/drawingml/2006/main">
               <a:ext uri="{FF2B5EF4-FFF2-40B4-BE49-F238E27FC236}">
-                <a16:creationId xmlns:a16="http://schemas.microsoft.com/office/drawing/2014/main" id="{D9FB5281-3590-496A-B573-4C0B9EDE2605}"/>
+                <a16:creationId xmlns:a16="http://schemas.microsoft.com/office/drawing/2014/main" id="{A80A4C6B-69D3-4B9C-A34E-B28E7BD9DB03}"/>
               </a:ext>
             </a:extLst>
           </p:cNvPr>
@@ -3892,7 +3892,7 @@
           <p:cNvPr id="11" name="">
             <a:extLst xmlns:a="http://schemas.openxmlformats.org/drawingml/2006/main">
               <a:ext uri="{FF2B5EF4-FFF2-40B4-BE49-F238E27FC236}">
-                <a16:creationId xmlns:a16="http://schemas.microsoft.com/office/drawing/2014/main" id="{F9EEAA80-49FB-4414-A66A-9F3D715600FA}"/>
+                <a16:creationId xmlns:a16="http://schemas.microsoft.com/office/drawing/2014/main" id="{9471E850-0E00-4BBE-AD68-484BD128D4E3}"/>
               </a:ext>
             </a:extLst>
           </p:cNvPr>
@@ -3942,7 +3942,7 @@
           <p:cNvPr id="12" name="">
             <a:extLst xmlns:a="http://schemas.openxmlformats.org/drawingml/2006/main">
               <a:ext uri="{FF2B5EF4-FFF2-40B4-BE49-F238E27FC236}">
-                <a16:creationId xmlns:a16="http://schemas.microsoft.com/office/drawing/2014/main" id="{0C83AA0F-6970-441A-985B-85E22AA8FD79}"/>
+                <a16:creationId xmlns:a16="http://schemas.microsoft.com/office/drawing/2014/main" id="{45A13744-98F7-4FB9-929C-8C97CF39173F}"/>
               </a:ext>
             </a:extLst>
           </p:cNvPr>
@@ -3975,7 +3975,7 @@
           <p:cNvPr id="13" name="">
             <a:extLst xmlns:a="http://schemas.openxmlformats.org/drawingml/2006/main">
               <a:ext uri="{FF2B5EF4-FFF2-40B4-BE49-F238E27FC236}">
-                <a16:creationId xmlns:a16="http://schemas.microsoft.com/office/drawing/2014/main" id="{CBFAD747-85CD-46B3-8AF3-2A0CDA28A29D}"/>
+                <a16:creationId xmlns:a16="http://schemas.microsoft.com/office/drawing/2014/main" id="{C6D99D0D-4A10-4E80-B93B-ADA419183C75}"/>
               </a:ext>
             </a:extLst>
           </p:cNvPr>
@@ -4025,7 +4025,7 @@
           <p:cNvPr id="14" name="">
             <a:extLst xmlns:a="http://schemas.openxmlformats.org/drawingml/2006/main">
               <a:ext uri="{FF2B5EF4-FFF2-40B4-BE49-F238E27FC236}">
-                <a16:creationId xmlns:a16="http://schemas.microsoft.com/office/drawing/2014/main" id="{EA3F34B6-FD34-4169-B502-20CCA82301C1}"/>
+                <a16:creationId xmlns:a16="http://schemas.microsoft.com/office/drawing/2014/main" id="{90084DCC-A9D4-41A0-9B0D-40DF1A239825}"/>
               </a:ext>
             </a:extLst>
           </p:cNvPr>
@@ -4075,7 +4075,7 @@
           <p:cNvPr id="15" name="">
             <a:extLst xmlns:a="http://schemas.openxmlformats.org/drawingml/2006/main">
               <a:ext uri="{FF2B5EF4-FFF2-40B4-BE49-F238E27FC236}">
-                <a16:creationId xmlns:a16="http://schemas.microsoft.com/office/drawing/2014/main" id="{E3A4D14E-1EDC-4F12-9D0C-9F163A15E759}"/>
+                <a16:creationId xmlns:a16="http://schemas.microsoft.com/office/drawing/2014/main" id="{03892DD2-9BEB-4D81-9326-843603842EF6}"/>
               </a:ext>
             </a:extLst>
           </p:cNvPr>
@@ -4125,7 +4125,7 @@
           <p:cNvPr id="16" name="">
             <a:extLst xmlns:a="http://schemas.openxmlformats.org/drawingml/2006/main">
               <a:ext uri="{FF2B5EF4-FFF2-40B4-BE49-F238E27FC236}">
-                <a16:creationId xmlns:a16="http://schemas.microsoft.com/office/drawing/2014/main" id="{3C2DDDB3-9AE4-42C7-AB42-FAC18F1384C5}"/>
+                <a16:creationId xmlns:a16="http://schemas.microsoft.com/office/drawing/2014/main" id="{444DBFC0-59F4-4A46-8006-C8A829AEC498}"/>
               </a:ext>
             </a:extLst>
           </p:cNvPr>
@@ -4158,7 +4158,7 @@
           <p:cNvPr id="17" name="">
             <a:extLst xmlns:a="http://schemas.openxmlformats.org/drawingml/2006/main">
               <a:ext uri="{FF2B5EF4-FFF2-40B4-BE49-F238E27FC236}">
-                <a16:creationId xmlns:a16="http://schemas.microsoft.com/office/drawing/2014/main" id="{9467FEFB-2D24-415C-8B20-14B699B2AD87}"/>
+                <a16:creationId xmlns:a16="http://schemas.microsoft.com/office/drawing/2014/main" id="{6968E45C-2248-4712-966C-C045B9C99B8F}"/>
               </a:ext>
             </a:extLst>
           </p:cNvPr>
@@ -4208,7 +4208,7 @@
           <p:cNvPr id="18" name="">
             <a:extLst xmlns:a="http://schemas.openxmlformats.org/drawingml/2006/main">
               <a:ext uri="{FF2B5EF4-FFF2-40B4-BE49-F238E27FC236}">
-                <a16:creationId xmlns:a16="http://schemas.microsoft.com/office/drawing/2014/main" id="{64A92343-0CF4-45D8-955A-71E27F0782FB}"/>
+                <a16:creationId xmlns:a16="http://schemas.microsoft.com/office/drawing/2014/main" id="{B0148CEC-A384-42EC-9BDD-B1587EE8495A}"/>
               </a:ext>
             </a:extLst>
           </p:cNvPr>
@@ -4258,7 +4258,7 @@
           <p:cNvPr id="19" name="">
             <a:extLst xmlns:a="http://schemas.openxmlformats.org/drawingml/2006/main">
               <a:ext uri="{FF2B5EF4-FFF2-40B4-BE49-F238E27FC236}">
-                <a16:creationId xmlns:a16="http://schemas.microsoft.com/office/drawing/2014/main" id="{28BA2A09-22C6-4114-B2BC-C4181EDF17A7}"/>
+                <a16:creationId xmlns:a16="http://schemas.microsoft.com/office/drawing/2014/main" id="{7BC5977D-D114-4388-BF3A-B2375548892D}"/>
               </a:ext>
             </a:extLst>
           </p:cNvPr>
@@ -4308,7 +4308,7 @@
           <p:cNvPr id="20" name="">
             <a:extLst xmlns:a="http://schemas.openxmlformats.org/drawingml/2006/main">
               <a:ext uri="{FF2B5EF4-FFF2-40B4-BE49-F238E27FC236}">
-                <a16:creationId xmlns:a16="http://schemas.microsoft.com/office/drawing/2014/main" id="{8092BC3C-2566-4A0B-B0DA-C6927E08B65F}"/>
+                <a16:creationId xmlns:a16="http://schemas.microsoft.com/office/drawing/2014/main" id="{FAE70EED-294A-4EE3-8B70-CC9DB627016A}"/>
               </a:ext>
             </a:extLst>
           </p:cNvPr>
@@ -4341,7 +4341,7 @@
           <p:cNvPr id="21" name="">
             <a:extLst xmlns:a="http://schemas.openxmlformats.org/drawingml/2006/main">
               <a:ext uri="{FF2B5EF4-FFF2-40B4-BE49-F238E27FC236}">
-                <a16:creationId xmlns:a16="http://schemas.microsoft.com/office/drawing/2014/main" id="{90BD908E-FB1A-46CA-9A9A-11D0D2A50248}"/>
+                <a16:creationId xmlns:a16="http://schemas.microsoft.com/office/drawing/2014/main" id="{38CFE426-D4EF-45D0-871D-EBA0543DD430}"/>
               </a:ext>
             </a:extLst>
           </p:cNvPr>
@@ -4391,7 +4391,7 @@
           <p:cNvPr id="22" name="">
             <a:extLst xmlns:a="http://schemas.openxmlformats.org/drawingml/2006/main">
               <a:ext uri="{FF2B5EF4-FFF2-40B4-BE49-F238E27FC236}">
-                <a16:creationId xmlns:a16="http://schemas.microsoft.com/office/drawing/2014/main" id="{F3F35A35-39B1-4480-9EE3-DFCD5071B1FB}"/>
+                <a16:creationId xmlns:a16="http://schemas.microsoft.com/office/drawing/2014/main" id="{7759C68B-3D56-4B42-B066-365EFC2EDF56}"/>
               </a:ext>
             </a:extLst>
           </p:cNvPr>
@@ -4441,7 +4441,7 @@
           <p:cNvPr id="23" name="">
             <a:extLst xmlns:a="http://schemas.openxmlformats.org/drawingml/2006/main">
               <a:ext uri="{FF2B5EF4-FFF2-40B4-BE49-F238E27FC236}">
-                <a16:creationId xmlns:a16="http://schemas.microsoft.com/office/drawing/2014/main" id="{B5DB47FE-4615-405D-8BE1-CA663B7ED9B3}"/>
+                <a16:creationId xmlns:a16="http://schemas.microsoft.com/office/drawing/2014/main" id="{D4927DE3-6C16-475B-AA2F-FB7079496821}"/>
               </a:ext>
             </a:extLst>
           </p:cNvPr>
@@ -4491,7 +4491,7 @@
           <p:cNvPr id="24" name="">
             <a:extLst xmlns:a="http://schemas.openxmlformats.org/drawingml/2006/main">
               <a:ext uri="{FF2B5EF4-FFF2-40B4-BE49-F238E27FC236}">
-                <a16:creationId xmlns:a16="http://schemas.microsoft.com/office/drawing/2014/main" id="{3A33A37B-766D-42E5-818B-778A56F14EBC}"/>
+                <a16:creationId xmlns:a16="http://schemas.microsoft.com/office/drawing/2014/main" id="{5D0D428D-7954-488E-B511-3FCBA05603BA}"/>
               </a:ext>
             </a:extLst>
           </p:cNvPr>
@@ -4524,7 +4524,7 @@
           <p:cNvPr id="25" name="">
             <a:extLst xmlns:a="http://schemas.openxmlformats.org/drawingml/2006/main">
               <a:ext uri="{FF2B5EF4-FFF2-40B4-BE49-F238E27FC236}">
-                <a16:creationId xmlns:a16="http://schemas.microsoft.com/office/drawing/2014/main" id="{CC0839A8-69D0-44D9-95D2-DAD1AD3AF5E8}"/>
+                <a16:creationId xmlns:a16="http://schemas.microsoft.com/office/drawing/2014/main" id="{D8643C7A-EE37-4388-A7E2-DB9B2EBD66E0}"/>
               </a:ext>
             </a:extLst>
           </p:cNvPr>
@@ -4574,7 +4574,7 @@
           <p:cNvPr id="26" name="">
             <a:extLst xmlns:a="http://schemas.openxmlformats.org/drawingml/2006/main">
               <a:ext uri="{FF2B5EF4-FFF2-40B4-BE49-F238E27FC236}">
-                <a16:creationId xmlns:a16="http://schemas.microsoft.com/office/drawing/2014/main" id="{1989662C-A8FC-4489-9F8A-3568F4BBCE71}"/>
+                <a16:creationId xmlns:a16="http://schemas.microsoft.com/office/drawing/2014/main" id="{44C4EEEF-7DEF-4FF1-9A70-DFEDD4C9F4DB}"/>
               </a:ext>
             </a:extLst>
           </p:cNvPr>
@@ -4624,7 +4624,7 @@
           <p:cNvPr id="27" name="">
             <a:extLst xmlns:a="http://schemas.openxmlformats.org/drawingml/2006/main">
               <a:ext uri="{FF2B5EF4-FFF2-40B4-BE49-F238E27FC236}">
-                <a16:creationId xmlns:a16="http://schemas.microsoft.com/office/drawing/2014/main" id="{AFFE92CB-D172-4546-947B-06E565A945F5}"/>
+                <a16:creationId xmlns:a16="http://schemas.microsoft.com/office/drawing/2014/main" id="{D0829F30-EB8B-4DED-B4DA-BE6542ECDB34}"/>
               </a:ext>
             </a:extLst>
           </p:cNvPr>
@@ -4674,7 +4674,7 @@
           <p:cNvPr id="28" name="">
             <a:extLst xmlns:a="http://schemas.openxmlformats.org/drawingml/2006/main">
               <a:ext uri="{FF2B5EF4-FFF2-40B4-BE49-F238E27FC236}">
-                <a16:creationId xmlns:a16="http://schemas.microsoft.com/office/drawing/2014/main" id="{0889530E-1829-4988-9729-20C7619C99C6}"/>
+                <a16:creationId xmlns:a16="http://schemas.microsoft.com/office/drawing/2014/main" id="{47B211CB-EF0E-41DC-9CEE-18EAA4FDD750}"/>
               </a:ext>
             </a:extLst>
           </p:cNvPr>
@@ -4707,7 +4707,7 @@
           <p:cNvPr id="29" name="">
             <a:extLst xmlns:a="http://schemas.openxmlformats.org/drawingml/2006/main">
               <a:ext uri="{FF2B5EF4-FFF2-40B4-BE49-F238E27FC236}">
-                <a16:creationId xmlns:a16="http://schemas.microsoft.com/office/drawing/2014/main" id="{8D8D41E5-9F50-43C4-B1F3-3E351DB5A8FB}"/>
+                <a16:creationId xmlns:a16="http://schemas.microsoft.com/office/drawing/2014/main" id="{E2D0C0CE-BED9-45B3-9434-A482BBF2A627}"/>
               </a:ext>
             </a:extLst>
           </p:cNvPr>
@@ -4757,7 +4757,7 @@
           <p:cNvPr id="30" name="">
             <a:extLst xmlns:a="http://schemas.openxmlformats.org/drawingml/2006/main">
               <a:ext uri="{FF2B5EF4-FFF2-40B4-BE49-F238E27FC236}">
-                <a16:creationId xmlns:a16="http://schemas.microsoft.com/office/drawing/2014/main" id="{218B3401-D02F-41A2-B278-7C50FD6F92B4}"/>
+                <a16:creationId xmlns:a16="http://schemas.microsoft.com/office/drawing/2014/main" id="{11EDEBDF-8DB9-405A-BB9D-2A7FD2B796E6}"/>
               </a:ext>
             </a:extLst>
           </p:cNvPr>
@@ -4807,7 +4807,7 @@
           <p:cNvPr id="31" name="">
             <a:extLst xmlns:a="http://schemas.openxmlformats.org/drawingml/2006/main">
               <a:ext uri="{FF2B5EF4-FFF2-40B4-BE49-F238E27FC236}">
-                <a16:creationId xmlns:a16="http://schemas.microsoft.com/office/drawing/2014/main" id="{13D774A3-2634-4C05-918F-BB382EF9FCCF}"/>
+                <a16:creationId xmlns:a16="http://schemas.microsoft.com/office/drawing/2014/main" id="{34083153-4E70-4B3D-8AD7-69CC552F3A4C}"/>
               </a:ext>
             </a:extLst>
           </p:cNvPr>
@@ -4857,7 +4857,7 @@
           <p:cNvPr id="32" name="">
             <a:extLst xmlns:a="http://schemas.openxmlformats.org/drawingml/2006/main">
               <a:ext uri="{FF2B5EF4-FFF2-40B4-BE49-F238E27FC236}">
-                <a16:creationId xmlns:a16="http://schemas.microsoft.com/office/drawing/2014/main" id="{D720C529-CFF0-4373-BFEE-C6BFE291AFFF}"/>
+                <a16:creationId xmlns:a16="http://schemas.microsoft.com/office/drawing/2014/main" id="{FFB63C2A-F067-40BE-97B2-BAF1C8D4D0E2}"/>
               </a:ext>
             </a:extLst>
           </p:cNvPr>
@@ -4905,7 +4905,7 @@
     </p:spTree>
     <p:extLst>
       <p:ext uri="{BB962C8B-B14F-4D97-AF65-F5344CB8AC3E}">
-        <p14:creationId xmlns:p14="http://schemas.microsoft.com/office/powerpoint/2010/main" val="625527392"/>
+        <p14:creationId xmlns:p14="http://schemas.microsoft.com/office/powerpoint/2010/main" val="265153298"/>
       </p:ext>
     </p:extLst>
   </p:cSld>
@@ -4936,7 +4936,7 @@
           <p:cNvPr id="1" name="">
             <a:extLst xmlns:a="http://schemas.openxmlformats.org/drawingml/2006/main">
               <a:ext uri="{FF2B5EF4-FFF2-40B4-BE49-F238E27FC236}">
-                <a16:creationId xmlns:a16="http://schemas.microsoft.com/office/drawing/2014/main" id="{3FA55DA5-E6C0-410D-883C-5028585CC078}"/>
+                <a16:creationId xmlns:a16="http://schemas.microsoft.com/office/drawing/2014/main" id="{F6A9E7D6-3C72-4724-9C5F-7FFA09CD8A63}"/>
               </a:ext>
             </a:extLst>
           </p:cNvPr>
@@ -4986,7 +4986,7 @@
           <p:cNvPr id="2" name="">
             <a:extLst xmlns:a="http://schemas.openxmlformats.org/drawingml/2006/main">
               <a:ext uri="{FF2B5EF4-FFF2-40B4-BE49-F238E27FC236}">
-                <a16:creationId xmlns:a16="http://schemas.microsoft.com/office/drawing/2014/main" id="{9566FE8A-E04A-44FD-B994-59C361C6062F}"/>
+                <a16:creationId xmlns:a16="http://schemas.microsoft.com/office/drawing/2014/main" id="{6805A35E-2BE5-46B0-B7C0-9920C695D859}"/>
               </a:ext>
             </a:extLst>
           </p:cNvPr>
@@ -5036,7 +5036,7 @@
           <p:cNvPr id="3" name="">
             <a:extLst xmlns:a="http://schemas.openxmlformats.org/drawingml/2006/main">
               <a:ext uri="{FF2B5EF4-FFF2-40B4-BE49-F238E27FC236}">
-                <a16:creationId xmlns:a16="http://schemas.microsoft.com/office/drawing/2014/main" id="{9C85337B-51CF-4342-AB35-156ABA68D8DE}"/>
+                <a16:creationId xmlns:a16="http://schemas.microsoft.com/office/drawing/2014/main" id="{F0A3BEB0-368F-4DFA-89C9-1B76A3F4A064}"/>
               </a:ext>
             </a:extLst>
           </p:cNvPr>
@@ -5086,7 +5086,7 @@
           <p:cNvPr id="4" name="">
             <a:extLst xmlns:a="http://schemas.openxmlformats.org/drawingml/2006/main">
               <a:ext uri="{FF2B5EF4-FFF2-40B4-BE49-F238E27FC236}">
-                <a16:creationId xmlns:a16="http://schemas.microsoft.com/office/drawing/2014/main" id="{0B526005-CDDB-4902-8EEA-5DAEE8149E74}"/>
+                <a16:creationId xmlns:a16="http://schemas.microsoft.com/office/drawing/2014/main" id="{5BB59833-CC9F-4607-A57E-76F18C09CD7D}"/>
               </a:ext>
             </a:extLst>
           </p:cNvPr>
@@ -5119,7 +5119,7 @@
           <p:cNvPr id="5" name="">
             <a:extLst xmlns:a="http://schemas.openxmlformats.org/drawingml/2006/main">
               <a:ext uri="{FF2B5EF4-FFF2-40B4-BE49-F238E27FC236}">
-                <a16:creationId xmlns:a16="http://schemas.microsoft.com/office/drawing/2014/main" id="{F81A75BE-6EA5-497B-8AC0-975C9DAADED0}"/>
+                <a16:creationId xmlns:a16="http://schemas.microsoft.com/office/drawing/2014/main" id="{07B604C4-BA62-4929-BF2C-62994DAD36F9}"/>
               </a:ext>
             </a:extLst>
           </p:cNvPr>
@@ -5169,7 +5169,7 @@
           <p:cNvPr id="6" name="">
             <a:extLst xmlns:a="http://schemas.openxmlformats.org/drawingml/2006/main">
               <a:ext uri="{FF2B5EF4-FFF2-40B4-BE49-F238E27FC236}">
-                <a16:creationId xmlns:a16="http://schemas.microsoft.com/office/drawing/2014/main" id="{51FFBA4C-3E20-4603-80FB-B1F64ECFE725}"/>
+                <a16:creationId xmlns:a16="http://schemas.microsoft.com/office/drawing/2014/main" id="{81FEB825-CA6F-48D2-AA29-84DE26A68C81}"/>
               </a:ext>
             </a:extLst>
           </p:cNvPr>
@@ -5219,7 +5219,7 @@
           <p:cNvPr id="7" name="">
             <a:extLst xmlns:a="http://schemas.openxmlformats.org/drawingml/2006/main">
               <a:ext uri="{FF2B5EF4-FFF2-40B4-BE49-F238E27FC236}">
-                <a16:creationId xmlns:a16="http://schemas.microsoft.com/office/drawing/2014/main" id="{116EC688-51D0-4752-AAFC-BC02478CADA1}"/>
+                <a16:creationId xmlns:a16="http://schemas.microsoft.com/office/drawing/2014/main" id="{70690643-9C33-48DE-B9F3-AAC7EA35A8DB}"/>
               </a:ext>
             </a:extLst>
           </p:cNvPr>
@@ -5269,7 +5269,7 @@
           <p:cNvPr id="8" name="">
             <a:extLst xmlns:a="http://schemas.openxmlformats.org/drawingml/2006/main">
               <a:ext uri="{FF2B5EF4-FFF2-40B4-BE49-F238E27FC236}">
-                <a16:creationId xmlns:a16="http://schemas.microsoft.com/office/drawing/2014/main" id="{5AB4B227-662C-47EB-8AC0-5C1729FC53AD}"/>
+                <a16:creationId xmlns:a16="http://schemas.microsoft.com/office/drawing/2014/main" id="{8173D208-BFD8-479B-90F5-C0659572D106}"/>
               </a:ext>
             </a:extLst>
           </p:cNvPr>
@@ -5319,7 +5319,7 @@
           <p:cNvPr id="9" name="">
             <a:extLst xmlns:a="http://schemas.openxmlformats.org/drawingml/2006/main">
               <a:ext uri="{FF2B5EF4-FFF2-40B4-BE49-F238E27FC236}">
-                <a16:creationId xmlns:a16="http://schemas.microsoft.com/office/drawing/2014/main" id="{4A761C91-FE82-48E0-B8E4-4406FEDA2352}"/>
+                <a16:creationId xmlns:a16="http://schemas.microsoft.com/office/drawing/2014/main" id="{EF3DA9D7-F2C2-4B16-9417-E6E95B7F8AD9}"/>
               </a:ext>
             </a:extLst>
           </p:cNvPr>
@@ -5352,7 +5352,7 @@
           <p:cNvPr id="10" name="">
             <a:extLst xmlns:a="http://schemas.openxmlformats.org/drawingml/2006/main">
               <a:ext uri="{FF2B5EF4-FFF2-40B4-BE49-F238E27FC236}">
-                <a16:creationId xmlns:a16="http://schemas.microsoft.com/office/drawing/2014/main" id="{7C966470-236E-4004-9851-B5870201268C}"/>
+                <a16:creationId xmlns:a16="http://schemas.microsoft.com/office/drawing/2014/main" id="{147993A2-CFAC-474B-8305-1DF634D6F453}"/>
               </a:ext>
             </a:extLst>
           </p:cNvPr>
@@ -5402,7 +5402,7 @@
           <p:cNvPr id="11" name="">
             <a:extLst xmlns:a="http://schemas.openxmlformats.org/drawingml/2006/main">
               <a:ext uri="{FF2B5EF4-FFF2-40B4-BE49-F238E27FC236}">
-                <a16:creationId xmlns:a16="http://schemas.microsoft.com/office/drawing/2014/main" id="{8DF86B65-D421-4EF4-8F11-B0AE07100C3B}"/>
+                <a16:creationId xmlns:a16="http://schemas.microsoft.com/office/drawing/2014/main" id="{A491728C-98F8-4D3E-BDB1-1D68BCCE101C}"/>
               </a:ext>
             </a:extLst>
           </p:cNvPr>
@@ -5452,7 +5452,7 @@
           <p:cNvPr id="12" name="">
             <a:extLst xmlns:a="http://schemas.openxmlformats.org/drawingml/2006/main">
               <a:ext uri="{FF2B5EF4-FFF2-40B4-BE49-F238E27FC236}">
-                <a16:creationId xmlns:a16="http://schemas.microsoft.com/office/drawing/2014/main" id="{4A505FF5-154E-49C1-89E5-C491DF2DEC1E}"/>
+                <a16:creationId xmlns:a16="http://schemas.microsoft.com/office/drawing/2014/main" id="{7AD97668-910C-45C2-945C-ABA1889FD363}"/>
               </a:ext>
             </a:extLst>
           </p:cNvPr>
@@ -5502,7 +5502,7 @@
           <p:cNvPr id="13" name="">
             <a:extLst xmlns:a="http://schemas.openxmlformats.org/drawingml/2006/main">
               <a:ext uri="{FF2B5EF4-FFF2-40B4-BE49-F238E27FC236}">
-                <a16:creationId xmlns:a16="http://schemas.microsoft.com/office/drawing/2014/main" id="{37574B49-B134-4AE6-A290-176A94F231FB}"/>
+                <a16:creationId xmlns:a16="http://schemas.microsoft.com/office/drawing/2014/main" id="{617DD1A2-F357-4D01-8CC4-AE04D34AB1AE}"/>
               </a:ext>
             </a:extLst>
           </p:cNvPr>
@@ -5552,7 +5552,7 @@
           <p:cNvPr id="14" name="">
             <a:extLst xmlns:a="http://schemas.openxmlformats.org/drawingml/2006/main">
               <a:ext uri="{FF2B5EF4-FFF2-40B4-BE49-F238E27FC236}">
-                <a16:creationId xmlns:a16="http://schemas.microsoft.com/office/drawing/2014/main" id="{4D260DF0-36B2-4C4A-9B25-36664D59DEDB}"/>
+                <a16:creationId xmlns:a16="http://schemas.microsoft.com/office/drawing/2014/main" id="{B272C08F-976D-43EB-8875-F6522FB946FF}"/>
               </a:ext>
             </a:extLst>
           </p:cNvPr>
@@ -5585,7 +5585,7 @@
           <p:cNvPr id="15" name="">
             <a:extLst xmlns:a="http://schemas.openxmlformats.org/drawingml/2006/main">
               <a:ext uri="{FF2B5EF4-FFF2-40B4-BE49-F238E27FC236}">
-                <a16:creationId xmlns:a16="http://schemas.microsoft.com/office/drawing/2014/main" id="{452BD620-50BE-4E45-8FE0-BE093BC09BAB}"/>
+                <a16:creationId xmlns:a16="http://schemas.microsoft.com/office/drawing/2014/main" id="{D16CBAC6-7F51-494E-8E0F-65F773EFC342}"/>
               </a:ext>
             </a:extLst>
           </p:cNvPr>
@@ -5635,7 +5635,7 @@
           <p:cNvPr id="16" name="">
             <a:extLst xmlns:a="http://schemas.openxmlformats.org/drawingml/2006/main">
               <a:ext uri="{FF2B5EF4-FFF2-40B4-BE49-F238E27FC236}">
-                <a16:creationId xmlns:a16="http://schemas.microsoft.com/office/drawing/2014/main" id="{D0DA26C0-B3F1-407F-8F0A-E2636736028C}"/>
+                <a16:creationId xmlns:a16="http://schemas.microsoft.com/office/drawing/2014/main" id="{3993A6BC-01D3-4985-89B4-BA42493A5BDE}"/>
               </a:ext>
             </a:extLst>
           </p:cNvPr>
@@ -5685,7 +5685,7 @@
           <p:cNvPr id="17" name="">
             <a:extLst xmlns:a="http://schemas.openxmlformats.org/drawingml/2006/main">
               <a:ext uri="{FF2B5EF4-FFF2-40B4-BE49-F238E27FC236}">
-                <a16:creationId xmlns:a16="http://schemas.microsoft.com/office/drawing/2014/main" id="{38D2455B-55BC-4C27-86DF-04B991E59BA4}"/>
+                <a16:creationId xmlns:a16="http://schemas.microsoft.com/office/drawing/2014/main" id="{9AE2124E-0E55-44F8-AC84-C985FE3BC92A}"/>
               </a:ext>
             </a:extLst>
           </p:cNvPr>
@@ -5735,7 +5735,7 @@
           <p:cNvPr id="18" name="">
             <a:extLst xmlns:a="http://schemas.openxmlformats.org/drawingml/2006/main">
               <a:ext uri="{FF2B5EF4-FFF2-40B4-BE49-F238E27FC236}">
-                <a16:creationId xmlns:a16="http://schemas.microsoft.com/office/drawing/2014/main" id="{07C46825-4B43-4A8E-A1B4-21E4FF6BE93B}"/>
+                <a16:creationId xmlns:a16="http://schemas.microsoft.com/office/drawing/2014/main" id="{947ED101-42D5-413A-A066-E4DE550B0DD0}"/>
               </a:ext>
             </a:extLst>
           </p:cNvPr>
@@ -5785,7 +5785,7 @@
           <p:cNvPr id="19" name="">
             <a:extLst xmlns:a="http://schemas.openxmlformats.org/drawingml/2006/main">
               <a:ext uri="{FF2B5EF4-FFF2-40B4-BE49-F238E27FC236}">
-                <a16:creationId xmlns:a16="http://schemas.microsoft.com/office/drawing/2014/main" id="{59CD6998-5E31-416F-8FC2-CE047FD5CBC5}"/>
+                <a16:creationId xmlns:a16="http://schemas.microsoft.com/office/drawing/2014/main" id="{94B6B5BC-89D5-4EF9-AC25-9E9B97C9FE1D}"/>
               </a:ext>
             </a:extLst>
           </p:cNvPr>
@@ -5818,7 +5818,7 @@
           <p:cNvPr id="20" name="">
             <a:extLst xmlns:a="http://schemas.openxmlformats.org/drawingml/2006/main">
               <a:ext uri="{FF2B5EF4-FFF2-40B4-BE49-F238E27FC236}">
-                <a16:creationId xmlns:a16="http://schemas.microsoft.com/office/drawing/2014/main" id="{DB08D507-3AA0-4D7D-87D6-720597C8637C}"/>
+                <a16:creationId xmlns:a16="http://schemas.microsoft.com/office/drawing/2014/main" id="{4F86FA51-1ACF-4C06-9D20-B33C7B5E09EB}"/>
               </a:ext>
             </a:extLst>
           </p:cNvPr>
@@ -5868,7 +5868,7 @@
           <p:cNvPr id="21" name="">
             <a:extLst xmlns:a="http://schemas.openxmlformats.org/drawingml/2006/main">
               <a:ext uri="{FF2B5EF4-FFF2-40B4-BE49-F238E27FC236}">
-                <a16:creationId xmlns:a16="http://schemas.microsoft.com/office/drawing/2014/main" id="{38AFC84A-25F4-4D14-A59B-E624EB4260C2}"/>
+                <a16:creationId xmlns:a16="http://schemas.microsoft.com/office/drawing/2014/main" id="{10FFEC1A-DC94-416A-B650-056CA8BF9548}"/>
               </a:ext>
             </a:extLst>
           </p:cNvPr>
@@ -5918,7 +5918,7 @@
           <p:cNvPr id="22" name="">
             <a:extLst xmlns:a="http://schemas.openxmlformats.org/drawingml/2006/main">
               <a:ext uri="{FF2B5EF4-FFF2-40B4-BE49-F238E27FC236}">
-                <a16:creationId xmlns:a16="http://schemas.microsoft.com/office/drawing/2014/main" id="{8FBF613E-5AF2-4EA0-94B6-30641CC07BA1}"/>
+                <a16:creationId xmlns:a16="http://schemas.microsoft.com/office/drawing/2014/main" id="{A4E61412-3034-4145-8ECD-698CD0736D96}"/>
               </a:ext>
             </a:extLst>
           </p:cNvPr>
@@ -5968,7 +5968,7 @@
           <p:cNvPr id="23" name="">
             <a:extLst xmlns:a="http://schemas.openxmlformats.org/drawingml/2006/main">
               <a:ext uri="{FF2B5EF4-FFF2-40B4-BE49-F238E27FC236}">
-                <a16:creationId xmlns:a16="http://schemas.microsoft.com/office/drawing/2014/main" id="{77D918A4-76C4-4CA3-BA51-D43F8A65035A}"/>
+                <a16:creationId xmlns:a16="http://schemas.microsoft.com/office/drawing/2014/main" id="{6DA47B01-A6BD-45C2-86FB-725850438F61}"/>
               </a:ext>
             </a:extLst>
           </p:cNvPr>
@@ -6018,7 +6018,7 @@
           <p:cNvPr id="24" name="">
             <a:extLst xmlns:a="http://schemas.openxmlformats.org/drawingml/2006/main">
               <a:ext uri="{FF2B5EF4-FFF2-40B4-BE49-F238E27FC236}">
-                <a16:creationId xmlns:a16="http://schemas.microsoft.com/office/drawing/2014/main" id="{0A495205-C502-46F8-B99B-10327089967A}"/>
+                <a16:creationId xmlns:a16="http://schemas.microsoft.com/office/drawing/2014/main" id="{C3DE605A-0860-44A7-AA26-7AD869736347}"/>
               </a:ext>
             </a:extLst>
           </p:cNvPr>
@@ -6051,7 +6051,7 @@
           <p:cNvPr id="25" name="">
             <a:extLst xmlns:a="http://schemas.openxmlformats.org/drawingml/2006/main">
               <a:ext uri="{FF2B5EF4-FFF2-40B4-BE49-F238E27FC236}">
-                <a16:creationId xmlns:a16="http://schemas.microsoft.com/office/drawing/2014/main" id="{797B04CC-0461-4B91-B524-8FC8119B4E8C}"/>
+                <a16:creationId xmlns:a16="http://schemas.microsoft.com/office/drawing/2014/main" id="{36310DD3-0F3C-4CF5-9A92-42CE9686E8E1}"/>
               </a:ext>
             </a:extLst>
           </p:cNvPr>
@@ -6101,7 +6101,7 @@
           <p:cNvPr id="26" name="">
             <a:extLst xmlns:a="http://schemas.openxmlformats.org/drawingml/2006/main">
               <a:ext uri="{FF2B5EF4-FFF2-40B4-BE49-F238E27FC236}">
-                <a16:creationId xmlns:a16="http://schemas.microsoft.com/office/drawing/2014/main" id="{F50EBF7A-4C8F-4D0F-8524-A79F46ACECC8}"/>
+                <a16:creationId xmlns:a16="http://schemas.microsoft.com/office/drawing/2014/main" id="{6D04ECA7-1988-4E3C-B506-BCD09A6F16A0}"/>
               </a:ext>
             </a:extLst>
           </p:cNvPr>
@@ -6151,7 +6151,7 @@
           <p:cNvPr id="27" name="">
             <a:extLst xmlns:a="http://schemas.openxmlformats.org/drawingml/2006/main">
               <a:ext uri="{FF2B5EF4-FFF2-40B4-BE49-F238E27FC236}">
-                <a16:creationId xmlns:a16="http://schemas.microsoft.com/office/drawing/2014/main" id="{D42DC977-3247-4E5A-9A9F-AED4E82B98CC}"/>
+                <a16:creationId xmlns:a16="http://schemas.microsoft.com/office/drawing/2014/main" id="{CC3FD29D-B2E7-43CC-8DC2-A2637CABC394}"/>
               </a:ext>
             </a:extLst>
           </p:cNvPr>
@@ -6184,7 +6184,7 @@
           <p:cNvPr id="28" name="">
             <a:extLst xmlns:a="http://schemas.openxmlformats.org/drawingml/2006/main">
               <a:ext uri="{FF2B5EF4-FFF2-40B4-BE49-F238E27FC236}">
-                <a16:creationId xmlns:a16="http://schemas.microsoft.com/office/drawing/2014/main" id="{1E4E83D3-3440-453F-A7A6-295D1B53DF50}"/>
+                <a16:creationId xmlns:a16="http://schemas.microsoft.com/office/drawing/2014/main" id="{414009F4-72E7-43D0-A937-3DB4F91FA607}"/>
               </a:ext>
             </a:extLst>
           </p:cNvPr>
@@ -6234,7 +6234,7 @@
           <p:cNvPr id="29" name="">
             <a:extLst xmlns:a="http://schemas.openxmlformats.org/drawingml/2006/main">
               <a:ext uri="{FF2B5EF4-FFF2-40B4-BE49-F238E27FC236}">
-                <a16:creationId xmlns:a16="http://schemas.microsoft.com/office/drawing/2014/main" id="{05BACD8D-CC63-4E52-A003-61179DE1B760}"/>
+                <a16:creationId xmlns:a16="http://schemas.microsoft.com/office/drawing/2014/main" id="{5C45D9BC-15C4-4C09-AC47-631A7B2E78D1}"/>
               </a:ext>
             </a:extLst>
           </p:cNvPr>
@@ -6284,7 +6284,7 @@
           <p:cNvPr id="30" name="">
             <a:extLst xmlns:a="http://schemas.openxmlformats.org/drawingml/2006/main">
               <a:ext uri="{FF2B5EF4-FFF2-40B4-BE49-F238E27FC236}">
-                <a16:creationId xmlns:a16="http://schemas.microsoft.com/office/drawing/2014/main" id="{298E4E98-F774-444D-A83E-B8B72F96AABB}"/>
+                <a16:creationId xmlns:a16="http://schemas.microsoft.com/office/drawing/2014/main" id="{B0C6523D-5725-45C5-BDE5-A3A294DF8B66}"/>
               </a:ext>
             </a:extLst>
           </p:cNvPr>
@@ -6332,7 +6332,7 @@
     </p:spTree>
     <p:extLst>
       <p:ext uri="{BB962C8B-B14F-4D97-AF65-F5344CB8AC3E}">
-        <p14:creationId xmlns:p14="http://schemas.microsoft.com/office/powerpoint/2010/main" val="1826336367"/>
+        <p14:creationId xmlns:p14="http://schemas.microsoft.com/office/powerpoint/2010/main" val="1788157796"/>
       </p:ext>
     </p:extLst>
   </p:cSld>
@@ -6363,7 +6363,7 @@
           <p:cNvPr id="1" name="">
             <a:extLst xmlns:a="http://schemas.openxmlformats.org/drawingml/2006/main">
               <a:ext uri="{FF2B5EF4-FFF2-40B4-BE49-F238E27FC236}">
-                <a16:creationId xmlns:a16="http://schemas.microsoft.com/office/drawing/2014/main" id="{550E27B2-38BE-48F0-876A-9E90D2646464}"/>
+                <a16:creationId xmlns:a16="http://schemas.microsoft.com/office/drawing/2014/main" id="{8901862E-B53F-47BF-8BC1-3B9D94FD39CB}"/>
               </a:ext>
             </a:extLst>
           </p:cNvPr>
@@ -6413,7 +6413,7 @@
           <p:cNvPr id="2" name="">
             <a:extLst xmlns:a="http://schemas.openxmlformats.org/drawingml/2006/main">
               <a:ext uri="{FF2B5EF4-FFF2-40B4-BE49-F238E27FC236}">
-                <a16:creationId xmlns:a16="http://schemas.microsoft.com/office/drawing/2014/main" id="{FD5621D6-6CBD-4F48-AD8B-FC82FA18DADE}"/>
+                <a16:creationId xmlns:a16="http://schemas.microsoft.com/office/drawing/2014/main" id="{B6F7F171-0B7B-456C-A5CE-89B0D398F7F8}"/>
               </a:ext>
             </a:extLst>
           </p:cNvPr>
@@ -6463,7 +6463,7 @@
           <p:cNvPr id="3" name="">
             <a:extLst xmlns:a="http://schemas.openxmlformats.org/drawingml/2006/main">
               <a:ext uri="{FF2B5EF4-FFF2-40B4-BE49-F238E27FC236}">
-                <a16:creationId xmlns:a16="http://schemas.microsoft.com/office/drawing/2014/main" id="{DD7527C3-71EF-476E-8E39-8E4074517489}"/>
+                <a16:creationId xmlns:a16="http://schemas.microsoft.com/office/drawing/2014/main" id="{FA745531-1ABA-4E89-A30C-C2CE841AC8E5}"/>
               </a:ext>
             </a:extLst>
           </p:cNvPr>
@@ -6513,7 +6513,7 @@
           <p:cNvPr id="4" name="">
             <a:extLst xmlns:a="http://schemas.openxmlformats.org/drawingml/2006/main">
               <a:ext uri="{FF2B5EF4-FFF2-40B4-BE49-F238E27FC236}">
-                <a16:creationId xmlns:a16="http://schemas.microsoft.com/office/drawing/2014/main" id="{A6C50490-60F2-460A-926A-AC57BB895B01}"/>
+                <a16:creationId xmlns:a16="http://schemas.microsoft.com/office/drawing/2014/main" id="{730FBF1C-2E6C-42AB-8133-B0DADE42EF3D}"/>
               </a:ext>
             </a:extLst>
           </p:cNvPr>
@@ -6546,7 +6546,7 @@
           <p:cNvPr id="5" name="">
             <a:extLst xmlns:a="http://schemas.openxmlformats.org/drawingml/2006/main">
               <a:ext uri="{FF2B5EF4-FFF2-40B4-BE49-F238E27FC236}">
-                <a16:creationId xmlns:a16="http://schemas.microsoft.com/office/drawing/2014/main" id="{3D69275D-44D6-4138-8BEF-4A0057AC7126}"/>
+                <a16:creationId xmlns:a16="http://schemas.microsoft.com/office/drawing/2014/main" id="{BA81F210-14F4-4A90-848F-E9B7927F2E7B}"/>
               </a:ext>
             </a:extLst>
           </p:cNvPr>
@@ -6596,7 +6596,7 @@
           <p:cNvPr id="6" name="">
             <a:extLst xmlns:a="http://schemas.openxmlformats.org/drawingml/2006/main">
               <a:ext uri="{FF2B5EF4-FFF2-40B4-BE49-F238E27FC236}">
-                <a16:creationId xmlns:a16="http://schemas.microsoft.com/office/drawing/2014/main" id="{2FEBF6A5-1FCF-4D1B-965D-93A2BA0DD605}"/>
+                <a16:creationId xmlns:a16="http://schemas.microsoft.com/office/drawing/2014/main" id="{32B8ABA7-A7FD-4731-98D4-1A3E8CEAD123}"/>
               </a:ext>
             </a:extLst>
           </p:cNvPr>
@@ -6646,7 +6646,7 @@
           <p:cNvPr id="7" name="">
             <a:extLst xmlns:a="http://schemas.openxmlformats.org/drawingml/2006/main">
               <a:ext uri="{FF2B5EF4-FFF2-40B4-BE49-F238E27FC236}">
-                <a16:creationId xmlns:a16="http://schemas.microsoft.com/office/drawing/2014/main" id="{E5DEE6C5-6FB2-4B40-93E7-A2152C10242F}"/>
+                <a16:creationId xmlns:a16="http://schemas.microsoft.com/office/drawing/2014/main" id="{A9B3ED52-E401-41A9-A06D-3AE86D572DAB}"/>
               </a:ext>
             </a:extLst>
           </p:cNvPr>
@@ -6696,7 +6696,7 @@
           <p:cNvPr id="8" name="">
             <a:extLst xmlns:a="http://schemas.openxmlformats.org/drawingml/2006/main">
               <a:ext uri="{FF2B5EF4-FFF2-40B4-BE49-F238E27FC236}">
-                <a16:creationId xmlns:a16="http://schemas.microsoft.com/office/drawing/2014/main" id="{82C8B614-2D03-470A-A7E2-FFA9858C4491}"/>
+                <a16:creationId xmlns:a16="http://schemas.microsoft.com/office/drawing/2014/main" id="{C0A90A30-20A0-4915-8776-BA2B07DC4E5F}"/>
               </a:ext>
             </a:extLst>
           </p:cNvPr>
@@ -6746,7 +6746,7 @@
           <p:cNvPr id="9" name="">
             <a:extLst xmlns:a="http://schemas.openxmlformats.org/drawingml/2006/main">
               <a:ext uri="{FF2B5EF4-FFF2-40B4-BE49-F238E27FC236}">
-                <a16:creationId xmlns:a16="http://schemas.microsoft.com/office/drawing/2014/main" id="{43C6FD3B-F20B-45B4-A022-EA87E19167A3}"/>
+                <a16:creationId xmlns:a16="http://schemas.microsoft.com/office/drawing/2014/main" id="{B291CECF-F789-419C-A121-DD48B4D1B65D}"/>
               </a:ext>
             </a:extLst>
           </p:cNvPr>
@@ -6779,7 +6779,7 @@
           <p:cNvPr id="10" name="">
             <a:extLst xmlns:a="http://schemas.openxmlformats.org/drawingml/2006/main">
               <a:ext uri="{FF2B5EF4-FFF2-40B4-BE49-F238E27FC236}">
-                <a16:creationId xmlns:a16="http://schemas.microsoft.com/office/drawing/2014/main" id="{B55EE3F4-D3B5-4C1C-8414-7797520CFB80}"/>
+                <a16:creationId xmlns:a16="http://schemas.microsoft.com/office/drawing/2014/main" id="{AA389D9F-6202-4792-8A6C-9744B3040353}"/>
               </a:ext>
             </a:extLst>
           </p:cNvPr>
@@ -6829,7 +6829,7 @@
           <p:cNvPr id="11" name="">
             <a:extLst xmlns:a="http://schemas.openxmlformats.org/drawingml/2006/main">
               <a:ext uri="{FF2B5EF4-FFF2-40B4-BE49-F238E27FC236}">
-                <a16:creationId xmlns:a16="http://schemas.microsoft.com/office/drawing/2014/main" id="{90F23613-FDEB-4BA0-B4DF-89B77BD2AB38}"/>
+                <a16:creationId xmlns:a16="http://schemas.microsoft.com/office/drawing/2014/main" id="{59113E32-5233-48A2-84E5-75511CEFB0DF}"/>
               </a:ext>
             </a:extLst>
           </p:cNvPr>
@@ -6879,7 +6879,7 @@
           <p:cNvPr id="12" name="">
             <a:extLst xmlns:a="http://schemas.openxmlformats.org/drawingml/2006/main">
               <a:ext uri="{FF2B5EF4-FFF2-40B4-BE49-F238E27FC236}">
-                <a16:creationId xmlns:a16="http://schemas.microsoft.com/office/drawing/2014/main" id="{0925821C-76E0-46E0-9046-42F547D5D9B1}"/>
+                <a16:creationId xmlns:a16="http://schemas.microsoft.com/office/drawing/2014/main" id="{1DB33934-DA09-4451-91BB-EA4A2789E944}"/>
               </a:ext>
             </a:extLst>
           </p:cNvPr>
@@ -6929,7 +6929,7 @@
           <p:cNvPr id="13" name="">
             <a:extLst xmlns:a="http://schemas.openxmlformats.org/drawingml/2006/main">
               <a:ext uri="{FF2B5EF4-FFF2-40B4-BE49-F238E27FC236}">
-                <a16:creationId xmlns:a16="http://schemas.microsoft.com/office/drawing/2014/main" id="{B699CF1D-685B-42DC-8ABF-56DA7A1C1999}"/>
+                <a16:creationId xmlns:a16="http://schemas.microsoft.com/office/drawing/2014/main" id="{66C6025F-B563-4959-BC1C-4084A06B72F5}"/>
               </a:ext>
             </a:extLst>
           </p:cNvPr>
@@ -6979,7 +6979,7 @@
           <p:cNvPr id="14" name="">
             <a:extLst xmlns:a="http://schemas.openxmlformats.org/drawingml/2006/main">
               <a:ext uri="{FF2B5EF4-FFF2-40B4-BE49-F238E27FC236}">
-                <a16:creationId xmlns:a16="http://schemas.microsoft.com/office/drawing/2014/main" id="{C077A2BD-36DB-43C9-954B-8977CE8FE741}"/>
+                <a16:creationId xmlns:a16="http://schemas.microsoft.com/office/drawing/2014/main" id="{16FE4B8F-F67B-4792-A464-D1A52CC40AC0}"/>
               </a:ext>
             </a:extLst>
           </p:cNvPr>
@@ -7012,7 +7012,7 @@
           <p:cNvPr id="15" name="">
             <a:extLst xmlns:a="http://schemas.openxmlformats.org/drawingml/2006/main">
               <a:ext uri="{FF2B5EF4-FFF2-40B4-BE49-F238E27FC236}">
-                <a16:creationId xmlns:a16="http://schemas.microsoft.com/office/drawing/2014/main" id="{57E70F55-1A07-45BA-BBD0-66F7E350EDA8}"/>
+                <a16:creationId xmlns:a16="http://schemas.microsoft.com/office/drawing/2014/main" id="{F89D57D7-02D5-4CFE-ADE2-CB148E7AAE80}"/>
               </a:ext>
             </a:extLst>
           </p:cNvPr>
@@ -7062,7 +7062,7 @@
           <p:cNvPr id="16" name="">
             <a:extLst xmlns:a="http://schemas.openxmlformats.org/drawingml/2006/main">
               <a:ext uri="{FF2B5EF4-FFF2-40B4-BE49-F238E27FC236}">
-                <a16:creationId xmlns:a16="http://schemas.microsoft.com/office/drawing/2014/main" id="{EDF601C6-D097-4418-AAED-269A7A8A1E19}"/>
+                <a16:creationId xmlns:a16="http://schemas.microsoft.com/office/drawing/2014/main" id="{D8BBC45F-904C-4914-8EE7-EA476E8FE7FF}"/>
               </a:ext>
             </a:extLst>
           </p:cNvPr>
@@ -7112,7 +7112,7 @@
           <p:cNvPr id="17" name="">
             <a:extLst xmlns:a="http://schemas.openxmlformats.org/drawingml/2006/main">
               <a:ext uri="{FF2B5EF4-FFF2-40B4-BE49-F238E27FC236}">
-                <a16:creationId xmlns:a16="http://schemas.microsoft.com/office/drawing/2014/main" id="{D25A5D04-3566-4DD2-B2DF-F77D4295FB3D}"/>
+                <a16:creationId xmlns:a16="http://schemas.microsoft.com/office/drawing/2014/main" id="{55B3FCC6-41DA-47A9-A37B-E231A5698903}"/>
               </a:ext>
             </a:extLst>
           </p:cNvPr>
@@ -7162,7 +7162,7 @@
           <p:cNvPr id="18" name="">
             <a:extLst xmlns:a="http://schemas.openxmlformats.org/drawingml/2006/main">
               <a:ext uri="{FF2B5EF4-FFF2-40B4-BE49-F238E27FC236}">
-                <a16:creationId xmlns:a16="http://schemas.microsoft.com/office/drawing/2014/main" id="{635B5B67-0469-4F72-B89A-0119CDC3D402}"/>
+                <a16:creationId xmlns:a16="http://schemas.microsoft.com/office/drawing/2014/main" id="{BA30FDB5-E1F4-49A2-A94F-F8EF0D6D2078}"/>
               </a:ext>
             </a:extLst>
           </p:cNvPr>
@@ -7212,7 +7212,7 @@
           <p:cNvPr id="19" name="">
             <a:extLst xmlns:a="http://schemas.openxmlformats.org/drawingml/2006/main">
               <a:ext uri="{FF2B5EF4-FFF2-40B4-BE49-F238E27FC236}">
-                <a16:creationId xmlns:a16="http://schemas.microsoft.com/office/drawing/2014/main" id="{DE9D215F-EE65-40CD-8241-5DF7537FE240}"/>
+                <a16:creationId xmlns:a16="http://schemas.microsoft.com/office/drawing/2014/main" id="{53EB06F1-FB8D-41C2-8973-57D1FA378264}"/>
               </a:ext>
             </a:extLst>
           </p:cNvPr>
@@ -7245,7 +7245,7 @@
           <p:cNvPr id="20" name="">
             <a:extLst xmlns:a="http://schemas.openxmlformats.org/drawingml/2006/main">
               <a:ext uri="{FF2B5EF4-FFF2-40B4-BE49-F238E27FC236}">
-                <a16:creationId xmlns:a16="http://schemas.microsoft.com/office/drawing/2014/main" id="{AEB41D58-CE4E-4C52-A2B1-B2739E8048D0}"/>
+                <a16:creationId xmlns:a16="http://schemas.microsoft.com/office/drawing/2014/main" id="{1B86F43C-6374-4432-919E-ACFDD723FFF8}"/>
               </a:ext>
             </a:extLst>
           </p:cNvPr>
@@ -7295,7 +7295,7 @@
           <p:cNvPr id="21" name="">
             <a:extLst xmlns:a="http://schemas.openxmlformats.org/drawingml/2006/main">
               <a:ext uri="{FF2B5EF4-FFF2-40B4-BE49-F238E27FC236}">
-                <a16:creationId xmlns:a16="http://schemas.microsoft.com/office/drawing/2014/main" id="{5E62CFC8-D5C2-43F2-9B07-A51AA41114C0}"/>
+                <a16:creationId xmlns:a16="http://schemas.microsoft.com/office/drawing/2014/main" id="{27E7DB90-82E4-41C5-8859-456D73F2CE9A}"/>
               </a:ext>
             </a:extLst>
           </p:cNvPr>
@@ -7345,7 +7345,7 @@
           <p:cNvPr id="22" name="">
             <a:extLst xmlns:a="http://schemas.openxmlformats.org/drawingml/2006/main">
               <a:ext uri="{FF2B5EF4-FFF2-40B4-BE49-F238E27FC236}">
-                <a16:creationId xmlns:a16="http://schemas.microsoft.com/office/drawing/2014/main" id="{9CC8EDD3-9D91-49E2-BCC2-114524452F8A}"/>
+                <a16:creationId xmlns:a16="http://schemas.microsoft.com/office/drawing/2014/main" id="{194C86BC-B50A-4C8E-ABB8-CA6EC45CBA82}"/>
               </a:ext>
             </a:extLst>
           </p:cNvPr>
@@ -7395,7 +7395,7 @@
           <p:cNvPr id="23" name="">
             <a:extLst xmlns:a="http://schemas.openxmlformats.org/drawingml/2006/main">
               <a:ext uri="{FF2B5EF4-FFF2-40B4-BE49-F238E27FC236}">
-                <a16:creationId xmlns:a16="http://schemas.microsoft.com/office/drawing/2014/main" id="{9EE9F3DE-7DFA-47CF-BEFD-C101D15DE230}"/>
+                <a16:creationId xmlns:a16="http://schemas.microsoft.com/office/drawing/2014/main" id="{98CD5CEF-B335-4615-A984-6D1F925E8EC4}"/>
               </a:ext>
             </a:extLst>
           </p:cNvPr>
@@ -7445,7 +7445,7 @@
           <p:cNvPr id="24" name="">
             <a:extLst xmlns:a="http://schemas.openxmlformats.org/drawingml/2006/main">
               <a:ext uri="{FF2B5EF4-FFF2-40B4-BE49-F238E27FC236}">
-                <a16:creationId xmlns:a16="http://schemas.microsoft.com/office/drawing/2014/main" id="{94953A47-4C85-4E9F-B755-95ECABBD5719}"/>
+                <a16:creationId xmlns:a16="http://schemas.microsoft.com/office/drawing/2014/main" id="{DD9F8038-707E-4B80-B586-00F85CEA171C}"/>
               </a:ext>
             </a:extLst>
           </p:cNvPr>
@@ -7478,7 +7478,7 @@
           <p:cNvPr id="25" name="">
             <a:extLst xmlns:a="http://schemas.openxmlformats.org/drawingml/2006/main">
               <a:ext uri="{FF2B5EF4-FFF2-40B4-BE49-F238E27FC236}">
-                <a16:creationId xmlns:a16="http://schemas.microsoft.com/office/drawing/2014/main" id="{DBEB53B9-158A-49E2-AA0D-2D2355087A53}"/>
+                <a16:creationId xmlns:a16="http://schemas.microsoft.com/office/drawing/2014/main" id="{3AB45EF6-1F0B-404C-B4F8-9D861CEB5818}"/>
               </a:ext>
             </a:extLst>
           </p:cNvPr>
@@ -7528,19 +7528,19 @@
           <p:cNvPr id="26" name="">
             <a:extLst xmlns:a="http://schemas.openxmlformats.org/drawingml/2006/main">
               <a:ext uri="{FF2B5EF4-FFF2-40B4-BE49-F238E27FC236}">
-                <a16:creationId xmlns:a16="http://schemas.microsoft.com/office/drawing/2014/main" id="{ED7E5511-6FC5-4AE8-BCAE-D4986DB6579B}"/>
-              </a:ext>
-            </a:extLst>
-          </p:cNvPr>
-          <p:cNvSpPr>
-            <a:spLocks xmlns:a="http://schemas.openxmlformats.org/drawingml/2006/main" noGrp="1"/>
-          </p:cNvSpPr>
-          <p:nvPr/>
-        </p:nvSpPr>
-        <p:spPr>
-          <a:xfrm xmlns:a="http://schemas.openxmlformats.org/drawingml/2006/main">
-            <a:off x="2857500" y="4286250"/>
-            <a:ext cx="7048500" cy="457200"/>
+                <a16:creationId xmlns:a16="http://schemas.microsoft.com/office/drawing/2014/main" id="{08279338-2AE0-4E01-A815-F425D6C33E24}"/>
+              </a:ext>
+            </a:extLst>
+          </p:cNvPr>
+          <p:cNvSpPr>
+            <a:spLocks xmlns:a="http://schemas.openxmlformats.org/drawingml/2006/main" noGrp="1"/>
+          </p:cNvSpPr>
+          <p:nvPr/>
+        </p:nvSpPr>
+        <p:spPr>
+          <a:xfrm xmlns:a="http://schemas.openxmlformats.org/drawingml/2006/main">
+            <a:off x="2857500" y="4229100"/>
+            <a:ext cx="7048500" cy="552450"/>
           </a:xfrm>
           <a:prstGeom xmlns:a="http://schemas.openxmlformats.org/drawingml/2006/main" prst="rect">
             <a:avLst/>
@@ -7568,7 +7568,7 @@
                   <a:srgbClr val="111111"/>
                 </a:solidFill>
               </a:rPr>
-              <a:t>50 ns production 已是千万级步数；SMD 还要为每个变体做受力路径、重复轨迹和拉速敏感性分析。GROMACS 文档也强调非平衡拉伸只有在足够慢或多路径统计下才可解释。</a:t>
+              <a:t>50 ns production 已是千万级步数；SMD 还要为每个变体做受力路径、重复轨迹和拉速敏感性分析。本地记录中 5 ns × 3 reps/variant 是小时级；异常争用下 WT 曾慢到约 1.4 ns/day。</a:t>
             </a:r>
           </a:p>
         </p:txBody>
@@ -7578,7 +7578,7 @@
           <p:cNvPr id="27" name="">
             <a:extLst xmlns:a="http://schemas.openxmlformats.org/drawingml/2006/main">
               <a:ext uri="{FF2B5EF4-FFF2-40B4-BE49-F238E27FC236}">
-                <a16:creationId xmlns:a16="http://schemas.microsoft.com/office/drawing/2014/main" id="{5D11C16F-A647-4403-A593-95A79602C7FF}"/>
+                <a16:creationId xmlns:a16="http://schemas.microsoft.com/office/drawing/2014/main" id="{714F44E8-5108-479F-B711-BD07FA53EBCE}"/>
               </a:ext>
             </a:extLst>
           </p:cNvPr>
@@ -7618,7 +7618,7 @@
                   <a:srgbClr val="777777"/>
                 </a:solidFill>
               </a:rPr>
-              <a:t>Sources: GROMACS pull-code docs; VWF A2 force-unfolding MD/AFM literature.</a:t>
+              <a:t>Sources: docs/7A6O_SMD_STATUS_HANDOFF_2026-06-21.md; docs/7A6O_SMD_WT_DIAGNOSIS_2026-06-21.md; GROMACS pull-code docs.</a:t>
             </a:r>
           </a:p>
         </p:txBody>
@@ -7626,7 +7626,7 @@
     </p:spTree>
     <p:extLst>
       <p:ext uri="{BB962C8B-B14F-4D97-AF65-F5344CB8AC3E}">
-        <p14:creationId xmlns:p14="http://schemas.microsoft.com/office/powerpoint/2010/main" val="1924489589"/>
+        <p14:creationId xmlns:p14="http://schemas.microsoft.com/office/powerpoint/2010/main" val="1824139538"/>
       </p:ext>
     </p:extLst>
   </p:cSld>
@@ -7657,7 +7657,7 @@
           <p:cNvPr id="1" name="">
             <a:extLst xmlns:a="http://schemas.openxmlformats.org/drawingml/2006/main">
               <a:ext uri="{FF2B5EF4-FFF2-40B4-BE49-F238E27FC236}">
-                <a16:creationId xmlns:a16="http://schemas.microsoft.com/office/drawing/2014/main" id="{02B8462D-9DF8-4650-8103-E490FD0F17C6}"/>
+                <a16:creationId xmlns:a16="http://schemas.microsoft.com/office/drawing/2014/main" id="{1B750C13-E268-41BF-A6D4-5C73E8C4C9F2}"/>
               </a:ext>
             </a:extLst>
           </p:cNvPr>
@@ -7707,7 +7707,7 @@
           <p:cNvPr id="2" name="">
             <a:extLst xmlns:a="http://schemas.openxmlformats.org/drawingml/2006/main">
               <a:ext uri="{FF2B5EF4-FFF2-40B4-BE49-F238E27FC236}">
-                <a16:creationId xmlns:a16="http://schemas.microsoft.com/office/drawing/2014/main" id="{4FC31E27-0824-42A8-80EF-2C8610C4DB41}"/>
+                <a16:creationId xmlns:a16="http://schemas.microsoft.com/office/drawing/2014/main" id="{07877F2A-0E30-4049-BFC9-7F54123367E7}"/>
               </a:ext>
             </a:extLst>
           </p:cNvPr>
@@ -7757,7 +7757,7 @@
           <p:cNvPr id="3" name="">
             <a:extLst xmlns:a="http://schemas.openxmlformats.org/drawingml/2006/main">
               <a:ext uri="{FF2B5EF4-FFF2-40B4-BE49-F238E27FC236}">
-                <a16:creationId xmlns:a16="http://schemas.microsoft.com/office/drawing/2014/main" id="{398618EB-8A37-4ED1-8D4B-C8DB65101234}"/>
+                <a16:creationId xmlns:a16="http://schemas.microsoft.com/office/drawing/2014/main" id="{5BE83F49-4DBD-435F-A610-8982369FB5F2}"/>
               </a:ext>
             </a:extLst>
           </p:cNvPr>
@@ -7807,7 +7807,7 @@
           <p:cNvPr id="4" name="">
             <a:extLst xmlns:a="http://schemas.openxmlformats.org/drawingml/2006/main">
               <a:ext uri="{FF2B5EF4-FFF2-40B4-BE49-F238E27FC236}">
-                <a16:creationId xmlns:a16="http://schemas.microsoft.com/office/drawing/2014/main" id="{E42AC550-7769-4D13-ABF0-74F12A4DD481}"/>
+                <a16:creationId xmlns:a16="http://schemas.microsoft.com/office/drawing/2014/main" id="{8CF52770-B853-46F9-BDAC-A22AD3520E30}"/>
               </a:ext>
             </a:extLst>
           </p:cNvPr>
@@ -7840,7 +7840,7 @@
           <p:cNvPr id="5" name="">
             <a:extLst xmlns:a="http://schemas.openxmlformats.org/drawingml/2006/main">
               <a:ext uri="{FF2B5EF4-FFF2-40B4-BE49-F238E27FC236}">
-                <a16:creationId xmlns:a16="http://schemas.microsoft.com/office/drawing/2014/main" id="{A99E3A45-77DD-4B0D-80B7-70B7D872535F}"/>
+                <a16:creationId xmlns:a16="http://schemas.microsoft.com/office/drawing/2014/main" id="{7FDCA4F9-175A-44AF-8305-EB0BD0AF1D3D}"/>
               </a:ext>
             </a:extLst>
           </p:cNvPr>
@@ -7890,7 +7890,7 @@
           <p:cNvPr id="6" name="">
             <a:extLst xmlns:a="http://schemas.openxmlformats.org/drawingml/2006/main">
               <a:ext uri="{FF2B5EF4-FFF2-40B4-BE49-F238E27FC236}">
-                <a16:creationId xmlns:a16="http://schemas.microsoft.com/office/drawing/2014/main" id="{B47D0640-6CDC-4BE4-91E4-DCBF9978C42C}"/>
+                <a16:creationId xmlns:a16="http://schemas.microsoft.com/office/drawing/2014/main" id="{B439D8E1-FAB3-4B35-9CD7-B49023F2DBC1}"/>
               </a:ext>
             </a:extLst>
           </p:cNvPr>
@@ -7957,7 +7957,7 @@
           <p:cNvPr id="7" name="">
             <a:extLst xmlns:a="http://schemas.openxmlformats.org/drawingml/2006/main">
               <a:ext uri="{FF2B5EF4-FFF2-40B4-BE49-F238E27FC236}">
-                <a16:creationId xmlns:a16="http://schemas.microsoft.com/office/drawing/2014/main" id="{F7C8963D-56B2-466F-94AE-FFC3D8DD42E4}"/>
+                <a16:creationId xmlns:a16="http://schemas.microsoft.com/office/drawing/2014/main" id="{C81EBF18-7A0A-4B31-80AA-B9F19560FA70}"/>
               </a:ext>
             </a:extLst>
           </p:cNvPr>
@@ -8024,7 +8024,7 @@
           <p:cNvPr id="8" name="">
             <a:extLst xmlns:a="http://schemas.openxmlformats.org/drawingml/2006/main">
               <a:ext uri="{FF2B5EF4-FFF2-40B4-BE49-F238E27FC236}">
-                <a16:creationId xmlns:a16="http://schemas.microsoft.com/office/drawing/2014/main" id="{67C2E478-FC8D-4656-BB34-5CDACB60ED0A}"/>
+                <a16:creationId xmlns:a16="http://schemas.microsoft.com/office/drawing/2014/main" id="{C43CB1A8-87A4-480D-85FF-FD26788917EC}"/>
               </a:ext>
             </a:extLst>
           </p:cNvPr>
@@ -8057,7 +8057,7 @@
           <p:cNvPr id="9" name="">
             <a:extLst xmlns:a="http://schemas.openxmlformats.org/drawingml/2006/main">
               <a:ext uri="{FF2B5EF4-FFF2-40B4-BE49-F238E27FC236}">
-                <a16:creationId xmlns:a16="http://schemas.microsoft.com/office/drawing/2014/main" id="{0438B7D7-1576-44A8-9D59-5DF845E3EFD8}"/>
+                <a16:creationId xmlns:a16="http://schemas.microsoft.com/office/drawing/2014/main" id="{81FDB274-25E2-4560-A97B-6317853B0BAC}"/>
               </a:ext>
             </a:extLst>
           </p:cNvPr>
@@ -8107,7 +8107,7 @@
           <p:cNvPr id="10" name="">
             <a:extLst xmlns:a="http://schemas.openxmlformats.org/drawingml/2006/main">
               <a:ext uri="{FF2B5EF4-FFF2-40B4-BE49-F238E27FC236}">
-                <a16:creationId xmlns:a16="http://schemas.microsoft.com/office/drawing/2014/main" id="{9475C72E-0DA9-408A-A3D5-601255533DEF}"/>
+                <a16:creationId xmlns:a16="http://schemas.microsoft.com/office/drawing/2014/main" id="{AFD88A43-0F48-41F2-9202-D5236A5031A7}"/>
               </a:ext>
             </a:extLst>
           </p:cNvPr>
@@ -8174,7 +8174,7 @@
           <p:cNvPr id="11" name="">
             <a:extLst xmlns:a="http://schemas.openxmlformats.org/drawingml/2006/main">
               <a:ext uri="{FF2B5EF4-FFF2-40B4-BE49-F238E27FC236}">
-                <a16:creationId xmlns:a16="http://schemas.microsoft.com/office/drawing/2014/main" id="{823487C4-4725-4B1D-815D-F0F2C1786808}"/>
+                <a16:creationId xmlns:a16="http://schemas.microsoft.com/office/drawing/2014/main" id="{74DEBF55-0309-4473-8448-617BFC90E548}"/>
               </a:ext>
             </a:extLst>
           </p:cNvPr>
@@ -8214,7 +8214,7 @@
                   <a:srgbClr val="555555"/>
                 </a:solidFill>
               </a:rPr>
-              <a:t>成本：每样本多重复，约数倍-十倍 MD</a:t>
+              <a:t>本地配置：5 ns × 3 reps/variant</a:t>
             </a:r>
           </a:p>
           <a:p xmlns:a="http://schemas.openxmlformats.org/drawingml/2006/main">
@@ -8231,7 +8231,7 @@
                   <a:srgbClr val="555555"/>
                 </a:solidFill>
               </a:rPr>
-              <a:t>收益：可能验证 AIM release / A2 unfolding</a:t>
+              <a:t>成本：小时级/variant，慢速校准更贵</a:t>
             </a:r>
           </a:p>
         </p:txBody>
@@ -8241,7 +8241,7 @@
           <p:cNvPr id="12" name="">
             <a:extLst xmlns:a="http://schemas.openxmlformats.org/drawingml/2006/main">
               <a:ext uri="{FF2B5EF4-FFF2-40B4-BE49-F238E27FC236}">
-                <a16:creationId xmlns:a16="http://schemas.microsoft.com/office/drawing/2014/main" id="{404DE5B7-9391-462A-B6F4-E8976F63A1A4}"/>
+                <a16:creationId xmlns:a16="http://schemas.microsoft.com/office/drawing/2014/main" id="{39B40E6F-E685-4EBA-AC08-2DF841952595}"/>
               </a:ext>
             </a:extLst>
           </p:cNvPr>
@@ -8274,7 +8274,7 @@
           <p:cNvPr id="13" name="">
             <a:extLst xmlns:a="http://schemas.openxmlformats.org/drawingml/2006/main">
               <a:ext uri="{FF2B5EF4-FFF2-40B4-BE49-F238E27FC236}">
-                <a16:creationId xmlns:a16="http://schemas.microsoft.com/office/drawing/2014/main" id="{F7A4BDD5-A32C-491B-A720-56C42C4C7420}"/>
+                <a16:creationId xmlns:a16="http://schemas.microsoft.com/office/drawing/2014/main" id="{F426D9E2-6869-470C-A9C3-78C4EF6CFC88}"/>
               </a:ext>
             </a:extLst>
           </p:cNvPr>
@@ -8314,7 +8314,7 @@
                   <a:srgbClr val="2563EB"/>
                 </a:solidFill>
               </a:rPr>
-              <a:t>Umbrella / PMF</a:t>
+              <a:t>PMF</a:t>
             </a:r>
           </a:p>
         </p:txBody>
@@ -8324,7 +8324,7 @@
           <p:cNvPr id="14" name="">
             <a:extLst xmlns:a="http://schemas.openxmlformats.org/drawingml/2006/main">
               <a:ext uri="{FF2B5EF4-FFF2-40B4-BE49-F238E27FC236}">
-                <a16:creationId xmlns:a16="http://schemas.microsoft.com/office/drawing/2014/main" id="{892E17A3-C65F-4DEF-ACB1-B712ADB947C6}"/>
+                <a16:creationId xmlns:a16="http://schemas.microsoft.com/office/drawing/2014/main" id="{87E099C5-7D3A-4FE5-A729-91D65BC0E167}"/>
               </a:ext>
             </a:extLst>
           </p:cNvPr>
@@ -8391,7 +8391,7 @@
           <p:cNvPr id="15" name="">
             <a:extLst xmlns:a="http://schemas.openxmlformats.org/drawingml/2006/main">
               <a:ext uri="{FF2B5EF4-FFF2-40B4-BE49-F238E27FC236}">
-                <a16:creationId xmlns:a16="http://schemas.microsoft.com/office/drawing/2014/main" id="{0F6B4E90-4FC7-48E7-BF30-CE1995168F59}"/>
+                <a16:creationId xmlns:a16="http://schemas.microsoft.com/office/drawing/2014/main" id="{7E8F5FF1-2C05-417C-B185-8CDE556DFBCE}"/>
               </a:ext>
             </a:extLst>
           </p:cNvPr>
@@ -8458,7 +8458,7 @@
           <p:cNvPr id="16" name="">
             <a:extLst xmlns:a="http://schemas.openxmlformats.org/drawingml/2006/main">
               <a:ext uri="{FF2B5EF4-FFF2-40B4-BE49-F238E27FC236}">
-                <a16:creationId xmlns:a16="http://schemas.microsoft.com/office/drawing/2014/main" id="{CD5E13F3-1231-41E9-B891-C335E56FB613}"/>
+                <a16:creationId xmlns:a16="http://schemas.microsoft.com/office/drawing/2014/main" id="{E885C07F-111B-4A3D-AA60-CCF51316F8DA}"/>
               </a:ext>
             </a:extLst>
           </p:cNvPr>
@@ -8498,7 +8498,7 @@
                   <a:srgbClr val="111111"/>
                 </a:solidFill>
               </a:rPr>
-              <a:t>汇报口径：SMD/PMF 可作为高价值 case 的机制确认，但短期提升 recall 的性价比仍是 equilibrium MD + score fusion。</a:t>
+              <a:t>当前策略：SMD/PMF 用于高价值 case 的机制确认；短期批量提升 recall 仍优先 equilibrium MD + score fusion。</a:t>
             </a:r>
           </a:p>
         </p:txBody>
@@ -8508,7 +8508,7 @@
           <p:cNvPr id="17" name="">
             <a:extLst xmlns:a="http://schemas.openxmlformats.org/drawingml/2006/main">
               <a:ext uri="{FF2B5EF4-FFF2-40B4-BE49-F238E27FC236}">
-                <a16:creationId xmlns:a16="http://schemas.microsoft.com/office/drawing/2014/main" id="{BED7EB12-3952-4E71-8D9C-A33B2BE406E4}"/>
+                <a16:creationId xmlns:a16="http://schemas.microsoft.com/office/drawing/2014/main" id="{16AAD67E-E456-4EA5-A287-C81A40E15287}"/>
               </a:ext>
             </a:extLst>
           </p:cNvPr>
@@ -8548,7 +8548,7 @@
                   <a:srgbClr val="777777"/>
                 </a:solidFill>
               </a:rPr>
-              <a:t>Sources: GROMACS pull-code and umbrella sampling docs; force-MD is non-equilibrium and requires replicas/slow pulling for interpretation.</a:t>
+              <a:t>Local SMD record: 5 ns production replicate at 1 nm/ns, 3 reps/variant; GROMACS pull-code docs: non-equilibrium pulling requires path/repetition care.</a:t>
             </a:r>
           </a:p>
         </p:txBody>
@@ -8556,7 +8556,7 @@
     </p:spTree>
     <p:extLst>
       <p:ext uri="{BB962C8B-B14F-4D97-AF65-F5344CB8AC3E}">
-        <p14:creationId xmlns:p14="http://schemas.microsoft.com/office/powerpoint/2010/main" val="1861061088"/>
+        <p14:creationId xmlns:p14="http://schemas.microsoft.com/office/powerpoint/2010/main" val="552549965"/>
       </p:ext>
     </p:extLst>
   </p:cSld>
@@ -8587,7 +8587,7 @@
           <p:cNvPr id="1" name="">
             <a:extLst xmlns:a="http://schemas.openxmlformats.org/drawingml/2006/main">
               <a:ext uri="{FF2B5EF4-FFF2-40B4-BE49-F238E27FC236}">
-                <a16:creationId xmlns:a16="http://schemas.microsoft.com/office/drawing/2014/main" id="{2F704E25-3D2E-4B15-8EA9-1E72FAE85AC0}"/>
+                <a16:creationId xmlns:a16="http://schemas.microsoft.com/office/drawing/2014/main" id="{7A6323CF-5098-4AE2-85E4-55AE3662AEE5}"/>
               </a:ext>
             </a:extLst>
           </p:cNvPr>
@@ -8637,7 +8637,7 @@
           <p:cNvPr id="2" name="">
             <a:extLst xmlns:a="http://schemas.openxmlformats.org/drawingml/2006/main">
               <a:ext uri="{FF2B5EF4-FFF2-40B4-BE49-F238E27FC236}">
-                <a16:creationId xmlns:a16="http://schemas.microsoft.com/office/drawing/2014/main" id="{41E24A86-2D3B-4609-BFB9-108BEAD43B65}"/>
+                <a16:creationId xmlns:a16="http://schemas.microsoft.com/office/drawing/2014/main" id="{F05933EB-2C25-4DF4-8FDE-9D63CAEF9572}"/>
               </a:ext>
             </a:extLst>
           </p:cNvPr>
@@ -8687,7 +8687,7 @@
           <p:cNvPr id="3" name="">
             <a:extLst xmlns:a="http://schemas.openxmlformats.org/drawingml/2006/main">
               <a:ext uri="{FF2B5EF4-FFF2-40B4-BE49-F238E27FC236}">
-                <a16:creationId xmlns:a16="http://schemas.microsoft.com/office/drawing/2014/main" id="{05BDF564-FC04-4F75-892A-21D8E40DFF9E}"/>
+                <a16:creationId xmlns:a16="http://schemas.microsoft.com/office/drawing/2014/main" id="{46500D8D-E2D9-42BD-BD28-15F13E803081}"/>
               </a:ext>
             </a:extLst>
           </p:cNvPr>
@@ -8737,7 +8737,7 @@
           <p:cNvPr id="4" name="">
             <a:extLst xmlns:a="http://schemas.openxmlformats.org/drawingml/2006/main">
               <a:ext uri="{FF2B5EF4-FFF2-40B4-BE49-F238E27FC236}">
-                <a16:creationId xmlns:a16="http://schemas.microsoft.com/office/drawing/2014/main" id="{15749E4B-7EFB-4DB7-BF86-2C4E39D8B8A1}"/>
+                <a16:creationId xmlns:a16="http://schemas.microsoft.com/office/drawing/2014/main" id="{1313F34A-702B-4021-9A3C-BA96664447F4}"/>
               </a:ext>
             </a:extLst>
           </p:cNvPr>
@@ -8770,7 +8770,7 @@
           <p:cNvPr id="5" name="">
             <a:extLst xmlns:a="http://schemas.openxmlformats.org/drawingml/2006/main">
               <a:ext uri="{FF2B5EF4-FFF2-40B4-BE49-F238E27FC236}">
-                <a16:creationId xmlns:a16="http://schemas.microsoft.com/office/drawing/2014/main" id="{22976BBE-A180-461A-9C7A-BE0C0B0A9B3F}"/>
+                <a16:creationId xmlns:a16="http://schemas.microsoft.com/office/drawing/2014/main" id="{5197264E-669B-47EB-B0B5-6CB9272F9312}"/>
               </a:ext>
             </a:extLst>
           </p:cNvPr>
@@ -8820,7 +8820,7 @@
           <p:cNvPr id="6" name="">
             <a:extLst xmlns:a="http://schemas.openxmlformats.org/drawingml/2006/main">
               <a:ext uri="{FF2B5EF4-FFF2-40B4-BE49-F238E27FC236}">
-                <a16:creationId xmlns:a16="http://schemas.microsoft.com/office/drawing/2014/main" id="{3FD358A7-6ED9-458C-A2D9-9D051B7433DB}"/>
+                <a16:creationId xmlns:a16="http://schemas.microsoft.com/office/drawing/2014/main" id="{51A6BAE9-8C07-4EF6-A698-DCE8D3313EAB}"/>
               </a:ext>
             </a:extLst>
           </p:cNvPr>
@@ -8870,7 +8870,7 @@
           <p:cNvPr id="7" name="">
             <a:extLst xmlns:a="http://schemas.openxmlformats.org/drawingml/2006/main">
               <a:ext uri="{FF2B5EF4-FFF2-40B4-BE49-F238E27FC236}">
-                <a16:creationId xmlns:a16="http://schemas.microsoft.com/office/drawing/2014/main" id="{5F974B8D-477A-4E7B-BA45-44918D3062A2}"/>
+                <a16:creationId xmlns:a16="http://schemas.microsoft.com/office/drawing/2014/main" id="{8134D813-00FF-4CF2-B0E3-5F66B2BAD094}"/>
               </a:ext>
             </a:extLst>
           </p:cNvPr>
@@ -8920,7 +8920,7 @@
           <p:cNvPr id="8" name="">
             <a:extLst xmlns:a="http://schemas.openxmlformats.org/drawingml/2006/main">
               <a:ext uri="{FF2B5EF4-FFF2-40B4-BE49-F238E27FC236}">
-                <a16:creationId xmlns:a16="http://schemas.microsoft.com/office/drawing/2014/main" id="{C3ACE6E4-16FB-4130-9359-7D549345BBFC}"/>
+                <a16:creationId xmlns:a16="http://schemas.microsoft.com/office/drawing/2014/main" id="{1507C734-15EF-4DA6-8B4B-25447BD327D2}"/>
               </a:ext>
             </a:extLst>
           </p:cNvPr>
@@ -8970,7 +8970,7 @@
           <p:cNvPr id="9" name="">
             <a:extLst xmlns:a="http://schemas.openxmlformats.org/drawingml/2006/main">
               <a:ext uri="{FF2B5EF4-FFF2-40B4-BE49-F238E27FC236}">
-                <a16:creationId xmlns:a16="http://schemas.microsoft.com/office/drawing/2014/main" id="{5D8302E0-E5E4-4C5B-B281-61D198A43AD9}"/>
+                <a16:creationId xmlns:a16="http://schemas.microsoft.com/office/drawing/2014/main" id="{613BBB30-4081-47C9-90C3-E4B1555F5E0F}"/>
               </a:ext>
             </a:extLst>
           </p:cNvPr>
@@ -9003,7 +9003,7 @@
           <p:cNvPr id="10" name="">
             <a:extLst xmlns:a="http://schemas.openxmlformats.org/drawingml/2006/main">
               <a:ext uri="{FF2B5EF4-FFF2-40B4-BE49-F238E27FC236}">
-                <a16:creationId xmlns:a16="http://schemas.microsoft.com/office/drawing/2014/main" id="{F4023C5C-7D4B-4E1F-8135-775E44B4036F}"/>
+                <a16:creationId xmlns:a16="http://schemas.microsoft.com/office/drawing/2014/main" id="{AF0D7AF1-9627-4022-9F73-F62260FAC0B2}"/>
               </a:ext>
             </a:extLst>
           </p:cNvPr>
@@ -9053,7 +9053,7 @@
           <p:cNvPr id="11" name="">
             <a:extLst xmlns:a="http://schemas.openxmlformats.org/drawingml/2006/main">
               <a:ext uri="{FF2B5EF4-FFF2-40B4-BE49-F238E27FC236}">
-                <a16:creationId xmlns:a16="http://schemas.microsoft.com/office/drawing/2014/main" id="{200ADE9A-92F4-4599-9C60-E5F15E69B455}"/>
+                <a16:creationId xmlns:a16="http://schemas.microsoft.com/office/drawing/2014/main" id="{02EA537B-FA4B-4B8C-B2CA-DCC726AC5AE4}"/>
               </a:ext>
             </a:extLst>
           </p:cNvPr>
@@ -9103,7 +9103,7 @@
           <p:cNvPr id="12" name="">
             <a:extLst xmlns:a="http://schemas.openxmlformats.org/drawingml/2006/main">
               <a:ext uri="{FF2B5EF4-FFF2-40B4-BE49-F238E27FC236}">
-                <a16:creationId xmlns:a16="http://schemas.microsoft.com/office/drawing/2014/main" id="{F5F17BE0-3A09-44FD-8AC7-173CBEB32E7A}"/>
+                <a16:creationId xmlns:a16="http://schemas.microsoft.com/office/drawing/2014/main" id="{3A29A2F9-1AA4-4432-9686-FF9519C7261E}"/>
               </a:ext>
             </a:extLst>
           </p:cNvPr>
@@ -9153,7 +9153,7 @@
           <p:cNvPr id="13" name="">
             <a:extLst xmlns:a="http://schemas.openxmlformats.org/drawingml/2006/main">
               <a:ext uri="{FF2B5EF4-FFF2-40B4-BE49-F238E27FC236}">
-                <a16:creationId xmlns:a16="http://schemas.microsoft.com/office/drawing/2014/main" id="{2890274F-B585-4950-931C-941F8259AD62}"/>
+                <a16:creationId xmlns:a16="http://schemas.microsoft.com/office/drawing/2014/main" id="{95DD260B-EABE-4A1A-BE91-60709CE6CA52}"/>
               </a:ext>
             </a:extLst>
           </p:cNvPr>
@@ -9203,7 +9203,7 @@
           <p:cNvPr id="14" name="">
             <a:extLst xmlns:a="http://schemas.openxmlformats.org/drawingml/2006/main">
               <a:ext uri="{FF2B5EF4-FFF2-40B4-BE49-F238E27FC236}">
-                <a16:creationId xmlns:a16="http://schemas.microsoft.com/office/drawing/2014/main" id="{D4510BE2-C820-4529-A03F-9E3F1A6719AE}"/>
+                <a16:creationId xmlns:a16="http://schemas.microsoft.com/office/drawing/2014/main" id="{D53FE4DC-9BF5-4832-BF13-F8E63232257E}"/>
               </a:ext>
             </a:extLst>
           </p:cNvPr>
@@ -9236,7 +9236,7 @@
           <p:cNvPr id="15" name="">
             <a:extLst xmlns:a="http://schemas.openxmlformats.org/drawingml/2006/main">
               <a:ext uri="{FF2B5EF4-FFF2-40B4-BE49-F238E27FC236}">
-                <a16:creationId xmlns:a16="http://schemas.microsoft.com/office/drawing/2014/main" id="{89763584-7A13-45FC-9475-EBD5156F123D}"/>
+                <a16:creationId xmlns:a16="http://schemas.microsoft.com/office/drawing/2014/main" id="{67F9AD0C-2B5C-4100-80FA-E4749C39F7FB}"/>
               </a:ext>
             </a:extLst>
           </p:cNvPr>
@@ -9286,7 +9286,7 @@
           <p:cNvPr id="16" name="">
             <a:extLst xmlns:a="http://schemas.openxmlformats.org/drawingml/2006/main">
               <a:ext uri="{FF2B5EF4-FFF2-40B4-BE49-F238E27FC236}">
-                <a16:creationId xmlns:a16="http://schemas.microsoft.com/office/drawing/2014/main" id="{B80E955A-2AFD-4706-8AEA-FC16A3E2CE2D}"/>
+                <a16:creationId xmlns:a16="http://schemas.microsoft.com/office/drawing/2014/main" id="{0C1B0FA1-21FD-41D0-AD55-915E51F5451A}"/>
               </a:ext>
             </a:extLst>
           </p:cNvPr>
@@ -9336,7 +9336,7 @@
           <p:cNvPr id="17" name="">
             <a:extLst xmlns:a="http://schemas.openxmlformats.org/drawingml/2006/main">
               <a:ext uri="{FF2B5EF4-FFF2-40B4-BE49-F238E27FC236}">
-                <a16:creationId xmlns:a16="http://schemas.microsoft.com/office/drawing/2014/main" id="{8A53B848-BAD7-4D1F-B8ED-3C38BEDDEA45}"/>
+                <a16:creationId xmlns:a16="http://schemas.microsoft.com/office/drawing/2014/main" id="{32222F89-8691-44F1-AD52-D0257AAD95FF}"/>
               </a:ext>
             </a:extLst>
           </p:cNvPr>
@@ -9386,7 +9386,7 @@
           <p:cNvPr id="18" name="">
             <a:extLst xmlns:a="http://schemas.openxmlformats.org/drawingml/2006/main">
               <a:ext uri="{FF2B5EF4-FFF2-40B4-BE49-F238E27FC236}">
-                <a16:creationId xmlns:a16="http://schemas.microsoft.com/office/drawing/2014/main" id="{1C4BF35A-9177-47C2-B322-8036605D9E7D}"/>
+                <a16:creationId xmlns:a16="http://schemas.microsoft.com/office/drawing/2014/main" id="{5F61CCB1-3B9A-44E0-AC22-45D8AB1B42DA}"/>
               </a:ext>
             </a:extLst>
           </p:cNvPr>
@@ -9436,7 +9436,7 @@
           <p:cNvPr id="19" name="">
             <a:extLst xmlns:a="http://schemas.openxmlformats.org/drawingml/2006/main">
               <a:ext uri="{FF2B5EF4-FFF2-40B4-BE49-F238E27FC236}">
-                <a16:creationId xmlns:a16="http://schemas.microsoft.com/office/drawing/2014/main" id="{6E5D3A7F-26C6-4351-A429-FF2E78E5E548}"/>
+                <a16:creationId xmlns:a16="http://schemas.microsoft.com/office/drawing/2014/main" id="{02682BD6-101C-4FAF-9B78-3E6A63D5A6ED}"/>
               </a:ext>
             </a:extLst>
           </p:cNvPr>
@@ -9469,7 +9469,7 @@
           <p:cNvPr id="20" name="">
             <a:extLst xmlns:a="http://schemas.openxmlformats.org/drawingml/2006/main">
               <a:ext uri="{FF2B5EF4-FFF2-40B4-BE49-F238E27FC236}">
-                <a16:creationId xmlns:a16="http://schemas.microsoft.com/office/drawing/2014/main" id="{3179ACA4-357E-4A79-96F0-84D26C0A9530}"/>
+                <a16:creationId xmlns:a16="http://schemas.microsoft.com/office/drawing/2014/main" id="{05BCEB99-5C99-42BC-95E4-06F10597FFED}"/>
               </a:ext>
             </a:extLst>
           </p:cNvPr>
@@ -9519,7 +9519,7 @@
           <p:cNvPr id="21" name="">
             <a:extLst xmlns:a="http://schemas.openxmlformats.org/drawingml/2006/main">
               <a:ext uri="{FF2B5EF4-FFF2-40B4-BE49-F238E27FC236}">
-                <a16:creationId xmlns:a16="http://schemas.microsoft.com/office/drawing/2014/main" id="{013F7B80-ACF3-4A5C-AF1D-8A6E27519BC1}"/>
+                <a16:creationId xmlns:a16="http://schemas.microsoft.com/office/drawing/2014/main" id="{909C170C-EF8C-467F-A7F3-37DA8958B0AE}"/>
               </a:ext>
             </a:extLst>
           </p:cNvPr>
@@ -9569,7 +9569,7 @@
           <p:cNvPr id="22" name="">
             <a:extLst xmlns:a="http://schemas.openxmlformats.org/drawingml/2006/main">
               <a:ext uri="{FF2B5EF4-FFF2-40B4-BE49-F238E27FC236}">
-                <a16:creationId xmlns:a16="http://schemas.microsoft.com/office/drawing/2014/main" id="{7CEF9BC3-95D8-42D9-9E1A-DEFB84EECAF4}"/>
+                <a16:creationId xmlns:a16="http://schemas.microsoft.com/office/drawing/2014/main" id="{C8E1D4FA-36ED-4317-830D-2C725D8F4928}"/>
               </a:ext>
             </a:extLst>
           </p:cNvPr>
@@ -9619,7 +9619,7 @@
           <p:cNvPr id="23" name="">
             <a:extLst xmlns:a="http://schemas.openxmlformats.org/drawingml/2006/main">
               <a:ext uri="{FF2B5EF4-FFF2-40B4-BE49-F238E27FC236}">
-                <a16:creationId xmlns:a16="http://schemas.microsoft.com/office/drawing/2014/main" id="{6FDD1F1C-9448-4288-BD40-FAA3A2A112EE}"/>
+                <a16:creationId xmlns:a16="http://schemas.microsoft.com/office/drawing/2014/main" id="{BC30C1B6-C608-4762-94DD-E9E7075F1717}"/>
               </a:ext>
             </a:extLst>
           </p:cNvPr>
@@ -9669,7 +9669,7 @@
           <p:cNvPr id="24" name="">
             <a:extLst xmlns:a="http://schemas.openxmlformats.org/drawingml/2006/main">
               <a:ext uri="{FF2B5EF4-FFF2-40B4-BE49-F238E27FC236}">
-                <a16:creationId xmlns:a16="http://schemas.microsoft.com/office/drawing/2014/main" id="{FB8C678B-5E85-42E5-9C15-63A09EA1D455}"/>
+                <a16:creationId xmlns:a16="http://schemas.microsoft.com/office/drawing/2014/main" id="{36835BD3-4FEF-4E0A-B01D-24B24FAECD73}"/>
               </a:ext>
             </a:extLst>
           </p:cNvPr>
@@ -9702,7 +9702,7 @@
           <p:cNvPr id="25" name="">
             <a:extLst xmlns:a="http://schemas.openxmlformats.org/drawingml/2006/main">
               <a:ext uri="{FF2B5EF4-FFF2-40B4-BE49-F238E27FC236}">
-                <a16:creationId xmlns:a16="http://schemas.microsoft.com/office/drawing/2014/main" id="{7FD18C16-BD47-4185-88D1-3219DD84F7B0}"/>
+                <a16:creationId xmlns:a16="http://schemas.microsoft.com/office/drawing/2014/main" id="{AA136563-FDC3-4CEF-ABA9-2280A8C68B41}"/>
               </a:ext>
             </a:extLst>
           </p:cNvPr>
@@ -9752,7 +9752,7 @@
           <p:cNvPr id="26" name="">
             <a:extLst xmlns:a="http://schemas.openxmlformats.org/drawingml/2006/main">
               <a:ext uri="{FF2B5EF4-FFF2-40B4-BE49-F238E27FC236}">
-                <a16:creationId xmlns:a16="http://schemas.microsoft.com/office/drawing/2014/main" id="{98FB4ABB-6680-4DB1-A643-CE8E27EEB896}"/>
+                <a16:creationId xmlns:a16="http://schemas.microsoft.com/office/drawing/2014/main" id="{E4B99D0C-51CC-4152-B3D5-1B3309A31801}"/>
               </a:ext>
             </a:extLst>
           </p:cNvPr>
@@ -9802,7 +9802,7 @@
           <p:cNvPr id="27" name="">
             <a:extLst xmlns:a="http://schemas.openxmlformats.org/drawingml/2006/main">
               <a:ext uri="{FF2B5EF4-FFF2-40B4-BE49-F238E27FC236}">
-                <a16:creationId xmlns:a16="http://schemas.microsoft.com/office/drawing/2014/main" id="{3FE06184-2649-4D71-8E36-DF396A6CE942}"/>
+                <a16:creationId xmlns:a16="http://schemas.microsoft.com/office/drawing/2014/main" id="{06A4FE9B-5AC0-4CFA-8545-2DCE57C9A2D3}"/>
               </a:ext>
             </a:extLst>
           </p:cNvPr>
@@ -9852,7 +9852,7 @@
           <p:cNvPr id="28" name="">
             <a:extLst xmlns:a="http://schemas.openxmlformats.org/drawingml/2006/main">
               <a:ext uri="{FF2B5EF4-FFF2-40B4-BE49-F238E27FC236}">
-                <a16:creationId xmlns:a16="http://schemas.microsoft.com/office/drawing/2014/main" id="{283F1990-7301-49A4-8486-C8B0EFBDCD40}"/>
+                <a16:creationId xmlns:a16="http://schemas.microsoft.com/office/drawing/2014/main" id="{A251C67F-00F4-4E59-B18E-032C41BD0304}"/>
               </a:ext>
             </a:extLst>
           </p:cNvPr>
@@ -9902,7 +9902,7 @@
           <p:cNvPr id="29" name="">
             <a:extLst xmlns:a="http://schemas.openxmlformats.org/drawingml/2006/main">
               <a:ext uri="{FF2B5EF4-FFF2-40B4-BE49-F238E27FC236}">
-                <a16:creationId xmlns:a16="http://schemas.microsoft.com/office/drawing/2014/main" id="{7A8B34CE-C619-416F-92A3-D1F1F6F905D8}"/>
+                <a16:creationId xmlns:a16="http://schemas.microsoft.com/office/drawing/2014/main" id="{906401F8-6C4E-425F-BF00-60CE038B3E4B}"/>
               </a:ext>
             </a:extLst>
           </p:cNvPr>
@@ -9935,7 +9935,7 @@
           <p:cNvPr id="30" name="">
             <a:extLst xmlns:a="http://schemas.openxmlformats.org/drawingml/2006/main">
               <a:ext uri="{FF2B5EF4-FFF2-40B4-BE49-F238E27FC236}">
-                <a16:creationId xmlns:a16="http://schemas.microsoft.com/office/drawing/2014/main" id="{8415C233-8F89-4F9C-8A10-CA3D98849064}"/>
+                <a16:creationId xmlns:a16="http://schemas.microsoft.com/office/drawing/2014/main" id="{39B84E2B-C70D-4F6E-99E3-6B3B6AD5A8D8}"/>
               </a:ext>
             </a:extLst>
           </p:cNvPr>
@@ -9985,7 +9985,7 @@
           <p:cNvPr id="31" name="">
             <a:extLst xmlns:a="http://schemas.openxmlformats.org/drawingml/2006/main">
               <a:ext uri="{FF2B5EF4-FFF2-40B4-BE49-F238E27FC236}">
-                <a16:creationId xmlns:a16="http://schemas.microsoft.com/office/drawing/2014/main" id="{7B407AF3-52D4-4A09-9597-D88DE7A6C2A3}"/>
+                <a16:creationId xmlns:a16="http://schemas.microsoft.com/office/drawing/2014/main" id="{F9E86057-02D5-4386-BBFA-167F2A299D2C}"/>
               </a:ext>
             </a:extLst>
           </p:cNvPr>
@@ -10035,7 +10035,7 @@
           <p:cNvPr id="32" name="">
             <a:extLst xmlns:a="http://schemas.openxmlformats.org/drawingml/2006/main">
               <a:ext uri="{FF2B5EF4-FFF2-40B4-BE49-F238E27FC236}">
-                <a16:creationId xmlns:a16="http://schemas.microsoft.com/office/drawing/2014/main" id="{62EDD7FD-4720-42DE-A774-9F6669B25301}"/>
+                <a16:creationId xmlns:a16="http://schemas.microsoft.com/office/drawing/2014/main" id="{DAA89ECB-BBA3-4B4C-98E1-8233065F0429}"/>
               </a:ext>
             </a:extLst>
           </p:cNvPr>
@@ -10085,7 +10085,7 @@
           <p:cNvPr id="33" name="">
             <a:extLst xmlns:a="http://schemas.openxmlformats.org/drawingml/2006/main">
               <a:ext uri="{FF2B5EF4-FFF2-40B4-BE49-F238E27FC236}">
-                <a16:creationId xmlns:a16="http://schemas.microsoft.com/office/drawing/2014/main" id="{5A6D36F7-7876-4581-92E6-8B19005E0A84}"/>
+                <a16:creationId xmlns:a16="http://schemas.microsoft.com/office/drawing/2014/main" id="{7CB73419-950A-48B2-90BA-6C275C65234F}"/>
               </a:ext>
             </a:extLst>
           </p:cNvPr>
@@ -10135,7 +10135,7 @@
           <p:cNvPr id="34" name="">
             <a:extLst xmlns:a="http://schemas.openxmlformats.org/drawingml/2006/main">
               <a:ext uri="{FF2B5EF4-FFF2-40B4-BE49-F238E27FC236}">
-                <a16:creationId xmlns:a16="http://schemas.microsoft.com/office/drawing/2014/main" id="{FDE6CCA7-080C-46AB-8410-C3C1D5F0AA17}"/>
+                <a16:creationId xmlns:a16="http://schemas.microsoft.com/office/drawing/2014/main" id="{9AD093BD-004E-4195-BD92-3E9C2AA0D96B}"/>
               </a:ext>
             </a:extLst>
           </p:cNvPr>
@@ -10168,7 +10168,7 @@
           <p:cNvPr id="35" name="">
             <a:extLst xmlns:a="http://schemas.openxmlformats.org/drawingml/2006/main">
               <a:ext uri="{FF2B5EF4-FFF2-40B4-BE49-F238E27FC236}">
-                <a16:creationId xmlns:a16="http://schemas.microsoft.com/office/drawing/2014/main" id="{E43739AF-BD86-4D0E-A0D5-B3C077EA85C5}"/>
+                <a16:creationId xmlns:a16="http://schemas.microsoft.com/office/drawing/2014/main" id="{819288E5-3D92-46FE-880E-24660CD6C52B}"/>
               </a:ext>
             </a:extLst>
           </p:cNvPr>
@@ -10218,7 +10218,7 @@
           <p:cNvPr id="36" name="">
             <a:extLst xmlns:a="http://schemas.openxmlformats.org/drawingml/2006/main">
               <a:ext uri="{FF2B5EF4-FFF2-40B4-BE49-F238E27FC236}">
-                <a16:creationId xmlns:a16="http://schemas.microsoft.com/office/drawing/2014/main" id="{11E75EB6-564C-4855-982E-32C496A4A3FA}"/>
+                <a16:creationId xmlns:a16="http://schemas.microsoft.com/office/drawing/2014/main" id="{0B5BFFD5-BE28-4103-B365-28E0FC832E6E}"/>
               </a:ext>
             </a:extLst>
           </p:cNvPr>
@@ -10268,7 +10268,7 @@
           <p:cNvPr id="37" name="">
             <a:extLst xmlns:a="http://schemas.openxmlformats.org/drawingml/2006/main">
               <a:ext uri="{FF2B5EF4-FFF2-40B4-BE49-F238E27FC236}">
-                <a16:creationId xmlns:a16="http://schemas.microsoft.com/office/drawing/2014/main" id="{9648BF93-89D7-4F42-B987-CF2CBCDACF78}"/>
+                <a16:creationId xmlns:a16="http://schemas.microsoft.com/office/drawing/2014/main" id="{A98D750F-79FE-4B6D-8747-CCC73578C36E}"/>
               </a:ext>
             </a:extLst>
           </p:cNvPr>
@@ -10318,7 +10318,7 @@
           <p:cNvPr id="38" name="">
             <a:extLst xmlns:a="http://schemas.openxmlformats.org/drawingml/2006/main">
               <a:ext uri="{FF2B5EF4-FFF2-40B4-BE49-F238E27FC236}">
-                <a16:creationId xmlns:a16="http://schemas.microsoft.com/office/drawing/2014/main" id="{0027E7B3-5456-492A-AE13-D07B90362DAD}"/>
+                <a16:creationId xmlns:a16="http://schemas.microsoft.com/office/drawing/2014/main" id="{A4F44D73-524B-49BD-A9ED-CC59A4CE9E8B}"/>
               </a:ext>
             </a:extLst>
           </p:cNvPr>
@@ -10368,7 +10368,7 @@
           <p:cNvPr id="39" name="">
             <a:extLst xmlns:a="http://schemas.openxmlformats.org/drawingml/2006/main">
               <a:ext uri="{FF2B5EF4-FFF2-40B4-BE49-F238E27FC236}">
-                <a16:creationId xmlns:a16="http://schemas.microsoft.com/office/drawing/2014/main" id="{DCDACD77-7BBA-4060-A764-5BB8F52823F9}"/>
+                <a16:creationId xmlns:a16="http://schemas.microsoft.com/office/drawing/2014/main" id="{22D245F7-04D3-41F8-98B1-EB73775626FE}"/>
               </a:ext>
             </a:extLst>
           </p:cNvPr>
@@ -10418,7 +10418,7 @@
           <p:cNvPr id="40" name="">
             <a:extLst xmlns:a="http://schemas.openxmlformats.org/drawingml/2006/main">
               <a:ext uri="{FF2B5EF4-FFF2-40B4-BE49-F238E27FC236}">
-                <a16:creationId xmlns:a16="http://schemas.microsoft.com/office/drawing/2014/main" id="{D0C11FE8-FC90-4026-A9F5-0CD02FC569AD}"/>
+                <a16:creationId xmlns:a16="http://schemas.microsoft.com/office/drawing/2014/main" id="{70032414-2888-4F02-85A2-145E4E03FB3E}"/>
               </a:ext>
             </a:extLst>
           </p:cNvPr>
@@ -10458,7 +10458,7 @@
                   <a:srgbClr val="777777"/>
                 </a:solidFill>
               </a:rPr>
-              <a:t>Target bands are conservative planning estimates, not validated claims; report them as next-phase milestones.</a:t>
+              <a:t>Target bands are conservative planning estimates, not validated claims.</a:t>
             </a:r>
           </a:p>
         </p:txBody>
@@ -10466,7 +10466,7 @@
     </p:spTree>
     <p:extLst>
       <p:ext uri="{BB962C8B-B14F-4D97-AF65-F5344CB8AC3E}">
-        <p14:creationId xmlns:p14="http://schemas.microsoft.com/office/powerpoint/2010/main" val="2118186947"/>
+        <p14:creationId xmlns:p14="http://schemas.microsoft.com/office/powerpoint/2010/main" val="2026007912"/>
       </p:ext>
     </p:extLst>
   </p:cSld>
@@ -10497,7 +10497,7 @@
           <p:cNvPr id="1" name="">
             <a:extLst xmlns:a="http://schemas.openxmlformats.org/drawingml/2006/main">
               <a:ext uri="{FF2B5EF4-FFF2-40B4-BE49-F238E27FC236}">
-                <a16:creationId xmlns:a16="http://schemas.microsoft.com/office/drawing/2014/main" id="{58534703-73F1-4E2B-ADE7-17B3B3932E69}"/>
+                <a16:creationId xmlns:a16="http://schemas.microsoft.com/office/drawing/2014/main" id="{7BB9B00A-1B06-42F0-AB68-6D97539E3772}"/>
               </a:ext>
             </a:extLst>
           </p:cNvPr>
@@ -10537,7 +10537,7 @@
                   <a:srgbClr val="111111"/>
                 </a:solidFill>
               </a:rPr>
-              <a:t>研究定位：不是泛化 pathogenicity，而是 subtype mechanism</a:t>
+              <a:t>研究定位：subtype mechanism</a:t>
             </a:r>
           </a:p>
         </p:txBody>
@@ -10547,7 +10547,7 @@
           <p:cNvPr id="2" name="">
             <a:extLst xmlns:a="http://schemas.openxmlformats.org/drawingml/2006/main">
               <a:ext uri="{FF2B5EF4-FFF2-40B4-BE49-F238E27FC236}">
-                <a16:creationId xmlns:a16="http://schemas.microsoft.com/office/drawing/2014/main" id="{4575185E-1733-40E7-9BA5-4A1672614D7B}"/>
+                <a16:creationId xmlns:a16="http://schemas.microsoft.com/office/drawing/2014/main" id="{EE0D2C03-EB5A-460A-A1CA-C0FAB0316C46}"/>
               </a:ext>
             </a:extLst>
           </p:cNvPr>
@@ -10597,7 +10597,7 @@
           <p:cNvPr id="3" name="">
             <a:extLst xmlns:a="http://schemas.openxmlformats.org/drawingml/2006/main">
               <a:ext uri="{FF2B5EF4-FFF2-40B4-BE49-F238E27FC236}">
-                <a16:creationId xmlns:a16="http://schemas.microsoft.com/office/drawing/2014/main" id="{A56792EA-E4D2-4164-A71E-6D793AA06554}"/>
+                <a16:creationId xmlns:a16="http://schemas.microsoft.com/office/drawing/2014/main" id="{4E49285E-D20D-4F0D-941E-D7D41EE8D630}"/>
               </a:ext>
             </a:extLst>
           </p:cNvPr>
@@ -10647,18 +10647,18 @@
           <p:cNvPr id="4" name="">
             <a:extLst xmlns:a="http://schemas.openxmlformats.org/drawingml/2006/main">
               <a:ext uri="{FF2B5EF4-FFF2-40B4-BE49-F238E27FC236}">
-                <a16:creationId xmlns:a16="http://schemas.microsoft.com/office/drawing/2014/main" id="{2FA58B33-C1C6-4260-A94F-D509246B9D14}"/>
-              </a:ext>
-            </a:extLst>
-          </p:cNvPr>
-          <p:cNvSpPr>
-            <a:spLocks xmlns:a="http://schemas.openxmlformats.org/drawingml/2006/main" noGrp="1"/>
-          </p:cNvSpPr>
-          <p:nvPr/>
-        </p:nvSpPr>
-        <p:spPr>
-          <a:xfrm xmlns:a="http://schemas.openxmlformats.org/drawingml/2006/main">
-            <a:off x="609600" y="1524000"/>
+                <a16:creationId xmlns:a16="http://schemas.microsoft.com/office/drawing/2014/main" id="{2BDD5BF6-6E30-4919-8CFD-CEE413A2FEA4}"/>
+              </a:ext>
+            </a:extLst>
+          </p:cNvPr>
+          <p:cNvSpPr>
+            <a:spLocks xmlns:a="http://schemas.openxmlformats.org/drawingml/2006/main" noGrp="1"/>
+          </p:cNvSpPr>
+          <p:nvPr/>
+        </p:nvSpPr>
+        <p:spPr>
+          <a:xfrm xmlns:a="http://schemas.openxmlformats.org/drawingml/2006/main">
+            <a:off x="609600" y="1428750"/>
             <a:ext cx="10572750" cy="323850"/>
           </a:xfrm>
           <a:prstGeom xmlns:a="http://schemas.openxmlformats.org/drawingml/2006/main" prst="rect">
@@ -10680,18 +10680,18 @@
           <p:cNvPr id="5" name="">
             <a:extLst xmlns:a="http://schemas.openxmlformats.org/drawingml/2006/main">
               <a:ext uri="{FF2B5EF4-FFF2-40B4-BE49-F238E27FC236}">
-                <a16:creationId xmlns:a16="http://schemas.microsoft.com/office/drawing/2014/main" id="{64C2C056-A434-4C06-8407-1ADBA1BE28F9}"/>
-              </a:ext>
-            </a:extLst>
-          </p:cNvPr>
-          <p:cNvSpPr>
-            <a:spLocks xmlns:a="http://schemas.openxmlformats.org/drawingml/2006/main" noGrp="1"/>
-          </p:cNvSpPr>
-          <p:nvPr/>
-        </p:nvSpPr>
-        <p:spPr>
-          <a:xfrm xmlns:a="http://schemas.openxmlformats.org/drawingml/2006/main">
-            <a:off x="685800" y="1600200"/>
+                <a16:creationId xmlns:a16="http://schemas.microsoft.com/office/drawing/2014/main" id="{F1044AA5-1A06-47FA-B0E3-343E7EA2AD4E}"/>
+              </a:ext>
+            </a:extLst>
+          </p:cNvPr>
+          <p:cNvSpPr>
+            <a:spLocks xmlns:a="http://schemas.openxmlformats.org/drawingml/2006/main" noGrp="1"/>
+          </p:cNvSpPr>
+          <p:nvPr/>
+        </p:nvSpPr>
+        <p:spPr>
+          <a:xfrm xmlns:a="http://schemas.openxmlformats.org/drawingml/2006/main">
+            <a:off x="685800" y="1504950"/>
             <a:ext cx="1847850" cy="247650"/>
           </a:xfrm>
           <a:prstGeom xmlns:a="http://schemas.openxmlformats.org/drawingml/2006/main" prst="rect">
@@ -10730,18 +10730,18 @@
           <p:cNvPr id="6" name="">
             <a:extLst xmlns:a="http://schemas.openxmlformats.org/drawingml/2006/main">
               <a:ext uri="{FF2B5EF4-FFF2-40B4-BE49-F238E27FC236}">
-                <a16:creationId xmlns:a16="http://schemas.microsoft.com/office/drawing/2014/main" id="{70B3D3BB-6839-4ADD-B915-4F9F877FE5CD}"/>
-              </a:ext>
-            </a:extLst>
-          </p:cNvPr>
-          <p:cNvSpPr>
-            <a:spLocks xmlns:a="http://schemas.openxmlformats.org/drawingml/2006/main" noGrp="1"/>
-          </p:cNvSpPr>
-          <p:nvPr/>
-        </p:nvSpPr>
-        <p:spPr>
-          <a:xfrm xmlns:a="http://schemas.openxmlformats.org/drawingml/2006/main">
-            <a:off x="2686050" y="1600200"/>
+                <a16:creationId xmlns:a16="http://schemas.microsoft.com/office/drawing/2014/main" id="{C2F53567-CBA5-42E5-933A-49E4D880A74A}"/>
+              </a:ext>
+            </a:extLst>
+          </p:cNvPr>
+          <p:cNvSpPr>
+            <a:spLocks xmlns:a="http://schemas.openxmlformats.org/drawingml/2006/main" noGrp="1"/>
+          </p:cNvSpPr>
+          <p:nvPr/>
+        </p:nvSpPr>
+        <p:spPr>
+          <a:xfrm xmlns:a="http://schemas.openxmlformats.org/drawingml/2006/main">
+            <a:off x="2686050" y="1504950"/>
             <a:ext cx="3657600" cy="247650"/>
           </a:xfrm>
           <a:prstGeom xmlns:a="http://schemas.openxmlformats.org/drawingml/2006/main" prst="rect">
@@ -10780,18 +10780,18 @@
           <p:cNvPr id="7" name="">
             <a:extLst xmlns:a="http://schemas.openxmlformats.org/drawingml/2006/main">
               <a:ext uri="{FF2B5EF4-FFF2-40B4-BE49-F238E27FC236}">
-                <a16:creationId xmlns:a16="http://schemas.microsoft.com/office/drawing/2014/main" id="{F56CDC31-A7B2-446E-9A62-AA2E1F299425}"/>
-              </a:ext>
-            </a:extLst>
-          </p:cNvPr>
-          <p:cNvSpPr>
-            <a:spLocks xmlns:a="http://schemas.openxmlformats.org/drawingml/2006/main" noGrp="1"/>
-          </p:cNvSpPr>
-          <p:nvPr/>
-        </p:nvSpPr>
-        <p:spPr>
-          <a:xfrm xmlns:a="http://schemas.openxmlformats.org/drawingml/2006/main">
-            <a:off x="6496050" y="1600200"/>
+                <a16:creationId xmlns:a16="http://schemas.microsoft.com/office/drawing/2014/main" id="{44888098-D94B-4974-8296-F5CD2EED456F}"/>
+              </a:ext>
+            </a:extLst>
+          </p:cNvPr>
+          <p:cNvSpPr>
+            <a:spLocks xmlns:a="http://schemas.openxmlformats.org/drawingml/2006/main" noGrp="1"/>
+          </p:cNvSpPr>
+          <p:nvPr/>
+        </p:nvSpPr>
+        <p:spPr>
+          <a:xfrm xmlns:a="http://schemas.openxmlformats.org/drawingml/2006/main">
+            <a:off x="6496050" y="1504950"/>
             <a:ext cx="4610100" cy="247650"/>
           </a:xfrm>
           <a:prstGeom xmlns:a="http://schemas.openxmlformats.org/drawingml/2006/main" prst="rect">
@@ -10830,19 +10830,19 @@
           <p:cNvPr id="8" name="">
             <a:extLst xmlns:a="http://schemas.openxmlformats.org/drawingml/2006/main">
               <a:ext uri="{FF2B5EF4-FFF2-40B4-BE49-F238E27FC236}">
-                <a16:creationId xmlns:a16="http://schemas.microsoft.com/office/drawing/2014/main" id="{FCFB23BF-9453-455E-8AFB-96BBAE8A1E14}"/>
-              </a:ext>
-            </a:extLst>
-          </p:cNvPr>
-          <p:cNvSpPr>
-            <a:spLocks xmlns:a="http://schemas.openxmlformats.org/drawingml/2006/main" noGrp="1"/>
-          </p:cNvSpPr>
-          <p:nvPr/>
-        </p:nvSpPr>
-        <p:spPr>
-          <a:xfrm xmlns:a="http://schemas.openxmlformats.org/drawingml/2006/main">
-            <a:off x="609600" y="1847850"/>
-            <a:ext cx="10572750" cy="533400"/>
+                <a16:creationId xmlns:a16="http://schemas.microsoft.com/office/drawing/2014/main" id="{D435F17E-3B06-4041-B56F-A7D9E5D010D0}"/>
+              </a:ext>
+            </a:extLst>
+          </p:cNvPr>
+          <p:cNvSpPr>
+            <a:spLocks xmlns:a="http://schemas.openxmlformats.org/drawingml/2006/main" noGrp="1"/>
+          </p:cNvSpPr>
+          <p:nvPr/>
+        </p:nvSpPr>
+        <p:spPr>
+          <a:xfrm xmlns:a="http://schemas.openxmlformats.org/drawingml/2006/main">
+            <a:off x="609600" y="1752600"/>
+            <a:ext cx="10572750" cy="514350"/>
           </a:xfrm>
           <a:prstGeom xmlns:a="http://schemas.openxmlformats.org/drawingml/2006/main" prst="rect">
             <a:avLst/>
@@ -10863,47 +10863,47 @@
           <p:cNvPr id="9" name="">
             <a:extLst xmlns:a="http://schemas.openxmlformats.org/drawingml/2006/main">
               <a:ext uri="{FF2B5EF4-FFF2-40B4-BE49-F238E27FC236}">
-                <a16:creationId xmlns:a16="http://schemas.microsoft.com/office/drawing/2014/main" id="{4610DBC8-71BF-4902-96BA-E9B296990954}"/>
-              </a:ext>
-            </a:extLst>
-          </p:cNvPr>
-          <p:cNvSpPr>
-            <a:spLocks xmlns:a="http://schemas.openxmlformats.org/drawingml/2006/main" noGrp="1"/>
-          </p:cNvSpPr>
-          <p:nvPr/>
-        </p:nvSpPr>
-        <p:spPr>
-          <a:xfrm xmlns:a="http://schemas.openxmlformats.org/drawingml/2006/main">
-            <a:off x="685800" y="1933575"/>
-            <a:ext cx="1847850" cy="457200"/>
-          </a:xfrm>
-          <a:prstGeom xmlns:a="http://schemas.openxmlformats.org/drawingml/2006/main" prst="rect">
-            <a:avLst/>
-          </a:prstGeom>
-          <a:noFill xmlns:a="http://schemas.openxmlformats.org/drawingml/2006/main"/>
-          <a:ln xmlns:a="http://schemas.openxmlformats.org/drawingml/2006/main" w="0">
-            <a:noFill/>
-            <a:prstDash val="solid"/>
-          </a:ln>
-        </p:spPr>
-        <p:txBody>
-          <a:bodyPr xmlns:a="http://schemas.openxmlformats.org/drawingml/2006/main"/>
-          <a:lstStyle xmlns:a="http://schemas.openxmlformats.org/drawingml/2006/main"/>
-          <a:p xmlns:a="http://schemas.openxmlformats.org/drawingml/2006/main">
-            <a:pPr algn="l">
-              <a:defRPr sz="1200" b="0">
-                <a:solidFill>
-                  <a:srgbClr val="111111"/>
-                </a:solidFill>
-              </a:defRPr>
-            </a:pPr>
-            <a:r>
-              <a:rPr sz="1200" b="0">
-                <a:solidFill>
-                  <a:srgbClr val="111111"/>
-                </a:solidFill>
-              </a:rPr>
-              <a:t>AlphaMissense/VEP</a:t>
+                <a16:creationId xmlns:a16="http://schemas.microsoft.com/office/drawing/2014/main" id="{7489AAAA-A164-467F-AF5F-5A69AF465C1E}"/>
+              </a:ext>
+            </a:extLst>
+          </p:cNvPr>
+          <p:cNvSpPr>
+            <a:spLocks xmlns:a="http://schemas.openxmlformats.org/drawingml/2006/main" noGrp="1"/>
+          </p:cNvSpPr>
+          <p:nvPr/>
+        </p:nvSpPr>
+        <p:spPr>
+          <a:xfrm xmlns:a="http://schemas.openxmlformats.org/drawingml/2006/main">
+            <a:off x="685800" y="1838325"/>
+            <a:ext cx="1847850" cy="438150"/>
+          </a:xfrm>
+          <a:prstGeom xmlns:a="http://schemas.openxmlformats.org/drawingml/2006/main" prst="rect">
+            <a:avLst/>
+          </a:prstGeom>
+          <a:noFill xmlns:a="http://schemas.openxmlformats.org/drawingml/2006/main"/>
+          <a:ln xmlns:a="http://schemas.openxmlformats.org/drawingml/2006/main" w="0">
+            <a:noFill/>
+            <a:prstDash val="solid"/>
+          </a:ln>
+        </p:spPr>
+        <p:txBody>
+          <a:bodyPr xmlns:a="http://schemas.openxmlformats.org/drawingml/2006/main"/>
+          <a:lstStyle xmlns:a="http://schemas.openxmlformats.org/drawingml/2006/main"/>
+          <a:p xmlns:a="http://schemas.openxmlformats.org/drawingml/2006/main">
+            <a:pPr algn="l">
+              <a:defRPr sz="1125" b="0">
+                <a:solidFill>
+                  <a:srgbClr val="111111"/>
+                </a:solidFill>
+              </a:defRPr>
+            </a:pPr>
+            <a:r>
+              <a:rPr sz="1125" b="0">
+                <a:solidFill>
+                  <a:srgbClr val="111111"/>
+                </a:solidFill>
+              </a:rPr>
+              <a:t>ClinGen/ACMG</a:t>
             </a:r>
           </a:p>
         </p:txBody>
@@ -10913,47 +10913,47 @@
           <p:cNvPr id="10" name="">
             <a:extLst xmlns:a="http://schemas.openxmlformats.org/drawingml/2006/main">
               <a:ext uri="{FF2B5EF4-FFF2-40B4-BE49-F238E27FC236}">
-                <a16:creationId xmlns:a16="http://schemas.microsoft.com/office/drawing/2014/main" id="{1DCABB72-7469-4EF3-BA0F-A45035C93D24}"/>
-              </a:ext>
-            </a:extLst>
-          </p:cNvPr>
-          <p:cNvSpPr>
-            <a:spLocks xmlns:a="http://schemas.openxmlformats.org/drawingml/2006/main" noGrp="1"/>
-          </p:cNvSpPr>
-          <p:nvPr/>
-        </p:nvSpPr>
-        <p:spPr>
-          <a:xfrm xmlns:a="http://schemas.openxmlformats.org/drawingml/2006/main">
-            <a:off x="2686050" y="1933575"/>
-            <a:ext cx="3657600" cy="457200"/>
-          </a:xfrm>
-          <a:prstGeom xmlns:a="http://schemas.openxmlformats.org/drawingml/2006/main" prst="rect">
-            <a:avLst/>
-          </a:prstGeom>
-          <a:noFill xmlns:a="http://schemas.openxmlformats.org/drawingml/2006/main"/>
-          <a:ln xmlns:a="http://schemas.openxmlformats.org/drawingml/2006/main" w="0">
-            <a:noFill/>
-            <a:prstDash val="solid"/>
-          </a:ln>
-        </p:spPr>
-        <p:txBody>
-          <a:bodyPr xmlns:a="http://schemas.openxmlformats.org/drawingml/2006/main"/>
-          <a:lstStyle xmlns:a="http://schemas.openxmlformats.org/drawingml/2006/main"/>
-          <a:p xmlns:a="http://schemas.openxmlformats.org/drawingml/2006/main">
-            <a:pPr algn="l">
-              <a:defRPr sz="1200" b="0">
-                <a:solidFill>
-                  <a:srgbClr val="111111"/>
-                </a:solidFill>
-              </a:defRPr>
-            </a:pPr>
-            <a:r>
-              <a:rPr sz="1200" b="0">
-                <a:solidFill>
-                  <a:srgbClr val="111111"/>
-                </a:solidFill>
-              </a:rPr>
-              <a:t>missense pathogenicity prior</a:t>
+                <a16:creationId xmlns:a16="http://schemas.microsoft.com/office/drawing/2014/main" id="{247B474C-2F97-4BCB-B169-CD98718BF26F}"/>
+              </a:ext>
+            </a:extLst>
+          </p:cNvPr>
+          <p:cNvSpPr>
+            <a:spLocks xmlns:a="http://schemas.openxmlformats.org/drawingml/2006/main" noGrp="1"/>
+          </p:cNvSpPr>
+          <p:nvPr/>
+        </p:nvSpPr>
+        <p:spPr>
+          <a:xfrm xmlns:a="http://schemas.openxmlformats.org/drawingml/2006/main">
+            <a:off x="2686050" y="1838325"/>
+            <a:ext cx="3657600" cy="438150"/>
+          </a:xfrm>
+          <a:prstGeom xmlns:a="http://schemas.openxmlformats.org/drawingml/2006/main" prst="rect">
+            <a:avLst/>
+          </a:prstGeom>
+          <a:noFill xmlns:a="http://schemas.openxmlformats.org/drawingml/2006/main"/>
+          <a:ln xmlns:a="http://schemas.openxmlformats.org/drawingml/2006/main" w="0">
+            <a:noFill/>
+            <a:prstDash val="solid"/>
+          </a:ln>
+        </p:spPr>
+        <p:txBody>
+          <a:bodyPr xmlns:a="http://schemas.openxmlformats.org/drawingml/2006/main"/>
+          <a:lstStyle xmlns:a="http://schemas.openxmlformats.org/drawingml/2006/main"/>
+          <a:p xmlns:a="http://schemas.openxmlformats.org/drawingml/2006/main">
+            <a:pPr algn="l">
+              <a:defRPr sz="1125" b="0">
+                <a:solidFill>
+                  <a:srgbClr val="111111"/>
+                </a:solidFill>
+              </a:defRPr>
+            </a:pPr>
+            <a:r>
+              <a:rPr sz="1125" b="0">
+                <a:solidFill>
+                  <a:srgbClr val="111111"/>
+                </a:solidFill>
+              </a:rPr>
+              <a:t>VWF rule specifications + curated evidence</a:t>
             </a:r>
           </a:p>
         </p:txBody>
@@ -10963,47 +10963,47 @@
           <p:cNvPr id="11" name="">
             <a:extLst xmlns:a="http://schemas.openxmlformats.org/drawingml/2006/main">
               <a:ext uri="{FF2B5EF4-FFF2-40B4-BE49-F238E27FC236}">
-                <a16:creationId xmlns:a16="http://schemas.microsoft.com/office/drawing/2014/main" id="{155FA403-5539-43A4-B215-76CE31F5C4A4}"/>
-              </a:ext>
-            </a:extLst>
-          </p:cNvPr>
-          <p:cNvSpPr>
-            <a:spLocks xmlns:a="http://schemas.openxmlformats.org/drawingml/2006/main" noGrp="1"/>
-          </p:cNvSpPr>
-          <p:nvPr/>
-        </p:nvSpPr>
-        <p:spPr>
-          <a:xfrm xmlns:a="http://schemas.openxmlformats.org/drawingml/2006/main">
-            <a:off x="6496050" y="1933575"/>
-            <a:ext cx="4610100" cy="457200"/>
-          </a:xfrm>
-          <a:prstGeom xmlns:a="http://schemas.openxmlformats.org/drawingml/2006/main" prst="rect">
-            <a:avLst/>
-          </a:prstGeom>
-          <a:noFill xmlns:a="http://schemas.openxmlformats.org/drawingml/2006/main"/>
-          <a:ln xmlns:a="http://schemas.openxmlformats.org/drawingml/2006/main" w="0">
-            <a:noFill/>
-            <a:prstDash val="solid"/>
-          </a:ln>
-        </p:spPr>
-        <p:txBody>
-          <a:bodyPr xmlns:a="http://schemas.openxmlformats.org/drawingml/2006/main"/>
-          <a:lstStyle xmlns:a="http://schemas.openxmlformats.org/drawingml/2006/main"/>
-          <a:p xmlns:a="http://schemas.openxmlformats.org/drawingml/2006/main">
-            <a:pPr algn="l">
-              <a:defRPr sz="1200" b="0">
-                <a:solidFill>
-                  <a:srgbClr val="111111"/>
-                </a:solidFill>
-              </a:defRPr>
-            </a:pPr>
-            <a:r>
-              <a:rPr sz="1200" b="0">
-                <a:solidFill>
-                  <a:srgbClr val="111111"/>
-                </a:solidFill>
-              </a:rPr>
-              <a:t>不直接给 VWD subtype 和机制方向</a:t>
+                <a16:creationId xmlns:a16="http://schemas.microsoft.com/office/drawing/2014/main" id="{652975E2-D375-4BD8-AB25-3951222BBB93}"/>
+              </a:ext>
+            </a:extLst>
+          </p:cNvPr>
+          <p:cNvSpPr>
+            <a:spLocks xmlns:a="http://schemas.openxmlformats.org/drawingml/2006/main" noGrp="1"/>
+          </p:cNvSpPr>
+          <p:nvPr/>
+        </p:nvSpPr>
+        <p:spPr>
+          <a:xfrm xmlns:a="http://schemas.openxmlformats.org/drawingml/2006/main">
+            <a:off x="6496050" y="1838325"/>
+            <a:ext cx="4610100" cy="438150"/>
+          </a:xfrm>
+          <a:prstGeom xmlns:a="http://schemas.openxmlformats.org/drawingml/2006/main" prst="rect">
+            <a:avLst/>
+          </a:prstGeom>
+          <a:noFill xmlns:a="http://schemas.openxmlformats.org/drawingml/2006/main"/>
+          <a:ln xmlns:a="http://schemas.openxmlformats.org/drawingml/2006/main" w="0">
+            <a:noFill/>
+            <a:prstDash val="solid"/>
+          </a:ln>
+        </p:spPr>
+        <p:txBody>
+          <a:bodyPr xmlns:a="http://schemas.openxmlformats.org/drawingml/2006/main"/>
+          <a:lstStyle xmlns:a="http://schemas.openxmlformats.org/drawingml/2006/main"/>
+          <a:p xmlns:a="http://schemas.openxmlformats.org/drawingml/2006/main">
+            <a:pPr algn="l">
+              <a:defRPr sz="1125" b="0">
+                <a:solidFill>
+                  <a:srgbClr val="111111"/>
+                </a:solidFill>
+              </a:defRPr>
+            </a:pPr>
+            <a:r>
+              <a:rPr sz="1125" b="0">
+                <a:solidFill>
+                  <a:srgbClr val="111111"/>
+                </a:solidFill>
+              </a:rPr>
+              <a:t>可作 pathogenicity/curation baseline；不是前瞻机制预测</a:t>
             </a:r>
           </a:p>
         </p:txBody>
@@ -11013,19 +11013,19 @@
           <p:cNvPr id="12" name="">
             <a:extLst xmlns:a="http://schemas.openxmlformats.org/drawingml/2006/main">
               <a:ext uri="{FF2B5EF4-FFF2-40B4-BE49-F238E27FC236}">
-                <a16:creationId xmlns:a16="http://schemas.microsoft.com/office/drawing/2014/main" id="{27687A60-0C7D-416E-8E06-11C15215E62F}"/>
-              </a:ext>
-            </a:extLst>
-          </p:cNvPr>
-          <p:cNvSpPr>
-            <a:spLocks xmlns:a="http://schemas.openxmlformats.org/drawingml/2006/main" noGrp="1"/>
-          </p:cNvSpPr>
-          <p:nvPr/>
-        </p:nvSpPr>
-        <p:spPr>
-          <a:xfrm xmlns:a="http://schemas.openxmlformats.org/drawingml/2006/main">
-            <a:off x="609600" y="2381250"/>
-            <a:ext cx="10572750" cy="533400"/>
+                <a16:creationId xmlns:a16="http://schemas.microsoft.com/office/drawing/2014/main" id="{9792B33F-8838-44B3-97F7-E46DD75BFBF0}"/>
+              </a:ext>
+            </a:extLst>
+          </p:cNvPr>
+          <p:cNvSpPr>
+            <a:spLocks xmlns:a="http://schemas.openxmlformats.org/drawingml/2006/main" noGrp="1"/>
+          </p:cNvSpPr>
+          <p:nvPr/>
+        </p:nvSpPr>
+        <p:spPr>
+          <a:xfrm xmlns:a="http://schemas.openxmlformats.org/drawingml/2006/main">
+            <a:off x="609600" y="2266950"/>
+            <a:ext cx="10572750" cy="514350"/>
           </a:xfrm>
           <a:prstGeom xmlns:a="http://schemas.openxmlformats.org/drawingml/2006/main" prst="rect">
             <a:avLst/>
@@ -11046,47 +11046,47 @@
           <p:cNvPr id="13" name="">
             <a:extLst xmlns:a="http://schemas.openxmlformats.org/drawingml/2006/main">
               <a:ext uri="{FF2B5EF4-FFF2-40B4-BE49-F238E27FC236}">
-                <a16:creationId xmlns:a16="http://schemas.microsoft.com/office/drawing/2014/main" id="{F449E3AF-7645-490F-A0E5-36D209A97B0F}"/>
-              </a:ext>
-            </a:extLst>
-          </p:cNvPr>
-          <p:cNvSpPr>
-            <a:spLocks xmlns:a="http://schemas.openxmlformats.org/drawingml/2006/main" noGrp="1"/>
-          </p:cNvSpPr>
-          <p:nvPr/>
-        </p:nvSpPr>
-        <p:spPr>
-          <a:xfrm xmlns:a="http://schemas.openxmlformats.org/drawingml/2006/main">
-            <a:off x="685800" y="2466975"/>
-            <a:ext cx="1847850" cy="457200"/>
-          </a:xfrm>
-          <a:prstGeom xmlns:a="http://schemas.openxmlformats.org/drawingml/2006/main" prst="rect">
-            <a:avLst/>
-          </a:prstGeom>
-          <a:noFill xmlns:a="http://schemas.openxmlformats.org/drawingml/2006/main"/>
-          <a:ln xmlns:a="http://schemas.openxmlformats.org/drawingml/2006/main" w="0">
-            <a:noFill/>
-            <a:prstDash val="solid"/>
-          </a:ln>
-        </p:spPr>
-        <p:txBody>
-          <a:bodyPr xmlns:a="http://schemas.openxmlformats.org/drawingml/2006/main"/>
-          <a:lstStyle xmlns:a="http://schemas.openxmlformats.org/drawingml/2006/main"/>
-          <a:p xmlns:a="http://schemas.openxmlformats.org/drawingml/2006/main">
-            <a:pPr algn="l">
-              <a:defRPr sz="1200" b="0">
-                <a:solidFill>
-                  <a:srgbClr val="111111"/>
-                </a:solidFill>
-              </a:defRPr>
-            </a:pPr>
-            <a:r>
-              <a:rPr sz="1200" b="0">
-                <a:solidFill>
-                  <a:srgbClr val="111111"/>
-                </a:solidFill>
-              </a:rPr>
-              <a:t>AF3/Boltz</a:t>
+                <a16:creationId xmlns:a16="http://schemas.microsoft.com/office/drawing/2014/main" id="{45627768-A2F6-4A2B-8BC2-B8164A5839F7}"/>
+              </a:ext>
+            </a:extLst>
+          </p:cNvPr>
+          <p:cNvSpPr>
+            <a:spLocks xmlns:a="http://schemas.openxmlformats.org/drawingml/2006/main" noGrp="1"/>
+          </p:cNvSpPr>
+          <p:nvPr/>
+        </p:nvSpPr>
+        <p:spPr>
+          <a:xfrm xmlns:a="http://schemas.openxmlformats.org/drawingml/2006/main">
+            <a:off x="685800" y="2352675"/>
+            <a:ext cx="1847850" cy="438150"/>
+          </a:xfrm>
+          <a:prstGeom xmlns:a="http://schemas.openxmlformats.org/drawingml/2006/main" prst="rect">
+            <a:avLst/>
+          </a:prstGeom>
+          <a:noFill xmlns:a="http://schemas.openxmlformats.org/drawingml/2006/main"/>
+          <a:ln xmlns:a="http://schemas.openxmlformats.org/drawingml/2006/main" w="0">
+            <a:noFill/>
+            <a:prstDash val="solid"/>
+          </a:ln>
+        </p:spPr>
+        <p:txBody>
+          <a:bodyPr xmlns:a="http://schemas.openxmlformats.org/drawingml/2006/main"/>
+          <a:lstStyle xmlns:a="http://schemas.openxmlformats.org/drawingml/2006/main"/>
+          <a:p xmlns:a="http://schemas.openxmlformats.org/drawingml/2006/main">
+            <a:pPr algn="l">
+              <a:defRPr sz="1125" b="0">
+                <a:solidFill>
+                  <a:srgbClr val="111111"/>
+                </a:solidFill>
+              </a:defRPr>
+            </a:pPr>
+            <a:r>
+              <a:rPr sz="1125" b="0">
+                <a:solidFill>
+                  <a:srgbClr val="111111"/>
+                </a:solidFill>
+              </a:rPr>
+              <a:t>AlphaMissense/VEP</a:t>
             </a:r>
           </a:p>
         </p:txBody>
@@ -11096,47 +11096,47 @@
           <p:cNvPr id="14" name="">
             <a:extLst xmlns:a="http://schemas.openxmlformats.org/drawingml/2006/main">
               <a:ext uri="{FF2B5EF4-FFF2-40B4-BE49-F238E27FC236}">
-                <a16:creationId xmlns:a16="http://schemas.microsoft.com/office/drawing/2014/main" id="{806ADF45-FE47-45A6-8A9B-E5B3355E9ABB}"/>
-              </a:ext>
-            </a:extLst>
-          </p:cNvPr>
-          <p:cNvSpPr>
-            <a:spLocks xmlns:a="http://schemas.openxmlformats.org/drawingml/2006/main" noGrp="1"/>
-          </p:cNvSpPr>
-          <p:nvPr/>
-        </p:nvSpPr>
-        <p:spPr>
-          <a:xfrm xmlns:a="http://schemas.openxmlformats.org/drawingml/2006/main">
-            <a:off x="2686050" y="2466975"/>
-            <a:ext cx="3657600" cy="457200"/>
-          </a:xfrm>
-          <a:prstGeom xmlns:a="http://schemas.openxmlformats.org/drawingml/2006/main" prst="rect">
-            <a:avLst/>
-          </a:prstGeom>
-          <a:noFill xmlns:a="http://schemas.openxmlformats.org/drawingml/2006/main"/>
-          <a:ln xmlns:a="http://schemas.openxmlformats.org/drawingml/2006/main" w="0">
-            <a:noFill/>
-            <a:prstDash val="solid"/>
-          </a:ln>
-        </p:spPr>
-        <p:txBody>
-          <a:bodyPr xmlns:a="http://schemas.openxmlformats.org/drawingml/2006/main"/>
-          <a:lstStyle xmlns:a="http://schemas.openxmlformats.org/drawingml/2006/main"/>
-          <a:p xmlns:a="http://schemas.openxmlformats.org/drawingml/2006/main">
-            <a:pPr algn="l">
-              <a:defRPr sz="1200" b="0">
-                <a:solidFill>
-                  <a:srgbClr val="111111"/>
-                </a:solidFill>
-              </a:defRPr>
-            </a:pPr>
-            <a:r>
-              <a:rPr sz="1200" b="0">
-                <a:solidFill>
-                  <a:srgbClr val="111111"/>
-                </a:solidFill>
-              </a:rPr>
-              <a:t>复合体结构与 confidence/affinity proxy</a:t>
+                <a16:creationId xmlns:a16="http://schemas.microsoft.com/office/drawing/2014/main" id="{8BB6D87A-3FCE-40ED-9C5D-EECAC24F0926}"/>
+              </a:ext>
+            </a:extLst>
+          </p:cNvPr>
+          <p:cNvSpPr>
+            <a:spLocks xmlns:a="http://schemas.openxmlformats.org/drawingml/2006/main" noGrp="1"/>
+          </p:cNvSpPr>
+          <p:nvPr/>
+        </p:nvSpPr>
+        <p:spPr>
+          <a:xfrm xmlns:a="http://schemas.openxmlformats.org/drawingml/2006/main">
+            <a:off x="2686050" y="2352675"/>
+            <a:ext cx="3657600" cy="438150"/>
+          </a:xfrm>
+          <a:prstGeom xmlns:a="http://schemas.openxmlformats.org/drawingml/2006/main" prst="rect">
+            <a:avLst/>
+          </a:prstGeom>
+          <a:noFill xmlns:a="http://schemas.openxmlformats.org/drawingml/2006/main"/>
+          <a:ln xmlns:a="http://schemas.openxmlformats.org/drawingml/2006/main" w="0">
+            <a:noFill/>
+            <a:prstDash val="solid"/>
+          </a:ln>
+        </p:spPr>
+        <p:txBody>
+          <a:bodyPr xmlns:a="http://schemas.openxmlformats.org/drawingml/2006/main"/>
+          <a:lstStyle xmlns:a="http://schemas.openxmlformats.org/drawingml/2006/main"/>
+          <a:p xmlns:a="http://schemas.openxmlformats.org/drawingml/2006/main">
+            <a:pPr algn="l">
+              <a:defRPr sz="1125" b="0">
+                <a:solidFill>
+                  <a:srgbClr val="111111"/>
+                </a:solidFill>
+              </a:defRPr>
+            </a:pPr>
+            <a:r>
+              <a:rPr sz="1125" b="0">
+                <a:solidFill>
+                  <a:srgbClr val="111111"/>
+                </a:solidFill>
+              </a:rPr>
+              <a:t>missense pathogenicity prior</a:t>
             </a:r>
           </a:p>
         </p:txBody>
@@ -11146,47 +11146,47 @@
           <p:cNvPr id="15" name="">
             <a:extLst xmlns:a="http://schemas.openxmlformats.org/drawingml/2006/main">
               <a:ext uri="{FF2B5EF4-FFF2-40B4-BE49-F238E27FC236}">
-                <a16:creationId xmlns:a16="http://schemas.microsoft.com/office/drawing/2014/main" id="{01614948-24CF-4164-ACFE-3B04FAB7BC25}"/>
-              </a:ext>
-            </a:extLst>
-          </p:cNvPr>
-          <p:cNvSpPr>
-            <a:spLocks xmlns:a="http://schemas.openxmlformats.org/drawingml/2006/main" noGrp="1"/>
-          </p:cNvSpPr>
-          <p:nvPr/>
-        </p:nvSpPr>
-        <p:spPr>
-          <a:xfrm xmlns:a="http://schemas.openxmlformats.org/drawingml/2006/main">
-            <a:off x="6496050" y="2466975"/>
-            <a:ext cx="4610100" cy="457200"/>
-          </a:xfrm>
-          <a:prstGeom xmlns:a="http://schemas.openxmlformats.org/drawingml/2006/main" prst="rect">
-            <a:avLst/>
-          </a:prstGeom>
-          <a:noFill xmlns:a="http://schemas.openxmlformats.org/drawingml/2006/main"/>
-          <a:ln xmlns:a="http://schemas.openxmlformats.org/drawingml/2006/main" w="0">
-            <a:noFill/>
-            <a:prstDash val="solid"/>
-          </a:ln>
-        </p:spPr>
-        <p:txBody>
-          <a:bodyPr xmlns:a="http://schemas.openxmlformats.org/drawingml/2006/main"/>
-          <a:lstStyle xmlns:a="http://schemas.openxmlformats.org/drawingml/2006/main"/>
-          <a:p xmlns:a="http://schemas.openxmlformats.org/drawingml/2006/main">
-            <a:pPr algn="l">
-              <a:defRPr sz="1200" b="0">
-                <a:solidFill>
-                  <a:srgbClr val="111111"/>
-                </a:solidFill>
-              </a:defRPr>
-            </a:pPr>
-            <a:r>
-              <a:rPr sz="1200" b="0">
-                <a:solidFill>
-                  <a:srgbClr val="111111"/>
-                </a:solidFill>
-              </a:rPr>
-              <a:t>静态结构不能覆盖动力学/剪切触发</a:t>
+                <a16:creationId xmlns:a16="http://schemas.microsoft.com/office/drawing/2014/main" id="{5EB7483C-A5D2-4260-A34B-09727D25113F}"/>
+              </a:ext>
+            </a:extLst>
+          </p:cNvPr>
+          <p:cNvSpPr>
+            <a:spLocks xmlns:a="http://schemas.openxmlformats.org/drawingml/2006/main" noGrp="1"/>
+          </p:cNvSpPr>
+          <p:nvPr/>
+        </p:nvSpPr>
+        <p:spPr>
+          <a:xfrm xmlns:a="http://schemas.openxmlformats.org/drawingml/2006/main">
+            <a:off x="6496050" y="2352675"/>
+            <a:ext cx="4610100" cy="438150"/>
+          </a:xfrm>
+          <a:prstGeom xmlns:a="http://schemas.openxmlformats.org/drawingml/2006/main" prst="rect">
+            <a:avLst/>
+          </a:prstGeom>
+          <a:noFill xmlns:a="http://schemas.openxmlformats.org/drawingml/2006/main"/>
+          <a:ln xmlns:a="http://schemas.openxmlformats.org/drawingml/2006/main" w="0">
+            <a:noFill/>
+            <a:prstDash val="solid"/>
+          </a:ln>
+        </p:spPr>
+        <p:txBody>
+          <a:bodyPr xmlns:a="http://schemas.openxmlformats.org/drawingml/2006/main"/>
+          <a:lstStyle xmlns:a="http://schemas.openxmlformats.org/drawingml/2006/main"/>
+          <a:p xmlns:a="http://schemas.openxmlformats.org/drawingml/2006/main">
+            <a:pPr algn="l">
+              <a:defRPr sz="1125" b="0">
+                <a:solidFill>
+                  <a:srgbClr val="111111"/>
+                </a:solidFill>
+              </a:defRPr>
+            </a:pPr>
+            <a:r>
+              <a:rPr sz="1125" b="0">
+                <a:solidFill>
+                  <a:srgbClr val="111111"/>
+                </a:solidFill>
+              </a:rPr>
+              <a:t>不直接给 VWD subtype 和机制方向</a:t>
             </a:r>
           </a:p>
         </p:txBody>
@@ -11196,19 +11196,19 @@
           <p:cNvPr id="16" name="">
             <a:extLst xmlns:a="http://schemas.openxmlformats.org/drawingml/2006/main">
               <a:ext uri="{FF2B5EF4-FFF2-40B4-BE49-F238E27FC236}">
-                <a16:creationId xmlns:a16="http://schemas.microsoft.com/office/drawing/2014/main" id="{12553537-17D9-4D21-998F-C7BC36216A69}"/>
-              </a:ext>
-            </a:extLst>
-          </p:cNvPr>
-          <p:cNvSpPr>
-            <a:spLocks xmlns:a="http://schemas.openxmlformats.org/drawingml/2006/main" noGrp="1"/>
-          </p:cNvSpPr>
-          <p:nvPr/>
-        </p:nvSpPr>
-        <p:spPr>
-          <a:xfrm xmlns:a="http://schemas.openxmlformats.org/drawingml/2006/main">
-            <a:off x="609600" y="2914650"/>
-            <a:ext cx="10572750" cy="533400"/>
+                <a16:creationId xmlns:a16="http://schemas.microsoft.com/office/drawing/2014/main" id="{4A893FF2-2157-4877-9777-A499F419DC42}"/>
+              </a:ext>
+            </a:extLst>
+          </p:cNvPr>
+          <p:cNvSpPr>
+            <a:spLocks xmlns:a="http://schemas.openxmlformats.org/drawingml/2006/main" noGrp="1"/>
+          </p:cNvSpPr>
+          <p:nvPr/>
+        </p:nvSpPr>
+        <p:spPr>
+          <a:xfrm xmlns:a="http://schemas.openxmlformats.org/drawingml/2006/main">
+            <a:off x="609600" y="2781300"/>
+            <a:ext cx="10572750" cy="514350"/>
           </a:xfrm>
           <a:prstGeom xmlns:a="http://schemas.openxmlformats.org/drawingml/2006/main" prst="rect">
             <a:avLst/>
@@ -11229,47 +11229,47 @@
           <p:cNvPr id="17" name="">
             <a:extLst xmlns:a="http://schemas.openxmlformats.org/drawingml/2006/main">
               <a:ext uri="{FF2B5EF4-FFF2-40B4-BE49-F238E27FC236}">
-                <a16:creationId xmlns:a16="http://schemas.microsoft.com/office/drawing/2014/main" id="{A235D449-5D82-4450-BED4-CB936322EEE7}"/>
-              </a:ext>
-            </a:extLst>
-          </p:cNvPr>
-          <p:cNvSpPr>
-            <a:spLocks xmlns:a="http://schemas.openxmlformats.org/drawingml/2006/main" noGrp="1"/>
-          </p:cNvSpPr>
-          <p:nvPr/>
-        </p:nvSpPr>
-        <p:spPr>
-          <a:xfrm xmlns:a="http://schemas.openxmlformats.org/drawingml/2006/main">
-            <a:off x="685800" y="3000375"/>
-            <a:ext cx="1847850" cy="457200"/>
-          </a:xfrm>
-          <a:prstGeom xmlns:a="http://schemas.openxmlformats.org/drawingml/2006/main" prst="rect">
-            <a:avLst/>
-          </a:prstGeom>
-          <a:noFill xmlns:a="http://schemas.openxmlformats.org/drawingml/2006/main"/>
-          <a:ln xmlns:a="http://schemas.openxmlformats.org/drawingml/2006/main" w="0">
-            <a:noFill/>
-            <a:prstDash val="solid"/>
-          </a:ln>
-        </p:spPr>
-        <p:txBody>
-          <a:bodyPr xmlns:a="http://schemas.openxmlformats.org/drawingml/2006/main"/>
-          <a:lstStyle xmlns:a="http://schemas.openxmlformats.org/drawingml/2006/main"/>
-          <a:p xmlns:a="http://schemas.openxmlformats.org/drawingml/2006/main">
-            <a:pPr algn="l">
-              <a:defRPr sz="1200" b="0">
-                <a:solidFill>
-                  <a:srgbClr val="111111"/>
-                </a:solidFill>
-              </a:defRPr>
-            </a:pPr>
-            <a:r>
-              <a:rPr sz="1200" b="0">
-                <a:solidFill>
-                  <a:srgbClr val="111111"/>
-                </a:solidFill>
-              </a:rPr>
-              <a:t>Medical LLM agents</a:t>
+                <a16:creationId xmlns:a16="http://schemas.microsoft.com/office/drawing/2014/main" id="{8C109C57-0CE0-49E9-8AEE-C004D0FD1E93}"/>
+              </a:ext>
+            </a:extLst>
+          </p:cNvPr>
+          <p:cNvSpPr>
+            <a:spLocks xmlns:a="http://schemas.openxmlformats.org/drawingml/2006/main" noGrp="1"/>
+          </p:cNvSpPr>
+          <p:nvPr/>
+        </p:nvSpPr>
+        <p:spPr>
+          <a:xfrm xmlns:a="http://schemas.openxmlformats.org/drawingml/2006/main">
+            <a:off x="685800" y="2867025"/>
+            <a:ext cx="1847850" cy="438150"/>
+          </a:xfrm>
+          <a:prstGeom xmlns:a="http://schemas.openxmlformats.org/drawingml/2006/main" prst="rect">
+            <a:avLst/>
+          </a:prstGeom>
+          <a:noFill xmlns:a="http://schemas.openxmlformats.org/drawingml/2006/main"/>
+          <a:ln xmlns:a="http://schemas.openxmlformats.org/drawingml/2006/main" w="0">
+            <a:noFill/>
+            <a:prstDash val="solid"/>
+          </a:ln>
+        </p:spPr>
+        <p:txBody>
+          <a:bodyPr xmlns:a="http://schemas.openxmlformats.org/drawingml/2006/main"/>
+          <a:lstStyle xmlns:a="http://schemas.openxmlformats.org/drawingml/2006/main"/>
+          <a:p xmlns:a="http://schemas.openxmlformats.org/drawingml/2006/main">
+            <a:pPr algn="l">
+              <a:defRPr sz="1125" b="0">
+                <a:solidFill>
+                  <a:srgbClr val="111111"/>
+                </a:solidFill>
+              </a:defRPr>
+            </a:pPr>
+            <a:r>
+              <a:rPr sz="1125" b="0">
+                <a:solidFill>
+                  <a:srgbClr val="111111"/>
+                </a:solidFill>
+              </a:rPr>
+              <a:t>AF3/Boltz</a:t>
             </a:r>
           </a:p>
         </p:txBody>
@@ -11279,47 +11279,47 @@
           <p:cNvPr id="18" name="">
             <a:extLst xmlns:a="http://schemas.openxmlformats.org/drawingml/2006/main">
               <a:ext uri="{FF2B5EF4-FFF2-40B4-BE49-F238E27FC236}">
-                <a16:creationId xmlns:a16="http://schemas.microsoft.com/office/drawing/2014/main" id="{3D4E5145-2A58-4680-B919-E2E0E259A36B}"/>
-              </a:ext>
-            </a:extLst>
-          </p:cNvPr>
-          <p:cNvSpPr>
-            <a:spLocks xmlns:a="http://schemas.openxmlformats.org/drawingml/2006/main" noGrp="1"/>
-          </p:cNvSpPr>
-          <p:nvPr/>
-        </p:nvSpPr>
-        <p:spPr>
-          <a:xfrm xmlns:a="http://schemas.openxmlformats.org/drawingml/2006/main">
-            <a:off x="2686050" y="3000375"/>
-            <a:ext cx="3657600" cy="457200"/>
-          </a:xfrm>
-          <a:prstGeom xmlns:a="http://schemas.openxmlformats.org/drawingml/2006/main" prst="rect">
-            <a:avLst/>
-          </a:prstGeom>
-          <a:noFill xmlns:a="http://schemas.openxmlformats.org/drawingml/2006/main"/>
-          <a:ln xmlns:a="http://schemas.openxmlformats.org/drawingml/2006/main" w="0">
-            <a:noFill/>
-            <a:prstDash val="solid"/>
-          </a:ln>
-        </p:spPr>
-        <p:txBody>
-          <a:bodyPr xmlns:a="http://schemas.openxmlformats.org/drawingml/2006/main"/>
-          <a:lstStyle xmlns:a="http://schemas.openxmlformats.org/drawingml/2006/main"/>
-          <a:p xmlns:a="http://schemas.openxmlformats.org/drawingml/2006/main">
-            <a:pPr algn="l">
-              <a:defRPr sz="1200" b="0">
-                <a:solidFill>
-                  <a:srgbClr val="111111"/>
-                </a:solidFill>
-              </a:defRPr>
-            </a:pPr>
-            <a:r>
-              <a:rPr sz="1200" b="0">
-                <a:solidFill>
-                  <a:srgbClr val="111111"/>
-                </a:solidFill>
-              </a:rPr>
-              <a:t>多专家推理框架</a:t>
+                <a16:creationId xmlns:a16="http://schemas.microsoft.com/office/drawing/2014/main" id="{2AE957B1-5A0C-42EE-8858-A5D908F14515}"/>
+              </a:ext>
+            </a:extLst>
+          </p:cNvPr>
+          <p:cNvSpPr>
+            <a:spLocks xmlns:a="http://schemas.openxmlformats.org/drawingml/2006/main" noGrp="1"/>
+          </p:cNvSpPr>
+          <p:nvPr/>
+        </p:nvSpPr>
+        <p:spPr>
+          <a:xfrm xmlns:a="http://schemas.openxmlformats.org/drawingml/2006/main">
+            <a:off x="2686050" y="2867025"/>
+            <a:ext cx="3657600" cy="438150"/>
+          </a:xfrm>
+          <a:prstGeom xmlns:a="http://schemas.openxmlformats.org/drawingml/2006/main" prst="rect">
+            <a:avLst/>
+          </a:prstGeom>
+          <a:noFill xmlns:a="http://schemas.openxmlformats.org/drawingml/2006/main"/>
+          <a:ln xmlns:a="http://schemas.openxmlformats.org/drawingml/2006/main" w="0">
+            <a:noFill/>
+            <a:prstDash val="solid"/>
+          </a:ln>
+        </p:spPr>
+        <p:txBody>
+          <a:bodyPr xmlns:a="http://schemas.openxmlformats.org/drawingml/2006/main"/>
+          <a:lstStyle xmlns:a="http://schemas.openxmlformats.org/drawingml/2006/main"/>
+          <a:p xmlns:a="http://schemas.openxmlformats.org/drawingml/2006/main">
+            <a:pPr algn="l">
+              <a:defRPr sz="1125" b="0">
+                <a:solidFill>
+                  <a:srgbClr val="111111"/>
+                </a:solidFill>
+              </a:defRPr>
+            </a:pPr>
+            <a:r>
+              <a:rPr sz="1125" b="0">
+                <a:solidFill>
+                  <a:srgbClr val="111111"/>
+                </a:solidFill>
+              </a:rPr>
+              <a:t>复合体结构与 confidence/affinity proxy</a:t>
             </a:r>
           </a:p>
         </p:txBody>
@@ -11329,47 +11329,47 @@
           <p:cNvPr id="19" name="">
             <a:extLst xmlns:a="http://schemas.openxmlformats.org/drawingml/2006/main">
               <a:ext uri="{FF2B5EF4-FFF2-40B4-BE49-F238E27FC236}">
-                <a16:creationId xmlns:a16="http://schemas.microsoft.com/office/drawing/2014/main" id="{DD6E7390-9873-4AE5-9684-F5A248DE3C2A}"/>
-              </a:ext>
-            </a:extLst>
-          </p:cNvPr>
-          <p:cNvSpPr>
-            <a:spLocks xmlns:a="http://schemas.openxmlformats.org/drawingml/2006/main" noGrp="1"/>
-          </p:cNvSpPr>
-          <p:nvPr/>
-        </p:nvSpPr>
-        <p:spPr>
-          <a:xfrm xmlns:a="http://schemas.openxmlformats.org/drawingml/2006/main">
-            <a:off x="6496050" y="3000375"/>
-            <a:ext cx="4610100" cy="457200"/>
-          </a:xfrm>
-          <a:prstGeom xmlns:a="http://schemas.openxmlformats.org/drawingml/2006/main" prst="rect">
-            <a:avLst/>
-          </a:prstGeom>
-          <a:noFill xmlns:a="http://schemas.openxmlformats.org/drawingml/2006/main"/>
-          <a:ln xmlns:a="http://schemas.openxmlformats.org/drawingml/2006/main" w="0">
-            <a:noFill/>
-            <a:prstDash val="solid"/>
-          </a:ln>
-        </p:spPr>
-        <p:txBody>
-          <a:bodyPr xmlns:a="http://schemas.openxmlformats.org/drawingml/2006/main"/>
-          <a:lstStyle xmlns:a="http://schemas.openxmlformats.org/drawingml/2006/main"/>
-          <a:p xmlns:a="http://schemas.openxmlformats.org/drawingml/2006/main">
-            <a:pPr algn="l">
-              <a:defRPr sz="1200" b="0">
-                <a:solidFill>
-                  <a:srgbClr val="111111"/>
-                </a:solidFill>
-              </a:defRPr>
-            </a:pPr>
-            <a:r>
-              <a:rPr sz="1200" b="0">
-                <a:solidFill>
-                  <a:srgbClr val="111111"/>
-                </a:solidFill>
-              </a:rPr>
-              <a:t>缺少 VWF 特异结构-功能证据链</a:t>
+                <a16:creationId xmlns:a16="http://schemas.microsoft.com/office/drawing/2014/main" id="{7FCDCD82-B037-4D0C-9459-626865F92861}"/>
+              </a:ext>
+            </a:extLst>
+          </p:cNvPr>
+          <p:cNvSpPr>
+            <a:spLocks xmlns:a="http://schemas.openxmlformats.org/drawingml/2006/main" noGrp="1"/>
+          </p:cNvSpPr>
+          <p:nvPr/>
+        </p:nvSpPr>
+        <p:spPr>
+          <a:xfrm xmlns:a="http://schemas.openxmlformats.org/drawingml/2006/main">
+            <a:off x="6496050" y="2867025"/>
+            <a:ext cx="4610100" cy="438150"/>
+          </a:xfrm>
+          <a:prstGeom xmlns:a="http://schemas.openxmlformats.org/drawingml/2006/main" prst="rect">
+            <a:avLst/>
+          </a:prstGeom>
+          <a:noFill xmlns:a="http://schemas.openxmlformats.org/drawingml/2006/main"/>
+          <a:ln xmlns:a="http://schemas.openxmlformats.org/drawingml/2006/main" w="0">
+            <a:noFill/>
+            <a:prstDash val="solid"/>
+          </a:ln>
+        </p:spPr>
+        <p:txBody>
+          <a:bodyPr xmlns:a="http://schemas.openxmlformats.org/drawingml/2006/main"/>
+          <a:lstStyle xmlns:a="http://schemas.openxmlformats.org/drawingml/2006/main"/>
+          <a:p xmlns:a="http://schemas.openxmlformats.org/drawingml/2006/main">
+            <a:pPr algn="l">
+              <a:defRPr sz="1125" b="0">
+                <a:solidFill>
+                  <a:srgbClr val="111111"/>
+                </a:solidFill>
+              </a:defRPr>
+            </a:pPr>
+            <a:r>
+              <a:rPr sz="1125" b="0">
+                <a:solidFill>
+                  <a:srgbClr val="111111"/>
+                </a:solidFill>
+              </a:rPr>
+              <a:t>静态结构不能覆盖动力学/剪切触发</a:t>
             </a:r>
           </a:p>
         </p:txBody>
@@ -11379,19 +11379,19 @@
           <p:cNvPr id="20" name="">
             <a:extLst xmlns:a="http://schemas.openxmlformats.org/drawingml/2006/main">
               <a:ext uri="{FF2B5EF4-FFF2-40B4-BE49-F238E27FC236}">
-                <a16:creationId xmlns:a16="http://schemas.microsoft.com/office/drawing/2014/main" id="{AD2723C6-4F2A-4B19-9189-1861B0187851}"/>
-              </a:ext>
-            </a:extLst>
-          </p:cNvPr>
-          <p:cNvSpPr>
-            <a:spLocks xmlns:a="http://schemas.openxmlformats.org/drawingml/2006/main" noGrp="1"/>
-          </p:cNvSpPr>
-          <p:nvPr/>
-        </p:nvSpPr>
-        <p:spPr>
-          <a:xfrm xmlns:a="http://schemas.openxmlformats.org/drawingml/2006/main">
-            <a:off x="609600" y="3448050"/>
-            <a:ext cx="10572750" cy="533400"/>
+                <a16:creationId xmlns:a16="http://schemas.microsoft.com/office/drawing/2014/main" id="{288E94C1-8875-4DCB-B001-77BFEF4B6F32}"/>
+              </a:ext>
+            </a:extLst>
+          </p:cNvPr>
+          <p:cNvSpPr>
+            <a:spLocks xmlns:a="http://schemas.openxmlformats.org/drawingml/2006/main" noGrp="1"/>
+          </p:cNvSpPr>
+          <p:nvPr/>
+        </p:nvSpPr>
+        <p:spPr>
+          <a:xfrm xmlns:a="http://schemas.openxmlformats.org/drawingml/2006/main">
+            <a:off x="609600" y="3295650"/>
+            <a:ext cx="10572750" cy="514350"/>
           </a:xfrm>
           <a:prstGeom xmlns:a="http://schemas.openxmlformats.org/drawingml/2006/main" prst="rect">
             <a:avLst/>
@@ -11412,42 +11412,225 @@
           <p:cNvPr id="21" name="">
             <a:extLst xmlns:a="http://schemas.openxmlformats.org/drawingml/2006/main">
               <a:ext uri="{FF2B5EF4-FFF2-40B4-BE49-F238E27FC236}">
-                <a16:creationId xmlns:a16="http://schemas.microsoft.com/office/drawing/2014/main" id="{58D78A7F-5A78-442A-8AE8-412AC6E644A5}"/>
-              </a:ext>
-            </a:extLst>
-          </p:cNvPr>
-          <p:cNvSpPr>
-            <a:spLocks xmlns:a="http://schemas.openxmlformats.org/drawingml/2006/main" noGrp="1"/>
-          </p:cNvSpPr>
-          <p:nvPr/>
-        </p:nvSpPr>
-        <p:spPr>
-          <a:xfrm xmlns:a="http://schemas.openxmlformats.org/drawingml/2006/main">
-            <a:off x="685800" y="3533775"/>
-            <a:ext cx="1847850" cy="457200"/>
-          </a:xfrm>
-          <a:prstGeom xmlns:a="http://schemas.openxmlformats.org/drawingml/2006/main" prst="rect">
-            <a:avLst/>
-          </a:prstGeom>
-          <a:noFill xmlns:a="http://schemas.openxmlformats.org/drawingml/2006/main"/>
-          <a:ln xmlns:a="http://schemas.openxmlformats.org/drawingml/2006/main" w="0">
-            <a:noFill/>
-            <a:prstDash val="solid"/>
-          </a:ln>
-        </p:spPr>
-        <p:txBody>
-          <a:bodyPr xmlns:a="http://schemas.openxmlformats.org/drawingml/2006/main"/>
-          <a:lstStyle xmlns:a="http://schemas.openxmlformats.org/drawingml/2006/main"/>
-          <a:p xmlns:a="http://schemas.openxmlformats.org/drawingml/2006/main">
-            <a:pPr algn="l">
-              <a:defRPr sz="1200" b="0">
-                <a:solidFill>
-                  <a:srgbClr val="111111"/>
-                </a:solidFill>
-              </a:defRPr>
-            </a:pPr>
-            <a:r>
-              <a:rPr sz="1200" b="0">
+                <a16:creationId xmlns:a16="http://schemas.microsoft.com/office/drawing/2014/main" id="{240514BE-C208-421C-B96E-93935FCF1891}"/>
+              </a:ext>
+            </a:extLst>
+          </p:cNvPr>
+          <p:cNvSpPr>
+            <a:spLocks xmlns:a="http://schemas.openxmlformats.org/drawingml/2006/main" noGrp="1"/>
+          </p:cNvSpPr>
+          <p:nvPr/>
+        </p:nvSpPr>
+        <p:spPr>
+          <a:xfrm xmlns:a="http://schemas.openxmlformats.org/drawingml/2006/main">
+            <a:off x="685800" y="3381375"/>
+            <a:ext cx="1847850" cy="438150"/>
+          </a:xfrm>
+          <a:prstGeom xmlns:a="http://schemas.openxmlformats.org/drawingml/2006/main" prst="rect">
+            <a:avLst/>
+          </a:prstGeom>
+          <a:noFill xmlns:a="http://schemas.openxmlformats.org/drawingml/2006/main"/>
+          <a:ln xmlns:a="http://schemas.openxmlformats.org/drawingml/2006/main" w="0">
+            <a:noFill/>
+            <a:prstDash val="solid"/>
+          </a:ln>
+        </p:spPr>
+        <p:txBody>
+          <a:bodyPr xmlns:a="http://schemas.openxmlformats.org/drawingml/2006/main"/>
+          <a:lstStyle xmlns:a="http://schemas.openxmlformats.org/drawingml/2006/main"/>
+          <a:p xmlns:a="http://schemas.openxmlformats.org/drawingml/2006/main">
+            <a:pPr algn="l">
+              <a:defRPr sz="1125" b="0">
+                <a:solidFill>
+                  <a:srgbClr val="111111"/>
+                </a:solidFill>
+              </a:defRPr>
+            </a:pPr>
+            <a:r>
+              <a:rPr sz="1125" b="0">
+                <a:solidFill>
+                  <a:srgbClr val="111111"/>
+                </a:solidFill>
+              </a:rPr>
+              <a:t>Medical LLM agents</a:t>
+            </a:r>
+          </a:p>
+        </p:txBody>
+      </p:sp>
+      <p:sp>
+        <p:nvSpPr>
+          <p:cNvPr id="22" name="">
+            <a:extLst xmlns:a="http://schemas.openxmlformats.org/drawingml/2006/main">
+              <a:ext uri="{FF2B5EF4-FFF2-40B4-BE49-F238E27FC236}">
+                <a16:creationId xmlns:a16="http://schemas.microsoft.com/office/drawing/2014/main" id="{2474E708-144C-4760-BD48-349ACB8B8BA5}"/>
+              </a:ext>
+            </a:extLst>
+          </p:cNvPr>
+          <p:cNvSpPr>
+            <a:spLocks xmlns:a="http://schemas.openxmlformats.org/drawingml/2006/main" noGrp="1"/>
+          </p:cNvSpPr>
+          <p:nvPr/>
+        </p:nvSpPr>
+        <p:spPr>
+          <a:xfrm xmlns:a="http://schemas.openxmlformats.org/drawingml/2006/main">
+            <a:off x="2686050" y="3381375"/>
+            <a:ext cx="3657600" cy="438150"/>
+          </a:xfrm>
+          <a:prstGeom xmlns:a="http://schemas.openxmlformats.org/drawingml/2006/main" prst="rect">
+            <a:avLst/>
+          </a:prstGeom>
+          <a:noFill xmlns:a="http://schemas.openxmlformats.org/drawingml/2006/main"/>
+          <a:ln xmlns:a="http://schemas.openxmlformats.org/drawingml/2006/main" w="0">
+            <a:noFill/>
+            <a:prstDash val="solid"/>
+          </a:ln>
+        </p:spPr>
+        <p:txBody>
+          <a:bodyPr xmlns:a="http://schemas.openxmlformats.org/drawingml/2006/main"/>
+          <a:lstStyle xmlns:a="http://schemas.openxmlformats.org/drawingml/2006/main"/>
+          <a:p xmlns:a="http://schemas.openxmlformats.org/drawingml/2006/main">
+            <a:pPr algn="l">
+              <a:defRPr sz="1125" b="0">
+                <a:solidFill>
+                  <a:srgbClr val="111111"/>
+                </a:solidFill>
+              </a:defRPr>
+            </a:pPr>
+            <a:r>
+              <a:rPr sz="1125" b="0">
+                <a:solidFill>
+                  <a:srgbClr val="111111"/>
+                </a:solidFill>
+              </a:rPr>
+              <a:t>多专家推理框架</a:t>
+            </a:r>
+          </a:p>
+        </p:txBody>
+      </p:sp>
+      <p:sp>
+        <p:nvSpPr>
+          <p:cNvPr id="23" name="">
+            <a:extLst xmlns:a="http://schemas.openxmlformats.org/drawingml/2006/main">
+              <a:ext uri="{FF2B5EF4-FFF2-40B4-BE49-F238E27FC236}">
+                <a16:creationId xmlns:a16="http://schemas.microsoft.com/office/drawing/2014/main" id="{31DC0E11-0A0E-463C-870A-B5A0AF962CA7}"/>
+              </a:ext>
+            </a:extLst>
+          </p:cNvPr>
+          <p:cNvSpPr>
+            <a:spLocks xmlns:a="http://schemas.openxmlformats.org/drawingml/2006/main" noGrp="1"/>
+          </p:cNvSpPr>
+          <p:nvPr/>
+        </p:nvSpPr>
+        <p:spPr>
+          <a:xfrm xmlns:a="http://schemas.openxmlformats.org/drawingml/2006/main">
+            <a:off x="6496050" y="3381375"/>
+            <a:ext cx="4610100" cy="438150"/>
+          </a:xfrm>
+          <a:prstGeom xmlns:a="http://schemas.openxmlformats.org/drawingml/2006/main" prst="rect">
+            <a:avLst/>
+          </a:prstGeom>
+          <a:noFill xmlns:a="http://schemas.openxmlformats.org/drawingml/2006/main"/>
+          <a:ln xmlns:a="http://schemas.openxmlformats.org/drawingml/2006/main" w="0">
+            <a:noFill/>
+            <a:prstDash val="solid"/>
+          </a:ln>
+        </p:spPr>
+        <p:txBody>
+          <a:bodyPr xmlns:a="http://schemas.openxmlformats.org/drawingml/2006/main"/>
+          <a:lstStyle xmlns:a="http://schemas.openxmlformats.org/drawingml/2006/main"/>
+          <a:p xmlns:a="http://schemas.openxmlformats.org/drawingml/2006/main">
+            <a:pPr algn="l">
+              <a:defRPr sz="1125" b="0">
+                <a:solidFill>
+                  <a:srgbClr val="111111"/>
+                </a:solidFill>
+              </a:defRPr>
+            </a:pPr>
+            <a:r>
+              <a:rPr sz="1125" b="0">
+                <a:solidFill>
+                  <a:srgbClr val="111111"/>
+                </a:solidFill>
+              </a:rPr>
+              <a:t>缺少 VWF 特异结构-功能证据链</a:t>
+            </a:r>
+          </a:p>
+        </p:txBody>
+      </p:sp>
+      <p:sp>
+        <p:nvSpPr>
+          <p:cNvPr id="24" name="">
+            <a:extLst xmlns:a="http://schemas.openxmlformats.org/drawingml/2006/main">
+              <a:ext uri="{FF2B5EF4-FFF2-40B4-BE49-F238E27FC236}">
+                <a16:creationId xmlns:a16="http://schemas.microsoft.com/office/drawing/2014/main" id="{D2863790-2F39-4661-9B18-1CD4B1DB8C5A}"/>
+              </a:ext>
+            </a:extLst>
+          </p:cNvPr>
+          <p:cNvSpPr>
+            <a:spLocks xmlns:a="http://schemas.openxmlformats.org/drawingml/2006/main" noGrp="1"/>
+          </p:cNvSpPr>
+          <p:nvPr/>
+        </p:nvSpPr>
+        <p:spPr>
+          <a:xfrm xmlns:a="http://schemas.openxmlformats.org/drawingml/2006/main">
+            <a:off x="609600" y="3810000"/>
+            <a:ext cx="10572750" cy="514350"/>
+          </a:xfrm>
+          <a:prstGeom xmlns:a="http://schemas.openxmlformats.org/drawingml/2006/main" prst="rect">
+            <a:avLst/>
+          </a:prstGeom>
+          <a:solidFill xmlns:a="http://schemas.openxmlformats.org/drawingml/2006/main">
+            <a:srgbClr val="F1F2F4"/>
+          </a:solidFill>
+          <a:ln xmlns:a="http://schemas.openxmlformats.org/drawingml/2006/main" w="9525">
+            <a:solidFill>
+              <a:srgbClr val="D9DDE3"/>
+            </a:solidFill>
+            <a:prstDash val="solid"/>
+          </a:ln>
+        </p:spPr>
+      </p:sp>
+      <p:sp>
+        <p:nvSpPr>
+          <p:cNvPr id="25" name="">
+            <a:extLst xmlns:a="http://schemas.openxmlformats.org/drawingml/2006/main">
+              <a:ext uri="{FF2B5EF4-FFF2-40B4-BE49-F238E27FC236}">
+                <a16:creationId xmlns:a16="http://schemas.microsoft.com/office/drawing/2014/main" id="{2033E297-2B17-498B-8045-1573150430C3}"/>
+              </a:ext>
+            </a:extLst>
+          </p:cNvPr>
+          <p:cNvSpPr>
+            <a:spLocks xmlns:a="http://schemas.openxmlformats.org/drawingml/2006/main" noGrp="1"/>
+          </p:cNvSpPr>
+          <p:nvPr/>
+        </p:nvSpPr>
+        <p:spPr>
+          <a:xfrm xmlns:a="http://schemas.openxmlformats.org/drawingml/2006/main">
+            <a:off x="685800" y="3895725"/>
+            <a:ext cx="1847850" cy="438150"/>
+          </a:xfrm>
+          <a:prstGeom xmlns:a="http://schemas.openxmlformats.org/drawingml/2006/main" prst="rect">
+            <a:avLst/>
+          </a:prstGeom>
+          <a:noFill xmlns:a="http://schemas.openxmlformats.org/drawingml/2006/main"/>
+          <a:ln xmlns:a="http://schemas.openxmlformats.org/drawingml/2006/main" w="0">
+            <a:noFill/>
+            <a:prstDash val="solid"/>
+          </a:ln>
+        </p:spPr>
+        <p:txBody>
+          <a:bodyPr xmlns:a="http://schemas.openxmlformats.org/drawingml/2006/main"/>
+          <a:lstStyle xmlns:a="http://schemas.openxmlformats.org/drawingml/2006/main"/>
+          <a:p xmlns:a="http://schemas.openxmlformats.org/drawingml/2006/main">
+            <a:pPr algn="l">
+              <a:defRPr sz="1125" b="0">
+                <a:solidFill>
+                  <a:srgbClr val="111111"/>
+                </a:solidFill>
+              </a:defRPr>
+            </a:pPr>
+            <a:r>
+              <a:rPr sz="1125" b="0">
                 <a:solidFill>
                   <a:srgbClr val="111111"/>
                 </a:solidFill>
@@ -11459,45 +11642,45 @@
       </p:sp>
       <p:sp>
         <p:nvSpPr>
-          <p:cNvPr id="22" name="">
-            <a:extLst xmlns:a="http://schemas.openxmlformats.org/drawingml/2006/main">
-              <a:ext uri="{FF2B5EF4-FFF2-40B4-BE49-F238E27FC236}">
-                <a16:creationId xmlns:a16="http://schemas.microsoft.com/office/drawing/2014/main" id="{B8E5D8F8-FE66-4599-A8FA-0DE3186679D9}"/>
-              </a:ext>
-            </a:extLst>
-          </p:cNvPr>
-          <p:cNvSpPr>
-            <a:spLocks xmlns:a="http://schemas.openxmlformats.org/drawingml/2006/main" noGrp="1"/>
-          </p:cNvSpPr>
-          <p:nvPr/>
-        </p:nvSpPr>
-        <p:spPr>
-          <a:xfrm xmlns:a="http://schemas.openxmlformats.org/drawingml/2006/main">
-            <a:off x="2686050" y="3533775"/>
-            <a:ext cx="3657600" cy="457200"/>
-          </a:xfrm>
-          <a:prstGeom xmlns:a="http://schemas.openxmlformats.org/drawingml/2006/main" prst="rect">
-            <a:avLst/>
-          </a:prstGeom>
-          <a:noFill xmlns:a="http://schemas.openxmlformats.org/drawingml/2006/main"/>
-          <a:ln xmlns:a="http://schemas.openxmlformats.org/drawingml/2006/main" w="0">
-            <a:noFill/>
-            <a:prstDash val="solid"/>
-          </a:ln>
-        </p:spPr>
-        <p:txBody>
-          <a:bodyPr xmlns:a="http://schemas.openxmlformats.org/drawingml/2006/main"/>
-          <a:lstStyle xmlns:a="http://schemas.openxmlformats.org/drawingml/2006/main"/>
-          <a:p xmlns:a="http://schemas.openxmlformats.org/drawingml/2006/main">
-            <a:pPr algn="l">
-              <a:defRPr sz="1200" b="0">
-                <a:solidFill>
-                  <a:srgbClr val="111111"/>
-                </a:solidFill>
-              </a:defRPr>
-            </a:pPr>
-            <a:r>
-              <a:rPr sz="1200" b="0">
+          <p:cNvPr id="26" name="">
+            <a:extLst xmlns:a="http://schemas.openxmlformats.org/drawingml/2006/main">
+              <a:ext uri="{FF2B5EF4-FFF2-40B4-BE49-F238E27FC236}">
+                <a16:creationId xmlns:a16="http://schemas.microsoft.com/office/drawing/2014/main" id="{EE28192E-7BD8-4CBB-A625-09DED5058F61}"/>
+              </a:ext>
+            </a:extLst>
+          </p:cNvPr>
+          <p:cNvSpPr>
+            <a:spLocks xmlns:a="http://schemas.openxmlformats.org/drawingml/2006/main" noGrp="1"/>
+          </p:cNvSpPr>
+          <p:nvPr/>
+        </p:nvSpPr>
+        <p:spPr>
+          <a:xfrm xmlns:a="http://schemas.openxmlformats.org/drawingml/2006/main">
+            <a:off x="2686050" y="3895725"/>
+            <a:ext cx="3657600" cy="438150"/>
+          </a:xfrm>
+          <a:prstGeom xmlns:a="http://schemas.openxmlformats.org/drawingml/2006/main" prst="rect">
+            <a:avLst/>
+          </a:prstGeom>
+          <a:noFill xmlns:a="http://schemas.openxmlformats.org/drawingml/2006/main"/>
+          <a:ln xmlns:a="http://schemas.openxmlformats.org/drawingml/2006/main" w="0">
+            <a:noFill/>
+            <a:prstDash val="solid"/>
+          </a:ln>
+        </p:spPr>
+        <p:txBody>
+          <a:bodyPr xmlns:a="http://schemas.openxmlformats.org/drawingml/2006/main"/>
+          <a:lstStyle xmlns:a="http://schemas.openxmlformats.org/drawingml/2006/main"/>
+          <a:p xmlns:a="http://schemas.openxmlformats.org/drawingml/2006/main">
+            <a:pPr algn="l">
+              <a:defRPr sz="1125" b="0">
+                <a:solidFill>
+                  <a:srgbClr val="111111"/>
+                </a:solidFill>
+              </a:defRPr>
+            </a:pPr>
+            <a:r>
+              <a:rPr sz="1125" b="0">
                 <a:solidFill>
                   <a:srgbClr val="111111"/>
                 </a:solidFill>
@@ -11509,45 +11692,45 @@
       </p:sp>
       <p:sp>
         <p:nvSpPr>
-          <p:cNvPr id="23" name="">
-            <a:extLst xmlns:a="http://schemas.openxmlformats.org/drawingml/2006/main">
-              <a:ext uri="{FF2B5EF4-FFF2-40B4-BE49-F238E27FC236}">
-                <a16:creationId xmlns:a16="http://schemas.microsoft.com/office/drawing/2014/main" id="{40C48DFA-9D03-40A2-8B66-1C11850639DC}"/>
-              </a:ext>
-            </a:extLst>
-          </p:cNvPr>
-          <p:cNvSpPr>
-            <a:spLocks xmlns:a="http://schemas.openxmlformats.org/drawingml/2006/main" noGrp="1"/>
-          </p:cNvSpPr>
-          <p:nvPr/>
-        </p:nvSpPr>
-        <p:spPr>
-          <a:xfrm xmlns:a="http://schemas.openxmlformats.org/drawingml/2006/main">
-            <a:off x="6496050" y="3533775"/>
-            <a:ext cx="4610100" cy="457200"/>
-          </a:xfrm>
-          <a:prstGeom xmlns:a="http://schemas.openxmlformats.org/drawingml/2006/main" prst="rect">
-            <a:avLst/>
-          </a:prstGeom>
-          <a:noFill xmlns:a="http://schemas.openxmlformats.org/drawingml/2006/main"/>
-          <a:ln xmlns:a="http://schemas.openxmlformats.org/drawingml/2006/main" w="0">
-            <a:noFill/>
-            <a:prstDash val="solid"/>
-          </a:ln>
-        </p:spPr>
-        <p:txBody>
-          <a:bodyPr xmlns:a="http://schemas.openxmlformats.org/drawingml/2006/main"/>
-          <a:lstStyle xmlns:a="http://schemas.openxmlformats.org/drawingml/2006/main"/>
-          <a:p xmlns:a="http://schemas.openxmlformats.org/drawingml/2006/main">
-            <a:pPr algn="l">
-              <a:defRPr sz="1200" b="0">
-                <a:solidFill>
-                  <a:srgbClr val="111111"/>
-                </a:solidFill>
-              </a:defRPr>
-            </a:pPr>
-            <a:r>
-              <a:rPr sz="1200" b="0">
+          <p:cNvPr id="27" name="">
+            <a:extLst xmlns:a="http://schemas.openxmlformats.org/drawingml/2006/main">
+              <a:ext uri="{FF2B5EF4-FFF2-40B4-BE49-F238E27FC236}">
+                <a16:creationId xmlns:a16="http://schemas.microsoft.com/office/drawing/2014/main" id="{C7C82900-D9A5-40E8-90A9-BD851088E7F3}"/>
+              </a:ext>
+            </a:extLst>
+          </p:cNvPr>
+          <p:cNvSpPr>
+            <a:spLocks xmlns:a="http://schemas.openxmlformats.org/drawingml/2006/main" noGrp="1"/>
+          </p:cNvSpPr>
+          <p:nvPr/>
+        </p:nvSpPr>
+        <p:spPr>
+          <a:xfrm xmlns:a="http://schemas.openxmlformats.org/drawingml/2006/main">
+            <a:off x="6496050" y="3895725"/>
+            <a:ext cx="4610100" cy="438150"/>
+          </a:xfrm>
+          <a:prstGeom xmlns:a="http://schemas.openxmlformats.org/drawingml/2006/main" prst="rect">
+            <a:avLst/>
+          </a:prstGeom>
+          <a:noFill xmlns:a="http://schemas.openxmlformats.org/drawingml/2006/main"/>
+          <a:ln xmlns:a="http://schemas.openxmlformats.org/drawingml/2006/main" w="0">
+            <a:noFill/>
+            <a:prstDash val="solid"/>
+          </a:ln>
+        </p:spPr>
+        <p:txBody>
+          <a:bodyPr xmlns:a="http://schemas.openxmlformats.org/drawingml/2006/main"/>
+          <a:lstStyle xmlns:a="http://schemas.openxmlformats.org/drawingml/2006/main"/>
+          <a:p xmlns:a="http://schemas.openxmlformats.org/drawingml/2006/main">
+            <a:pPr algn="l">
+              <a:defRPr sz="1125" b="0">
+                <a:solidFill>
+                  <a:srgbClr val="111111"/>
+                </a:solidFill>
+              </a:defRPr>
+            </a:pPr>
+            <a:r>
+              <a:rPr sz="1125" b="0">
                 <a:solidFill>
                   <a:srgbClr val="111111"/>
                 </a:solidFill>
@@ -11559,22 +11742,22 @@
       </p:sp>
       <p:sp>
         <p:nvSpPr>
-          <p:cNvPr id="24" name="">
-            <a:extLst xmlns:a="http://schemas.openxmlformats.org/drawingml/2006/main">
-              <a:ext uri="{FF2B5EF4-FFF2-40B4-BE49-F238E27FC236}">
-                <a16:creationId xmlns:a16="http://schemas.microsoft.com/office/drawing/2014/main" id="{9B7F58BF-1B6E-4DE9-9E10-83B5D553DDB8}"/>
-              </a:ext>
-            </a:extLst>
-          </p:cNvPr>
-          <p:cNvSpPr>
-            <a:spLocks xmlns:a="http://schemas.openxmlformats.org/drawingml/2006/main" noGrp="1"/>
-          </p:cNvSpPr>
-          <p:nvPr/>
-        </p:nvSpPr>
-        <p:spPr>
-          <a:xfrm xmlns:a="http://schemas.openxmlformats.org/drawingml/2006/main">
-            <a:off x="1066800" y="4552950"/>
-            <a:ext cx="9334500" cy="628650"/>
+          <p:cNvPr id="28" name="">
+            <a:extLst xmlns:a="http://schemas.openxmlformats.org/drawingml/2006/main">
+              <a:ext uri="{FF2B5EF4-FFF2-40B4-BE49-F238E27FC236}">
+                <a16:creationId xmlns:a16="http://schemas.microsoft.com/office/drawing/2014/main" id="{AC91DDEF-4614-4E8B-9C0A-CF9C2AB10AFB}"/>
+              </a:ext>
+            </a:extLst>
+          </p:cNvPr>
+          <p:cNvSpPr>
+            <a:spLocks xmlns:a="http://schemas.openxmlformats.org/drawingml/2006/main" noGrp="1"/>
+          </p:cNvSpPr>
+          <p:nvPr/>
+        </p:nvSpPr>
+        <p:spPr>
+          <a:xfrm xmlns:a="http://schemas.openxmlformats.org/drawingml/2006/main">
+            <a:off x="1066800" y="4686300"/>
+            <a:ext cx="9334500" cy="781050"/>
           </a:xfrm>
           <a:prstGeom xmlns:a="http://schemas.openxmlformats.org/drawingml/2006/main" prst="rect">
             <a:avLst/>
@@ -11592,45 +11775,45 @@
       </p:sp>
       <p:sp>
         <p:nvSpPr>
-          <p:cNvPr id="25" name="">
-            <a:extLst xmlns:a="http://schemas.openxmlformats.org/drawingml/2006/main">
-              <a:ext uri="{FF2B5EF4-FFF2-40B4-BE49-F238E27FC236}">
-                <a16:creationId xmlns:a16="http://schemas.microsoft.com/office/drawing/2014/main" id="{F2B5D01A-BA54-407E-8AC6-4AC8F6789DF0}"/>
-              </a:ext>
-            </a:extLst>
-          </p:cNvPr>
-          <p:cNvSpPr>
-            <a:spLocks xmlns:a="http://schemas.openxmlformats.org/drawingml/2006/main" noGrp="1"/>
-          </p:cNvSpPr>
-          <p:nvPr/>
-        </p:nvSpPr>
-        <p:spPr>
-          <a:xfrm xmlns:a="http://schemas.openxmlformats.org/drawingml/2006/main">
-            <a:off x="1390650" y="4733925"/>
-            <a:ext cx="8667750" cy="304800"/>
-          </a:xfrm>
-          <a:prstGeom xmlns:a="http://schemas.openxmlformats.org/drawingml/2006/main" prst="rect">
-            <a:avLst/>
-          </a:prstGeom>
-          <a:noFill xmlns:a="http://schemas.openxmlformats.org/drawingml/2006/main"/>
-          <a:ln xmlns:a="http://schemas.openxmlformats.org/drawingml/2006/main" w="0">
-            <a:noFill/>
-            <a:prstDash val="solid"/>
-          </a:ln>
-        </p:spPr>
-        <p:txBody>
-          <a:bodyPr xmlns:a="http://schemas.openxmlformats.org/drawingml/2006/main"/>
-          <a:lstStyle xmlns:a="http://schemas.openxmlformats.org/drawingml/2006/main"/>
-          <a:p xmlns:a="http://schemas.openxmlformats.org/drawingml/2006/main">
-            <a:pPr algn="l">
-              <a:defRPr sz="1500" b="1">
+          <p:cNvPr id="29" name="">
+            <a:extLst xmlns:a="http://schemas.openxmlformats.org/drawingml/2006/main">
+              <a:ext uri="{FF2B5EF4-FFF2-40B4-BE49-F238E27FC236}">
+                <a16:creationId xmlns:a16="http://schemas.microsoft.com/office/drawing/2014/main" id="{6038FC9C-CB1F-4032-8BCB-D3BEB2D6D922}"/>
+              </a:ext>
+            </a:extLst>
+          </p:cNvPr>
+          <p:cNvSpPr>
+            <a:spLocks xmlns:a="http://schemas.openxmlformats.org/drawingml/2006/main" noGrp="1"/>
+          </p:cNvSpPr>
+          <p:nvPr/>
+        </p:nvSpPr>
+        <p:spPr>
+          <a:xfrm xmlns:a="http://schemas.openxmlformats.org/drawingml/2006/main">
+            <a:off x="1390650" y="4857750"/>
+            <a:ext cx="8667750" cy="457200"/>
+          </a:xfrm>
+          <a:prstGeom xmlns:a="http://schemas.openxmlformats.org/drawingml/2006/main" prst="rect">
+            <a:avLst/>
+          </a:prstGeom>
+          <a:noFill xmlns:a="http://schemas.openxmlformats.org/drawingml/2006/main"/>
+          <a:ln xmlns:a="http://schemas.openxmlformats.org/drawingml/2006/main" w="0">
+            <a:noFill/>
+            <a:prstDash val="solid"/>
+          </a:ln>
+        </p:spPr>
+        <p:txBody>
+          <a:bodyPr xmlns:a="http://schemas.openxmlformats.org/drawingml/2006/main"/>
+          <a:lstStyle xmlns:a="http://schemas.openxmlformats.org/drawingml/2006/main"/>
+          <a:p xmlns:a="http://schemas.openxmlformats.org/drawingml/2006/main">
+            <a:pPr algn="l">
+              <a:defRPr sz="1350" b="1">
                 <a:solidFill>
                   <a:srgbClr val="FFFFFF"/>
                 </a:solidFill>
               </a:defRPr>
             </a:pPr>
             <a:r>
-              <a:rPr sz="1500" b="1">
+              <a:rPr sz="1350" b="1">
                 <a:solidFill>
                   <a:srgbClr val="FFFFFF"/>
                 </a:solidFill>
@@ -11642,10 +11825,10 @@
       </p:sp>
       <p:sp>
         <p:nvSpPr>
-          <p:cNvPr id="26" name="">
-            <a:extLst xmlns:a="http://schemas.openxmlformats.org/drawingml/2006/main">
-              <a:ext uri="{FF2B5EF4-FFF2-40B4-BE49-F238E27FC236}">
-                <a16:creationId xmlns:a16="http://schemas.microsoft.com/office/drawing/2014/main" id="{69406867-3FB7-4A61-B4D7-0F8575153DBF}"/>
+          <p:cNvPr id="30" name="">
+            <a:extLst xmlns:a="http://schemas.openxmlformats.org/drawingml/2006/main">
+              <a:ext uri="{FF2B5EF4-FFF2-40B4-BE49-F238E27FC236}">
+                <a16:creationId xmlns:a16="http://schemas.microsoft.com/office/drawing/2014/main" id="{4531EF5B-ECA4-41DB-B079-5F6F4BE0608A}"/>
               </a:ext>
             </a:extLst>
           </p:cNvPr>
@@ -11685,7 +11868,7 @@
                   <a:srgbClr val="777777"/>
                 </a:solidFill>
               </a:rPr>
-              <a:t>Sources: AF3 Nature 2024; Boltz-2 technical report/repository; AlphaMissense Science 2023/PubMed.</a:t>
+              <a:t>Sources: ClinGen VWD VCEP / CSpec registry; AF3 Nature 2024; Boltz-2; AlphaMissense Science 2023.</a:t>
             </a:r>
           </a:p>
         </p:txBody>
@@ -11693,7 +11876,7 @@
     </p:spTree>
     <p:extLst>
       <p:ext uri="{BB962C8B-B14F-4D97-AF65-F5344CB8AC3E}">
-        <p14:creationId xmlns:p14="http://schemas.microsoft.com/office/powerpoint/2010/main" val="223324987"/>
+        <p14:creationId xmlns:p14="http://schemas.microsoft.com/office/powerpoint/2010/main" val="230485675"/>
       </p:ext>
     </p:extLst>
   </p:cSld>
@@ -11724,7 +11907,7 @@
           <p:cNvPr id="1" name="">
             <a:extLst xmlns:a="http://schemas.openxmlformats.org/drawingml/2006/main">
               <a:ext uri="{FF2B5EF4-FFF2-40B4-BE49-F238E27FC236}">
-                <a16:creationId xmlns:a16="http://schemas.microsoft.com/office/drawing/2014/main" id="{DDDAD8BE-820E-4018-8D4D-99D077C1C21D}"/>
+                <a16:creationId xmlns:a16="http://schemas.microsoft.com/office/drawing/2014/main" id="{EBF554A1-3914-4A08-B566-05870CF58DC5}"/>
               </a:ext>
             </a:extLst>
           </p:cNvPr>
@@ -11774,7 +11957,7 @@
           <p:cNvPr id="2" name="">
             <a:extLst xmlns:a="http://schemas.openxmlformats.org/drawingml/2006/main">
               <a:ext uri="{FF2B5EF4-FFF2-40B4-BE49-F238E27FC236}">
-                <a16:creationId xmlns:a16="http://schemas.microsoft.com/office/drawing/2014/main" id="{02AAFDAF-781F-452C-8B7C-2B944757C14A}"/>
+                <a16:creationId xmlns:a16="http://schemas.microsoft.com/office/drawing/2014/main" id="{3E6E479E-CBC8-4D25-99FB-47B7639D00E3}"/>
               </a:ext>
             </a:extLst>
           </p:cNvPr>
@@ -11814,7 +11997,7 @@
                   <a:srgbClr val="555555"/>
                 </a:solidFill>
               </a:rPr>
-              <a:t>汇报时建议把“系统还低”说成“机制补全空间明确”。</a:t>
+              <a:t>无位置记忆后的结果更保守，也更能暴露真正的机制缺口。</a:t>
             </a:r>
           </a:p>
         </p:txBody>
@@ -11824,7 +12007,7 @@
           <p:cNvPr id="3" name="">
             <a:extLst xmlns:a="http://schemas.openxmlformats.org/drawingml/2006/main">
               <a:ext uri="{FF2B5EF4-FFF2-40B4-BE49-F238E27FC236}">
-                <a16:creationId xmlns:a16="http://schemas.microsoft.com/office/drawing/2014/main" id="{CC476058-29F8-4519-B4A3-0D2CEBEE31D4}"/>
+                <a16:creationId xmlns:a16="http://schemas.microsoft.com/office/drawing/2014/main" id="{37CA74F7-E503-4F94-8A2D-0E8DCCF9E104}"/>
               </a:ext>
             </a:extLst>
           </p:cNvPr>
@@ -11874,7 +12057,7 @@
           <p:cNvPr id="4" name="">
             <a:extLst xmlns:a="http://schemas.openxmlformats.org/drawingml/2006/main">
               <a:ext uri="{FF2B5EF4-FFF2-40B4-BE49-F238E27FC236}">
-                <a16:creationId xmlns:a16="http://schemas.microsoft.com/office/drawing/2014/main" id="{2DCA07AB-2B3B-478A-A834-CD46CCDAE08B}"/>
+                <a16:creationId xmlns:a16="http://schemas.microsoft.com/office/drawing/2014/main" id="{43F81E66-5E22-47B3-8D51-1A03EC39030E}"/>
               </a:ext>
             </a:extLst>
           </p:cNvPr>
@@ -11907,7 +12090,7 @@
           <p:cNvPr id="5" name="">
             <a:extLst xmlns:a="http://schemas.openxmlformats.org/drawingml/2006/main">
               <a:ext uri="{FF2B5EF4-FFF2-40B4-BE49-F238E27FC236}">
-                <a16:creationId xmlns:a16="http://schemas.microsoft.com/office/drawing/2014/main" id="{B6C425D7-9826-4AEE-BEEA-7A5BE8F52968}"/>
+                <a16:creationId xmlns:a16="http://schemas.microsoft.com/office/drawing/2014/main" id="{8DEB44C5-616C-4A6C-B2A7-42AF90513FDB}"/>
               </a:ext>
             </a:extLst>
           </p:cNvPr>
@@ -11957,7 +12140,7 @@
           <p:cNvPr id="6" name="">
             <a:extLst xmlns:a="http://schemas.openxmlformats.org/drawingml/2006/main">
               <a:ext uri="{FF2B5EF4-FFF2-40B4-BE49-F238E27FC236}">
-                <a16:creationId xmlns:a16="http://schemas.microsoft.com/office/drawing/2014/main" id="{7F2FD8E9-1CD4-4CE7-A77F-4381C8074E2B}"/>
+                <a16:creationId xmlns:a16="http://schemas.microsoft.com/office/drawing/2014/main" id="{12D881EA-7952-4100-8423-14C24BD8C697}"/>
               </a:ext>
             </a:extLst>
           </p:cNvPr>
@@ -11997,7 +12180,7 @@
                   <a:srgbClr val="111111"/>
                 </a:solidFill>
               </a:rPr>
-              <a:t>“机制驱动的 VWD 智能体辅助分型/诊断系统”符合项目实质；建议强调 research prototype / decision support。</a:t>
+              <a:t>“机制驱动的 VWD 智能体辅助分型/诊断系统”符合项目实质；定位为 research prototype / decision support。</a:t>
             </a:r>
           </a:p>
         </p:txBody>
@@ -12007,7 +12190,7 @@
           <p:cNvPr id="7" name="">
             <a:extLst xmlns:a="http://schemas.openxmlformats.org/drawingml/2006/main">
               <a:ext uri="{FF2B5EF4-FFF2-40B4-BE49-F238E27FC236}">
-                <a16:creationId xmlns:a16="http://schemas.microsoft.com/office/drawing/2014/main" id="{BD5036E9-AD93-4772-9E3D-EBE9BA9607C5}"/>
+                <a16:creationId xmlns:a16="http://schemas.microsoft.com/office/drawing/2014/main" id="{14C08DDB-B19A-4128-B68C-F208064155EA}"/>
               </a:ext>
             </a:extLst>
           </p:cNvPr>
@@ -12040,7 +12223,7 @@
           <p:cNvPr id="8" name="">
             <a:extLst xmlns:a="http://schemas.openxmlformats.org/drawingml/2006/main">
               <a:ext uri="{FF2B5EF4-FFF2-40B4-BE49-F238E27FC236}">
-                <a16:creationId xmlns:a16="http://schemas.microsoft.com/office/drawing/2014/main" id="{52C250A8-AC1F-4539-8633-56CCCED5186B}"/>
+                <a16:creationId xmlns:a16="http://schemas.microsoft.com/office/drawing/2014/main" id="{167D4348-C331-430A-8C8A-B6127F7A111F}"/>
               </a:ext>
             </a:extLst>
           </p:cNvPr>
@@ -12090,7 +12273,7 @@
           <p:cNvPr id="9" name="">
             <a:extLst xmlns:a="http://schemas.openxmlformats.org/drawingml/2006/main">
               <a:ext uri="{FF2B5EF4-FFF2-40B4-BE49-F238E27FC236}">
-                <a16:creationId xmlns:a16="http://schemas.microsoft.com/office/drawing/2014/main" id="{D4821F14-49DF-43C8-BEBB-C65C7797C279}"/>
+                <a16:creationId xmlns:a16="http://schemas.microsoft.com/office/drawing/2014/main" id="{468B8DBF-EEE4-4C92-A853-AD1B009A6D5D}"/>
               </a:ext>
             </a:extLst>
           </p:cNvPr>
@@ -12140,7 +12323,7 @@
           <p:cNvPr id="10" name="">
             <a:extLst xmlns:a="http://schemas.openxmlformats.org/drawingml/2006/main">
               <a:ext uri="{FF2B5EF4-FFF2-40B4-BE49-F238E27FC236}">
-                <a16:creationId xmlns:a16="http://schemas.microsoft.com/office/drawing/2014/main" id="{EE500EB7-51BD-459A-BC6D-5F3571E35E39}"/>
+                <a16:creationId xmlns:a16="http://schemas.microsoft.com/office/drawing/2014/main" id="{CD096CAD-065E-4702-BFA3-2D70784F4AFF}"/>
               </a:ext>
             </a:extLst>
           </p:cNvPr>
@@ -12173,7 +12356,7 @@
           <p:cNvPr id="11" name="">
             <a:extLst xmlns:a="http://schemas.openxmlformats.org/drawingml/2006/main">
               <a:ext uri="{FF2B5EF4-FFF2-40B4-BE49-F238E27FC236}">
-                <a16:creationId xmlns:a16="http://schemas.microsoft.com/office/drawing/2014/main" id="{6A95F630-BB82-4A89-AEAB-42DCF8CF3EAC}"/>
+                <a16:creationId xmlns:a16="http://schemas.microsoft.com/office/drawing/2014/main" id="{ADDD7B2D-7902-462B-87A6-EB4BD9E5A70A}"/>
               </a:ext>
             </a:extLst>
           </p:cNvPr>
@@ -12223,7 +12406,7 @@
           <p:cNvPr id="12" name="">
             <a:extLst xmlns:a="http://schemas.openxmlformats.org/drawingml/2006/main">
               <a:ext uri="{FF2B5EF4-FFF2-40B4-BE49-F238E27FC236}">
-                <a16:creationId xmlns:a16="http://schemas.microsoft.com/office/drawing/2014/main" id="{D084EF5E-E66F-41B4-8AFF-EACE0F331AD9}"/>
+                <a16:creationId xmlns:a16="http://schemas.microsoft.com/office/drawing/2014/main" id="{6BB3DC45-AADD-4380-9AFD-8FC342DDA8B8}"/>
               </a:ext>
             </a:extLst>
           </p:cNvPr>
@@ -12273,7 +12456,7 @@
           <p:cNvPr id="13" name="">
             <a:extLst xmlns:a="http://schemas.openxmlformats.org/drawingml/2006/main">
               <a:ext uri="{FF2B5EF4-FFF2-40B4-BE49-F238E27FC236}">
-                <a16:creationId xmlns:a16="http://schemas.microsoft.com/office/drawing/2014/main" id="{27032EE3-76B2-41E6-A23A-7119C0A2DFD9}"/>
+                <a16:creationId xmlns:a16="http://schemas.microsoft.com/office/drawing/2014/main" id="{42A16EF3-5FAB-4B8B-BD39-FB3FCCFBBBED}"/>
               </a:ext>
             </a:extLst>
           </p:cNvPr>
@@ -12321,7 +12504,7 @@
     </p:spTree>
     <p:extLst>
       <p:ext uri="{BB962C8B-B14F-4D97-AF65-F5344CB8AC3E}">
-        <p14:creationId xmlns:p14="http://schemas.microsoft.com/office/powerpoint/2010/main" val="372270034"/>
+        <p14:creationId xmlns:p14="http://schemas.microsoft.com/office/powerpoint/2010/main" val="847787460"/>
       </p:ext>
     </p:extLst>
   </p:cSld>
@@ -12352,7 +12535,7 @@
           <p:cNvPr id="1" name="">
             <a:extLst xmlns:a="http://schemas.openxmlformats.org/drawingml/2006/main">
               <a:ext uri="{FF2B5EF4-FFF2-40B4-BE49-F238E27FC236}">
-                <a16:creationId xmlns:a16="http://schemas.microsoft.com/office/drawing/2014/main" id="{E29CF56B-BF94-4B8B-9FC4-0DEB0A22B079}"/>
+                <a16:creationId xmlns:a16="http://schemas.microsoft.com/office/drawing/2014/main" id="{65700C2C-45AF-4E90-BDFF-F8C67DBE97F4}"/>
               </a:ext>
             </a:extLst>
           </p:cNvPr>
@@ -12402,7 +12585,7 @@
           <p:cNvPr id="2" name="">
             <a:extLst xmlns:a="http://schemas.openxmlformats.org/drawingml/2006/main">
               <a:ext uri="{FF2B5EF4-FFF2-40B4-BE49-F238E27FC236}">
-                <a16:creationId xmlns:a16="http://schemas.microsoft.com/office/drawing/2014/main" id="{359C3952-AF49-4CBC-913C-1D87FE7A7DEA}"/>
+                <a16:creationId xmlns:a16="http://schemas.microsoft.com/office/drawing/2014/main" id="{CED6169F-3E3C-497A-AEA2-3655097C2229}"/>
               </a:ext>
             </a:extLst>
           </p:cNvPr>
@@ -12452,7 +12635,7 @@
           <p:cNvPr id="3" name="">
             <a:extLst xmlns:a="http://schemas.openxmlformats.org/drawingml/2006/main">
               <a:ext uri="{FF2B5EF4-FFF2-40B4-BE49-F238E27FC236}">
-                <a16:creationId xmlns:a16="http://schemas.microsoft.com/office/drawing/2014/main" id="{669B7E32-DF1F-4D42-926E-87B866BD126C}"/>
+                <a16:creationId xmlns:a16="http://schemas.microsoft.com/office/drawing/2014/main" id="{8F9E1D33-67F3-45AE-BF2A-F175DE37B7EB}"/>
               </a:ext>
             </a:extLst>
           </p:cNvPr>
@@ -12502,7 +12685,7 @@
           <p:cNvPr id="4" name="">
             <a:extLst xmlns:a="http://schemas.openxmlformats.org/drawingml/2006/main">
               <a:ext uri="{FF2B5EF4-FFF2-40B4-BE49-F238E27FC236}">
-                <a16:creationId xmlns:a16="http://schemas.microsoft.com/office/drawing/2014/main" id="{79BB2839-19DF-4E3D-ACD5-17D388EA7288}"/>
+                <a16:creationId xmlns:a16="http://schemas.microsoft.com/office/drawing/2014/main" id="{B6297D9E-6A24-4E3F-81A8-48C7AD65DCDA}"/>
               </a:ext>
             </a:extLst>
           </p:cNvPr>
@@ -12535,7 +12718,7 @@
           <p:cNvPr id="5" name="">
             <a:extLst xmlns:a="http://schemas.openxmlformats.org/drawingml/2006/main">
               <a:ext uri="{FF2B5EF4-FFF2-40B4-BE49-F238E27FC236}">
-                <a16:creationId xmlns:a16="http://schemas.microsoft.com/office/drawing/2014/main" id="{115CC030-5B44-4276-ABDB-A2205A9162E1}"/>
+                <a16:creationId xmlns:a16="http://schemas.microsoft.com/office/drawing/2014/main" id="{EEA42556-004C-445A-95A2-FFEC11B3A77A}"/>
               </a:ext>
             </a:extLst>
           </p:cNvPr>
@@ -12585,7 +12768,7 @@
           <p:cNvPr id="6" name="">
             <a:extLst xmlns:a="http://schemas.openxmlformats.org/drawingml/2006/main">
               <a:ext uri="{FF2B5EF4-FFF2-40B4-BE49-F238E27FC236}">
-                <a16:creationId xmlns:a16="http://schemas.microsoft.com/office/drawing/2014/main" id="{1D96F7D4-6FFE-46DA-9989-BE0DC76FB19F}"/>
+                <a16:creationId xmlns:a16="http://schemas.microsoft.com/office/drawing/2014/main" id="{B45C5952-AA86-4F82-B1BE-E77821A46F3F}"/>
               </a:ext>
             </a:extLst>
           </p:cNvPr>
@@ -12635,7 +12818,7 @@
           <p:cNvPr id="7" name="">
             <a:extLst xmlns:a="http://schemas.openxmlformats.org/drawingml/2006/main">
               <a:ext uri="{FF2B5EF4-FFF2-40B4-BE49-F238E27FC236}">
-                <a16:creationId xmlns:a16="http://schemas.microsoft.com/office/drawing/2014/main" id="{0EB165C7-C130-47E3-97AF-8A0C8A85CFC9}"/>
+                <a16:creationId xmlns:a16="http://schemas.microsoft.com/office/drawing/2014/main" id="{9AE99093-A33A-494A-B30B-5FE5C40546D0}"/>
               </a:ext>
             </a:extLst>
           </p:cNvPr>
@@ -12685,7 +12868,7 @@
           <p:cNvPr id="8" name="">
             <a:extLst xmlns:a="http://schemas.openxmlformats.org/drawingml/2006/main">
               <a:ext uri="{FF2B5EF4-FFF2-40B4-BE49-F238E27FC236}">
-                <a16:creationId xmlns:a16="http://schemas.microsoft.com/office/drawing/2014/main" id="{ECB036BC-19A4-44E8-AF24-673C4ADBBFC2}"/>
+                <a16:creationId xmlns:a16="http://schemas.microsoft.com/office/drawing/2014/main" id="{0C5723E9-9D88-4D2C-AB1A-F8F2720DC51E}"/>
               </a:ext>
             </a:extLst>
           </p:cNvPr>
@@ -12718,7 +12901,7 @@
           <p:cNvPr id="9" name="">
             <a:extLst xmlns:a="http://schemas.openxmlformats.org/drawingml/2006/main">
               <a:ext uri="{FF2B5EF4-FFF2-40B4-BE49-F238E27FC236}">
-                <a16:creationId xmlns:a16="http://schemas.microsoft.com/office/drawing/2014/main" id="{041E21AD-4FDD-4652-AAC5-783458BA5E9B}"/>
+                <a16:creationId xmlns:a16="http://schemas.microsoft.com/office/drawing/2014/main" id="{BBA46D38-E093-4012-9A22-7FCC70D503FE}"/>
               </a:ext>
             </a:extLst>
           </p:cNvPr>
@@ -12768,7 +12951,7 @@
           <p:cNvPr id="10" name="">
             <a:extLst xmlns:a="http://schemas.openxmlformats.org/drawingml/2006/main">
               <a:ext uri="{FF2B5EF4-FFF2-40B4-BE49-F238E27FC236}">
-                <a16:creationId xmlns:a16="http://schemas.microsoft.com/office/drawing/2014/main" id="{517E3E8F-10FE-41BF-A015-671844BDC18E}"/>
+                <a16:creationId xmlns:a16="http://schemas.microsoft.com/office/drawing/2014/main" id="{4B38292F-AFF5-40D6-B5D4-18C46554944A}"/>
               </a:ext>
             </a:extLst>
           </p:cNvPr>
@@ -12818,7 +13001,7 @@
           <p:cNvPr id="11" name="">
             <a:extLst xmlns:a="http://schemas.openxmlformats.org/drawingml/2006/main">
               <a:ext uri="{FF2B5EF4-FFF2-40B4-BE49-F238E27FC236}">
-                <a16:creationId xmlns:a16="http://schemas.microsoft.com/office/drawing/2014/main" id="{EBB3978D-CE65-44E8-8B04-E8A2BCDA8B89}"/>
+                <a16:creationId xmlns:a16="http://schemas.microsoft.com/office/drawing/2014/main" id="{7CDE2C9E-4144-4A13-81F4-1FC9E97FDCB1}"/>
               </a:ext>
             </a:extLst>
           </p:cNvPr>
@@ -12868,7 +13051,7 @@
           <p:cNvPr id="12" name="">
             <a:extLst xmlns:a="http://schemas.openxmlformats.org/drawingml/2006/main">
               <a:ext uri="{FF2B5EF4-FFF2-40B4-BE49-F238E27FC236}">
-                <a16:creationId xmlns:a16="http://schemas.microsoft.com/office/drawing/2014/main" id="{F39D6938-2F2B-4697-A97D-A594DD6BCCB8}"/>
+                <a16:creationId xmlns:a16="http://schemas.microsoft.com/office/drawing/2014/main" id="{40F7051F-EEE9-48E1-AFC6-424221265BB6}"/>
               </a:ext>
             </a:extLst>
           </p:cNvPr>
@@ -12901,7 +13084,7 @@
           <p:cNvPr id="13" name="">
             <a:extLst xmlns:a="http://schemas.openxmlformats.org/drawingml/2006/main">
               <a:ext uri="{FF2B5EF4-FFF2-40B4-BE49-F238E27FC236}">
-                <a16:creationId xmlns:a16="http://schemas.microsoft.com/office/drawing/2014/main" id="{30FBD098-5E5C-4E5E-8017-2009ACBDDFE3}"/>
+                <a16:creationId xmlns:a16="http://schemas.microsoft.com/office/drawing/2014/main" id="{E3BDE267-AEBD-446D-B7E1-8167E319C394}"/>
               </a:ext>
             </a:extLst>
           </p:cNvPr>
@@ -12951,7 +13134,7 @@
           <p:cNvPr id="14" name="">
             <a:extLst xmlns:a="http://schemas.openxmlformats.org/drawingml/2006/main">
               <a:ext uri="{FF2B5EF4-FFF2-40B4-BE49-F238E27FC236}">
-                <a16:creationId xmlns:a16="http://schemas.microsoft.com/office/drawing/2014/main" id="{66CA04A6-DA0E-4849-B0CC-22B1C7C3CB37}"/>
+                <a16:creationId xmlns:a16="http://schemas.microsoft.com/office/drawing/2014/main" id="{16C88CB2-2006-4E38-ABF1-8844A8DE84D2}"/>
               </a:ext>
             </a:extLst>
           </p:cNvPr>
@@ -13001,7 +13184,7 @@
           <p:cNvPr id="15" name="">
             <a:extLst xmlns:a="http://schemas.openxmlformats.org/drawingml/2006/main">
               <a:ext uri="{FF2B5EF4-FFF2-40B4-BE49-F238E27FC236}">
-                <a16:creationId xmlns:a16="http://schemas.microsoft.com/office/drawing/2014/main" id="{58F395FA-5B3D-4D0E-AA32-BE16D9998315}"/>
+                <a16:creationId xmlns:a16="http://schemas.microsoft.com/office/drawing/2014/main" id="{24148721-4AFB-4457-B4D5-5B17A66DB29A}"/>
               </a:ext>
             </a:extLst>
           </p:cNvPr>
@@ -13051,7 +13234,7 @@
           <p:cNvPr id="16" name="">
             <a:extLst xmlns:a="http://schemas.openxmlformats.org/drawingml/2006/main">
               <a:ext uri="{FF2B5EF4-FFF2-40B4-BE49-F238E27FC236}">
-                <a16:creationId xmlns:a16="http://schemas.microsoft.com/office/drawing/2014/main" id="{3C55E271-C129-43F1-B64B-9224DEE91530}"/>
+                <a16:creationId xmlns:a16="http://schemas.microsoft.com/office/drawing/2014/main" id="{22DAC379-72E3-43FF-BA8F-8971C722C745}"/>
               </a:ext>
             </a:extLst>
           </p:cNvPr>
@@ -13084,7 +13267,7 @@
           <p:cNvPr id="17" name="">
             <a:extLst xmlns:a="http://schemas.openxmlformats.org/drawingml/2006/main">
               <a:ext uri="{FF2B5EF4-FFF2-40B4-BE49-F238E27FC236}">
-                <a16:creationId xmlns:a16="http://schemas.microsoft.com/office/drawing/2014/main" id="{A23C0434-A311-4F40-8515-604D95B60EB0}"/>
+                <a16:creationId xmlns:a16="http://schemas.microsoft.com/office/drawing/2014/main" id="{DD50574C-8384-4243-890F-57F61C84B266}"/>
               </a:ext>
             </a:extLst>
           </p:cNvPr>
@@ -13134,7 +13317,7 @@
           <p:cNvPr id="18" name="">
             <a:extLst xmlns:a="http://schemas.openxmlformats.org/drawingml/2006/main">
               <a:ext uri="{FF2B5EF4-FFF2-40B4-BE49-F238E27FC236}">
-                <a16:creationId xmlns:a16="http://schemas.microsoft.com/office/drawing/2014/main" id="{89345486-2BD4-4E23-93D9-232859ECCB70}"/>
+                <a16:creationId xmlns:a16="http://schemas.microsoft.com/office/drawing/2014/main" id="{9B8D920E-EA97-4AAC-8DD0-5830F5B9F482}"/>
               </a:ext>
             </a:extLst>
           </p:cNvPr>
@@ -13184,7 +13367,7 @@
           <p:cNvPr id="19" name="">
             <a:extLst xmlns:a="http://schemas.openxmlformats.org/drawingml/2006/main">
               <a:ext uri="{FF2B5EF4-FFF2-40B4-BE49-F238E27FC236}">
-                <a16:creationId xmlns:a16="http://schemas.microsoft.com/office/drawing/2014/main" id="{47E1E90D-0922-450F-9563-DD30047E5C5E}"/>
+                <a16:creationId xmlns:a16="http://schemas.microsoft.com/office/drawing/2014/main" id="{0AF41917-45B5-4090-A9E5-9FD89C6BCD68}"/>
               </a:ext>
             </a:extLst>
           </p:cNvPr>
@@ -13234,7 +13417,7 @@
           <p:cNvPr id="20" name="">
             <a:extLst xmlns:a="http://schemas.openxmlformats.org/drawingml/2006/main">
               <a:ext uri="{FF2B5EF4-FFF2-40B4-BE49-F238E27FC236}">
-                <a16:creationId xmlns:a16="http://schemas.microsoft.com/office/drawing/2014/main" id="{CB1140BF-4F79-4645-A2E0-978E70821D6F}"/>
+                <a16:creationId xmlns:a16="http://schemas.microsoft.com/office/drawing/2014/main" id="{EFF3BE16-3C3D-422E-9B0A-E253E449F823}"/>
               </a:ext>
             </a:extLst>
           </p:cNvPr>
@@ -13267,7 +13450,7 @@
           <p:cNvPr id="21" name="">
             <a:extLst xmlns:a="http://schemas.openxmlformats.org/drawingml/2006/main">
               <a:ext uri="{FF2B5EF4-FFF2-40B4-BE49-F238E27FC236}">
-                <a16:creationId xmlns:a16="http://schemas.microsoft.com/office/drawing/2014/main" id="{729A80C2-86A8-41EF-BBF3-8008F8E48773}"/>
+                <a16:creationId xmlns:a16="http://schemas.microsoft.com/office/drawing/2014/main" id="{A982F1EF-B442-48CB-A6F3-0A59A478D7CC}"/>
               </a:ext>
             </a:extLst>
           </p:cNvPr>
@@ -13317,7 +13500,7 @@
           <p:cNvPr id="22" name="">
             <a:extLst xmlns:a="http://schemas.openxmlformats.org/drawingml/2006/main">
               <a:ext uri="{FF2B5EF4-FFF2-40B4-BE49-F238E27FC236}">
-                <a16:creationId xmlns:a16="http://schemas.microsoft.com/office/drawing/2014/main" id="{D51A8E96-7E54-46FE-8340-C6E37D2DD48B}"/>
+                <a16:creationId xmlns:a16="http://schemas.microsoft.com/office/drawing/2014/main" id="{16FC7034-8341-4E62-9E61-0A82078D86DD}"/>
               </a:ext>
             </a:extLst>
           </p:cNvPr>
@@ -13367,7 +13550,7 @@
           <p:cNvPr id="23" name="">
             <a:extLst xmlns:a="http://schemas.openxmlformats.org/drawingml/2006/main">
               <a:ext uri="{FF2B5EF4-FFF2-40B4-BE49-F238E27FC236}">
-                <a16:creationId xmlns:a16="http://schemas.microsoft.com/office/drawing/2014/main" id="{54DF328B-91F5-4053-9F78-50E927BA5F0B}"/>
+                <a16:creationId xmlns:a16="http://schemas.microsoft.com/office/drawing/2014/main" id="{B4950BA2-F094-451E-AF13-44FF9728A9D0}"/>
               </a:ext>
             </a:extLst>
           </p:cNvPr>
@@ -13417,7 +13600,7 @@
           <p:cNvPr id="24" name="">
             <a:extLst xmlns:a="http://schemas.openxmlformats.org/drawingml/2006/main">
               <a:ext uri="{FF2B5EF4-FFF2-40B4-BE49-F238E27FC236}">
-                <a16:creationId xmlns:a16="http://schemas.microsoft.com/office/drawing/2014/main" id="{4636849A-333C-40D5-82CD-5E5ACC3EBB86}"/>
+                <a16:creationId xmlns:a16="http://schemas.microsoft.com/office/drawing/2014/main" id="{B30AD962-9E3E-486A-A57B-E5F8C34B91B5}"/>
               </a:ext>
             </a:extLst>
           </p:cNvPr>
@@ -13450,7 +13633,7 @@
           <p:cNvPr id="25" name="">
             <a:extLst xmlns:a="http://schemas.openxmlformats.org/drawingml/2006/main">
               <a:ext uri="{FF2B5EF4-FFF2-40B4-BE49-F238E27FC236}">
-                <a16:creationId xmlns:a16="http://schemas.microsoft.com/office/drawing/2014/main" id="{E3726585-0424-4ABC-926C-B31595CDEDD0}"/>
+                <a16:creationId xmlns:a16="http://schemas.microsoft.com/office/drawing/2014/main" id="{BD15B4FF-3809-4893-B3BE-45FFFA5BEB8B}"/>
               </a:ext>
             </a:extLst>
           </p:cNvPr>
@@ -13500,7 +13683,7 @@
           <p:cNvPr id="26" name="">
             <a:extLst xmlns:a="http://schemas.openxmlformats.org/drawingml/2006/main">
               <a:ext uri="{FF2B5EF4-FFF2-40B4-BE49-F238E27FC236}">
-                <a16:creationId xmlns:a16="http://schemas.microsoft.com/office/drawing/2014/main" id="{456B0224-1654-4473-A80B-658B1D702F28}"/>
+                <a16:creationId xmlns:a16="http://schemas.microsoft.com/office/drawing/2014/main" id="{5DCC58B9-4ADD-45F4-8F43-034A5D8177FC}"/>
               </a:ext>
             </a:extLst>
           </p:cNvPr>
@@ -13550,7 +13733,7 @@
           <p:cNvPr id="27" name="">
             <a:extLst xmlns:a="http://schemas.openxmlformats.org/drawingml/2006/main">
               <a:ext uri="{FF2B5EF4-FFF2-40B4-BE49-F238E27FC236}">
-                <a16:creationId xmlns:a16="http://schemas.microsoft.com/office/drawing/2014/main" id="{51CA3098-3C93-46EA-BBF4-DD4201A8BE78}"/>
+                <a16:creationId xmlns:a16="http://schemas.microsoft.com/office/drawing/2014/main" id="{E116732A-4E0F-422F-BFF6-8549C21AAC84}"/>
               </a:ext>
             </a:extLst>
           </p:cNvPr>
@@ -13600,7 +13783,7 @@
           <p:cNvPr id="28" name="">
             <a:extLst xmlns:a="http://schemas.openxmlformats.org/drawingml/2006/main">
               <a:ext uri="{FF2B5EF4-FFF2-40B4-BE49-F238E27FC236}">
-                <a16:creationId xmlns:a16="http://schemas.microsoft.com/office/drawing/2014/main" id="{DA412898-E8A6-40D9-90BE-645CA9FC3E30}"/>
+                <a16:creationId xmlns:a16="http://schemas.microsoft.com/office/drawing/2014/main" id="{F4C80ABB-061E-4F20-86BF-0FCE4EB81407}"/>
               </a:ext>
             </a:extLst>
           </p:cNvPr>
@@ -13633,7 +13816,7 @@
           <p:cNvPr id="29" name="">
             <a:extLst xmlns:a="http://schemas.openxmlformats.org/drawingml/2006/main">
               <a:ext uri="{FF2B5EF4-FFF2-40B4-BE49-F238E27FC236}">
-                <a16:creationId xmlns:a16="http://schemas.microsoft.com/office/drawing/2014/main" id="{6ADD4C55-0430-47E7-B8A9-6ECB35DA0726}"/>
+                <a16:creationId xmlns:a16="http://schemas.microsoft.com/office/drawing/2014/main" id="{C46B7B25-E96E-4529-946D-CCE9C3D19DCA}"/>
               </a:ext>
             </a:extLst>
           </p:cNvPr>
@@ -13683,7 +13866,7 @@
           <p:cNvPr id="30" name="">
             <a:extLst xmlns:a="http://schemas.openxmlformats.org/drawingml/2006/main">
               <a:ext uri="{FF2B5EF4-FFF2-40B4-BE49-F238E27FC236}">
-                <a16:creationId xmlns:a16="http://schemas.microsoft.com/office/drawing/2014/main" id="{357BA55E-D006-4C6C-B87C-4EE7A508FDB5}"/>
+                <a16:creationId xmlns:a16="http://schemas.microsoft.com/office/drawing/2014/main" id="{99B7C4E1-AF82-4781-ABD5-23F63AD19F75}"/>
               </a:ext>
             </a:extLst>
           </p:cNvPr>
@@ -13733,7 +13916,7 @@
           <p:cNvPr id="31" name="">
             <a:extLst xmlns:a="http://schemas.openxmlformats.org/drawingml/2006/main">
               <a:ext uri="{FF2B5EF4-FFF2-40B4-BE49-F238E27FC236}">
-                <a16:creationId xmlns:a16="http://schemas.microsoft.com/office/drawing/2014/main" id="{60A16982-8F5F-4062-BFFC-D4094F9BE3A3}"/>
+                <a16:creationId xmlns:a16="http://schemas.microsoft.com/office/drawing/2014/main" id="{CD18B629-11C7-4DF3-A992-7C767041CAB4}"/>
               </a:ext>
             </a:extLst>
           </p:cNvPr>
@@ -13783,7 +13966,7 @@
           <p:cNvPr id="32" name="">
             <a:extLst xmlns:a="http://schemas.openxmlformats.org/drawingml/2006/main">
               <a:ext uri="{FF2B5EF4-FFF2-40B4-BE49-F238E27FC236}">
-                <a16:creationId xmlns:a16="http://schemas.microsoft.com/office/drawing/2014/main" id="{4620E3E1-C524-4DAC-9953-2F7DD9F095CF}"/>
+                <a16:creationId xmlns:a16="http://schemas.microsoft.com/office/drawing/2014/main" id="{D807D701-5BD5-4419-98FE-0FD15F967755}"/>
               </a:ext>
             </a:extLst>
           </p:cNvPr>
@@ -13816,7 +13999,7 @@
           <p:cNvPr id="33" name="">
             <a:extLst xmlns:a="http://schemas.openxmlformats.org/drawingml/2006/main">
               <a:ext uri="{FF2B5EF4-FFF2-40B4-BE49-F238E27FC236}">
-                <a16:creationId xmlns:a16="http://schemas.microsoft.com/office/drawing/2014/main" id="{F3894CA0-C732-43F5-AB56-F78909ADE5B2}"/>
+                <a16:creationId xmlns:a16="http://schemas.microsoft.com/office/drawing/2014/main" id="{80BF7DFC-8650-4850-AFA8-3B08FEDA5E38}"/>
               </a:ext>
             </a:extLst>
           </p:cNvPr>
@@ -13866,7 +14049,7 @@
           <p:cNvPr id="34" name="">
             <a:extLst xmlns:a="http://schemas.openxmlformats.org/drawingml/2006/main">
               <a:ext uri="{FF2B5EF4-FFF2-40B4-BE49-F238E27FC236}">
-                <a16:creationId xmlns:a16="http://schemas.microsoft.com/office/drawing/2014/main" id="{30C6E20B-5EEE-464A-B251-FFE0BCF3123F}"/>
+                <a16:creationId xmlns:a16="http://schemas.microsoft.com/office/drawing/2014/main" id="{C5BFA20B-E863-4F6F-8786-8F16ACF6F93D}"/>
               </a:ext>
             </a:extLst>
           </p:cNvPr>
@@ -13967,7 +14150,7 @@
           <p:cNvPr id="35" name="">
             <a:extLst xmlns:a="http://schemas.openxmlformats.org/drawingml/2006/main">
               <a:ext uri="{FF2B5EF4-FFF2-40B4-BE49-F238E27FC236}">
-                <a16:creationId xmlns:a16="http://schemas.microsoft.com/office/drawing/2014/main" id="{CDF6A47C-72B0-41B4-9F9E-39B90039E2AC}"/>
+                <a16:creationId xmlns:a16="http://schemas.microsoft.com/office/drawing/2014/main" id="{F871F84F-846E-4F38-B894-73CA0DE50A1B}"/>
               </a:ext>
             </a:extLst>
           </p:cNvPr>
@@ -14015,7 +14198,7 @@
     </p:spTree>
     <p:extLst>
       <p:ext uri="{BB962C8B-B14F-4D97-AF65-F5344CB8AC3E}">
-        <p14:creationId xmlns:p14="http://schemas.microsoft.com/office/powerpoint/2010/main" val="1685021364"/>
+        <p14:creationId xmlns:p14="http://schemas.microsoft.com/office/powerpoint/2010/main" val="519289002"/>
       </p:ext>
     </p:extLst>
   </p:cSld>
@@ -14046,7 +14229,7 @@
           <p:cNvPr id="1" name="">
             <a:extLst xmlns:a="http://schemas.openxmlformats.org/drawingml/2006/main">
               <a:ext uri="{FF2B5EF4-FFF2-40B4-BE49-F238E27FC236}">
-                <a16:creationId xmlns:a16="http://schemas.microsoft.com/office/drawing/2014/main" id="{E43BBA51-026A-4709-A844-57EA3830011F}"/>
+                <a16:creationId xmlns:a16="http://schemas.microsoft.com/office/drawing/2014/main" id="{14961ECA-6881-42F1-BEC7-F80BA386076C}"/>
               </a:ext>
             </a:extLst>
           </p:cNvPr>
@@ -14096,7 +14279,7 @@
           <p:cNvPr id="2" name="">
             <a:extLst xmlns:a="http://schemas.openxmlformats.org/drawingml/2006/main">
               <a:ext uri="{FF2B5EF4-FFF2-40B4-BE49-F238E27FC236}">
-                <a16:creationId xmlns:a16="http://schemas.microsoft.com/office/drawing/2014/main" id="{3F469460-7355-4EE1-A706-EF077150FA31}"/>
+                <a16:creationId xmlns:a16="http://schemas.microsoft.com/office/drawing/2014/main" id="{ACF2CE3B-E1A2-42F4-83C2-BD2001C7A3F6}"/>
               </a:ext>
             </a:extLst>
           </p:cNvPr>
@@ -14146,7 +14329,7 @@
           <p:cNvPr id="3" name="">
             <a:extLst xmlns:a="http://schemas.openxmlformats.org/drawingml/2006/main">
               <a:ext uri="{FF2B5EF4-FFF2-40B4-BE49-F238E27FC236}">
-                <a16:creationId xmlns:a16="http://schemas.microsoft.com/office/drawing/2014/main" id="{9A25A98C-E0B3-4F01-B987-FE5A14D64973}"/>
+                <a16:creationId xmlns:a16="http://schemas.microsoft.com/office/drawing/2014/main" id="{007AFA61-0DE9-419C-8544-4A0037F1B09E}"/>
               </a:ext>
             </a:extLst>
           </p:cNvPr>
@@ -14196,7 +14379,7 @@
           <p:cNvPr id="4" name="">
             <a:extLst xmlns:a="http://schemas.openxmlformats.org/drawingml/2006/main">
               <a:ext uri="{FF2B5EF4-FFF2-40B4-BE49-F238E27FC236}">
-                <a16:creationId xmlns:a16="http://schemas.microsoft.com/office/drawing/2014/main" id="{AC481A19-AB58-4072-9B66-83F4EBC2E52B}"/>
+                <a16:creationId xmlns:a16="http://schemas.microsoft.com/office/drawing/2014/main" id="{E306C6A3-C117-4BF1-A513-ABBCCD03FA06}"/>
               </a:ext>
             </a:extLst>
           </p:cNvPr>
@@ -14229,7 +14412,7 @@
           <p:cNvPr id="5" name="">
             <a:extLst xmlns:a="http://schemas.openxmlformats.org/drawingml/2006/main">
               <a:ext uri="{FF2B5EF4-FFF2-40B4-BE49-F238E27FC236}">
-                <a16:creationId xmlns:a16="http://schemas.microsoft.com/office/drawing/2014/main" id="{9EDAC6AE-9255-477A-8EA2-AF664FA9591B}"/>
+                <a16:creationId xmlns:a16="http://schemas.microsoft.com/office/drawing/2014/main" id="{9D810C4C-E32F-4510-9516-881A0A12DFB2}"/>
               </a:ext>
             </a:extLst>
           </p:cNvPr>
@@ -14279,7 +14462,7 @@
           <p:cNvPr id="6" name="">
             <a:extLst xmlns:a="http://schemas.openxmlformats.org/drawingml/2006/main">
               <a:ext uri="{FF2B5EF4-FFF2-40B4-BE49-F238E27FC236}">
-                <a16:creationId xmlns:a16="http://schemas.microsoft.com/office/drawing/2014/main" id="{F0666962-6E90-4D0A-B181-E0CD7A74EFAF}"/>
+                <a16:creationId xmlns:a16="http://schemas.microsoft.com/office/drawing/2014/main" id="{4858DB88-F4D8-483F-ACCD-0E9B890516FE}"/>
               </a:ext>
             </a:extLst>
           </p:cNvPr>
@@ -14329,7 +14512,7 @@
           <p:cNvPr id="7" name="">
             <a:extLst xmlns:a="http://schemas.openxmlformats.org/drawingml/2006/main">
               <a:ext uri="{FF2B5EF4-FFF2-40B4-BE49-F238E27FC236}">
-                <a16:creationId xmlns:a16="http://schemas.microsoft.com/office/drawing/2014/main" id="{EAE25A08-955C-4B52-914E-07E962082B06}"/>
+                <a16:creationId xmlns:a16="http://schemas.microsoft.com/office/drawing/2014/main" id="{FDCD9F69-C732-4692-B69C-D3D620101C6B}"/>
               </a:ext>
             </a:extLst>
           </p:cNvPr>
@@ -14379,7 +14562,7 @@
           <p:cNvPr id="8" name="">
             <a:extLst xmlns:a="http://schemas.openxmlformats.org/drawingml/2006/main">
               <a:ext uri="{FF2B5EF4-FFF2-40B4-BE49-F238E27FC236}">
-                <a16:creationId xmlns:a16="http://schemas.microsoft.com/office/drawing/2014/main" id="{FDA42506-B23B-4B0D-B29D-9A7F86CE2A6F}"/>
+                <a16:creationId xmlns:a16="http://schemas.microsoft.com/office/drawing/2014/main" id="{C1C6C3EC-5BC2-4179-BF3C-DA80970956CB}"/>
               </a:ext>
             </a:extLst>
           </p:cNvPr>
@@ -14412,7 +14595,7 @@
           <p:cNvPr id="9" name="">
             <a:extLst xmlns:a="http://schemas.openxmlformats.org/drawingml/2006/main">
               <a:ext uri="{FF2B5EF4-FFF2-40B4-BE49-F238E27FC236}">
-                <a16:creationId xmlns:a16="http://schemas.microsoft.com/office/drawing/2014/main" id="{4FCCAE0A-23E5-40EB-B0A5-B8D6EA2F75F6}"/>
+                <a16:creationId xmlns:a16="http://schemas.microsoft.com/office/drawing/2014/main" id="{4EA8E496-CD2F-456D-A57A-B327825AFC54}"/>
               </a:ext>
             </a:extLst>
           </p:cNvPr>
@@ -14462,7 +14645,7 @@
           <p:cNvPr id="10" name="">
             <a:extLst xmlns:a="http://schemas.openxmlformats.org/drawingml/2006/main">
               <a:ext uri="{FF2B5EF4-FFF2-40B4-BE49-F238E27FC236}">
-                <a16:creationId xmlns:a16="http://schemas.microsoft.com/office/drawing/2014/main" id="{5B7947A8-D40A-4EDA-9E52-6BD24A4E3938}"/>
+                <a16:creationId xmlns:a16="http://schemas.microsoft.com/office/drawing/2014/main" id="{B5F15A0A-23DE-4A71-9A52-0B959D1B8211}"/>
               </a:ext>
             </a:extLst>
           </p:cNvPr>
@@ -14512,7 +14695,7 @@
           <p:cNvPr id="11" name="">
             <a:extLst xmlns:a="http://schemas.openxmlformats.org/drawingml/2006/main">
               <a:ext uri="{FF2B5EF4-FFF2-40B4-BE49-F238E27FC236}">
-                <a16:creationId xmlns:a16="http://schemas.microsoft.com/office/drawing/2014/main" id="{EC34B046-13AF-4023-BB22-79041A6B3E21}"/>
+                <a16:creationId xmlns:a16="http://schemas.microsoft.com/office/drawing/2014/main" id="{52331265-6D23-4972-B0EA-52114D1267E4}"/>
               </a:ext>
             </a:extLst>
           </p:cNvPr>
@@ -14562,7 +14745,7 @@
           <p:cNvPr id="12" name="">
             <a:extLst xmlns:a="http://schemas.openxmlformats.org/drawingml/2006/main">
               <a:ext uri="{FF2B5EF4-FFF2-40B4-BE49-F238E27FC236}">
-                <a16:creationId xmlns:a16="http://schemas.microsoft.com/office/drawing/2014/main" id="{FAE21A82-DC8F-45CF-BC84-0654F19C152B}"/>
+                <a16:creationId xmlns:a16="http://schemas.microsoft.com/office/drawing/2014/main" id="{50E73F72-FEAC-4C67-BA1E-7AC36BB4F593}"/>
               </a:ext>
             </a:extLst>
           </p:cNvPr>
@@ -14595,7 +14778,7 @@
           <p:cNvPr id="13" name="">
             <a:extLst xmlns:a="http://schemas.openxmlformats.org/drawingml/2006/main">
               <a:ext uri="{FF2B5EF4-FFF2-40B4-BE49-F238E27FC236}">
-                <a16:creationId xmlns:a16="http://schemas.microsoft.com/office/drawing/2014/main" id="{07A52CE1-FF6C-4A33-BFED-58DE3A0D6B62}"/>
+                <a16:creationId xmlns:a16="http://schemas.microsoft.com/office/drawing/2014/main" id="{375BDB94-94B0-42B9-8626-F2A3E35C385C}"/>
               </a:ext>
             </a:extLst>
           </p:cNvPr>
@@ -14645,7 +14828,7 @@
           <p:cNvPr id="14" name="">
             <a:extLst xmlns:a="http://schemas.openxmlformats.org/drawingml/2006/main">
               <a:ext uri="{FF2B5EF4-FFF2-40B4-BE49-F238E27FC236}">
-                <a16:creationId xmlns:a16="http://schemas.microsoft.com/office/drawing/2014/main" id="{56A486AF-B2FC-41EE-8677-00BFC0563436}"/>
+                <a16:creationId xmlns:a16="http://schemas.microsoft.com/office/drawing/2014/main" id="{E872C9FC-FC27-40C6-BBDE-BE3926ACE479}"/>
               </a:ext>
             </a:extLst>
           </p:cNvPr>
@@ -14695,7 +14878,7 @@
           <p:cNvPr id="15" name="">
             <a:extLst xmlns:a="http://schemas.openxmlformats.org/drawingml/2006/main">
               <a:ext uri="{FF2B5EF4-FFF2-40B4-BE49-F238E27FC236}">
-                <a16:creationId xmlns:a16="http://schemas.microsoft.com/office/drawing/2014/main" id="{12291D47-703A-45FF-B568-C1D6D7680DB1}"/>
+                <a16:creationId xmlns:a16="http://schemas.microsoft.com/office/drawing/2014/main" id="{2179DEBF-3448-4C92-8E98-1B6BC9BDFEFA}"/>
               </a:ext>
             </a:extLst>
           </p:cNvPr>
@@ -14745,7 +14928,7 @@
           <p:cNvPr id="16" name="">
             <a:extLst xmlns:a="http://schemas.openxmlformats.org/drawingml/2006/main">
               <a:ext uri="{FF2B5EF4-FFF2-40B4-BE49-F238E27FC236}">
-                <a16:creationId xmlns:a16="http://schemas.microsoft.com/office/drawing/2014/main" id="{9B03A2EE-9433-4D16-94FE-6081138E0B08}"/>
+                <a16:creationId xmlns:a16="http://schemas.microsoft.com/office/drawing/2014/main" id="{EEF15CE5-722A-4D30-98B6-084AC62338C3}"/>
               </a:ext>
             </a:extLst>
           </p:cNvPr>
@@ -14778,7 +14961,7 @@
           <p:cNvPr id="17" name="">
             <a:extLst xmlns:a="http://schemas.openxmlformats.org/drawingml/2006/main">
               <a:ext uri="{FF2B5EF4-FFF2-40B4-BE49-F238E27FC236}">
-                <a16:creationId xmlns:a16="http://schemas.microsoft.com/office/drawing/2014/main" id="{4BFAC529-9B7D-4F3E-AD77-32D97A6799F5}"/>
+                <a16:creationId xmlns:a16="http://schemas.microsoft.com/office/drawing/2014/main" id="{1B2F9EE0-5D27-4271-90E1-9036837F3D85}"/>
               </a:ext>
             </a:extLst>
           </p:cNvPr>
@@ -14828,7 +15011,7 @@
           <p:cNvPr id="18" name="">
             <a:extLst xmlns:a="http://schemas.openxmlformats.org/drawingml/2006/main">
               <a:ext uri="{FF2B5EF4-FFF2-40B4-BE49-F238E27FC236}">
-                <a16:creationId xmlns:a16="http://schemas.microsoft.com/office/drawing/2014/main" id="{D59C3480-24FC-4108-AC72-B0F79927CD95}"/>
+                <a16:creationId xmlns:a16="http://schemas.microsoft.com/office/drawing/2014/main" id="{2FDABB8C-C172-4907-B9A4-8ED097FC41F0}"/>
               </a:ext>
             </a:extLst>
           </p:cNvPr>
@@ -14878,7 +15061,7 @@
           <p:cNvPr id="19" name="">
             <a:extLst xmlns:a="http://schemas.openxmlformats.org/drawingml/2006/main">
               <a:ext uri="{FF2B5EF4-FFF2-40B4-BE49-F238E27FC236}">
-                <a16:creationId xmlns:a16="http://schemas.microsoft.com/office/drawing/2014/main" id="{F90163A9-9F09-4CFD-8A73-BC5CF5E76B40}"/>
+                <a16:creationId xmlns:a16="http://schemas.microsoft.com/office/drawing/2014/main" id="{FA21F005-D72A-4327-BBE7-9A0B6CFDF7B7}"/>
               </a:ext>
             </a:extLst>
           </p:cNvPr>
@@ -14928,7 +15111,7 @@
           <p:cNvPr id="20" name="">
             <a:extLst xmlns:a="http://schemas.openxmlformats.org/drawingml/2006/main">
               <a:ext uri="{FF2B5EF4-FFF2-40B4-BE49-F238E27FC236}">
-                <a16:creationId xmlns:a16="http://schemas.microsoft.com/office/drawing/2014/main" id="{4D9A0E07-1B23-4FC8-B3AF-89EF3570DA77}"/>
+                <a16:creationId xmlns:a16="http://schemas.microsoft.com/office/drawing/2014/main" id="{1DCF4FAA-119B-45DC-8338-825E9830E079}"/>
               </a:ext>
             </a:extLst>
           </p:cNvPr>
@@ -14961,7 +15144,7 @@
           <p:cNvPr id="21" name="">
             <a:extLst xmlns:a="http://schemas.openxmlformats.org/drawingml/2006/main">
               <a:ext uri="{FF2B5EF4-FFF2-40B4-BE49-F238E27FC236}">
-                <a16:creationId xmlns:a16="http://schemas.microsoft.com/office/drawing/2014/main" id="{4CE683CD-96EF-4E5C-A8ED-0B4E63358C46}"/>
+                <a16:creationId xmlns:a16="http://schemas.microsoft.com/office/drawing/2014/main" id="{A1BF3005-71CB-487A-9CB2-2097A294DC8F}"/>
               </a:ext>
             </a:extLst>
           </p:cNvPr>
@@ -15011,7 +15194,7 @@
           <p:cNvPr id="22" name="">
             <a:extLst xmlns:a="http://schemas.openxmlformats.org/drawingml/2006/main">
               <a:ext uri="{FF2B5EF4-FFF2-40B4-BE49-F238E27FC236}">
-                <a16:creationId xmlns:a16="http://schemas.microsoft.com/office/drawing/2014/main" id="{D7BE8A27-3E30-42B9-8C76-A3375B66D0E8}"/>
+                <a16:creationId xmlns:a16="http://schemas.microsoft.com/office/drawing/2014/main" id="{8635B3C6-04E7-4419-BCE4-AA21662ABE78}"/>
               </a:ext>
             </a:extLst>
           </p:cNvPr>
@@ -15061,7 +15244,7 @@
           <p:cNvPr id="23" name="">
             <a:extLst xmlns:a="http://schemas.openxmlformats.org/drawingml/2006/main">
               <a:ext uri="{FF2B5EF4-FFF2-40B4-BE49-F238E27FC236}">
-                <a16:creationId xmlns:a16="http://schemas.microsoft.com/office/drawing/2014/main" id="{8A254418-E153-48C1-9F81-168B81ACE966}"/>
+                <a16:creationId xmlns:a16="http://schemas.microsoft.com/office/drawing/2014/main" id="{4C91443F-826E-42B0-B639-514CE684A4A7}"/>
               </a:ext>
             </a:extLst>
           </p:cNvPr>
@@ -15111,7 +15294,7 @@
           <p:cNvPr id="24" name="">
             <a:extLst xmlns:a="http://schemas.openxmlformats.org/drawingml/2006/main">
               <a:ext uri="{FF2B5EF4-FFF2-40B4-BE49-F238E27FC236}">
-                <a16:creationId xmlns:a16="http://schemas.microsoft.com/office/drawing/2014/main" id="{8D1E616A-6A2D-4A16-8475-F556AF72F9ED}"/>
+                <a16:creationId xmlns:a16="http://schemas.microsoft.com/office/drawing/2014/main" id="{667D1683-6489-4B48-8E3C-1CC7F3D92329}"/>
               </a:ext>
             </a:extLst>
           </p:cNvPr>
@@ -15144,7 +15327,7 @@
           <p:cNvPr id="25" name="">
             <a:extLst xmlns:a="http://schemas.openxmlformats.org/drawingml/2006/main">
               <a:ext uri="{FF2B5EF4-FFF2-40B4-BE49-F238E27FC236}">
-                <a16:creationId xmlns:a16="http://schemas.microsoft.com/office/drawing/2014/main" id="{A8ACD202-E405-4DCB-932B-487AB9C1766D}"/>
+                <a16:creationId xmlns:a16="http://schemas.microsoft.com/office/drawing/2014/main" id="{011B413A-6A71-40EA-BE8D-7F30976492D8}"/>
               </a:ext>
             </a:extLst>
           </p:cNvPr>
@@ -15194,7 +15377,7 @@
           <p:cNvPr id="26" name="">
             <a:extLst xmlns:a="http://schemas.openxmlformats.org/drawingml/2006/main">
               <a:ext uri="{FF2B5EF4-FFF2-40B4-BE49-F238E27FC236}">
-                <a16:creationId xmlns:a16="http://schemas.microsoft.com/office/drawing/2014/main" id="{17725399-4DE1-42E4-99A1-DFF288494170}"/>
+                <a16:creationId xmlns:a16="http://schemas.microsoft.com/office/drawing/2014/main" id="{B68FC08D-ABB9-43CC-A574-E0C121105155}"/>
               </a:ext>
             </a:extLst>
           </p:cNvPr>
@@ -15244,7 +15427,7 @@
           <p:cNvPr id="27" name="">
             <a:extLst xmlns:a="http://schemas.openxmlformats.org/drawingml/2006/main">
               <a:ext uri="{FF2B5EF4-FFF2-40B4-BE49-F238E27FC236}">
-                <a16:creationId xmlns:a16="http://schemas.microsoft.com/office/drawing/2014/main" id="{DCBA86CA-A584-4596-A4C5-30F08C05F91A}"/>
+                <a16:creationId xmlns:a16="http://schemas.microsoft.com/office/drawing/2014/main" id="{F7B6AE82-13D2-4270-93C3-5737BD3A6098}"/>
               </a:ext>
             </a:extLst>
           </p:cNvPr>
@@ -15294,7 +15477,7 @@
           <p:cNvPr id="28" name="">
             <a:extLst xmlns:a="http://schemas.openxmlformats.org/drawingml/2006/main">
               <a:ext uri="{FF2B5EF4-FFF2-40B4-BE49-F238E27FC236}">
-                <a16:creationId xmlns:a16="http://schemas.microsoft.com/office/drawing/2014/main" id="{4AD9078B-6E20-4384-AD77-2DB167671475}"/>
+                <a16:creationId xmlns:a16="http://schemas.microsoft.com/office/drawing/2014/main" id="{8A1CB2BE-3D35-4ABA-863F-905BA02D2572}"/>
               </a:ext>
             </a:extLst>
           </p:cNvPr>
@@ -15327,7 +15510,7 @@
           <p:cNvPr id="29" name="">
             <a:extLst xmlns:a="http://schemas.openxmlformats.org/drawingml/2006/main">
               <a:ext uri="{FF2B5EF4-FFF2-40B4-BE49-F238E27FC236}">
-                <a16:creationId xmlns:a16="http://schemas.microsoft.com/office/drawing/2014/main" id="{AEF903E5-6CF8-482F-8E30-797104DF414D}"/>
+                <a16:creationId xmlns:a16="http://schemas.microsoft.com/office/drawing/2014/main" id="{6F6E702A-9299-4B72-A69E-43012C4ECAB8}"/>
               </a:ext>
             </a:extLst>
           </p:cNvPr>
@@ -15377,7 +15560,7 @@
           <p:cNvPr id="30" name="">
             <a:extLst xmlns:a="http://schemas.openxmlformats.org/drawingml/2006/main">
               <a:ext uri="{FF2B5EF4-FFF2-40B4-BE49-F238E27FC236}">
-                <a16:creationId xmlns:a16="http://schemas.microsoft.com/office/drawing/2014/main" id="{DFEDE95F-4039-4259-96AB-C94BBF91151D}"/>
+                <a16:creationId xmlns:a16="http://schemas.microsoft.com/office/drawing/2014/main" id="{6395CB0C-B255-4AFA-84BF-EF2FD676446D}"/>
               </a:ext>
             </a:extLst>
           </p:cNvPr>
@@ -15427,7 +15610,7 @@
           <p:cNvPr id="31" name="">
             <a:extLst xmlns:a="http://schemas.openxmlformats.org/drawingml/2006/main">
               <a:ext uri="{FF2B5EF4-FFF2-40B4-BE49-F238E27FC236}">
-                <a16:creationId xmlns:a16="http://schemas.microsoft.com/office/drawing/2014/main" id="{6CD3ED00-653F-4FD5-96E2-F0727F927A22}"/>
+                <a16:creationId xmlns:a16="http://schemas.microsoft.com/office/drawing/2014/main" id="{6A2DB5F3-02E6-434B-87CD-1729C22F44F2}"/>
               </a:ext>
             </a:extLst>
           </p:cNvPr>
@@ -15484,7 +15667,7 @@
         </p:xfrm>
         <a:graphic xmlns:a="http://schemas.openxmlformats.org/drawingml/2006/main">
           <a:graphicData uri="http://schemas.openxmlformats.org/drawingml/2006/chart">
-            <c:chart xmlns:r="http://schemas.openxmlformats.org/officeDocument/2006/relationships" xmlns:c="http://schemas.openxmlformats.org/drawingml/2006/chart" r:id="R1fb37e57314844e4"/>
+            <c:chart xmlns:r="http://schemas.openxmlformats.org/officeDocument/2006/relationships" xmlns:c="http://schemas.openxmlformats.org/drawingml/2006/chart" r:id="R3da428b240fa4a05"/>
           </a:graphicData>
         </a:graphic>
       </p:graphicFrame>
@@ -15493,7 +15676,7 @@
           <p:cNvPr id="33" name="">
             <a:extLst xmlns:a="http://schemas.openxmlformats.org/drawingml/2006/main">
               <a:ext uri="{FF2B5EF4-FFF2-40B4-BE49-F238E27FC236}">
-                <a16:creationId xmlns:a16="http://schemas.microsoft.com/office/drawing/2014/main" id="{AC6D2A36-355A-48B8-89FE-FE38BF1E993E}"/>
+                <a16:creationId xmlns:a16="http://schemas.microsoft.com/office/drawing/2014/main" id="{D9B28568-605D-4A8D-9162-71A581D4300F}"/>
               </a:ext>
             </a:extLst>
           </p:cNvPr>
@@ -15543,7 +15726,7 @@
           <p:cNvPr id="34" name="">
             <a:extLst xmlns:a="http://schemas.openxmlformats.org/drawingml/2006/main">
               <a:ext uri="{FF2B5EF4-FFF2-40B4-BE49-F238E27FC236}">
-                <a16:creationId xmlns:a16="http://schemas.microsoft.com/office/drawing/2014/main" id="{F4CB1986-EB8A-4F56-8E1E-81A7D9CAA8D0}"/>
+                <a16:creationId xmlns:a16="http://schemas.microsoft.com/office/drawing/2014/main" id="{5F7EADF4-8ADC-4461-AD35-0F8EBAAE2A9C}"/>
               </a:ext>
             </a:extLst>
           </p:cNvPr>
@@ -15591,7 +15774,7 @@
     </p:spTree>
     <p:extLst>
       <p:ext uri="{BB962C8B-B14F-4D97-AF65-F5344CB8AC3E}">
-        <p14:creationId xmlns:p14="http://schemas.microsoft.com/office/powerpoint/2010/main" val="1333826834"/>
+        <p14:creationId xmlns:p14="http://schemas.microsoft.com/office/powerpoint/2010/main" val="1145785928"/>
       </p:ext>
     </p:extLst>
   </p:cSld>
@@ -15622,7 +15805,7 @@
           <p:cNvPr id="1" name="">
             <a:extLst xmlns:a="http://schemas.openxmlformats.org/drawingml/2006/main">
               <a:ext uri="{FF2B5EF4-FFF2-40B4-BE49-F238E27FC236}">
-                <a16:creationId xmlns:a16="http://schemas.microsoft.com/office/drawing/2014/main" id="{44D71F50-F00F-41C0-AC03-D473A28EEC34}"/>
+                <a16:creationId xmlns:a16="http://schemas.microsoft.com/office/drawing/2014/main" id="{782A0428-A24F-4526-9D94-4F5041CC8195}"/>
               </a:ext>
             </a:extLst>
           </p:cNvPr>
@@ -15672,7 +15855,7 @@
           <p:cNvPr id="2" name="">
             <a:extLst xmlns:a="http://schemas.openxmlformats.org/drawingml/2006/main">
               <a:ext uri="{FF2B5EF4-FFF2-40B4-BE49-F238E27FC236}">
-                <a16:creationId xmlns:a16="http://schemas.microsoft.com/office/drawing/2014/main" id="{71234446-5147-4660-A4CF-FF2337E78EFB}"/>
+                <a16:creationId xmlns:a16="http://schemas.microsoft.com/office/drawing/2014/main" id="{16943E0E-A83F-4928-9966-AA6F500D65A9}"/>
               </a:ext>
             </a:extLst>
           </p:cNvPr>
@@ -15722,7 +15905,7 @@
           <p:cNvPr id="3" name="">
             <a:extLst xmlns:a="http://schemas.openxmlformats.org/drawingml/2006/main">
               <a:ext uri="{FF2B5EF4-FFF2-40B4-BE49-F238E27FC236}">
-                <a16:creationId xmlns:a16="http://schemas.microsoft.com/office/drawing/2014/main" id="{DE53BD82-ECB4-4514-A581-5887BAC54EA4}"/>
+                <a16:creationId xmlns:a16="http://schemas.microsoft.com/office/drawing/2014/main" id="{4AB95D6C-A3A8-47F8-A503-472EEE1A6C25}"/>
               </a:ext>
             </a:extLst>
           </p:cNvPr>
@@ -15779,7 +15962,7 @@
         </p:xfrm>
         <a:graphic xmlns:a="http://schemas.openxmlformats.org/drawingml/2006/main">
           <a:graphicData uri="http://schemas.openxmlformats.org/drawingml/2006/chart">
-            <c:chart xmlns:r="http://schemas.openxmlformats.org/officeDocument/2006/relationships" xmlns:c="http://schemas.openxmlformats.org/drawingml/2006/chart" r:id="R886cc28fe6144a78"/>
+            <c:chart xmlns:r="http://schemas.openxmlformats.org/officeDocument/2006/relationships" xmlns:c="http://schemas.openxmlformats.org/drawingml/2006/chart" r:id="Rc0258df0275f4443"/>
           </a:graphicData>
         </a:graphic>
       </p:graphicFrame>
@@ -15788,7 +15971,7 @@
           <p:cNvPr id="5" name="">
             <a:extLst xmlns:a="http://schemas.openxmlformats.org/drawingml/2006/main">
               <a:ext uri="{FF2B5EF4-FFF2-40B4-BE49-F238E27FC236}">
-                <a16:creationId xmlns:a16="http://schemas.microsoft.com/office/drawing/2014/main" id="{5322C626-C9B1-444A-9FA5-B81B58233D67}"/>
+                <a16:creationId xmlns:a16="http://schemas.microsoft.com/office/drawing/2014/main" id="{B9AE048F-4C3D-4BC6-9AB6-6919932EDBF2}"/>
               </a:ext>
             </a:extLst>
           </p:cNvPr>
@@ -15838,7 +16021,7 @@
           <p:cNvPr id="6" name="">
             <a:extLst xmlns:a="http://schemas.openxmlformats.org/drawingml/2006/main">
               <a:ext uri="{FF2B5EF4-FFF2-40B4-BE49-F238E27FC236}">
-                <a16:creationId xmlns:a16="http://schemas.microsoft.com/office/drawing/2014/main" id="{34527A47-CB92-43FF-8522-E4423533B974}"/>
+                <a16:creationId xmlns:a16="http://schemas.microsoft.com/office/drawing/2014/main" id="{CA8CE3AD-7361-457C-8A52-94F1C6ACA8D7}"/>
               </a:ext>
             </a:extLst>
           </p:cNvPr>
@@ -15888,7 +16071,7 @@
           <p:cNvPr id="7" name="">
             <a:extLst xmlns:a="http://schemas.openxmlformats.org/drawingml/2006/main">
               <a:ext uri="{FF2B5EF4-FFF2-40B4-BE49-F238E27FC236}">
-                <a16:creationId xmlns:a16="http://schemas.microsoft.com/office/drawing/2014/main" id="{AF99FF34-AB3A-4501-90B7-7E072FBEBD5D}"/>
+                <a16:creationId xmlns:a16="http://schemas.microsoft.com/office/drawing/2014/main" id="{221ED03E-A39E-478B-BF21-D095E8030E48}"/>
               </a:ext>
             </a:extLst>
           </p:cNvPr>
@@ -15938,7 +16121,7 @@
           <p:cNvPr id="8" name="">
             <a:extLst xmlns:a="http://schemas.openxmlformats.org/drawingml/2006/main">
               <a:ext uri="{FF2B5EF4-FFF2-40B4-BE49-F238E27FC236}">
-                <a16:creationId xmlns:a16="http://schemas.microsoft.com/office/drawing/2014/main" id="{173FA15C-BD45-49FB-8A6A-F29B870BD0CF}"/>
+                <a16:creationId xmlns:a16="http://schemas.microsoft.com/office/drawing/2014/main" id="{E2DF2842-D454-4B82-9E6B-4D520B49407D}"/>
               </a:ext>
             </a:extLst>
           </p:cNvPr>
@@ -15988,7 +16171,7 @@
           <p:cNvPr id="9" name="">
             <a:extLst xmlns:a="http://schemas.openxmlformats.org/drawingml/2006/main">
               <a:ext uri="{FF2B5EF4-FFF2-40B4-BE49-F238E27FC236}">
-                <a16:creationId xmlns:a16="http://schemas.microsoft.com/office/drawing/2014/main" id="{0ECF232B-5513-493A-8DF1-7D48F88D77FA}"/>
+                <a16:creationId xmlns:a16="http://schemas.microsoft.com/office/drawing/2014/main" id="{6501698C-5D05-4022-ADA6-99FD20CC872B}"/>
               </a:ext>
             </a:extLst>
           </p:cNvPr>
@@ -16038,7 +16221,7 @@
           <p:cNvPr id="10" name="">
             <a:extLst xmlns:a="http://schemas.openxmlformats.org/drawingml/2006/main">
               <a:ext uri="{FF2B5EF4-FFF2-40B4-BE49-F238E27FC236}">
-                <a16:creationId xmlns:a16="http://schemas.microsoft.com/office/drawing/2014/main" id="{9D9117CE-A6BA-4400-8C63-E4E078DE2906}"/>
+                <a16:creationId xmlns:a16="http://schemas.microsoft.com/office/drawing/2014/main" id="{C7C6C72E-CA3C-46A3-B687-0BFC9F04AF20}"/>
               </a:ext>
             </a:extLst>
           </p:cNvPr>
@@ -16088,7 +16271,7 @@
           <p:cNvPr id="11" name="">
             <a:extLst xmlns:a="http://schemas.openxmlformats.org/drawingml/2006/main">
               <a:ext uri="{FF2B5EF4-FFF2-40B4-BE49-F238E27FC236}">
-                <a16:creationId xmlns:a16="http://schemas.microsoft.com/office/drawing/2014/main" id="{B84CDDD0-5E70-4177-851C-927C7C4A412B}"/>
+                <a16:creationId xmlns:a16="http://schemas.microsoft.com/office/drawing/2014/main" id="{DB4C82A2-5B8C-4F66-8AE5-5152BA032AA9}"/>
               </a:ext>
             </a:extLst>
           </p:cNvPr>
@@ -16121,7 +16304,7 @@
           <p:cNvPr id="12" name="">
             <a:extLst xmlns:a="http://schemas.openxmlformats.org/drawingml/2006/main">
               <a:ext uri="{FF2B5EF4-FFF2-40B4-BE49-F238E27FC236}">
-                <a16:creationId xmlns:a16="http://schemas.microsoft.com/office/drawing/2014/main" id="{FD906567-3FAA-42AE-A62C-233BD443C071}"/>
+                <a16:creationId xmlns:a16="http://schemas.microsoft.com/office/drawing/2014/main" id="{46E816B3-577E-4871-BD96-2D1650F40405}"/>
               </a:ext>
             </a:extLst>
           </p:cNvPr>
@@ -16212,7 +16395,7 @@
                   <a:srgbClr val="111111"/>
                 </a:solidFill>
               </a:rPr>
-              <a:t>• no-hotspot 版本更适合汇报和投稿</a:t>
+              <a:t>• no-hotspot 版本降低循环证据和标签记忆风险</a:t>
             </a:r>
           </a:p>
         </p:txBody>
@@ -16222,7 +16405,7 @@
           <p:cNvPr id="13" name="">
             <a:extLst xmlns:a="http://schemas.openxmlformats.org/drawingml/2006/main">
               <a:ext uri="{FF2B5EF4-FFF2-40B4-BE49-F238E27FC236}">
-                <a16:creationId xmlns:a16="http://schemas.microsoft.com/office/drawing/2014/main" id="{7811E3DE-7D61-4ADB-ACD0-95B38E1D9877}"/>
+                <a16:creationId xmlns:a16="http://schemas.microsoft.com/office/drawing/2014/main" id="{8BB213C8-65A8-4F3F-AF83-6166D5089003}"/>
               </a:ext>
             </a:extLst>
           </p:cNvPr>
@@ -16270,7 +16453,7 @@
     </p:spTree>
     <p:extLst>
       <p:ext uri="{BB962C8B-B14F-4D97-AF65-F5344CB8AC3E}">
-        <p14:creationId xmlns:p14="http://schemas.microsoft.com/office/powerpoint/2010/main" val="339854719"/>
+        <p14:creationId xmlns:p14="http://schemas.microsoft.com/office/powerpoint/2010/main" val="146215076"/>
       </p:ext>
     </p:extLst>
   </p:cSld>
@@ -16301,7 +16484,7 @@
           <p:cNvPr id="1" name="">
             <a:extLst xmlns:a="http://schemas.openxmlformats.org/drawingml/2006/main">
               <a:ext uri="{FF2B5EF4-FFF2-40B4-BE49-F238E27FC236}">
-                <a16:creationId xmlns:a16="http://schemas.microsoft.com/office/drawing/2014/main" id="{5E1773EB-6952-4F1F-B1EF-FD078C5753CA}"/>
+                <a16:creationId xmlns:a16="http://schemas.microsoft.com/office/drawing/2014/main" id="{D404E5B5-15CD-450C-AF2C-EBA60751B099}"/>
               </a:ext>
             </a:extLst>
           </p:cNvPr>
@@ -16351,7 +16534,7 @@
           <p:cNvPr id="2" name="">
             <a:extLst xmlns:a="http://schemas.openxmlformats.org/drawingml/2006/main">
               <a:ext uri="{FF2B5EF4-FFF2-40B4-BE49-F238E27FC236}">
-                <a16:creationId xmlns:a16="http://schemas.microsoft.com/office/drawing/2014/main" id="{7CEC86E3-D19E-40F8-A86F-413A089697AA}"/>
+                <a16:creationId xmlns:a16="http://schemas.microsoft.com/office/drawing/2014/main" id="{342FDB18-78D8-455B-AE84-8EC58193D1BA}"/>
               </a:ext>
             </a:extLst>
           </p:cNvPr>
@@ -16401,7 +16584,7 @@
           <p:cNvPr id="3" name="">
             <a:extLst xmlns:a="http://schemas.openxmlformats.org/drawingml/2006/main">
               <a:ext uri="{FF2B5EF4-FFF2-40B4-BE49-F238E27FC236}">
-                <a16:creationId xmlns:a16="http://schemas.microsoft.com/office/drawing/2014/main" id="{0523966C-31AC-4FE5-B658-87871B3A7AF2}"/>
+                <a16:creationId xmlns:a16="http://schemas.microsoft.com/office/drawing/2014/main" id="{2FC9CA19-612C-4973-989D-61680A5964E0}"/>
               </a:ext>
             </a:extLst>
           </p:cNvPr>
@@ -16451,7 +16634,7 @@
           <p:cNvPr id="4" name="">
             <a:extLst xmlns:a="http://schemas.openxmlformats.org/drawingml/2006/main">
               <a:ext uri="{FF2B5EF4-FFF2-40B4-BE49-F238E27FC236}">
-                <a16:creationId xmlns:a16="http://schemas.microsoft.com/office/drawing/2014/main" id="{3307BF7D-E021-4950-A85D-A0FE1BE01377}"/>
+                <a16:creationId xmlns:a16="http://schemas.microsoft.com/office/drawing/2014/main" id="{32B020E1-E6CE-40CA-B99A-535BE927FC1D}"/>
               </a:ext>
             </a:extLst>
           </p:cNvPr>
@@ -16484,7 +16667,7 @@
           <p:cNvPr id="5" name="">
             <a:extLst xmlns:a="http://schemas.openxmlformats.org/drawingml/2006/main">
               <a:ext uri="{FF2B5EF4-FFF2-40B4-BE49-F238E27FC236}">
-                <a16:creationId xmlns:a16="http://schemas.microsoft.com/office/drawing/2014/main" id="{62DDEF58-50F2-41EC-B835-B997E0988AD5}"/>
+                <a16:creationId xmlns:a16="http://schemas.microsoft.com/office/drawing/2014/main" id="{97F68F6C-D581-4C31-A4E3-7AEF2BD60852}"/>
               </a:ext>
             </a:extLst>
           </p:cNvPr>
@@ -16534,7 +16717,7 @@
           <p:cNvPr id="6" name="">
             <a:extLst xmlns:a="http://schemas.openxmlformats.org/drawingml/2006/main">
               <a:ext uri="{FF2B5EF4-FFF2-40B4-BE49-F238E27FC236}">
-                <a16:creationId xmlns:a16="http://schemas.microsoft.com/office/drawing/2014/main" id="{53A50F82-EB87-43EC-BCC3-A6E7A7922547}"/>
+                <a16:creationId xmlns:a16="http://schemas.microsoft.com/office/drawing/2014/main" id="{BB6F93DE-EFD2-43B5-A64F-1E435D187A63}"/>
               </a:ext>
             </a:extLst>
           </p:cNvPr>
@@ -16584,7 +16767,7 @@
           <p:cNvPr id="7" name="">
             <a:extLst xmlns:a="http://schemas.openxmlformats.org/drawingml/2006/main">
               <a:ext uri="{FF2B5EF4-FFF2-40B4-BE49-F238E27FC236}">
-                <a16:creationId xmlns:a16="http://schemas.microsoft.com/office/drawing/2014/main" id="{4087FBD2-885C-4935-9120-E1E1CC317BC3}"/>
+                <a16:creationId xmlns:a16="http://schemas.microsoft.com/office/drawing/2014/main" id="{E00C26E1-C78C-484F-9232-787583998FF1}"/>
               </a:ext>
             </a:extLst>
           </p:cNvPr>
@@ -16634,7 +16817,7 @@
           <p:cNvPr id="8" name="">
             <a:extLst xmlns:a="http://schemas.openxmlformats.org/drawingml/2006/main">
               <a:ext uri="{FF2B5EF4-FFF2-40B4-BE49-F238E27FC236}">
-                <a16:creationId xmlns:a16="http://schemas.microsoft.com/office/drawing/2014/main" id="{82310BDC-4E8F-4C44-8331-4E2972186D0A}"/>
+                <a16:creationId xmlns:a16="http://schemas.microsoft.com/office/drawing/2014/main" id="{AFCF1186-4A0D-45BA-A493-CDEFD99B9012}"/>
               </a:ext>
             </a:extLst>
           </p:cNvPr>
@@ -16684,7 +16867,7 @@
           <p:cNvPr id="9" name="">
             <a:extLst xmlns:a="http://schemas.openxmlformats.org/drawingml/2006/main">
               <a:ext uri="{FF2B5EF4-FFF2-40B4-BE49-F238E27FC236}">
-                <a16:creationId xmlns:a16="http://schemas.microsoft.com/office/drawing/2014/main" id="{8B49821C-70EE-43F6-982E-4632AD635332}"/>
+                <a16:creationId xmlns:a16="http://schemas.microsoft.com/office/drawing/2014/main" id="{D6FE8A7A-78B9-41D4-A7BF-AF4DCA16128E}"/>
               </a:ext>
             </a:extLst>
           </p:cNvPr>
@@ -16734,7 +16917,7 @@
           <p:cNvPr id="10" name="">
             <a:extLst xmlns:a="http://schemas.openxmlformats.org/drawingml/2006/main">
               <a:ext uri="{FF2B5EF4-FFF2-40B4-BE49-F238E27FC236}">
-                <a16:creationId xmlns:a16="http://schemas.microsoft.com/office/drawing/2014/main" id="{66CA2A66-031E-4EA3-B2A7-7D7E4F6F75E9}"/>
+                <a16:creationId xmlns:a16="http://schemas.microsoft.com/office/drawing/2014/main" id="{27355901-FC40-4431-B038-57B429CB5F9E}"/>
               </a:ext>
             </a:extLst>
           </p:cNvPr>
@@ -16784,7 +16967,7 @@
           <p:cNvPr id="11" name="">
             <a:extLst xmlns:a="http://schemas.openxmlformats.org/drawingml/2006/main">
               <a:ext uri="{FF2B5EF4-FFF2-40B4-BE49-F238E27FC236}">
-                <a16:creationId xmlns:a16="http://schemas.microsoft.com/office/drawing/2014/main" id="{ACF28F3F-ED80-4875-8C0B-7347E1422843}"/>
+                <a16:creationId xmlns:a16="http://schemas.microsoft.com/office/drawing/2014/main" id="{320585D6-2A34-4020-AFEF-0A94CF2D0CC8}"/>
               </a:ext>
             </a:extLst>
           </p:cNvPr>
@@ -16817,7 +17000,7 @@
           <p:cNvPr id="12" name="">
             <a:extLst xmlns:a="http://schemas.openxmlformats.org/drawingml/2006/main">
               <a:ext uri="{FF2B5EF4-FFF2-40B4-BE49-F238E27FC236}">
-                <a16:creationId xmlns:a16="http://schemas.microsoft.com/office/drawing/2014/main" id="{5552B2DF-EB19-4809-8D86-E86F0F0901E9}"/>
+                <a16:creationId xmlns:a16="http://schemas.microsoft.com/office/drawing/2014/main" id="{4F809F61-8A88-4112-A461-50D41FA2A4B3}"/>
               </a:ext>
             </a:extLst>
           </p:cNvPr>
@@ -16867,7 +17050,7 @@
           <p:cNvPr id="13" name="">
             <a:extLst xmlns:a="http://schemas.openxmlformats.org/drawingml/2006/main">
               <a:ext uri="{FF2B5EF4-FFF2-40B4-BE49-F238E27FC236}">
-                <a16:creationId xmlns:a16="http://schemas.microsoft.com/office/drawing/2014/main" id="{1762A4C5-BBD9-4B36-A2AF-167881E7985D}"/>
+                <a16:creationId xmlns:a16="http://schemas.microsoft.com/office/drawing/2014/main" id="{D64DE936-12DB-493F-B0ED-A237175EDD74}"/>
               </a:ext>
             </a:extLst>
           </p:cNvPr>
@@ -16917,7 +17100,7 @@
           <p:cNvPr id="14" name="">
             <a:extLst xmlns:a="http://schemas.openxmlformats.org/drawingml/2006/main">
               <a:ext uri="{FF2B5EF4-FFF2-40B4-BE49-F238E27FC236}">
-                <a16:creationId xmlns:a16="http://schemas.microsoft.com/office/drawing/2014/main" id="{1E6BB6FD-D436-40DF-A795-E926616A053F}"/>
+                <a16:creationId xmlns:a16="http://schemas.microsoft.com/office/drawing/2014/main" id="{23EC8F62-D87C-46C6-8700-FDC5731616CE}"/>
               </a:ext>
             </a:extLst>
           </p:cNvPr>
@@ -16967,7 +17150,7 @@
           <p:cNvPr id="15" name="">
             <a:extLst xmlns:a="http://schemas.openxmlformats.org/drawingml/2006/main">
               <a:ext uri="{FF2B5EF4-FFF2-40B4-BE49-F238E27FC236}">
-                <a16:creationId xmlns:a16="http://schemas.microsoft.com/office/drawing/2014/main" id="{CD469363-C093-421C-8AA5-59470FB8A2AF}"/>
+                <a16:creationId xmlns:a16="http://schemas.microsoft.com/office/drawing/2014/main" id="{A0A1A22F-C311-4D20-BDA1-AAA72700A453}"/>
               </a:ext>
             </a:extLst>
           </p:cNvPr>
@@ -17017,7 +17200,7 @@
           <p:cNvPr id="16" name="">
             <a:extLst xmlns:a="http://schemas.openxmlformats.org/drawingml/2006/main">
               <a:ext uri="{FF2B5EF4-FFF2-40B4-BE49-F238E27FC236}">
-                <a16:creationId xmlns:a16="http://schemas.microsoft.com/office/drawing/2014/main" id="{4CA31F19-5502-402F-82A8-1B7A1F210C52}"/>
+                <a16:creationId xmlns:a16="http://schemas.microsoft.com/office/drawing/2014/main" id="{1D948743-B6C1-4A60-B520-4F7B06802409}"/>
               </a:ext>
             </a:extLst>
           </p:cNvPr>
@@ -17067,7 +17250,7 @@
           <p:cNvPr id="17" name="">
             <a:extLst xmlns:a="http://schemas.openxmlformats.org/drawingml/2006/main">
               <a:ext uri="{FF2B5EF4-FFF2-40B4-BE49-F238E27FC236}">
-                <a16:creationId xmlns:a16="http://schemas.microsoft.com/office/drawing/2014/main" id="{40763D05-555A-49AA-8639-1502E714AEE6}"/>
+                <a16:creationId xmlns:a16="http://schemas.microsoft.com/office/drawing/2014/main" id="{C2B3AA49-2621-4D83-841D-2D509F73052A}"/>
               </a:ext>
             </a:extLst>
           </p:cNvPr>
@@ -17117,7 +17300,7 @@
           <p:cNvPr id="18" name="">
             <a:extLst xmlns:a="http://schemas.openxmlformats.org/drawingml/2006/main">
               <a:ext uri="{FF2B5EF4-FFF2-40B4-BE49-F238E27FC236}">
-                <a16:creationId xmlns:a16="http://schemas.microsoft.com/office/drawing/2014/main" id="{42060E4E-023E-49E7-87CE-D97E238AC4D2}"/>
+                <a16:creationId xmlns:a16="http://schemas.microsoft.com/office/drawing/2014/main" id="{290DD342-F94E-499B-909A-CA1F2E81BD9E}"/>
               </a:ext>
             </a:extLst>
           </p:cNvPr>
@@ -17150,7 +17333,7 @@
           <p:cNvPr id="19" name="">
             <a:extLst xmlns:a="http://schemas.openxmlformats.org/drawingml/2006/main">
               <a:ext uri="{FF2B5EF4-FFF2-40B4-BE49-F238E27FC236}">
-                <a16:creationId xmlns:a16="http://schemas.microsoft.com/office/drawing/2014/main" id="{1063323E-B9FC-4B61-A874-1664D8FB7212}"/>
+                <a16:creationId xmlns:a16="http://schemas.microsoft.com/office/drawing/2014/main" id="{F9B1235F-5928-4FBE-98A5-BB311E2D28A9}"/>
               </a:ext>
             </a:extLst>
           </p:cNvPr>
@@ -17200,7 +17383,7 @@
           <p:cNvPr id="20" name="">
             <a:extLst xmlns:a="http://schemas.openxmlformats.org/drawingml/2006/main">
               <a:ext uri="{FF2B5EF4-FFF2-40B4-BE49-F238E27FC236}">
-                <a16:creationId xmlns:a16="http://schemas.microsoft.com/office/drawing/2014/main" id="{F21C862C-0098-4366-8FD2-2A1CFCDF48E1}"/>
+                <a16:creationId xmlns:a16="http://schemas.microsoft.com/office/drawing/2014/main" id="{C9AE4EBF-CEF6-4165-BA55-B82F906671B7}"/>
               </a:ext>
             </a:extLst>
           </p:cNvPr>
@@ -17250,7 +17433,7 @@
           <p:cNvPr id="21" name="">
             <a:extLst xmlns:a="http://schemas.openxmlformats.org/drawingml/2006/main">
               <a:ext uri="{FF2B5EF4-FFF2-40B4-BE49-F238E27FC236}">
-                <a16:creationId xmlns:a16="http://schemas.microsoft.com/office/drawing/2014/main" id="{1E7DAFB6-0093-4637-A2C3-FDF88FB0F508}"/>
+                <a16:creationId xmlns:a16="http://schemas.microsoft.com/office/drawing/2014/main" id="{39796108-D2C3-4A8A-B13C-FAF436688CF1}"/>
               </a:ext>
             </a:extLst>
           </p:cNvPr>
@@ -17300,7 +17483,7 @@
           <p:cNvPr id="22" name="">
             <a:extLst xmlns:a="http://schemas.openxmlformats.org/drawingml/2006/main">
               <a:ext uri="{FF2B5EF4-FFF2-40B4-BE49-F238E27FC236}">
-                <a16:creationId xmlns:a16="http://schemas.microsoft.com/office/drawing/2014/main" id="{C1C25AB7-8099-4B6B-8903-4461324FF525}"/>
+                <a16:creationId xmlns:a16="http://schemas.microsoft.com/office/drawing/2014/main" id="{72AFEE73-3817-4C7B-B307-FD126E0F0D65}"/>
               </a:ext>
             </a:extLst>
           </p:cNvPr>
@@ -17350,7 +17533,7 @@
           <p:cNvPr id="23" name="">
             <a:extLst xmlns:a="http://schemas.openxmlformats.org/drawingml/2006/main">
               <a:ext uri="{FF2B5EF4-FFF2-40B4-BE49-F238E27FC236}">
-                <a16:creationId xmlns:a16="http://schemas.microsoft.com/office/drawing/2014/main" id="{27BDE61E-F562-4DC2-8B7A-931EC3088BD3}"/>
+                <a16:creationId xmlns:a16="http://schemas.microsoft.com/office/drawing/2014/main" id="{E21561EB-3107-48F6-A118-273053D05C99}"/>
               </a:ext>
             </a:extLst>
           </p:cNvPr>
@@ -17400,7 +17583,7 @@
           <p:cNvPr id="24" name="">
             <a:extLst xmlns:a="http://schemas.openxmlformats.org/drawingml/2006/main">
               <a:ext uri="{FF2B5EF4-FFF2-40B4-BE49-F238E27FC236}">
-                <a16:creationId xmlns:a16="http://schemas.microsoft.com/office/drawing/2014/main" id="{EAF88F4F-EBD5-4CC1-9683-BC567655A242}"/>
+                <a16:creationId xmlns:a16="http://schemas.microsoft.com/office/drawing/2014/main" id="{1A2FFD67-18A8-41FE-B861-96DFE4EA229B}"/>
               </a:ext>
             </a:extLst>
           </p:cNvPr>
@@ -17450,7 +17633,7 @@
           <p:cNvPr id="25" name="">
             <a:extLst xmlns:a="http://schemas.openxmlformats.org/drawingml/2006/main">
               <a:ext uri="{FF2B5EF4-FFF2-40B4-BE49-F238E27FC236}">
-                <a16:creationId xmlns:a16="http://schemas.microsoft.com/office/drawing/2014/main" id="{353C540C-C6F4-4D25-8191-2EBD9E8BF08E}"/>
+                <a16:creationId xmlns:a16="http://schemas.microsoft.com/office/drawing/2014/main" id="{144CD216-91EC-48A5-BE21-9D1D196AF8E4}"/>
               </a:ext>
             </a:extLst>
           </p:cNvPr>
@@ -17483,7 +17666,7 @@
           <p:cNvPr id="26" name="">
             <a:extLst xmlns:a="http://schemas.openxmlformats.org/drawingml/2006/main">
               <a:ext uri="{FF2B5EF4-FFF2-40B4-BE49-F238E27FC236}">
-                <a16:creationId xmlns:a16="http://schemas.microsoft.com/office/drawing/2014/main" id="{28EEC3E8-5C64-4A31-8355-8FDF085238C1}"/>
+                <a16:creationId xmlns:a16="http://schemas.microsoft.com/office/drawing/2014/main" id="{F74BE83F-30B5-4AA7-84ED-18A15A22B2AC}"/>
               </a:ext>
             </a:extLst>
           </p:cNvPr>
@@ -17533,7 +17716,7 @@
           <p:cNvPr id="27" name="">
             <a:extLst xmlns:a="http://schemas.openxmlformats.org/drawingml/2006/main">
               <a:ext uri="{FF2B5EF4-FFF2-40B4-BE49-F238E27FC236}">
-                <a16:creationId xmlns:a16="http://schemas.microsoft.com/office/drawing/2014/main" id="{9E4EBAC1-FC7F-4A3C-ADE9-8C4B2B17B8FA}"/>
+                <a16:creationId xmlns:a16="http://schemas.microsoft.com/office/drawing/2014/main" id="{20888BC4-12B3-4733-BB02-9915C4C9871F}"/>
               </a:ext>
             </a:extLst>
           </p:cNvPr>
@@ -17583,7 +17766,7 @@
           <p:cNvPr id="28" name="">
             <a:extLst xmlns:a="http://schemas.openxmlformats.org/drawingml/2006/main">
               <a:ext uri="{FF2B5EF4-FFF2-40B4-BE49-F238E27FC236}">
-                <a16:creationId xmlns:a16="http://schemas.microsoft.com/office/drawing/2014/main" id="{98F5A53A-580F-4FE5-948F-C827748BAD4E}"/>
+                <a16:creationId xmlns:a16="http://schemas.microsoft.com/office/drawing/2014/main" id="{CCCC3EE3-F29D-4248-9BA2-7DA39F1C29AA}"/>
               </a:ext>
             </a:extLst>
           </p:cNvPr>
@@ -17633,7 +17816,7 @@
           <p:cNvPr id="29" name="">
             <a:extLst xmlns:a="http://schemas.openxmlformats.org/drawingml/2006/main">
               <a:ext uri="{FF2B5EF4-FFF2-40B4-BE49-F238E27FC236}">
-                <a16:creationId xmlns:a16="http://schemas.microsoft.com/office/drawing/2014/main" id="{E804DFFB-0508-40D7-A411-2F4435871342}"/>
+                <a16:creationId xmlns:a16="http://schemas.microsoft.com/office/drawing/2014/main" id="{602C0B17-9894-43B3-812E-9D9A338C8655}"/>
               </a:ext>
             </a:extLst>
           </p:cNvPr>
@@ -17683,7 +17866,7 @@
           <p:cNvPr id="30" name="">
             <a:extLst xmlns:a="http://schemas.openxmlformats.org/drawingml/2006/main">
               <a:ext uri="{FF2B5EF4-FFF2-40B4-BE49-F238E27FC236}">
-                <a16:creationId xmlns:a16="http://schemas.microsoft.com/office/drawing/2014/main" id="{D0DEF477-EB5E-42E0-816B-7327EA4118DB}"/>
+                <a16:creationId xmlns:a16="http://schemas.microsoft.com/office/drawing/2014/main" id="{51FE85A5-53BC-4AFC-837D-C62904C964CB}"/>
               </a:ext>
             </a:extLst>
           </p:cNvPr>
@@ -17733,7 +17916,7 @@
           <p:cNvPr id="31" name="">
             <a:extLst xmlns:a="http://schemas.openxmlformats.org/drawingml/2006/main">
               <a:ext uri="{FF2B5EF4-FFF2-40B4-BE49-F238E27FC236}">
-                <a16:creationId xmlns:a16="http://schemas.microsoft.com/office/drawing/2014/main" id="{F581F22D-DCFA-4E0B-A0FF-D796C8BC028D}"/>
+                <a16:creationId xmlns:a16="http://schemas.microsoft.com/office/drawing/2014/main" id="{F39CF95D-6361-4F21-8318-36E56822F436}"/>
               </a:ext>
             </a:extLst>
           </p:cNvPr>
@@ -17783,7 +17966,7 @@
           <p:cNvPr id="32" name="">
             <a:extLst xmlns:a="http://schemas.openxmlformats.org/drawingml/2006/main">
               <a:ext uri="{FF2B5EF4-FFF2-40B4-BE49-F238E27FC236}">
-                <a16:creationId xmlns:a16="http://schemas.microsoft.com/office/drawing/2014/main" id="{078CB6D5-38E1-41B2-B43B-25497C8C82FA}"/>
+                <a16:creationId xmlns:a16="http://schemas.microsoft.com/office/drawing/2014/main" id="{AB7A005F-B70A-4A04-8325-F6B6E1259605}"/>
               </a:ext>
             </a:extLst>
           </p:cNvPr>
@@ -17816,7 +17999,7 @@
           <p:cNvPr id="33" name="">
             <a:extLst xmlns:a="http://schemas.openxmlformats.org/drawingml/2006/main">
               <a:ext uri="{FF2B5EF4-FFF2-40B4-BE49-F238E27FC236}">
-                <a16:creationId xmlns:a16="http://schemas.microsoft.com/office/drawing/2014/main" id="{49AC96BF-21C0-4E10-B2E0-14E7EFBDD768}"/>
+                <a16:creationId xmlns:a16="http://schemas.microsoft.com/office/drawing/2014/main" id="{9E6B6607-9469-434F-A1FE-385D809FD928}"/>
               </a:ext>
             </a:extLst>
           </p:cNvPr>
@@ -17866,7 +18049,7 @@
           <p:cNvPr id="34" name="">
             <a:extLst xmlns:a="http://schemas.openxmlformats.org/drawingml/2006/main">
               <a:ext uri="{FF2B5EF4-FFF2-40B4-BE49-F238E27FC236}">
-                <a16:creationId xmlns:a16="http://schemas.microsoft.com/office/drawing/2014/main" id="{378AFBBB-C7F7-4ACA-9E09-32590194DC97}"/>
+                <a16:creationId xmlns:a16="http://schemas.microsoft.com/office/drawing/2014/main" id="{D7047A9A-4F84-4BFE-B508-A9A7D971ED24}"/>
               </a:ext>
             </a:extLst>
           </p:cNvPr>
@@ -17916,7 +18099,7 @@
           <p:cNvPr id="35" name="">
             <a:extLst xmlns:a="http://schemas.openxmlformats.org/drawingml/2006/main">
               <a:ext uri="{FF2B5EF4-FFF2-40B4-BE49-F238E27FC236}">
-                <a16:creationId xmlns:a16="http://schemas.microsoft.com/office/drawing/2014/main" id="{DDFFE072-CE02-435F-86D7-C693473AF13B}"/>
+                <a16:creationId xmlns:a16="http://schemas.microsoft.com/office/drawing/2014/main" id="{B4CB1D50-943D-4DAA-A380-6F2970AB0354}"/>
               </a:ext>
             </a:extLst>
           </p:cNvPr>
@@ -17966,7 +18149,7 @@
           <p:cNvPr id="36" name="">
             <a:extLst xmlns:a="http://schemas.openxmlformats.org/drawingml/2006/main">
               <a:ext uri="{FF2B5EF4-FFF2-40B4-BE49-F238E27FC236}">
-                <a16:creationId xmlns:a16="http://schemas.microsoft.com/office/drawing/2014/main" id="{DB3A4400-36B5-4878-BD9D-ECF999E4A840}"/>
+                <a16:creationId xmlns:a16="http://schemas.microsoft.com/office/drawing/2014/main" id="{F94E103A-7210-4111-B067-B27DC22D8CA3}"/>
               </a:ext>
             </a:extLst>
           </p:cNvPr>
@@ -18016,7 +18199,7 @@
           <p:cNvPr id="37" name="">
             <a:extLst xmlns:a="http://schemas.openxmlformats.org/drawingml/2006/main">
               <a:ext uri="{FF2B5EF4-FFF2-40B4-BE49-F238E27FC236}">
-                <a16:creationId xmlns:a16="http://schemas.microsoft.com/office/drawing/2014/main" id="{19164E64-67AF-415A-A208-BBA7F1E596ED}"/>
+                <a16:creationId xmlns:a16="http://schemas.microsoft.com/office/drawing/2014/main" id="{AF33946A-94C2-406B-801F-C5AABD7B79A8}"/>
               </a:ext>
             </a:extLst>
           </p:cNvPr>
@@ -18066,7 +18249,7 @@
           <p:cNvPr id="38" name="">
             <a:extLst xmlns:a="http://schemas.openxmlformats.org/drawingml/2006/main">
               <a:ext uri="{FF2B5EF4-FFF2-40B4-BE49-F238E27FC236}">
-                <a16:creationId xmlns:a16="http://schemas.microsoft.com/office/drawing/2014/main" id="{CA10CA0D-E678-4E11-A1A3-545C4FCBC388}"/>
+                <a16:creationId xmlns:a16="http://schemas.microsoft.com/office/drawing/2014/main" id="{311FD307-4C69-423E-97D4-275AF504B687}"/>
               </a:ext>
             </a:extLst>
           </p:cNvPr>
@@ -18116,7 +18299,7 @@
           <p:cNvPr id="39" name="">
             <a:extLst xmlns:a="http://schemas.openxmlformats.org/drawingml/2006/main">
               <a:ext uri="{FF2B5EF4-FFF2-40B4-BE49-F238E27FC236}">
-                <a16:creationId xmlns:a16="http://schemas.microsoft.com/office/drawing/2014/main" id="{F5E5BECB-0201-4FA5-8A14-FCAF3EE87A51}"/>
+                <a16:creationId xmlns:a16="http://schemas.microsoft.com/office/drawing/2014/main" id="{6AE5C8B4-B9D7-4DDB-94B8-CB6D8B4DAC72}"/>
               </a:ext>
             </a:extLst>
           </p:cNvPr>
@@ -18166,7 +18349,7 @@
           <p:cNvPr id="40" name="">
             <a:extLst xmlns:a="http://schemas.openxmlformats.org/drawingml/2006/main">
               <a:ext uri="{FF2B5EF4-FFF2-40B4-BE49-F238E27FC236}">
-                <a16:creationId xmlns:a16="http://schemas.microsoft.com/office/drawing/2014/main" id="{8BA33755-89A4-4C9C-931A-4477A4E248E2}"/>
+                <a16:creationId xmlns:a16="http://schemas.microsoft.com/office/drawing/2014/main" id="{0D776B81-2E7B-4CFE-BB95-1FB439BB9CDD}"/>
               </a:ext>
             </a:extLst>
           </p:cNvPr>
@@ -18250,7 +18433,7 @@
           <p:cNvPr id="41" name="">
             <a:extLst xmlns:a="http://schemas.openxmlformats.org/drawingml/2006/main">
               <a:ext uri="{FF2B5EF4-FFF2-40B4-BE49-F238E27FC236}">
-                <a16:creationId xmlns:a16="http://schemas.microsoft.com/office/drawing/2014/main" id="{91693DA1-9E50-442B-9B2A-35640EE70802}"/>
+                <a16:creationId xmlns:a16="http://schemas.microsoft.com/office/drawing/2014/main" id="{15AF5992-C175-4A49-80F1-9BA451AD5EF8}"/>
               </a:ext>
             </a:extLst>
           </p:cNvPr>
@@ -18283,7 +18466,7 @@
           <p:cNvPr id="42" name="">
             <a:extLst xmlns:a="http://schemas.openxmlformats.org/drawingml/2006/main">
               <a:ext uri="{FF2B5EF4-FFF2-40B4-BE49-F238E27FC236}">
-                <a16:creationId xmlns:a16="http://schemas.microsoft.com/office/drawing/2014/main" id="{6DDD9CD8-2BF0-43CB-A680-B41FFE62DD77}"/>
+                <a16:creationId xmlns:a16="http://schemas.microsoft.com/office/drawing/2014/main" id="{531675F0-91AC-4F11-831E-0ED0D3E7E027}"/>
               </a:ext>
             </a:extLst>
           </p:cNvPr>
@@ -18323,7 +18506,7 @@
                   <a:srgbClr val="FF6B35"/>
                 </a:solidFill>
               </a:rPr>
-              <a:t>汇报口径</a:t>
+              <a:t>评估边界</a:t>
             </a:r>
           </a:p>
         </p:txBody>
@@ -18333,7 +18516,7 @@
           <p:cNvPr id="43" name="">
             <a:extLst xmlns:a="http://schemas.openxmlformats.org/drawingml/2006/main">
               <a:ext uri="{FF2B5EF4-FFF2-40B4-BE49-F238E27FC236}">
-                <a16:creationId xmlns:a16="http://schemas.microsoft.com/office/drawing/2014/main" id="{6ABEF781-1348-4535-BBFA-2775CF75C35F}"/>
+                <a16:creationId xmlns:a16="http://schemas.microsoft.com/office/drawing/2014/main" id="{E7776E90-3D7B-47D9-BF94-B0A6FAD845CA}"/>
               </a:ext>
             </a:extLst>
           </p:cNvPr>
@@ -18383,7 +18566,7 @@
           <p:cNvPr id="44" name="">
             <a:extLst xmlns:a="http://schemas.openxmlformats.org/drawingml/2006/main">
               <a:ext uri="{FF2B5EF4-FFF2-40B4-BE49-F238E27FC236}">
-                <a16:creationId xmlns:a16="http://schemas.microsoft.com/office/drawing/2014/main" id="{6B5B7193-C6BE-439F-8B17-94BC2C454FB4}"/>
+                <a16:creationId xmlns:a16="http://schemas.microsoft.com/office/drawing/2014/main" id="{2C721AE1-1A61-47B9-8330-7B9969427EAC}"/>
               </a:ext>
             </a:extLst>
           </p:cNvPr>
@@ -18431,7 +18614,7 @@
     </p:spTree>
     <p:extLst>
       <p:ext uri="{BB962C8B-B14F-4D97-AF65-F5344CB8AC3E}">
-        <p14:creationId xmlns:p14="http://schemas.microsoft.com/office/powerpoint/2010/main" val="1515646466"/>
+        <p14:creationId xmlns:p14="http://schemas.microsoft.com/office/powerpoint/2010/main" val="1965342834"/>
       </p:ext>
     </p:extLst>
   </p:cSld>
@@ -18462,7 +18645,7 @@
           <p:cNvPr id="1" name="">
             <a:extLst xmlns:a="http://schemas.openxmlformats.org/drawingml/2006/main">
               <a:ext uri="{FF2B5EF4-FFF2-40B4-BE49-F238E27FC236}">
-                <a16:creationId xmlns:a16="http://schemas.microsoft.com/office/drawing/2014/main" id="{E95F5D7E-19CA-4C2D-81C6-4E8A5955E946}"/>
+                <a16:creationId xmlns:a16="http://schemas.microsoft.com/office/drawing/2014/main" id="{38308102-72E1-4C54-87AA-80C035143BDC}"/>
               </a:ext>
             </a:extLst>
           </p:cNvPr>
@@ -18512,7 +18695,7 @@
           <p:cNvPr id="2" name="">
             <a:extLst xmlns:a="http://schemas.openxmlformats.org/drawingml/2006/main">
               <a:ext uri="{FF2B5EF4-FFF2-40B4-BE49-F238E27FC236}">
-                <a16:creationId xmlns:a16="http://schemas.microsoft.com/office/drawing/2014/main" id="{EB3568DE-5FE2-485B-A3FA-20744682C969}"/>
+                <a16:creationId xmlns:a16="http://schemas.microsoft.com/office/drawing/2014/main" id="{9CFE0BD9-9626-4C5D-B595-1BDC092EABE7}"/>
               </a:ext>
             </a:extLst>
           </p:cNvPr>
@@ -18562,7 +18745,7 @@
           <p:cNvPr id="3" name="">
             <a:extLst xmlns:a="http://schemas.openxmlformats.org/drawingml/2006/main">
               <a:ext uri="{FF2B5EF4-FFF2-40B4-BE49-F238E27FC236}">
-                <a16:creationId xmlns:a16="http://schemas.microsoft.com/office/drawing/2014/main" id="{FBE09D3F-20C5-4326-ACEC-94A9F593B51F}"/>
+                <a16:creationId xmlns:a16="http://schemas.microsoft.com/office/drawing/2014/main" id="{E8E5B878-8B94-487F-838A-1A4B7D9112B6}"/>
               </a:ext>
             </a:extLst>
           </p:cNvPr>
@@ -18612,7 +18795,7 @@
           <p:cNvPr id="4" name="">
             <a:extLst xmlns:a="http://schemas.openxmlformats.org/drawingml/2006/main">
               <a:ext uri="{FF2B5EF4-FFF2-40B4-BE49-F238E27FC236}">
-                <a16:creationId xmlns:a16="http://schemas.microsoft.com/office/drawing/2014/main" id="{9A51DF95-D399-4E5C-B2EC-EDEDC73EB05F}"/>
+                <a16:creationId xmlns:a16="http://schemas.microsoft.com/office/drawing/2014/main" id="{7C0F56CF-463B-487D-B19F-9C5EA0121963}"/>
               </a:ext>
             </a:extLst>
           </p:cNvPr>
@@ -18645,7 +18828,7 @@
           <p:cNvPr id="5" name="">
             <a:extLst xmlns:a="http://schemas.openxmlformats.org/drawingml/2006/main">
               <a:ext uri="{FF2B5EF4-FFF2-40B4-BE49-F238E27FC236}">
-                <a16:creationId xmlns:a16="http://schemas.microsoft.com/office/drawing/2014/main" id="{5EE377F7-BCFE-4E8D-8B0B-9A18C258F6C8}"/>
+                <a16:creationId xmlns:a16="http://schemas.microsoft.com/office/drawing/2014/main" id="{F67EF36B-D247-4095-9E4D-0F3963590BEF}"/>
               </a:ext>
             </a:extLst>
           </p:cNvPr>
@@ -18695,7 +18878,7 @@
           <p:cNvPr id="6" name="">
             <a:extLst xmlns:a="http://schemas.openxmlformats.org/drawingml/2006/main">
               <a:ext uri="{FF2B5EF4-FFF2-40B4-BE49-F238E27FC236}">
-                <a16:creationId xmlns:a16="http://schemas.microsoft.com/office/drawing/2014/main" id="{9F16B322-4CFA-45E6-BE69-36F45BE92D61}"/>
+                <a16:creationId xmlns:a16="http://schemas.microsoft.com/office/drawing/2014/main" id="{D558ED72-C0CB-4689-B7D8-BD31796EAF72}"/>
               </a:ext>
             </a:extLst>
           </p:cNvPr>
@@ -18728,7 +18911,7 @@
           <p:cNvPr id="7" name="">
             <a:extLst xmlns:a="http://schemas.openxmlformats.org/drawingml/2006/main">
               <a:ext uri="{FF2B5EF4-FFF2-40B4-BE49-F238E27FC236}">
-                <a16:creationId xmlns:a16="http://schemas.microsoft.com/office/drawing/2014/main" id="{589141C0-1D44-4A9C-AF53-D760B4B11234}"/>
+                <a16:creationId xmlns:a16="http://schemas.microsoft.com/office/drawing/2014/main" id="{4DF39047-15DE-47B8-8F11-4063B43E9A64}"/>
               </a:ext>
             </a:extLst>
           </p:cNvPr>
@@ -18778,7 +18961,7 @@
           <p:cNvPr id="8" name="">
             <a:extLst xmlns:a="http://schemas.openxmlformats.org/drawingml/2006/main">
               <a:ext uri="{FF2B5EF4-FFF2-40B4-BE49-F238E27FC236}">
-                <a16:creationId xmlns:a16="http://schemas.microsoft.com/office/drawing/2014/main" id="{62EA315B-2A66-4966-8F5B-A5A806297663}"/>
+                <a16:creationId xmlns:a16="http://schemas.microsoft.com/office/drawing/2014/main" id="{4767B4F6-0604-405B-8CDD-E3050FB5F137}"/>
               </a:ext>
             </a:extLst>
           </p:cNvPr>
@@ -18811,7 +18994,7 @@
           <p:cNvPr id="9" name="">
             <a:extLst xmlns:a="http://schemas.openxmlformats.org/drawingml/2006/main">
               <a:ext uri="{FF2B5EF4-FFF2-40B4-BE49-F238E27FC236}">
-                <a16:creationId xmlns:a16="http://schemas.microsoft.com/office/drawing/2014/main" id="{2C763F44-72A0-467A-B8F8-A84FB62E95F5}"/>
+                <a16:creationId xmlns:a16="http://schemas.microsoft.com/office/drawing/2014/main" id="{0C92E5D1-B776-4570-B822-BCB966B7E3FA}"/>
               </a:ext>
             </a:extLst>
           </p:cNvPr>
@@ -18861,7 +19044,7 @@
           <p:cNvPr id="10" name="">
             <a:extLst xmlns:a="http://schemas.openxmlformats.org/drawingml/2006/main">
               <a:ext uri="{FF2B5EF4-FFF2-40B4-BE49-F238E27FC236}">
-                <a16:creationId xmlns:a16="http://schemas.microsoft.com/office/drawing/2014/main" id="{C816C0EA-24B3-4920-8A32-4A488A8AA3B3}"/>
+                <a16:creationId xmlns:a16="http://schemas.microsoft.com/office/drawing/2014/main" id="{5432C73D-3287-4058-A250-B7A29FE5D602}"/>
               </a:ext>
             </a:extLst>
           </p:cNvPr>
@@ -18894,7 +19077,7 @@
           <p:cNvPr id="11" name="">
             <a:extLst xmlns:a="http://schemas.openxmlformats.org/drawingml/2006/main">
               <a:ext uri="{FF2B5EF4-FFF2-40B4-BE49-F238E27FC236}">
-                <a16:creationId xmlns:a16="http://schemas.microsoft.com/office/drawing/2014/main" id="{389725E2-BFFC-4768-9F3E-D20C00B1ABD8}"/>
+                <a16:creationId xmlns:a16="http://schemas.microsoft.com/office/drawing/2014/main" id="{92653D38-37D2-4D26-8DD1-125C269DEF23}"/>
               </a:ext>
             </a:extLst>
           </p:cNvPr>
@@ -18944,7 +19127,7 @@
           <p:cNvPr id="12" name="">
             <a:extLst xmlns:a="http://schemas.openxmlformats.org/drawingml/2006/main">
               <a:ext uri="{FF2B5EF4-FFF2-40B4-BE49-F238E27FC236}">
-                <a16:creationId xmlns:a16="http://schemas.microsoft.com/office/drawing/2014/main" id="{032AA5FD-5315-44CF-80F9-28891726686C}"/>
+                <a16:creationId xmlns:a16="http://schemas.microsoft.com/office/drawing/2014/main" id="{AD1F0152-1CD2-400C-B90E-5129A45CEC36}"/>
               </a:ext>
             </a:extLst>
           </p:cNvPr>
@@ -18977,7 +19160,7 @@
           <p:cNvPr id="13" name="">
             <a:extLst xmlns:a="http://schemas.openxmlformats.org/drawingml/2006/main">
               <a:ext uri="{FF2B5EF4-FFF2-40B4-BE49-F238E27FC236}">
-                <a16:creationId xmlns:a16="http://schemas.microsoft.com/office/drawing/2014/main" id="{DCE11317-407E-4534-A517-4A9E936CAABB}"/>
+                <a16:creationId xmlns:a16="http://schemas.microsoft.com/office/drawing/2014/main" id="{5DA43EDC-68FD-41A9-AC50-A956E4A8C93E}"/>
               </a:ext>
             </a:extLst>
           </p:cNvPr>
@@ -19027,7 +19210,7 @@
           <p:cNvPr id="14" name="">
             <a:extLst xmlns:a="http://schemas.openxmlformats.org/drawingml/2006/main">
               <a:ext uri="{FF2B5EF4-FFF2-40B4-BE49-F238E27FC236}">
-                <a16:creationId xmlns:a16="http://schemas.microsoft.com/office/drawing/2014/main" id="{C13B7813-30E5-4117-AD1A-6C2E3944CE2D}"/>
+                <a16:creationId xmlns:a16="http://schemas.microsoft.com/office/drawing/2014/main" id="{363A2E1B-875B-4F05-92D6-EF6174FAF60D}"/>
               </a:ext>
             </a:extLst>
           </p:cNvPr>
@@ -19057,7 +19240,7 @@
           <p:cNvPr id="15" name="">
             <a:extLst xmlns:a="http://schemas.openxmlformats.org/drawingml/2006/main">
               <a:ext uri="{FF2B5EF4-FFF2-40B4-BE49-F238E27FC236}">
-                <a16:creationId xmlns:a16="http://schemas.microsoft.com/office/drawing/2014/main" id="{4348DFC0-6D4D-4B18-B7DD-DBF70CC990AB}"/>
+                <a16:creationId xmlns:a16="http://schemas.microsoft.com/office/drawing/2014/main" id="{542A2324-62E5-4345-9E97-B08F5C3F53F4}"/>
               </a:ext>
             </a:extLst>
           </p:cNvPr>
@@ -19087,7 +19270,7 @@
           <p:cNvPr id="16" name="">
             <a:extLst xmlns:a="http://schemas.openxmlformats.org/drawingml/2006/main">
               <a:ext uri="{FF2B5EF4-FFF2-40B4-BE49-F238E27FC236}">
-                <a16:creationId xmlns:a16="http://schemas.microsoft.com/office/drawing/2014/main" id="{74E7431F-0007-4BCC-89C4-1FBBF8B6B934}"/>
+                <a16:creationId xmlns:a16="http://schemas.microsoft.com/office/drawing/2014/main" id="{87FC87DC-43B2-4432-9E19-6F9A0C1901F3}"/>
               </a:ext>
             </a:extLst>
           </p:cNvPr>
@@ -19117,7 +19300,7 @@
           <p:cNvPr id="17" name="">
             <a:extLst xmlns:a="http://schemas.openxmlformats.org/drawingml/2006/main">
               <a:ext uri="{FF2B5EF4-FFF2-40B4-BE49-F238E27FC236}">
-                <a16:creationId xmlns:a16="http://schemas.microsoft.com/office/drawing/2014/main" id="{8EC689DC-6D71-4C8E-86C0-77F2A5B76DA7}"/>
+                <a16:creationId xmlns:a16="http://schemas.microsoft.com/office/drawing/2014/main" id="{101076A2-BD9B-4504-8ACC-4CAB8ABCB4C4}"/>
               </a:ext>
             </a:extLst>
           </p:cNvPr>
@@ -19147,7 +19330,7 @@
           <p:cNvPr id="18" name="">
             <a:extLst xmlns:a="http://schemas.openxmlformats.org/drawingml/2006/main">
               <a:ext uri="{FF2B5EF4-FFF2-40B4-BE49-F238E27FC236}">
-                <a16:creationId xmlns:a16="http://schemas.microsoft.com/office/drawing/2014/main" id="{4D5F4BFC-0338-417A-91E6-A39755D79249}"/>
+                <a16:creationId xmlns:a16="http://schemas.microsoft.com/office/drawing/2014/main" id="{9EE89C57-F9EA-40E2-8FCA-544D4C99892F}"/>
               </a:ext>
             </a:extLst>
           </p:cNvPr>
@@ -19231,7 +19414,7 @@
           <p:cNvPr id="19" name="">
             <a:extLst xmlns:a="http://schemas.openxmlformats.org/drawingml/2006/main">
               <a:ext uri="{FF2B5EF4-FFF2-40B4-BE49-F238E27FC236}">
-                <a16:creationId xmlns:a16="http://schemas.microsoft.com/office/drawing/2014/main" id="{8B8863D9-18DB-46DC-A5FE-59D531B0CF49}"/>
+                <a16:creationId xmlns:a16="http://schemas.microsoft.com/office/drawing/2014/main" id="{0416069A-6B2F-4B37-97D9-5A6F40180ACE}"/>
               </a:ext>
             </a:extLst>
           </p:cNvPr>
@@ -19315,7 +19498,7 @@
           <p:cNvPr id="20" name="">
             <a:extLst xmlns:a="http://schemas.openxmlformats.org/drawingml/2006/main">
               <a:ext uri="{FF2B5EF4-FFF2-40B4-BE49-F238E27FC236}">
-                <a16:creationId xmlns:a16="http://schemas.microsoft.com/office/drawing/2014/main" id="{4A66E31B-F91B-4A4E-9623-2B3513139684}"/>
+                <a16:creationId xmlns:a16="http://schemas.microsoft.com/office/drawing/2014/main" id="{97F7F488-DB9E-41D8-B799-40111E856C3D}"/>
               </a:ext>
             </a:extLst>
           </p:cNvPr>
@@ -19399,7 +19582,7 @@
           <p:cNvPr id="21" name="">
             <a:extLst xmlns:a="http://schemas.openxmlformats.org/drawingml/2006/main">
               <a:ext uri="{FF2B5EF4-FFF2-40B4-BE49-F238E27FC236}">
-                <a16:creationId xmlns:a16="http://schemas.microsoft.com/office/drawing/2014/main" id="{2F25DAA1-374B-4AF4-BA53-D8F52FCBA53F}"/>
+                <a16:creationId xmlns:a16="http://schemas.microsoft.com/office/drawing/2014/main" id="{2219033E-E3C7-49C3-AAF4-F8B9375514F9}"/>
               </a:ext>
             </a:extLst>
           </p:cNvPr>
@@ -19500,7 +19683,7 @@
           <p:cNvPr id="22" name="">
             <a:extLst xmlns:a="http://schemas.openxmlformats.org/drawingml/2006/main">
               <a:ext uri="{FF2B5EF4-FFF2-40B4-BE49-F238E27FC236}">
-                <a16:creationId xmlns:a16="http://schemas.microsoft.com/office/drawing/2014/main" id="{AABD7801-B0AA-4A77-8C5E-9D989532A3D7}"/>
+                <a16:creationId xmlns:a16="http://schemas.microsoft.com/office/drawing/2014/main" id="{C2389078-C8A8-4CF4-81C7-AD37345E2C77}"/>
               </a:ext>
             </a:extLst>
           </p:cNvPr>
@@ -19584,7 +19767,7 @@
           <p:cNvPr id="23" name="">
             <a:extLst xmlns:a="http://schemas.openxmlformats.org/drawingml/2006/main">
               <a:ext uri="{FF2B5EF4-FFF2-40B4-BE49-F238E27FC236}">
-                <a16:creationId xmlns:a16="http://schemas.microsoft.com/office/drawing/2014/main" id="{72AA5BB7-DF94-4B0D-9B27-EEE584B60E4B}"/>
+                <a16:creationId xmlns:a16="http://schemas.microsoft.com/office/drawing/2014/main" id="{3F15B784-F02F-48F2-956F-A5F55BF446DA}"/>
               </a:ext>
             </a:extLst>
           </p:cNvPr>
@@ -19617,7 +19800,7 @@
           <p:cNvPr id="24" name="">
             <a:extLst xmlns:a="http://schemas.openxmlformats.org/drawingml/2006/main">
               <a:ext uri="{FF2B5EF4-FFF2-40B4-BE49-F238E27FC236}">
-                <a16:creationId xmlns:a16="http://schemas.microsoft.com/office/drawing/2014/main" id="{3330AE06-9905-4FC7-84D0-D571DB1AD1A2}"/>
+                <a16:creationId xmlns:a16="http://schemas.microsoft.com/office/drawing/2014/main" id="{DF36964B-1A25-4FFC-B2B6-FDBC3B74D5BE}"/>
               </a:ext>
             </a:extLst>
           </p:cNvPr>
@@ -19667,7 +19850,7 @@
           <p:cNvPr id="25" name="">
             <a:extLst xmlns:a="http://schemas.openxmlformats.org/drawingml/2006/main">
               <a:ext uri="{FF2B5EF4-FFF2-40B4-BE49-F238E27FC236}">
-                <a16:creationId xmlns:a16="http://schemas.microsoft.com/office/drawing/2014/main" id="{3F20095E-CBE5-4AC9-82D9-6DBF59C86E73}"/>
+                <a16:creationId xmlns:a16="http://schemas.microsoft.com/office/drawing/2014/main" id="{7092CCCE-D9DD-4B46-92A0-6F17B3CF0F20}"/>
               </a:ext>
             </a:extLst>
           </p:cNvPr>
@@ -19717,7 +19900,7 @@
           <p:cNvPr id="26" name="">
             <a:extLst xmlns:a="http://schemas.openxmlformats.org/drawingml/2006/main">
               <a:ext uri="{FF2B5EF4-FFF2-40B4-BE49-F238E27FC236}">
-                <a16:creationId xmlns:a16="http://schemas.microsoft.com/office/drawing/2014/main" id="{72327324-10E0-4F69-9B3A-D59142047F01}"/>
+                <a16:creationId xmlns:a16="http://schemas.microsoft.com/office/drawing/2014/main" id="{082B7A07-DD19-4E7B-8F1C-451006831759}"/>
               </a:ext>
             </a:extLst>
           </p:cNvPr>
@@ -19767,7 +19950,7 @@
           <p:cNvPr id="27" name="">
             <a:extLst xmlns:a="http://schemas.openxmlformats.org/drawingml/2006/main">
               <a:ext uri="{FF2B5EF4-FFF2-40B4-BE49-F238E27FC236}">
-                <a16:creationId xmlns:a16="http://schemas.microsoft.com/office/drawing/2014/main" id="{5208F6A1-6998-4F3B-9C0B-E38E2A4AD1F5}"/>
+                <a16:creationId xmlns:a16="http://schemas.microsoft.com/office/drawing/2014/main" id="{928A0055-3A9C-4751-8151-8DD15FADDFCA}"/>
               </a:ext>
             </a:extLst>
           </p:cNvPr>
@@ -19800,7 +19983,7 @@
           <p:cNvPr id="28" name="">
             <a:extLst xmlns:a="http://schemas.openxmlformats.org/drawingml/2006/main">
               <a:ext uri="{FF2B5EF4-FFF2-40B4-BE49-F238E27FC236}">
-                <a16:creationId xmlns:a16="http://schemas.microsoft.com/office/drawing/2014/main" id="{37A0A3F3-A64A-472C-860F-8EE2609CBEE6}"/>
+                <a16:creationId xmlns:a16="http://schemas.microsoft.com/office/drawing/2014/main" id="{7DE7B6B4-6C13-4901-9311-49521768A7DF}"/>
               </a:ext>
             </a:extLst>
           </p:cNvPr>
@@ -19850,7 +20033,7 @@
           <p:cNvPr id="29" name="">
             <a:extLst xmlns:a="http://schemas.openxmlformats.org/drawingml/2006/main">
               <a:ext uri="{FF2B5EF4-FFF2-40B4-BE49-F238E27FC236}">
-                <a16:creationId xmlns:a16="http://schemas.microsoft.com/office/drawing/2014/main" id="{DE4D8FDE-3B4F-462B-9B2A-F724C2EF6F0E}"/>
+                <a16:creationId xmlns:a16="http://schemas.microsoft.com/office/drawing/2014/main" id="{14FD6093-677B-4D60-A488-7D282089CAFB}"/>
               </a:ext>
             </a:extLst>
           </p:cNvPr>
@@ -19900,7 +20083,7 @@
           <p:cNvPr id="30" name="">
             <a:extLst xmlns:a="http://schemas.openxmlformats.org/drawingml/2006/main">
               <a:ext uri="{FF2B5EF4-FFF2-40B4-BE49-F238E27FC236}">
-                <a16:creationId xmlns:a16="http://schemas.microsoft.com/office/drawing/2014/main" id="{B9B74399-1CD5-4ADA-A2E3-5ABE25051C09}"/>
+                <a16:creationId xmlns:a16="http://schemas.microsoft.com/office/drawing/2014/main" id="{E8B42C95-C486-40EB-8026-B703D91D0984}"/>
               </a:ext>
             </a:extLst>
           </p:cNvPr>
@@ -19950,7 +20133,7 @@
           <p:cNvPr id="31" name="">
             <a:extLst xmlns:a="http://schemas.openxmlformats.org/drawingml/2006/main">
               <a:ext uri="{FF2B5EF4-FFF2-40B4-BE49-F238E27FC236}">
-                <a16:creationId xmlns:a16="http://schemas.microsoft.com/office/drawing/2014/main" id="{55B326BA-B601-4855-AF50-5221B6DBF1E7}"/>
+                <a16:creationId xmlns:a16="http://schemas.microsoft.com/office/drawing/2014/main" id="{D4CD81C9-4CA4-4814-AFAB-C715F48CA1FD}"/>
               </a:ext>
             </a:extLst>
           </p:cNvPr>
@@ -19983,7 +20166,7 @@
           <p:cNvPr id="32" name="">
             <a:extLst xmlns:a="http://schemas.openxmlformats.org/drawingml/2006/main">
               <a:ext uri="{FF2B5EF4-FFF2-40B4-BE49-F238E27FC236}">
-                <a16:creationId xmlns:a16="http://schemas.microsoft.com/office/drawing/2014/main" id="{1ACDF505-5A94-44E8-8937-F4D8264CC0C0}"/>
+                <a16:creationId xmlns:a16="http://schemas.microsoft.com/office/drawing/2014/main" id="{F3FE003A-3550-4162-A3B3-3887F1105561}"/>
               </a:ext>
             </a:extLst>
           </p:cNvPr>
@@ -20033,7 +20216,7 @@
           <p:cNvPr id="33" name="">
             <a:extLst xmlns:a="http://schemas.openxmlformats.org/drawingml/2006/main">
               <a:ext uri="{FF2B5EF4-FFF2-40B4-BE49-F238E27FC236}">
-                <a16:creationId xmlns:a16="http://schemas.microsoft.com/office/drawing/2014/main" id="{13C437A2-90E2-4368-AF5A-020BDBFFC01C}"/>
+                <a16:creationId xmlns:a16="http://schemas.microsoft.com/office/drawing/2014/main" id="{CCA6A614-1E2D-494D-8E95-ABCEB8499372}"/>
               </a:ext>
             </a:extLst>
           </p:cNvPr>
@@ -20083,7 +20266,7 @@
           <p:cNvPr id="34" name="">
             <a:extLst xmlns:a="http://schemas.openxmlformats.org/drawingml/2006/main">
               <a:ext uri="{FF2B5EF4-FFF2-40B4-BE49-F238E27FC236}">
-                <a16:creationId xmlns:a16="http://schemas.microsoft.com/office/drawing/2014/main" id="{17B23798-4540-4F4D-850F-CBF90EC641B9}"/>
+                <a16:creationId xmlns:a16="http://schemas.microsoft.com/office/drawing/2014/main" id="{57D5634D-E8BA-4980-9051-4E82FCF9D621}"/>
               </a:ext>
             </a:extLst>
           </p:cNvPr>
@@ -20133,7 +20316,7 @@
           <p:cNvPr id="35" name="">
             <a:extLst xmlns:a="http://schemas.openxmlformats.org/drawingml/2006/main">
               <a:ext uri="{FF2B5EF4-FFF2-40B4-BE49-F238E27FC236}">
-                <a16:creationId xmlns:a16="http://schemas.microsoft.com/office/drawing/2014/main" id="{8D28DAC5-EFDF-4256-BE4D-D50D49A54365}"/>
+                <a16:creationId xmlns:a16="http://schemas.microsoft.com/office/drawing/2014/main" id="{8B62A27D-65C5-4692-9C3F-ABB4C2677486}"/>
               </a:ext>
             </a:extLst>
           </p:cNvPr>
@@ -20166,7 +20349,7 @@
           <p:cNvPr id="36" name="">
             <a:extLst xmlns:a="http://schemas.openxmlformats.org/drawingml/2006/main">
               <a:ext uri="{FF2B5EF4-FFF2-40B4-BE49-F238E27FC236}">
-                <a16:creationId xmlns:a16="http://schemas.microsoft.com/office/drawing/2014/main" id="{4B6807EF-A181-4947-943E-24D0B3321B6D}"/>
+                <a16:creationId xmlns:a16="http://schemas.microsoft.com/office/drawing/2014/main" id="{FF636AAA-92E2-483A-9D19-058B61CAE1E1}"/>
               </a:ext>
             </a:extLst>
           </p:cNvPr>
@@ -20216,7 +20399,7 @@
           <p:cNvPr id="37" name="">
             <a:extLst xmlns:a="http://schemas.openxmlformats.org/drawingml/2006/main">
               <a:ext uri="{FF2B5EF4-FFF2-40B4-BE49-F238E27FC236}">
-                <a16:creationId xmlns:a16="http://schemas.microsoft.com/office/drawing/2014/main" id="{85082B4F-F724-4D2A-9D5E-C74873C50DF7}"/>
+                <a16:creationId xmlns:a16="http://schemas.microsoft.com/office/drawing/2014/main" id="{0EA37921-1E96-465E-8F32-3D025337E770}"/>
               </a:ext>
             </a:extLst>
           </p:cNvPr>
@@ -20266,7 +20449,7 @@
           <p:cNvPr id="38" name="">
             <a:extLst xmlns:a="http://schemas.openxmlformats.org/drawingml/2006/main">
               <a:ext uri="{FF2B5EF4-FFF2-40B4-BE49-F238E27FC236}">
-                <a16:creationId xmlns:a16="http://schemas.microsoft.com/office/drawing/2014/main" id="{E0CFFEFE-51CE-4F0D-8DD0-5E8FE9327581}"/>
+                <a16:creationId xmlns:a16="http://schemas.microsoft.com/office/drawing/2014/main" id="{3F1FF310-7CC0-4CE9-A52D-D3F51398893C}"/>
               </a:ext>
             </a:extLst>
           </p:cNvPr>
@@ -20316,7 +20499,7 @@
           <p:cNvPr id="39" name="">
             <a:extLst xmlns:a="http://schemas.openxmlformats.org/drawingml/2006/main">
               <a:ext uri="{FF2B5EF4-FFF2-40B4-BE49-F238E27FC236}">
-                <a16:creationId xmlns:a16="http://schemas.microsoft.com/office/drawing/2014/main" id="{88418074-48A7-4AC4-B633-D0F576337F98}"/>
+                <a16:creationId xmlns:a16="http://schemas.microsoft.com/office/drawing/2014/main" id="{1FE7FE04-86E4-4AD4-A8A5-E16130FD0D86}"/>
               </a:ext>
             </a:extLst>
           </p:cNvPr>
@@ -20349,7 +20532,7 @@
           <p:cNvPr id="40" name="">
             <a:extLst xmlns:a="http://schemas.openxmlformats.org/drawingml/2006/main">
               <a:ext uri="{FF2B5EF4-FFF2-40B4-BE49-F238E27FC236}">
-                <a16:creationId xmlns:a16="http://schemas.microsoft.com/office/drawing/2014/main" id="{501658FA-03D3-4FEB-8842-284F628F4861}"/>
+                <a16:creationId xmlns:a16="http://schemas.microsoft.com/office/drawing/2014/main" id="{0BC9F7A6-A975-45DB-889D-8C5D3B647BF9}"/>
               </a:ext>
             </a:extLst>
           </p:cNvPr>
@@ -20399,7 +20582,7 @@
           <p:cNvPr id="41" name="">
             <a:extLst xmlns:a="http://schemas.openxmlformats.org/drawingml/2006/main">
               <a:ext uri="{FF2B5EF4-FFF2-40B4-BE49-F238E27FC236}">
-                <a16:creationId xmlns:a16="http://schemas.microsoft.com/office/drawing/2014/main" id="{A3782B93-6DD2-443C-B074-49B651061142}"/>
+                <a16:creationId xmlns:a16="http://schemas.microsoft.com/office/drawing/2014/main" id="{CCBB351D-433C-4A70-850A-D0E635FC4AA5}"/>
               </a:ext>
             </a:extLst>
           </p:cNvPr>
@@ -20449,7 +20632,7 @@
           <p:cNvPr id="42" name="">
             <a:extLst xmlns:a="http://schemas.openxmlformats.org/drawingml/2006/main">
               <a:ext uri="{FF2B5EF4-FFF2-40B4-BE49-F238E27FC236}">
-                <a16:creationId xmlns:a16="http://schemas.microsoft.com/office/drawing/2014/main" id="{04E889AA-D25E-48F1-BC4E-119B1CCAECD2}"/>
+                <a16:creationId xmlns:a16="http://schemas.microsoft.com/office/drawing/2014/main" id="{E21B4379-A856-4C35-8A0E-B068F5BFBAE0}"/>
               </a:ext>
             </a:extLst>
           </p:cNvPr>
@@ -20499,7 +20682,7 @@
           <p:cNvPr id="43" name="">
             <a:extLst xmlns:a="http://schemas.openxmlformats.org/drawingml/2006/main">
               <a:ext uri="{FF2B5EF4-FFF2-40B4-BE49-F238E27FC236}">
-                <a16:creationId xmlns:a16="http://schemas.microsoft.com/office/drawing/2014/main" id="{E263B8F7-6CE9-4878-A04C-A3436E3E96EE}"/>
+                <a16:creationId xmlns:a16="http://schemas.microsoft.com/office/drawing/2014/main" id="{8BE6E4D4-6271-4502-8555-958BF47C2A82}"/>
               </a:ext>
             </a:extLst>
           </p:cNvPr>
@@ -20549,7 +20732,7 @@
           <p:cNvPr id="44" name="">
             <a:extLst xmlns:a="http://schemas.openxmlformats.org/drawingml/2006/main">
               <a:ext uri="{FF2B5EF4-FFF2-40B4-BE49-F238E27FC236}">
-                <a16:creationId xmlns:a16="http://schemas.microsoft.com/office/drawing/2014/main" id="{EEE5B97D-235E-43ED-B130-55B32868AD33}"/>
+                <a16:creationId xmlns:a16="http://schemas.microsoft.com/office/drawing/2014/main" id="{72CE0BC5-8038-47A4-BF8A-CDBB1AE7F4EC}"/>
               </a:ext>
             </a:extLst>
           </p:cNvPr>
@@ -20597,7 +20780,7 @@
     </p:spTree>
     <p:extLst>
       <p:ext uri="{BB962C8B-B14F-4D97-AF65-F5344CB8AC3E}">
-        <p14:creationId xmlns:p14="http://schemas.microsoft.com/office/powerpoint/2010/main" val="1769979213"/>
+        <p14:creationId xmlns:p14="http://schemas.microsoft.com/office/powerpoint/2010/main" val="1831224608"/>
       </p:ext>
     </p:extLst>
   </p:cSld>
@@ -20628,7 +20811,7 @@
           <p:cNvPr id="1" name="">
             <a:extLst xmlns:a="http://schemas.openxmlformats.org/drawingml/2006/main">
               <a:ext uri="{FF2B5EF4-FFF2-40B4-BE49-F238E27FC236}">
-                <a16:creationId xmlns:a16="http://schemas.microsoft.com/office/drawing/2014/main" id="{CD0BDBB5-0534-4533-ACBE-C2CE8054DFF9}"/>
+                <a16:creationId xmlns:a16="http://schemas.microsoft.com/office/drawing/2014/main" id="{B2004F7A-76C1-4FBA-B03A-5BD07D354547}"/>
               </a:ext>
             </a:extLst>
           </p:cNvPr>
@@ -20678,7 +20861,7 @@
           <p:cNvPr id="2" name="">
             <a:extLst xmlns:a="http://schemas.openxmlformats.org/drawingml/2006/main">
               <a:ext uri="{FF2B5EF4-FFF2-40B4-BE49-F238E27FC236}">
-                <a16:creationId xmlns:a16="http://schemas.microsoft.com/office/drawing/2014/main" id="{A2B0D201-7491-4876-8523-F85A27E72B49}"/>
+                <a16:creationId xmlns:a16="http://schemas.microsoft.com/office/drawing/2014/main" id="{F0BDA3FC-B092-4A19-8A68-463D09A7E37F}"/>
               </a:ext>
             </a:extLst>
           </p:cNvPr>
@@ -20728,7 +20911,7 @@
           <p:cNvPr id="3" name="">
             <a:extLst xmlns:a="http://schemas.openxmlformats.org/drawingml/2006/main">
               <a:ext uri="{FF2B5EF4-FFF2-40B4-BE49-F238E27FC236}">
-                <a16:creationId xmlns:a16="http://schemas.microsoft.com/office/drawing/2014/main" id="{86B88F4C-ED0E-4C63-9815-18707EE6BFD8}"/>
+                <a16:creationId xmlns:a16="http://schemas.microsoft.com/office/drawing/2014/main" id="{0A2E4D30-3BF9-483E-AED6-A4968592D5B5}"/>
               </a:ext>
             </a:extLst>
           </p:cNvPr>
@@ -20778,7 +20961,7 @@
           <p:cNvPr id="4" name="">
             <a:extLst xmlns:a="http://schemas.openxmlformats.org/drawingml/2006/main">
               <a:ext uri="{FF2B5EF4-FFF2-40B4-BE49-F238E27FC236}">
-                <a16:creationId xmlns:a16="http://schemas.microsoft.com/office/drawing/2014/main" id="{B8130C6A-C181-4CC1-BA31-DB66287A34A3}"/>
+                <a16:creationId xmlns:a16="http://schemas.microsoft.com/office/drawing/2014/main" id="{F6978482-F4F9-44F8-B76A-95B5A6F2F0C6}"/>
               </a:ext>
             </a:extLst>
           </p:cNvPr>
@@ -20811,7 +20994,7 @@
           <p:cNvPr id="5" name="">
             <a:extLst xmlns:a="http://schemas.openxmlformats.org/drawingml/2006/main">
               <a:ext uri="{FF2B5EF4-FFF2-40B4-BE49-F238E27FC236}">
-                <a16:creationId xmlns:a16="http://schemas.microsoft.com/office/drawing/2014/main" id="{5B1E2087-F598-4718-9845-66B991F2606B}"/>
+                <a16:creationId xmlns:a16="http://schemas.microsoft.com/office/drawing/2014/main" id="{478DB3DA-593A-4441-AB47-F90C5089B930}"/>
               </a:ext>
             </a:extLst>
           </p:cNvPr>
@@ -20861,7 +21044,7 @@
           <p:cNvPr id="6" name="">
             <a:extLst xmlns:a="http://schemas.openxmlformats.org/drawingml/2006/main">
               <a:ext uri="{FF2B5EF4-FFF2-40B4-BE49-F238E27FC236}">
-                <a16:creationId xmlns:a16="http://schemas.microsoft.com/office/drawing/2014/main" id="{1B07B6D1-467B-43AA-9AC8-021F266DC6E6}"/>
+                <a16:creationId xmlns:a16="http://schemas.microsoft.com/office/drawing/2014/main" id="{613D7376-0608-4A3A-818C-8A88996959BB}"/>
               </a:ext>
             </a:extLst>
           </p:cNvPr>
@@ -20911,7 +21094,7 @@
           <p:cNvPr id="7" name="">
             <a:extLst xmlns:a="http://schemas.openxmlformats.org/drawingml/2006/main">
               <a:ext uri="{FF2B5EF4-FFF2-40B4-BE49-F238E27FC236}">
-                <a16:creationId xmlns:a16="http://schemas.microsoft.com/office/drawing/2014/main" id="{E021B54D-E432-4FBB-B5F3-099DC839775F}"/>
+                <a16:creationId xmlns:a16="http://schemas.microsoft.com/office/drawing/2014/main" id="{3B38BF3E-1A7E-4440-A4CA-C7D9D1B2E848}"/>
               </a:ext>
             </a:extLst>
           </p:cNvPr>
@@ -20961,7 +21144,7 @@
           <p:cNvPr id="8" name="">
             <a:extLst xmlns:a="http://schemas.openxmlformats.org/drawingml/2006/main">
               <a:ext uri="{FF2B5EF4-FFF2-40B4-BE49-F238E27FC236}">
-                <a16:creationId xmlns:a16="http://schemas.microsoft.com/office/drawing/2014/main" id="{31FAEA23-66EB-457A-B522-4E875378D584}"/>
+                <a16:creationId xmlns:a16="http://schemas.microsoft.com/office/drawing/2014/main" id="{D5930C30-F357-46B0-BE88-D199525394B1}"/>
               </a:ext>
             </a:extLst>
           </p:cNvPr>
@@ -20994,7 +21177,7 @@
           <p:cNvPr id="9" name="">
             <a:extLst xmlns:a="http://schemas.openxmlformats.org/drawingml/2006/main">
               <a:ext uri="{FF2B5EF4-FFF2-40B4-BE49-F238E27FC236}">
-                <a16:creationId xmlns:a16="http://schemas.microsoft.com/office/drawing/2014/main" id="{C518D945-C460-4980-82F0-9D911FFE7EB3}"/>
+                <a16:creationId xmlns:a16="http://schemas.microsoft.com/office/drawing/2014/main" id="{28403F76-95D2-440A-92CE-293227244F82}"/>
               </a:ext>
             </a:extLst>
           </p:cNvPr>
@@ -21044,7 +21227,7 @@
           <p:cNvPr id="10" name="">
             <a:extLst xmlns:a="http://schemas.openxmlformats.org/drawingml/2006/main">
               <a:ext uri="{FF2B5EF4-FFF2-40B4-BE49-F238E27FC236}">
-                <a16:creationId xmlns:a16="http://schemas.microsoft.com/office/drawing/2014/main" id="{AADAFCBA-21F9-404C-801A-351123BDFF8B}"/>
+                <a16:creationId xmlns:a16="http://schemas.microsoft.com/office/drawing/2014/main" id="{B73FEB0B-4995-4749-9244-71CAD945A65C}"/>
               </a:ext>
             </a:extLst>
           </p:cNvPr>
@@ -21094,7 +21277,7 @@
           <p:cNvPr id="11" name="">
             <a:extLst xmlns:a="http://schemas.openxmlformats.org/drawingml/2006/main">
               <a:ext uri="{FF2B5EF4-FFF2-40B4-BE49-F238E27FC236}">
-                <a16:creationId xmlns:a16="http://schemas.microsoft.com/office/drawing/2014/main" id="{FBE4DA85-D8BB-4B32-8B24-074187E233D1}"/>
+                <a16:creationId xmlns:a16="http://schemas.microsoft.com/office/drawing/2014/main" id="{8FB0BCB2-9C88-47AF-B7CF-7CCF04D98CF0}"/>
               </a:ext>
             </a:extLst>
           </p:cNvPr>
@@ -21144,7 +21327,7 @@
           <p:cNvPr id="12" name="">
             <a:extLst xmlns:a="http://schemas.openxmlformats.org/drawingml/2006/main">
               <a:ext uri="{FF2B5EF4-FFF2-40B4-BE49-F238E27FC236}">
-                <a16:creationId xmlns:a16="http://schemas.microsoft.com/office/drawing/2014/main" id="{B56B6B7A-55FB-48E4-8EA1-E9A12D9BAFB8}"/>
+                <a16:creationId xmlns:a16="http://schemas.microsoft.com/office/drawing/2014/main" id="{5DC70D64-4348-467F-A3E1-F40C18D26BDD}"/>
               </a:ext>
             </a:extLst>
           </p:cNvPr>
@@ -21177,7 +21360,7 @@
           <p:cNvPr id="13" name="">
             <a:extLst xmlns:a="http://schemas.openxmlformats.org/drawingml/2006/main">
               <a:ext uri="{FF2B5EF4-FFF2-40B4-BE49-F238E27FC236}">
-                <a16:creationId xmlns:a16="http://schemas.microsoft.com/office/drawing/2014/main" id="{CF8EEF47-90A3-433B-B08C-528DF74BC9B5}"/>
+                <a16:creationId xmlns:a16="http://schemas.microsoft.com/office/drawing/2014/main" id="{5E826381-1D54-49F1-9466-D37C57FC193E}"/>
               </a:ext>
             </a:extLst>
           </p:cNvPr>
@@ -21227,7 +21410,7 @@
           <p:cNvPr id="14" name="">
             <a:extLst xmlns:a="http://schemas.openxmlformats.org/drawingml/2006/main">
               <a:ext uri="{FF2B5EF4-FFF2-40B4-BE49-F238E27FC236}">
-                <a16:creationId xmlns:a16="http://schemas.microsoft.com/office/drawing/2014/main" id="{F8790DCB-55B4-40CE-9004-6E1EC12DBE77}"/>
+                <a16:creationId xmlns:a16="http://schemas.microsoft.com/office/drawing/2014/main" id="{7C041050-E3A5-4A31-8A65-1BF8B67385AF}"/>
               </a:ext>
             </a:extLst>
           </p:cNvPr>
@@ -21277,7 +21460,7 @@
           <p:cNvPr id="15" name="">
             <a:extLst xmlns:a="http://schemas.openxmlformats.org/drawingml/2006/main">
               <a:ext uri="{FF2B5EF4-FFF2-40B4-BE49-F238E27FC236}">
-                <a16:creationId xmlns:a16="http://schemas.microsoft.com/office/drawing/2014/main" id="{D9883A3E-E680-43E5-97CA-E692E61FF2DB}"/>
+                <a16:creationId xmlns:a16="http://schemas.microsoft.com/office/drawing/2014/main" id="{8916500F-7A02-40DE-BE72-A96F09B18515}"/>
               </a:ext>
             </a:extLst>
           </p:cNvPr>
@@ -21327,7 +21510,7 @@
           <p:cNvPr id="16" name="">
             <a:extLst xmlns:a="http://schemas.openxmlformats.org/drawingml/2006/main">
               <a:ext uri="{FF2B5EF4-FFF2-40B4-BE49-F238E27FC236}">
-                <a16:creationId xmlns:a16="http://schemas.microsoft.com/office/drawing/2014/main" id="{B280743D-B95F-408A-8402-2F96592ADBFC}"/>
+                <a16:creationId xmlns:a16="http://schemas.microsoft.com/office/drawing/2014/main" id="{031C820E-1BF4-4219-95A2-98C4B8D90417}"/>
               </a:ext>
             </a:extLst>
           </p:cNvPr>
@@ -21360,7 +21543,7 @@
           <p:cNvPr id="17" name="">
             <a:extLst xmlns:a="http://schemas.openxmlformats.org/drawingml/2006/main">
               <a:ext uri="{FF2B5EF4-FFF2-40B4-BE49-F238E27FC236}">
-                <a16:creationId xmlns:a16="http://schemas.microsoft.com/office/drawing/2014/main" id="{11EE40E5-D637-4B32-A7EA-2E58646DE7C8}"/>
+                <a16:creationId xmlns:a16="http://schemas.microsoft.com/office/drawing/2014/main" id="{C595603B-DEFE-42DE-99CD-9F858C0E6EF3}"/>
               </a:ext>
             </a:extLst>
           </p:cNvPr>
@@ -21410,7 +21593,7 @@
           <p:cNvPr id="18" name="">
             <a:extLst xmlns:a="http://schemas.openxmlformats.org/drawingml/2006/main">
               <a:ext uri="{FF2B5EF4-FFF2-40B4-BE49-F238E27FC236}">
-                <a16:creationId xmlns:a16="http://schemas.microsoft.com/office/drawing/2014/main" id="{CF03E4CD-5B0C-44F3-B769-3B8F360EA3AC}"/>
+                <a16:creationId xmlns:a16="http://schemas.microsoft.com/office/drawing/2014/main" id="{5EEC5602-A2AA-4354-9293-29DDB2F84B3A}"/>
               </a:ext>
             </a:extLst>
           </p:cNvPr>
@@ -21460,7 +21643,7 @@
           <p:cNvPr id="19" name="">
             <a:extLst xmlns:a="http://schemas.openxmlformats.org/drawingml/2006/main">
               <a:ext uri="{FF2B5EF4-FFF2-40B4-BE49-F238E27FC236}">
-                <a16:creationId xmlns:a16="http://schemas.microsoft.com/office/drawing/2014/main" id="{5A8D13FE-0896-4E06-B47C-FF4297147021}"/>
+                <a16:creationId xmlns:a16="http://schemas.microsoft.com/office/drawing/2014/main" id="{E6D471B6-2872-4911-8F0B-23F48C00EDF3}"/>
               </a:ext>
             </a:extLst>
           </p:cNvPr>
@@ -21510,7 +21693,7 @@
           <p:cNvPr id="20" name="">
             <a:extLst xmlns:a="http://schemas.openxmlformats.org/drawingml/2006/main">
               <a:ext uri="{FF2B5EF4-FFF2-40B4-BE49-F238E27FC236}">
-                <a16:creationId xmlns:a16="http://schemas.microsoft.com/office/drawing/2014/main" id="{E11FD8B4-9400-48BA-9430-035605C3C58B}"/>
+                <a16:creationId xmlns:a16="http://schemas.microsoft.com/office/drawing/2014/main" id="{07A9263F-F0D2-4E7B-BB52-CD548C6D65DD}"/>
               </a:ext>
             </a:extLst>
           </p:cNvPr>
@@ -21543,7 +21726,7 @@
           <p:cNvPr id="21" name="">
             <a:extLst xmlns:a="http://schemas.openxmlformats.org/drawingml/2006/main">
               <a:ext uri="{FF2B5EF4-FFF2-40B4-BE49-F238E27FC236}">
-                <a16:creationId xmlns:a16="http://schemas.microsoft.com/office/drawing/2014/main" id="{12667997-CE28-46B9-9DF6-A76FC3779C7F}"/>
+                <a16:creationId xmlns:a16="http://schemas.microsoft.com/office/drawing/2014/main" id="{45C03393-F233-49E7-B70C-F2EAFAF21B05}"/>
               </a:ext>
             </a:extLst>
           </p:cNvPr>
@@ -21593,7 +21776,7 @@
           <p:cNvPr id="22" name="">
             <a:extLst xmlns:a="http://schemas.openxmlformats.org/drawingml/2006/main">
               <a:ext uri="{FF2B5EF4-FFF2-40B4-BE49-F238E27FC236}">
-                <a16:creationId xmlns:a16="http://schemas.microsoft.com/office/drawing/2014/main" id="{DC68A233-2C6F-4BBF-A5E2-D899F23D1A9F}"/>
+                <a16:creationId xmlns:a16="http://schemas.microsoft.com/office/drawing/2014/main" id="{07A625AD-67A4-4408-92F3-FA3A5106D508}"/>
               </a:ext>
             </a:extLst>
           </p:cNvPr>
@@ -21643,7 +21826,7 @@
           <p:cNvPr id="23" name="">
             <a:extLst xmlns:a="http://schemas.openxmlformats.org/drawingml/2006/main">
               <a:ext uri="{FF2B5EF4-FFF2-40B4-BE49-F238E27FC236}">
-                <a16:creationId xmlns:a16="http://schemas.microsoft.com/office/drawing/2014/main" id="{EDAFAFBB-57B9-4C9B-B49E-3959F5702B7E}"/>
+                <a16:creationId xmlns:a16="http://schemas.microsoft.com/office/drawing/2014/main" id="{F951C8FB-0644-4ED3-AAC7-956DFE0436EC}"/>
               </a:ext>
             </a:extLst>
           </p:cNvPr>
@@ -21693,7 +21876,7 @@
           <p:cNvPr id="24" name="">
             <a:extLst xmlns:a="http://schemas.openxmlformats.org/drawingml/2006/main">
               <a:ext uri="{FF2B5EF4-FFF2-40B4-BE49-F238E27FC236}">
-                <a16:creationId xmlns:a16="http://schemas.microsoft.com/office/drawing/2014/main" id="{A5946766-C337-456E-BBFB-C1357ED4488C}"/>
+                <a16:creationId xmlns:a16="http://schemas.microsoft.com/office/drawing/2014/main" id="{69910ECA-AAA2-413B-9DCE-F8CDF1DF91F9}"/>
               </a:ext>
             </a:extLst>
           </p:cNvPr>
@@ -21726,7 +21909,7 @@
           <p:cNvPr id="25" name="">
             <a:extLst xmlns:a="http://schemas.openxmlformats.org/drawingml/2006/main">
               <a:ext uri="{FF2B5EF4-FFF2-40B4-BE49-F238E27FC236}">
-                <a16:creationId xmlns:a16="http://schemas.microsoft.com/office/drawing/2014/main" id="{29C896E7-F523-484B-8B6C-047B4EC1A272}"/>
+                <a16:creationId xmlns:a16="http://schemas.microsoft.com/office/drawing/2014/main" id="{DDF63365-2F4C-4982-9B45-DFF751659B5D}"/>
               </a:ext>
             </a:extLst>
           </p:cNvPr>
@@ -21776,7 +21959,7 @@
           <p:cNvPr id="26" name="">
             <a:extLst xmlns:a="http://schemas.openxmlformats.org/drawingml/2006/main">
               <a:ext uri="{FF2B5EF4-FFF2-40B4-BE49-F238E27FC236}">
-                <a16:creationId xmlns:a16="http://schemas.microsoft.com/office/drawing/2014/main" id="{8B9D1F64-7127-4227-8485-A82268950935}"/>
+                <a16:creationId xmlns:a16="http://schemas.microsoft.com/office/drawing/2014/main" id="{9634B27C-26D2-4042-A14F-254FFE15D08B}"/>
               </a:ext>
             </a:extLst>
           </p:cNvPr>
@@ -21826,7 +22009,7 @@
           <p:cNvPr id="27" name="">
             <a:extLst xmlns:a="http://schemas.openxmlformats.org/drawingml/2006/main">
               <a:ext uri="{FF2B5EF4-FFF2-40B4-BE49-F238E27FC236}">
-                <a16:creationId xmlns:a16="http://schemas.microsoft.com/office/drawing/2014/main" id="{F7520A50-BF7A-4718-8B56-8AF593CC0DF5}"/>
+                <a16:creationId xmlns:a16="http://schemas.microsoft.com/office/drawing/2014/main" id="{A4C82494-167B-408E-8BF3-93B2F879343B}"/>
               </a:ext>
             </a:extLst>
           </p:cNvPr>
@@ -21876,7 +22059,7 @@
           <p:cNvPr id="28" name="">
             <a:extLst xmlns:a="http://schemas.openxmlformats.org/drawingml/2006/main">
               <a:ext uri="{FF2B5EF4-FFF2-40B4-BE49-F238E27FC236}">
-                <a16:creationId xmlns:a16="http://schemas.microsoft.com/office/drawing/2014/main" id="{34244295-996D-4E15-A5CC-61867A77A96B}"/>
+                <a16:creationId xmlns:a16="http://schemas.microsoft.com/office/drawing/2014/main" id="{FB3F3B0B-936E-492B-BFF7-82C813B0A89C}"/>
               </a:ext>
             </a:extLst>
           </p:cNvPr>
@@ -21909,7 +22092,7 @@
           <p:cNvPr id="29" name="">
             <a:extLst xmlns:a="http://schemas.openxmlformats.org/drawingml/2006/main">
               <a:ext uri="{FF2B5EF4-FFF2-40B4-BE49-F238E27FC236}">
-                <a16:creationId xmlns:a16="http://schemas.microsoft.com/office/drawing/2014/main" id="{94D46B28-5DD1-441D-AA37-C493A52F4916}"/>
+                <a16:creationId xmlns:a16="http://schemas.microsoft.com/office/drawing/2014/main" id="{E65CACAF-47A6-452F-AD13-B948868EE6B1}"/>
               </a:ext>
             </a:extLst>
           </p:cNvPr>
@@ -21959,7 +22142,7 @@
           <p:cNvPr id="30" name="">
             <a:extLst xmlns:a="http://schemas.openxmlformats.org/drawingml/2006/main">
               <a:ext uri="{FF2B5EF4-FFF2-40B4-BE49-F238E27FC236}">
-                <a16:creationId xmlns:a16="http://schemas.microsoft.com/office/drawing/2014/main" id="{84B8086F-E013-4C86-A964-6185A9900F3D}"/>
+                <a16:creationId xmlns:a16="http://schemas.microsoft.com/office/drawing/2014/main" id="{F76F9625-1E79-4D4D-98AC-806530A9124E}"/>
               </a:ext>
             </a:extLst>
           </p:cNvPr>
@@ -22060,7 +22243,7 @@
           <p:cNvPr id="31" name="">
             <a:extLst xmlns:a="http://schemas.openxmlformats.org/drawingml/2006/main">
               <a:ext uri="{FF2B5EF4-FFF2-40B4-BE49-F238E27FC236}">
-                <a16:creationId xmlns:a16="http://schemas.microsoft.com/office/drawing/2014/main" id="{E446B1B7-4A0E-4D27-847C-D75EE291DE0E}"/>
+                <a16:creationId xmlns:a16="http://schemas.microsoft.com/office/drawing/2014/main" id="{3E39B075-A43A-4888-8235-32DC91A61F34}"/>
               </a:ext>
             </a:extLst>
           </p:cNvPr>
@@ -22110,7 +22293,7 @@
           <p:cNvPr id="32" name="">
             <a:extLst xmlns:a="http://schemas.openxmlformats.org/drawingml/2006/main">
               <a:ext uri="{FF2B5EF4-FFF2-40B4-BE49-F238E27FC236}">
-                <a16:creationId xmlns:a16="http://schemas.microsoft.com/office/drawing/2014/main" id="{DB3FC420-FDEE-4BAF-B80B-BEFB5EBB5686}"/>
+                <a16:creationId xmlns:a16="http://schemas.microsoft.com/office/drawing/2014/main" id="{141F1795-5ACD-4FF5-91C8-9F809C5CE6B3}"/>
               </a:ext>
             </a:extLst>
           </p:cNvPr>
@@ -22158,7 +22341,7 @@
     </p:spTree>
     <p:extLst>
       <p:ext uri="{BB962C8B-B14F-4D97-AF65-F5344CB8AC3E}">
-        <p14:creationId xmlns:p14="http://schemas.microsoft.com/office/powerpoint/2010/main" val="878227214"/>
+        <p14:creationId xmlns:p14="http://schemas.microsoft.com/office/powerpoint/2010/main" val="337821720"/>
       </p:ext>
     </p:extLst>
   </p:cSld>
@@ -22189,7 +22372,7 @@
           <p:cNvPr id="1" name="">
             <a:extLst xmlns:a="http://schemas.openxmlformats.org/drawingml/2006/main">
               <a:ext uri="{FF2B5EF4-FFF2-40B4-BE49-F238E27FC236}">
-                <a16:creationId xmlns:a16="http://schemas.microsoft.com/office/drawing/2014/main" id="{ED628C4B-D24A-4B23-A80E-5D28524FD851}"/>
+                <a16:creationId xmlns:a16="http://schemas.microsoft.com/office/drawing/2014/main" id="{ACD717A8-CCE7-4E93-81C1-20995A9D8A31}"/>
               </a:ext>
             </a:extLst>
           </p:cNvPr>
@@ -22239,7 +22422,7 @@
           <p:cNvPr id="2" name="">
             <a:extLst xmlns:a="http://schemas.openxmlformats.org/drawingml/2006/main">
               <a:ext uri="{FF2B5EF4-FFF2-40B4-BE49-F238E27FC236}">
-                <a16:creationId xmlns:a16="http://schemas.microsoft.com/office/drawing/2014/main" id="{92D5C47C-FB83-4AC3-A6C5-001B38B6CC8A}"/>
+                <a16:creationId xmlns:a16="http://schemas.microsoft.com/office/drawing/2014/main" id="{AC804048-DEF9-4461-9F57-690237F6ACDE}"/>
               </a:ext>
             </a:extLst>
           </p:cNvPr>
@@ -22289,7 +22472,7 @@
           <p:cNvPr id="3" name="">
             <a:extLst xmlns:a="http://schemas.openxmlformats.org/drawingml/2006/main">
               <a:ext uri="{FF2B5EF4-FFF2-40B4-BE49-F238E27FC236}">
-                <a16:creationId xmlns:a16="http://schemas.microsoft.com/office/drawing/2014/main" id="{954B19D7-529E-42CF-8E61-E82F9831EA39}"/>
+                <a16:creationId xmlns:a16="http://schemas.microsoft.com/office/drawing/2014/main" id="{E87693F4-E65C-4354-9C05-7C9BE1147209}"/>
               </a:ext>
             </a:extLst>
           </p:cNvPr>
@@ -22339,7 +22522,7 @@
           <p:cNvPr id="4" name="">
             <a:extLst xmlns:a="http://schemas.openxmlformats.org/drawingml/2006/main">
               <a:ext uri="{FF2B5EF4-FFF2-40B4-BE49-F238E27FC236}">
-                <a16:creationId xmlns:a16="http://schemas.microsoft.com/office/drawing/2014/main" id="{40C8D0D2-C204-4479-9919-E03C3A8BCD1A}"/>
+                <a16:creationId xmlns:a16="http://schemas.microsoft.com/office/drawing/2014/main" id="{2F566295-983E-4CAE-9595-55FD237A7E0B}"/>
               </a:ext>
             </a:extLst>
           </p:cNvPr>
@@ -22372,7 +22555,7 @@
           <p:cNvPr id="5" name="">
             <a:extLst xmlns:a="http://schemas.openxmlformats.org/drawingml/2006/main">
               <a:ext uri="{FF2B5EF4-FFF2-40B4-BE49-F238E27FC236}">
-                <a16:creationId xmlns:a16="http://schemas.microsoft.com/office/drawing/2014/main" id="{F1DC3731-14AC-4B75-B175-9970D88BCEE5}"/>
+                <a16:creationId xmlns:a16="http://schemas.microsoft.com/office/drawing/2014/main" id="{3EE14C34-F29F-448A-A609-4E08D8804447}"/>
               </a:ext>
             </a:extLst>
           </p:cNvPr>
@@ -22422,7 +22605,7 @@
           <p:cNvPr id="6" name="">
             <a:extLst xmlns:a="http://schemas.openxmlformats.org/drawingml/2006/main">
               <a:ext uri="{FF2B5EF4-FFF2-40B4-BE49-F238E27FC236}">
-                <a16:creationId xmlns:a16="http://schemas.microsoft.com/office/drawing/2014/main" id="{1D43FAAC-5BEF-4DBD-829D-7FC0BB126D0F}"/>
+                <a16:creationId xmlns:a16="http://schemas.microsoft.com/office/drawing/2014/main" id="{B41B0EAE-3B7F-4BB9-AB35-AA371E71F8BE}"/>
               </a:ext>
             </a:extLst>
           </p:cNvPr>
@@ -22506,7 +22689,7 @@
           <p:cNvPr id="7" name="">
             <a:extLst xmlns:a="http://schemas.openxmlformats.org/drawingml/2006/main">
               <a:ext uri="{FF2B5EF4-FFF2-40B4-BE49-F238E27FC236}">
-                <a16:creationId xmlns:a16="http://schemas.microsoft.com/office/drawing/2014/main" id="{AE96FFD1-0F6D-4B99-A4A4-6B4042576D7C}"/>
+                <a16:creationId xmlns:a16="http://schemas.microsoft.com/office/drawing/2014/main" id="{EF67B918-1BD2-4232-9A97-9446AADABD15}"/>
               </a:ext>
             </a:extLst>
           </p:cNvPr>
@@ -22536,7 +22719,7 @@
           <p:cNvPr id="8" name="">
             <a:extLst xmlns:a="http://schemas.openxmlformats.org/drawingml/2006/main">
               <a:ext uri="{FF2B5EF4-FFF2-40B4-BE49-F238E27FC236}">
-                <a16:creationId xmlns:a16="http://schemas.microsoft.com/office/drawing/2014/main" id="{CE34E535-78D6-4993-867A-22AC115DD759}"/>
+                <a16:creationId xmlns:a16="http://schemas.microsoft.com/office/drawing/2014/main" id="{942202A7-EFF2-45DA-A3F9-2301B7C276BD}"/>
               </a:ext>
             </a:extLst>
           </p:cNvPr>
@@ -22569,7 +22752,7 @@
           <p:cNvPr id="9" name="">
             <a:extLst xmlns:a="http://schemas.openxmlformats.org/drawingml/2006/main">
               <a:ext uri="{FF2B5EF4-FFF2-40B4-BE49-F238E27FC236}">
-                <a16:creationId xmlns:a16="http://schemas.microsoft.com/office/drawing/2014/main" id="{B82CB304-218E-4623-99A1-B03760FF95B8}"/>
+                <a16:creationId xmlns:a16="http://schemas.microsoft.com/office/drawing/2014/main" id="{7BC80F15-2054-4B95-A102-6E4089EE48DC}"/>
               </a:ext>
             </a:extLst>
           </p:cNvPr>
@@ -22619,7 +22802,7 @@
           <p:cNvPr id="10" name="">
             <a:extLst xmlns:a="http://schemas.openxmlformats.org/drawingml/2006/main">
               <a:ext uri="{FF2B5EF4-FFF2-40B4-BE49-F238E27FC236}">
-                <a16:creationId xmlns:a16="http://schemas.microsoft.com/office/drawing/2014/main" id="{08058FA4-7F55-4EFD-8B97-97FDF8F05B8B}"/>
+                <a16:creationId xmlns:a16="http://schemas.microsoft.com/office/drawing/2014/main" id="{1F1DB463-DE9A-4051-85BF-8F19B61DD50F}"/>
               </a:ext>
             </a:extLst>
           </p:cNvPr>
@@ -22703,7 +22886,7 @@
           <p:cNvPr id="11" name="">
             <a:extLst xmlns:a="http://schemas.openxmlformats.org/drawingml/2006/main">
               <a:ext uri="{FF2B5EF4-FFF2-40B4-BE49-F238E27FC236}">
-                <a16:creationId xmlns:a16="http://schemas.microsoft.com/office/drawing/2014/main" id="{103C6B36-01F6-4DC6-A551-3725E2AC7D6F}"/>
+                <a16:creationId xmlns:a16="http://schemas.microsoft.com/office/drawing/2014/main" id="{E4A511D3-6740-44D8-AD39-4F23F4EB0188}"/>
               </a:ext>
             </a:extLst>
           </p:cNvPr>
@@ -22733,7 +22916,7 @@
           <p:cNvPr id="12" name="">
             <a:extLst xmlns:a="http://schemas.openxmlformats.org/drawingml/2006/main">
               <a:ext uri="{FF2B5EF4-FFF2-40B4-BE49-F238E27FC236}">
-                <a16:creationId xmlns:a16="http://schemas.microsoft.com/office/drawing/2014/main" id="{953CF784-3E5D-4785-A6E4-90314DC720EF}"/>
+                <a16:creationId xmlns:a16="http://schemas.microsoft.com/office/drawing/2014/main" id="{42163C5D-90F9-4AF0-BE10-0343F8C9D929}"/>
               </a:ext>
             </a:extLst>
           </p:cNvPr>
@@ -22766,7 +22949,7 @@
           <p:cNvPr id="13" name="">
             <a:extLst xmlns:a="http://schemas.openxmlformats.org/drawingml/2006/main">
               <a:ext uri="{FF2B5EF4-FFF2-40B4-BE49-F238E27FC236}">
-                <a16:creationId xmlns:a16="http://schemas.microsoft.com/office/drawing/2014/main" id="{F19E49D7-B05B-46C9-8D75-1CBC5877318C}"/>
+                <a16:creationId xmlns:a16="http://schemas.microsoft.com/office/drawing/2014/main" id="{0F6B602B-6B66-4FF0-88F6-60C13AD181BE}"/>
               </a:ext>
             </a:extLst>
           </p:cNvPr>
@@ -22816,7 +22999,7 @@
           <p:cNvPr id="14" name="">
             <a:extLst xmlns:a="http://schemas.openxmlformats.org/drawingml/2006/main">
               <a:ext uri="{FF2B5EF4-FFF2-40B4-BE49-F238E27FC236}">
-                <a16:creationId xmlns:a16="http://schemas.microsoft.com/office/drawing/2014/main" id="{95C7BE32-7E23-47EF-B783-2A2972FC4D79}"/>
+                <a16:creationId xmlns:a16="http://schemas.microsoft.com/office/drawing/2014/main" id="{A39E788A-90C6-4C01-A14D-FA59543A708F}"/>
               </a:ext>
             </a:extLst>
           </p:cNvPr>
@@ -22900,7 +23083,7 @@
           <p:cNvPr id="15" name="">
             <a:extLst xmlns:a="http://schemas.openxmlformats.org/drawingml/2006/main">
               <a:ext uri="{FF2B5EF4-FFF2-40B4-BE49-F238E27FC236}">
-                <a16:creationId xmlns:a16="http://schemas.microsoft.com/office/drawing/2014/main" id="{C141AC38-D484-432B-BE5B-99CC4562D485}"/>
+                <a16:creationId xmlns:a16="http://schemas.microsoft.com/office/drawing/2014/main" id="{F23BB012-6E68-41C3-BC9A-6309C82DACE4}"/>
               </a:ext>
             </a:extLst>
           </p:cNvPr>
@@ -22930,7 +23113,7 @@
           <p:cNvPr id="16" name="">
             <a:extLst xmlns:a="http://schemas.openxmlformats.org/drawingml/2006/main">
               <a:ext uri="{FF2B5EF4-FFF2-40B4-BE49-F238E27FC236}">
-                <a16:creationId xmlns:a16="http://schemas.microsoft.com/office/drawing/2014/main" id="{F60ADC29-3D01-46F0-8955-A4A9C1F1EA50}"/>
+                <a16:creationId xmlns:a16="http://schemas.microsoft.com/office/drawing/2014/main" id="{1F14A437-990E-4EFD-8146-511747600A4C}"/>
               </a:ext>
             </a:extLst>
           </p:cNvPr>
@@ -22963,7 +23146,7 @@
           <p:cNvPr id="17" name="">
             <a:extLst xmlns:a="http://schemas.openxmlformats.org/drawingml/2006/main">
               <a:ext uri="{FF2B5EF4-FFF2-40B4-BE49-F238E27FC236}">
-                <a16:creationId xmlns:a16="http://schemas.microsoft.com/office/drawing/2014/main" id="{84DC4541-3AF4-4B2D-B30D-7BBD94C5E7B6}"/>
+                <a16:creationId xmlns:a16="http://schemas.microsoft.com/office/drawing/2014/main" id="{88220F79-6EA7-4F84-8217-526F2955B444}"/>
               </a:ext>
             </a:extLst>
           </p:cNvPr>
@@ -23013,7 +23196,7 @@
           <p:cNvPr id="18" name="">
             <a:extLst xmlns:a="http://schemas.openxmlformats.org/drawingml/2006/main">
               <a:ext uri="{FF2B5EF4-FFF2-40B4-BE49-F238E27FC236}">
-                <a16:creationId xmlns:a16="http://schemas.microsoft.com/office/drawing/2014/main" id="{46E83B91-8669-4D0F-9DBF-E946989B800D}"/>
+                <a16:creationId xmlns:a16="http://schemas.microsoft.com/office/drawing/2014/main" id="{4DEDECC4-1514-4E9A-A7A4-934C6682B6FE}"/>
               </a:ext>
             </a:extLst>
           </p:cNvPr>
@@ -23097,7 +23280,7 @@
           <p:cNvPr id="19" name="">
             <a:extLst xmlns:a="http://schemas.openxmlformats.org/drawingml/2006/main">
               <a:ext uri="{FF2B5EF4-FFF2-40B4-BE49-F238E27FC236}">
-                <a16:creationId xmlns:a16="http://schemas.microsoft.com/office/drawing/2014/main" id="{1A38BB64-A742-42DF-8588-E89485671C4D}"/>
+                <a16:creationId xmlns:a16="http://schemas.microsoft.com/office/drawing/2014/main" id="{E43B9476-7C73-4FE8-85C8-A81D7EF25AC2}"/>
               </a:ext>
             </a:extLst>
           </p:cNvPr>
@@ -23127,7 +23310,7 @@
           <p:cNvPr id="20" name="">
             <a:extLst xmlns:a="http://schemas.openxmlformats.org/drawingml/2006/main">
               <a:ext uri="{FF2B5EF4-FFF2-40B4-BE49-F238E27FC236}">
-                <a16:creationId xmlns:a16="http://schemas.microsoft.com/office/drawing/2014/main" id="{F1E9B043-758F-470C-9C07-49BD52A63A71}"/>
+                <a16:creationId xmlns:a16="http://schemas.microsoft.com/office/drawing/2014/main" id="{AC3FDA9D-7D26-4044-8BEE-6FB6F5FAC72C}"/>
               </a:ext>
             </a:extLst>
           </p:cNvPr>
@@ -23160,7 +23343,7 @@
           <p:cNvPr id="21" name="">
             <a:extLst xmlns:a="http://schemas.openxmlformats.org/drawingml/2006/main">
               <a:ext uri="{FF2B5EF4-FFF2-40B4-BE49-F238E27FC236}">
-                <a16:creationId xmlns:a16="http://schemas.microsoft.com/office/drawing/2014/main" id="{8B93EBC5-915E-4CA0-8813-E8C9AAAE2B77}"/>
+                <a16:creationId xmlns:a16="http://schemas.microsoft.com/office/drawing/2014/main" id="{20973422-FC14-4DBD-B449-056FEE17354C}"/>
               </a:ext>
             </a:extLst>
           </p:cNvPr>
@@ -23210,7 +23393,7 @@
           <p:cNvPr id="22" name="">
             <a:extLst xmlns:a="http://schemas.openxmlformats.org/drawingml/2006/main">
               <a:ext uri="{FF2B5EF4-FFF2-40B4-BE49-F238E27FC236}">
-                <a16:creationId xmlns:a16="http://schemas.microsoft.com/office/drawing/2014/main" id="{AB829E6D-39CB-4E40-9D27-1B5CABD97775}"/>
+                <a16:creationId xmlns:a16="http://schemas.microsoft.com/office/drawing/2014/main" id="{94B823DA-DAA2-4981-8B99-D5615D783F9A}"/>
               </a:ext>
             </a:extLst>
           </p:cNvPr>
@@ -23294,7 +23477,7 @@
           <p:cNvPr id="23" name="">
             <a:extLst xmlns:a="http://schemas.openxmlformats.org/drawingml/2006/main">
               <a:ext uri="{FF2B5EF4-FFF2-40B4-BE49-F238E27FC236}">
-                <a16:creationId xmlns:a16="http://schemas.microsoft.com/office/drawing/2014/main" id="{55F4C599-5400-4B5A-BD57-690DBA46742A}"/>
+                <a16:creationId xmlns:a16="http://schemas.microsoft.com/office/drawing/2014/main" id="{45A6AFEA-D50C-4BC8-8F18-814F0AAC127B}"/>
               </a:ext>
             </a:extLst>
           </p:cNvPr>
@@ -23327,7 +23510,7 @@
           <p:cNvPr id="24" name="">
             <a:extLst xmlns:a="http://schemas.openxmlformats.org/drawingml/2006/main">
               <a:ext uri="{FF2B5EF4-FFF2-40B4-BE49-F238E27FC236}">
-                <a16:creationId xmlns:a16="http://schemas.microsoft.com/office/drawing/2014/main" id="{74694FB9-5051-4561-88FE-3E292AAD33B1}"/>
+                <a16:creationId xmlns:a16="http://schemas.microsoft.com/office/drawing/2014/main" id="{D70ADC83-2863-41A9-B68E-87F861D84423}"/>
               </a:ext>
             </a:extLst>
           </p:cNvPr>
@@ -23377,7 +23560,7 @@
           <p:cNvPr id="25" name="">
             <a:extLst xmlns:a="http://schemas.openxmlformats.org/drawingml/2006/main">
               <a:ext uri="{FF2B5EF4-FFF2-40B4-BE49-F238E27FC236}">
-                <a16:creationId xmlns:a16="http://schemas.microsoft.com/office/drawing/2014/main" id="{15EBB313-EFEF-4138-857D-BF3A58ADF03B}"/>
+                <a16:creationId xmlns:a16="http://schemas.microsoft.com/office/drawing/2014/main" id="{277758A6-B8DB-4B49-BB0B-7BB1EB5BCAE0}"/>
               </a:ext>
             </a:extLst>
           </p:cNvPr>
@@ -23427,7 +23610,7 @@
           <p:cNvPr id="26" name="">
             <a:extLst xmlns:a="http://schemas.openxmlformats.org/drawingml/2006/main">
               <a:ext uri="{FF2B5EF4-FFF2-40B4-BE49-F238E27FC236}">
-                <a16:creationId xmlns:a16="http://schemas.microsoft.com/office/drawing/2014/main" id="{B3824096-2BE4-47A8-B539-1C3C867215DC}"/>
+                <a16:creationId xmlns:a16="http://schemas.microsoft.com/office/drawing/2014/main" id="{204DE391-27C6-44C7-8384-9D6809C89EDB}"/>
               </a:ext>
             </a:extLst>
           </p:cNvPr>
@@ -23475,7 +23658,7 @@
     </p:spTree>
     <p:extLst>
       <p:ext uri="{BB962C8B-B14F-4D97-AF65-F5344CB8AC3E}">
-        <p14:creationId xmlns:p14="http://schemas.microsoft.com/office/powerpoint/2010/main" val="1692568178"/>
+        <p14:creationId xmlns:p14="http://schemas.microsoft.com/office/powerpoint/2010/main" val="1362889807"/>
       </p:ext>
     </p:extLst>
   </p:cSld>
@@ -23506,7 +23689,7 @@
           <p:cNvPr id="1" name="">
             <a:extLst xmlns:a="http://schemas.openxmlformats.org/drawingml/2006/main">
               <a:ext uri="{FF2B5EF4-FFF2-40B4-BE49-F238E27FC236}">
-                <a16:creationId xmlns:a16="http://schemas.microsoft.com/office/drawing/2014/main" id="{34370D68-114D-42E3-A1F1-3C4F5840E665}"/>
+                <a16:creationId xmlns:a16="http://schemas.microsoft.com/office/drawing/2014/main" id="{CE599A72-EF6A-4467-BCD3-723A025B558B}"/>
               </a:ext>
             </a:extLst>
           </p:cNvPr>
@@ -23556,7 +23739,7 @@
           <p:cNvPr id="2" name="">
             <a:extLst xmlns:a="http://schemas.openxmlformats.org/drawingml/2006/main">
               <a:ext uri="{FF2B5EF4-FFF2-40B4-BE49-F238E27FC236}">
-                <a16:creationId xmlns:a16="http://schemas.microsoft.com/office/drawing/2014/main" id="{FCCB9FFA-7852-4555-B86F-71B448209C1E}"/>
+                <a16:creationId xmlns:a16="http://schemas.microsoft.com/office/drawing/2014/main" id="{09485ED0-EFF9-4AB6-A20E-8E5CC8C3D566}"/>
               </a:ext>
             </a:extLst>
           </p:cNvPr>
@@ -23596,7 +23779,7 @@
                   <a:srgbClr val="555555"/>
                 </a:solidFill>
               </a:rPr>
-              <a:t>可作为汇报备注：Boltz 不是 MD，它预测一个静态复合体及相关 confidence/score。</a:t>
+              <a:t>Boltz 不是 MD，它预测一个静态复合体及相关 confidence/score。</a:t>
             </a:r>
           </a:p>
         </p:txBody>
@@ -23606,7 +23789,7 @@
           <p:cNvPr id="3" name="">
             <a:extLst xmlns:a="http://schemas.openxmlformats.org/drawingml/2006/main">
               <a:ext uri="{FF2B5EF4-FFF2-40B4-BE49-F238E27FC236}">
-                <a16:creationId xmlns:a16="http://schemas.microsoft.com/office/drawing/2014/main" id="{74610F73-7551-4D17-B358-82855C583592}"/>
+                <a16:creationId xmlns:a16="http://schemas.microsoft.com/office/drawing/2014/main" id="{69E56EF5-C782-4E6A-9CCB-BC1B97C77DD3}"/>
               </a:ext>
             </a:extLst>
           </p:cNvPr>
@@ -23656,7 +23839,7 @@
           <p:cNvPr id="4" name="">
             <a:extLst xmlns:a="http://schemas.openxmlformats.org/drawingml/2006/main">
               <a:ext uri="{FF2B5EF4-FFF2-40B4-BE49-F238E27FC236}">
-                <a16:creationId xmlns:a16="http://schemas.microsoft.com/office/drawing/2014/main" id="{98E3AD45-F95C-4442-B361-15A23D246E1B}"/>
+                <a16:creationId xmlns:a16="http://schemas.microsoft.com/office/drawing/2014/main" id="{0D82EE5A-85D1-42CD-B64B-8569B129BD4B}"/>
               </a:ext>
             </a:extLst>
           </p:cNvPr>
@@ -23689,7 +23872,7 @@
           <p:cNvPr id="5" name="">
             <a:extLst xmlns:a="http://schemas.openxmlformats.org/drawingml/2006/main">
               <a:ext uri="{FF2B5EF4-FFF2-40B4-BE49-F238E27FC236}">
-                <a16:creationId xmlns:a16="http://schemas.microsoft.com/office/drawing/2014/main" id="{7D5365FC-4407-41E5-9215-C945A715F35B}"/>
+                <a16:creationId xmlns:a16="http://schemas.microsoft.com/office/drawing/2014/main" id="{8A02C80A-5AE1-4F4E-9FE0-869F5079A237}"/>
               </a:ext>
             </a:extLst>
           </p:cNvPr>
@@ -23739,7 +23922,7 @@
           <p:cNvPr id="6" name="">
             <a:extLst xmlns:a="http://schemas.openxmlformats.org/drawingml/2006/main">
               <a:ext uri="{FF2B5EF4-FFF2-40B4-BE49-F238E27FC236}">
-                <a16:creationId xmlns:a16="http://schemas.microsoft.com/office/drawing/2014/main" id="{BF013D10-C4B6-4AA3-B314-594B9DFA6392}"/>
+                <a16:creationId xmlns:a16="http://schemas.microsoft.com/office/drawing/2014/main" id="{098D6DD5-EF21-409B-8837-867D60959CF0}"/>
               </a:ext>
             </a:extLst>
           </p:cNvPr>
@@ -23789,7 +23972,7 @@
           <p:cNvPr id="7" name="">
             <a:extLst xmlns:a="http://schemas.openxmlformats.org/drawingml/2006/main">
               <a:ext uri="{FF2B5EF4-FFF2-40B4-BE49-F238E27FC236}">
-                <a16:creationId xmlns:a16="http://schemas.microsoft.com/office/drawing/2014/main" id="{1A4FBC64-5F22-4055-B279-0C59F612A289}"/>
+                <a16:creationId xmlns:a16="http://schemas.microsoft.com/office/drawing/2014/main" id="{F5DA0D30-CA01-42E4-BB54-BBD4BAF9632B}"/>
               </a:ext>
             </a:extLst>
           </p:cNvPr>
@@ -23839,7 +24022,7 @@
           <p:cNvPr id="8" name="">
             <a:extLst xmlns:a="http://schemas.openxmlformats.org/drawingml/2006/main">
               <a:ext uri="{FF2B5EF4-FFF2-40B4-BE49-F238E27FC236}">
-                <a16:creationId xmlns:a16="http://schemas.microsoft.com/office/drawing/2014/main" id="{5FE2048F-2ECB-4155-8CF1-008CCD8E0261}"/>
+                <a16:creationId xmlns:a16="http://schemas.microsoft.com/office/drawing/2014/main" id="{EEA4E1C9-C5BD-4131-A948-BF2D4F9DE623}"/>
               </a:ext>
             </a:extLst>
           </p:cNvPr>
@@ -23889,7 +24072,7 @@
           <p:cNvPr id="9" name="">
             <a:extLst xmlns:a="http://schemas.openxmlformats.org/drawingml/2006/main">
               <a:ext uri="{FF2B5EF4-FFF2-40B4-BE49-F238E27FC236}">
-                <a16:creationId xmlns:a16="http://schemas.microsoft.com/office/drawing/2014/main" id="{D2ECED07-5B38-479A-813B-8B59BAC3D3A9}"/>
+                <a16:creationId xmlns:a16="http://schemas.microsoft.com/office/drawing/2014/main" id="{A80A39F0-2F15-407B-AE39-63051B26F8E3}"/>
               </a:ext>
             </a:extLst>
           </p:cNvPr>
@@ -23922,7 +24105,7 @@
           <p:cNvPr id="10" name="">
             <a:extLst xmlns:a="http://schemas.openxmlformats.org/drawingml/2006/main">
               <a:ext uri="{FF2B5EF4-FFF2-40B4-BE49-F238E27FC236}">
-                <a16:creationId xmlns:a16="http://schemas.microsoft.com/office/drawing/2014/main" id="{CC2C366B-9929-41EF-8CA5-A53F8A78F776}"/>
+                <a16:creationId xmlns:a16="http://schemas.microsoft.com/office/drawing/2014/main" id="{4E7645A2-40ED-429F-B93D-B5E1E580E484}"/>
               </a:ext>
             </a:extLst>
           </p:cNvPr>
@@ -23972,7 +24155,7 @@
           <p:cNvPr id="11" name="">
             <a:extLst xmlns:a="http://schemas.openxmlformats.org/drawingml/2006/main">
               <a:ext uri="{FF2B5EF4-FFF2-40B4-BE49-F238E27FC236}">
-                <a16:creationId xmlns:a16="http://schemas.microsoft.com/office/drawing/2014/main" id="{CEB77A1D-398E-44D9-88AF-67AF72F7D775}"/>
+                <a16:creationId xmlns:a16="http://schemas.microsoft.com/office/drawing/2014/main" id="{B5A5F96D-068F-41EE-9053-72CA0DD6AA15}"/>
               </a:ext>
             </a:extLst>
           </p:cNvPr>
@@ -24022,7 +24205,7 @@
           <p:cNvPr id="12" name="">
             <a:extLst xmlns:a="http://schemas.openxmlformats.org/drawingml/2006/main">
               <a:ext uri="{FF2B5EF4-FFF2-40B4-BE49-F238E27FC236}">
-                <a16:creationId xmlns:a16="http://schemas.microsoft.com/office/drawing/2014/main" id="{9D19DA6C-86B8-47B6-B040-AB6199C05121}"/>
+                <a16:creationId xmlns:a16="http://schemas.microsoft.com/office/drawing/2014/main" id="{521C23DA-9FB3-42F6-81AA-D5025FC33D6E}"/>
               </a:ext>
             </a:extLst>
           </p:cNvPr>
@@ -24072,7 +24255,7 @@
           <p:cNvPr id="13" name="">
             <a:extLst xmlns:a="http://schemas.openxmlformats.org/drawingml/2006/main">
               <a:ext uri="{FF2B5EF4-FFF2-40B4-BE49-F238E27FC236}">
-                <a16:creationId xmlns:a16="http://schemas.microsoft.com/office/drawing/2014/main" id="{2DEABBCA-50B0-4F85-84EC-223183F4FB3A}"/>
+                <a16:creationId xmlns:a16="http://schemas.microsoft.com/office/drawing/2014/main" id="{A3940DE8-9CB0-43B5-A3E7-BF47A66CB0E7}"/>
               </a:ext>
             </a:extLst>
           </p:cNvPr>
@@ -24122,7 +24305,7 @@
           <p:cNvPr id="14" name="">
             <a:extLst xmlns:a="http://schemas.openxmlformats.org/drawingml/2006/main">
               <a:ext uri="{FF2B5EF4-FFF2-40B4-BE49-F238E27FC236}">
-                <a16:creationId xmlns:a16="http://schemas.microsoft.com/office/drawing/2014/main" id="{9F950BA3-A9C8-4410-A664-35BB58034830}"/>
+                <a16:creationId xmlns:a16="http://schemas.microsoft.com/office/drawing/2014/main" id="{82ADFA26-B328-426E-A1DD-DC06D3D66F46}"/>
               </a:ext>
             </a:extLst>
           </p:cNvPr>
@@ -24155,7 +24338,7 @@
           <p:cNvPr id="15" name="">
             <a:extLst xmlns:a="http://schemas.openxmlformats.org/drawingml/2006/main">
               <a:ext uri="{FF2B5EF4-FFF2-40B4-BE49-F238E27FC236}">
-                <a16:creationId xmlns:a16="http://schemas.microsoft.com/office/drawing/2014/main" id="{272AD4AE-DA6D-4339-B753-0770AFE00B8F}"/>
+                <a16:creationId xmlns:a16="http://schemas.microsoft.com/office/drawing/2014/main" id="{07076AC6-5CEF-4638-8078-0B00E94F8248}"/>
               </a:ext>
             </a:extLst>
           </p:cNvPr>
@@ -24205,7 +24388,7 @@
           <p:cNvPr id="16" name="">
             <a:extLst xmlns:a="http://schemas.openxmlformats.org/drawingml/2006/main">
               <a:ext uri="{FF2B5EF4-FFF2-40B4-BE49-F238E27FC236}">
-                <a16:creationId xmlns:a16="http://schemas.microsoft.com/office/drawing/2014/main" id="{F2BDE25D-1B56-426D-9934-8C04BC4DF70F}"/>
+                <a16:creationId xmlns:a16="http://schemas.microsoft.com/office/drawing/2014/main" id="{33AC8C55-FBF1-4675-81BD-102BBFCDFEDD}"/>
               </a:ext>
             </a:extLst>
           </p:cNvPr>
@@ -24255,7 +24438,7 @@
           <p:cNvPr id="17" name="">
             <a:extLst xmlns:a="http://schemas.openxmlformats.org/drawingml/2006/main">
               <a:ext uri="{FF2B5EF4-FFF2-40B4-BE49-F238E27FC236}">
-                <a16:creationId xmlns:a16="http://schemas.microsoft.com/office/drawing/2014/main" id="{D356E199-B6B7-4DC6-BAA1-F9F9C1EFBBCB}"/>
+                <a16:creationId xmlns:a16="http://schemas.microsoft.com/office/drawing/2014/main" id="{8EAEC4B7-7FEC-458E-82CE-F3B87F7E185C}"/>
               </a:ext>
             </a:extLst>
           </p:cNvPr>
@@ -24305,7 +24488,7 @@
           <p:cNvPr id="18" name="">
             <a:extLst xmlns:a="http://schemas.openxmlformats.org/drawingml/2006/main">
               <a:ext uri="{FF2B5EF4-FFF2-40B4-BE49-F238E27FC236}">
-                <a16:creationId xmlns:a16="http://schemas.microsoft.com/office/drawing/2014/main" id="{CBA0BE4B-38DE-436A-830A-031A88E6CB34}"/>
+                <a16:creationId xmlns:a16="http://schemas.microsoft.com/office/drawing/2014/main" id="{ED0C73AB-87BC-4D6E-8299-06ED0A33FF27}"/>
               </a:ext>
             </a:extLst>
           </p:cNvPr>
@@ -24355,7 +24538,7 @@
           <p:cNvPr id="19" name="">
             <a:extLst xmlns:a="http://schemas.openxmlformats.org/drawingml/2006/main">
               <a:ext uri="{FF2B5EF4-FFF2-40B4-BE49-F238E27FC236}">
-                <a16:creationId xmlns:a16="http://schemas.microsoft.com/office/drawing/2014/main" id="{A333F732-890B-42BB-B071-1D4D87C924AC}"/>
+                <a16:creationId xmlns:a16="http://schemas.microsoft.com/office/drawing/2014/main" id="{74A40444-E745-4DFB-93B5-08C768298976}"/>
               </a:ext>
             </a:extLst>
           </p:cNvPr>
@@ -24388,7 +24571,7 @@
           <p:cNvPr id="20" name="">
             <a:extLst xmlns:a="http://schemas.openxmlformats.org/drawingml/2006/main">
               <a:ext uri="{FF2B5EF4-FFF2-40B4-BE49-F238E27FC236}">
-                <a16:creationId xmlns:a16="http://schemas.microsoft.com/office/drawing/2014/main" id="{2759BD36-8FD2-47D7-8BB0-916506370095}"/>
+                <a16:creationId xmlns:a16="http://schemas.microsoft.com/office/drawing/2014/main" id="{314F8FED-0FAE-4CF8-8024-7F464D43087A}"/>
               </a:ext>
             </a:extLst>
           </p:cNvPr>
@@ -24438,7 +24621,7 @@
           <p:cNvPr id="21" name="">
             <a:extLst xmlns:a="http://schemas.openxmlformats.org/drawingml/2006/main">
               <a:ext uri="{FF2B5EF4-FFF2-40B4-BE49-F238E27FC236}">
-                <a16:creationId xmlns:a16="http://schemas.microsoft.com/office/drawing/2014/main" id="{115A0769-8066-4E72-B6DB-844F4E25CC50}"/>
+                <a16:creationId xmlns:a16="http://schemas.microsoft.com/office/drawing/2014/main" id="{DE96FC61-770D-4D8B-AE9C-4628379FA9E5}"/>
               </a:ext>
             </a:extLst>
           </p:cNvPr>
@@ -24488,7 +24671,7 @@
           <p:cNvPr id="22" name="">
             <a:extLst xmlns:a="http://schemas.openxmlformats.org/drawingml/2006/main">
               <a:ext uri="{FF2B5EF4-FFF2-40B4-BE49-F238E27FC236}">
-                <a16:creationId xmlns:a16="http://schemas.microsoft.com/office/drawing/2014/main" id="{54D5A053-DB1F-4D8E-992D-0B73392AFA2A}"/>
+                <a16:creationId xmlns:a16="http://schemas.microsoft.com/office/drawing/2014/main" id="{B4A9D209-60B2-4447-B0C0-74FA2D4D1C48}"/>
               </a:ext>
             </a:extLst>
           </p:cNvPr>
@@ -24538,7 +24721,7 @@
           <p:cNvPr id="23" name="">
             <a:extLst xmlns:a="http://schemas.openxmlformats.org/drawingml/2006/main">
               <a:ext uri="{FF2B5EF4-FFF2-40B4-BE49-F238E27FC236}">
-                <a16:creationId xmlns:a16="http://schemas.microsoft.com/office/drawing/2014/main" id="{6D925C70-9952-4160-952A-D3DDAB703633}"/>
+                <a16:creationId xmlns:a16="http://schemas.microsoft.com/office/drawing/2014/main" id="{9A88D62C-4393-468B-B45F-DA450BF4791E}"/>
               </a:ext>
             </a:extLst>
           </p:cNvPr>
@@ -24588,7 +24771,7 @@
           <p:cNvPr id="24" name="">
             <a:extLst xmlns:a="http://schemas.openxmlformats.org/drawingml/2006/main">
               <a:ext uri="{FF2B5EF4-FFF2-40B4-BE49-F238E27FC236}">
-                <a16:creationId xmlns:a16="http://schemas.microsoft.com/office/drawing/2014/main" id="{91319933-AB1B-40B9-BE8A-D86EBA9B082A}"/>
+                <a16:creationId xmlns:a16="http://schemas.microsoft.com/office/drawing/2014/main" id="{BB8315AD-9377-4A58-9518-43F32F6E45DF}"/>
               </a:ext>
             </a:extLst>
           </p:cNvPr>
@@ -24621,7 +24804,7 @@
           <p:cNvPr id="25" name="">
             <a:extLst xmlns:a="http://schemas.openxmlformats.org/drawingml/2006/main">
               <a:ext uri="{FF2B5EF4-FFF2-40B4-BE49-F238E27FC236}">
-                <a16:creationId xmlns:a16="http://schemas.microsoft.com/office/drawing/2014/main" id="{B30F9350-08CB-4119-85A0-5C6156F2F2CF}"/>
+                <a16:creationId xmlns:a16="http://schemas.microsoft.com/office/drawing/2014/main" id="{C8ACEC9E-376D-41C6-8880-A28FF0DEDB73}"/>
               </a:ext>
             </a:extLst>
           </p:cNvPr>
@@ -24671,7 +24854,7 @@
           <p:cNvPr id="26" name="">
             <a:extLst xmlns:a="http://schemas.openxmlformats.org/drawingml/2006/main">
               <a:ext uri="{FF2B5EF4-FFF2-40B4-BE49-F238E27FC236}">
-                <a16:creationId xmlns:a16="http://schemas.microsoft.com/office/drawing/2014/main" id="{60B1911C-95FB-40A2-A295-D4E619982809}"/>
+                <a16:creationId xmlns:a16="http://schemas.microsoft.com/office/drawing/2014/main" id="{6F92AC92-1C1A-427E-BDF8-2CDCD41398DB}"/>
               </a:ext>
             </a:extLst>
           </p:cNvPr>
@@ -24721,7 +24904,7 @@
           <p:cNvPr id="27" name="">
             <a:extLst xmlns:a="http://schemas.openxmlformats.org/drawingml/2006/main">
               <a:ext uri="{FF2B5EF4-FFF2-40B4-BE49-F238E27FC236}">
-                <a16:creationId xmlns:a16="http://schemas.microsoft.com/office/drawing/2014/main" id="{AA2B909A-AD2C-4F57-A614-34DE6CDA6B9B}"/>
+                <a16:creationId xmlns:a16="http://schemas.microsoft.com/office/drawing/2014/main" id="{D35EA558-A632-45FF-BFFC-CABE5C459C6D}"/>
               </a:ext>
             </a:extLst>
           </p:cNvPr>
@@ -24771,7 +24954,7 @@
           <p:cNvPr id="28" name="">
             <a:extLst xmlns:a="http://schemas.openxmlformats.org/drawingml/2006/main">
               <a:ext uri="{FF2B5EF4-FFF2-40B4-BE49-F238E27FC236}">
-                <a16:creationId xmlns:a16="http://schemas.microsoft.com/office/drawing/2014/main" id="{228556DC-9021-486E-8B5E-B4274128F174}"/>
+                <a16:creationId xmlns:a16="http://schemas.microsoft.com/office/drawing/2014/main" id="{AA0DA9BE-8A8D-46D3-B5EB-E6190114C144}"/>
               </a:ext>
             </a:extLst>
           </p:cNvPr>
@@ -24821,7 +25004,7 @@
           <p:cNvPr id="29" name="">
             <a:extLst xmlns:a="http://schemas.openxmlformats.org/drawingml/2006/main">
               <a:ext uri="{FF2B5EF4-FFF2-40B4-BE49-F238E27FC236}">
-                <a16:creationId xmlns:a16="http://schemas.microsoft.com/office/drawing/2014/main" id="{1243A94D-961F-48AC-8714-1D78EBDF99D9}"/>
+                <a16:creationId xmlns:a16="http://schemas.microsoft.com/office/drawing/2014/main" id="{2DBA2824-C3E6-42B8-A6E5-8197B52DB6CB}"/>
               </a:ext>
             </a:extLst>
           </p:cNvPr>
@@ -24854,7 +25037,7 @@
           <p:cNvPr id="30" name="">
             <a:extLst xmlns:a="http://schemas.openxmlformats.org/drawingml/2006/main">
               <a:ext uri="{FF2B5EF4-FFF2-40B4-BE49-F238E27FC236}">
-                <a16:creationId xmlns:a16="http://schemas.microsoft.com/office/drawing/2014/main" id="{6A3E0674-3853-449F-BCA8-86F1A7F82B7E}"/>
+                <a16:creationId xmlns:a16="http://schemas.microsoft.com/office/drawing/2014/main" id="{FD26A615-34EB-4B45-BD7A-E8170E7E710D}"/>
               </a:ext>
             </a:extLst>
           </p:cNvPr>
@@ -24904,7 +25087,7 @@
           <p:cNvPr id="31" name="">
             <a:extLst xmlns:a="http://schemas.openxmlformats.org/drawingml/2006/main">
               <a:ext uri="{FF2B5EF4-FFF2-40B4-BE49-F238E27FC236}">
-                <a16:creationId xmlns:a16="http://schemas.microsoft.com/office/drawing/2014/main" id="{1F2F3B02-741B-4DEE-9B80-5C65FFCEF64A}"/>
+                <a16:creationId xmlns:a16="http://schemas.microsoft.com/office/drawing/2014/main" id="{33539570-9132-44D4-A36D-5FCCB1A58605}"/>
               </a:ext>
             </a:extLst>
           </p:cNvPr>
@@ -24954,7 +25137,7 @@
           <p:cNvPr id="32" name="">
             <a:extLst xmlns:a="http://schemas.openxmlformats.org/drawingml/2006/main">
               <a:ext uri="{FF2B5EF4-FFF2-40B4-BE49-F238E27FC236}">
-                <a16:creationId xmlns:a16="http://schemas.microsoft.com/office/drawing/2014/main" id="{F08F523E-D4AC-459C-B041-BA4ED1F72673}"/>
+                <a16:creationId xmlns:a16="http://schemas.microsoft.com/office/drawing/2014/main" id="{4615AD3D-54FA-4C35-8CBB-DE2C79EC3574}"/>
               </a:ext>
             </a:extLst>
           </p:cNvPr>
@@ -25002,7 +25185,7 @@
     </p:spTree>
     <p:extLst>
       <p:ext uri="{BB962C8B-B14F-4D97-AF65-F5344CB8AC3E}">
-        <p14:creationId xmlns:p14="http://schemas.microsoft.com/office/powerpoint/2010/main" val="1905369409"/>
+        <p14:creationId xmlns:p14="http://schemas.microsoft.com/office/powerpoint/2010/main" val="1474553637"/>
       </p:ext>
     </p:extLst>
   </p:cSld>
